--- a/lessons/derevo_resheniy/presentation.pptx
+++ b/lessons/derevo_resheniy/presentation.pptx
@@ -24,6 +24,11 @@
     <p:sldId id="272" r:id="rId24"/>
     <p:sldId id="273" r:id="rId25"/>
     <p:sldId id="274" r:id="rId26"/>
+    <p:sldId id="275" r:id="rId27"/>
+    <p:sldId id="276" r:id="rId28"/>
+    <p:sldId id="277" r:id="rId29"/>
+    <p:sldId id="278" r:id="rId30"/>
+    <p:sldId id="279" r:id="rId31"/>
   </p:sldIdLst>
   <p:sldSz cx="12191695" cy="6858000" type="screen4x3"/>
   <p:notesSz cx="6858000" cy="9144000"/>
@@ -590,7 +595,7 @@
           <a:lstStyle/>
           <a:p>
             <a:r>
-              <a:t>Показать график зависимости train/test accuracy от глубины дерева: train растёт монотонно, test — сначала растёт, потом падает (типичный колокол переобучения).</a:t>
+              <a:t>Упомянуть: точность (precision), полноту (recall), F1-меру для каждого класса. Показать, как class_weight влияет на выбор разбиения.</a:t>
             </a:r>
           </a:p>
         </p:txBody>
@@ -660,7 +665,7 @@
           <a:lstStyle/>
           <a:p>
             <a:r>
-              <a:t>Показать вызов в jupyter notebook, сделать predict на новых данных.</a:t>
+              <a:t>Показать график зависимости train/test accuracy от глубины дерева: train растёт монотонно, test — сначала растёт, потом падает (типичный колокол переобучения).</a:t>
             </a:r>
           </a:p>
         </p:txBody>
@@ -730,7 +735,7 @@
           <a:lstStyle/>
           <a:p>
             <a:r>
-              <a:t>Показать пример: feature_importances_ в sklearn. Обсудить этическую сторону — если в данных есть дискриминационный признак, модель его выучит.</a:t>
+              <a:t>Показать вызов в jupyter notebook, сделать predict на новых данных.</a:t>
             </a:r>
           </a:p>
         </p:txBody>
@@ -800,7 +805,7 @@
           <a:lstStyle/>
           <a:p>
             <a:r>
-              <a:t>Показать кусочно-постоянную аппроксимацию на одномерном примере: ступеньки разной высоты.</a:t>
+              <a:t>Показать пример: feature_importances_ в sklearn. Обсудить этическую сторону — если в данных есть дискриминационный признак, модель его выучит.</a:t>
             </a:r>
           </a:p>
         </p:txBody>
@@ -870,7 +875,7 @@
           <a:lstStyle/>
           <a:p>
             <a:r>
-              <a:t>Не углубляться — это анонс следующей темы. Сказать, что подробно разберём на следующем занятии.</a:t>
+              <a:t>Показать кусочно-постоянную аппроксимацию на одномерном примере: ступеньки разной высоты.</a:t>
             </a:r>
           </a:p>
         </p:txBody>
@@ -940,7 +945,7 @@
           <a:lstStyle/>
           <a:p>
             <a:r>
-              <a:t>Показать все три варианта в Jupyter. Объяснить, как читать дерево: в каждом узле — условие, impurity, число объектов, класс.</a:t>
+              <a:t>Не углубляться — это анонс следующей темы. Сказать, что подробно разберём на следующем занятии.</a:t>
             </a:r>
           </a:p>
         </p:txBody>
@@ -1010,7 +1015,7 @@
           <a:lstStyle/>
           <a:p>
             <a:r>
-              <a:t>Показать картинку с делением 2D-пространства деревом глубины 3. Обсудить, почему это ограничение важно и как ансамбли его смягчают.</a:t>
+              <a:t>Показать все три варианта в Jupyter. Объяснить, как читать дерево: в каждом узле — условие, impurity, число объектов, класс.</a:t>
             </a:r>
           </a:p>
         </p:txBody>
@@ -1080,7 +1085,7 @@
           <a:lstStyle/>
           <a:p>
             <a:r>
-              <a:t>Можно раздать как памятку или вывести на экран во время обсуждения.</a:t>
+              <a:t>Показать картинку с делением 2D-пространства деревом глубины 3. Обсудить, почему это ограничение важно и как ансамбли его смягчают.</a:t>
             </a:r>
           </a:p>
         </p:txBody>
@@ -1150,6 +1155,76 @@
           <a:lstStyle/>
           <a:p>
             <a:r>
+              <a:t>Можно раздать как памятку или вывести на экран во время обсуждения.</a:t>
+            </a:r>
+          </a:p>
+        </p:txBody>
+      </p:sp>
+      <p:sp>
+        <p:nvSpPr>
+          <p:cNvPr id="4" name="Slide Number Placeholder 3"/>
+          <p:cNvSpPr>
+            <a:spLocks noGrp="1"/>
+          </p:cNvSpPr>
+          <p:nvPr>
+            <p:ph type="sldNum" idx="5" sz="quarter"/>
+          </p:nvPr>
+        </p:nvSpPr>
+        <p:spPr/>
+      </p:sp>
+    </p:spTree>
+  </p:cSld>
+  <p:clrMapOvr>
+    <a:masterClrMapping/>
+  </p:clrMapOvr>
+</p:notes>
+</file>
+
+<file path=ppt/notesSlides/notesSlide19.xml><?xml version="1.0" encoding="utf-8"?>
+<p:notes xmlns:a="http://schemas.openxmlformats.org/drawingml/2006/main" xmlns:p="http://schemas.openxmlformats.org/presentationml/2006/main" xmlns:r="http://schemas.openxmlformats.org/officeDocument/2006/relationships">
+  <p:cSld>
+    <p:spTree>
+      <p:nvGrpSpPr>
+        <p:cNvPr id="1" name=""/>
+        <p:cNvGrpSpPr/>
+        <p:nvPr/>
+      </p:nvGrpSpPr>
+      <p:grpSpPr>
+        <a:xfrm>
+          <a:off x="0" y="0"/>
+          <a:ext cx="0" cy="0"/>
+          <a:chOff x="0" y="0"/>
+          <a:chExt cx="0" cy="0"/>
+        </a:xfrm>
+      </p:grpSpPr>
+      <p:sp>
+        <p:nvSpPr>
+          <p:cNvPr id="2" name="Slide Image Placeholder 1"/>
+          <p:cNvSpPr>
+            <a:spLocks noGrp="1"/>
+          </p:cNvSpPr>
+          <p:nvPr>
+            <p:ph type="sldImg" idx="2"/>
+          </p:nvPr>
+        </p:nvSpPr>
+        <p:spPr/>
+      </p:sp>
+      <p:sp>
+        <p:nvSpPr>
+          <p:cNvPr id="3" name="Notes Placeholder 2"/>
+          <p:cNvSpPr>
+            <a:spLocks noGrp="1"/>
+          </p:cNvSpPr>
+          <p:nvPr>
+            <p:ph type="body" idx="3" sz="quarter"/>
+          </p:nvPr>
+        </p:nvSpPr>
+        <p:spPr/>
+        <p:txBody>
+          <a:bodyPr/>
+          <a:lstStyle/>
+          <a:p>
+            <a:r>
               <a:t>Обсудить компромисс: точность vs интерпретируемость. Где важна объяснимость (медицина, кредитный скоринг) — дерево может быть предпочтительнее нейросети.</a:t>
             </a:r>
           </a:p>
@@ -1245,6 +1320,286 @@
 </p:notes>
 </file>
 
+<file path=ppt/notesSlides/notesSlide20.xml><?xml version="1.0" encoding="utf-8"?>
+<p:notes xmlns:a="http://schemas.openxmlformats.org/drawingml/2006/main" xmlns:p="http://schemas.openxmlformats.org/presentationml/2006/main" xmlns:r="http://schemas.openxmlformats.org/officeDocument/2006/relationships">
+  <p:cSld>
+    <p:spTree>
+      <p:nvGrpSpPr>
+        <p:cNvPr id="1" name=""/>
+        <p:cNvGrpSpPr/>
+        <p:nvPr/>
+      </p:nvGrpSpPr>
+      <p:grpSpPr>
+        <a:xfrm>
+          <a:off x="0" y="0"/>
+          <a:ext cx="0" cy="0"/>
+          <a:chOff x="0" y="0"/>
+          <a:chExt cx="0" cy="0"/>
+        </a:xfrm>
+      </p:grpSpPr>
+      <p:sp>
+        <p:nvSpPr>
+          <p:cNvPr id="2" name="Slide Image Placeholder 1"/>
+          <p:cNvSpPr>
+            <a:spLocks noGrp="1"/>
+          </p:cNvSpPr>
+          <p:nvPr>
+            <p:ph type="sldImg" idx="2"/>
+          </p:nvPr>
+        </p:nvSpPr>
+        <p:spPr/>
+      </p:sp>
+      <p:sp>
+        <p:nvSpPr>
+          <p:cNvPr id="3" name="Notes Placeholder 2"/>
+          <p:cNvSpPr>
+            <a:spLocks noGrp="1"/>
+          </p:cNvSpPr>
+          <p:nvPr>
+            <p:ph type="body" idx="3" sz="quarter"/>
+          </p:nvPr>
+        </p:nvSpPr>
+        <p:spPr/>
+        <p:txBody>
+          <a:bodyPr/>
+          <a:lstStyle/>
+          <a:p>
+            <a:r>
+              <a:t>Подчеркнуть, что ограничение на один признак и бинарные вопросы — это не баг, а фича: оно даёт интерпретируемость и контролируемую сложность.</a:t>
+            </a:r>
+          </a:p>
+        </p:txBody>
+      </p:sp>
+      <p:sp>
+        <p:nvSpPr>
+          <p:cNvPr id="4" name="Slide Number Placeholder 3"/>
+          <p:cNvSpPr>
+            <a:spLocks noGrp="1"/>
+          </p:cNvSpPr>
+          <p:nvPr>
+            <p:ph type="sldNum" idx="5" sz="quarter"/>
+          </p:nvPr>
+        </p:nvSpPr>
+        <p:spPr/>
+      </p:sp>
+    </p:spTree>
+  </p:cSld>
+  <p:clrMapOvr>
+    <a:masterClrMapping/>
+  </p:clrMapOvr>
+</p:notes>
+</file>
+
+<file path=ppt/notesSlides/notesSlide21.xml><?xml version="1.0" encoding="utf-8"?>
+<p:notes xmlns:a="http://schemas.openxmlformats.org/drawingml/2006/main" xmlns:p="http://schemas.openxmlformats.org/presentationml/2006/main" xmlns:r="http://schemas.openxmlformats.org/officeDocument/2006/relationships">
+  <p:cSld>
+    <p:spTree>
+      <p:nvGrpSpPr>
+        <p:cNvPr id="1" name=""/>
+        <p:cNvGrpSpPr/>
+        <p:nvPr/>
+      </p:nvGrpSpPr>
+      <p:grpSpPr>
+        <a:xfrm>
+          <a:off x="0" y="0"/>
+          <a:ext cx="0" cy="0"/>
+          <a:chOff x="0" y="0"/>
+          <a:chExt cx="0" cy="0"/>
+        </a:xfrm>
+      </p:grpSpPr>
+      <p:sp>
+        <p:nvSpPr>
+          <p:cNvPr id="2" name="Slide Image Placeholder 1"/>
+          <p:cNvSpPr>
+            <a:spLocks noGrp="1"/>
+          </p:cNvSpPr>
+          <p:nvPr>
+            <p:ph type="sldImg" idx="2"/>
+          </p:nvPr>
+        </p:nvSpPr>
+        <p:spPr/>
+      </p:sp>
+      <p:sp>
+        <p:nvSpPr>
+          <p:cNvPr id="3" name="Notes Placeholder 2"/>
+          <p:cNvSpPr>
+            <a:spLocks noGrp="1"/>
+          </p:cNvSpPr>
+          <p:nvPr>
+            <p:ph type="body" idx="3" sz="quarter"/>
+          </p:nvPr>
+        </p:nvSpPr>
+        <p:spPr/>
+        <p:txBody>
+          <a:bodyPr/>
+          <a:lstStyle/>
+          <a:p>
+            <a:r>
+              <a:t>Объяснить, почему жадность — вынужденная необходимость, а не лень разработчиков. Привести аналогию: жадный алгоритм как выбор лучшего хода в шахматах без просчёта всей партии.</a:t>
+            </a:r>
+          </a:p>
+        </p:txBody>
+      </p:sp>
+      <p:sp>
+        <p:nvSpPr>
+          <p:cNvPr id="4" name="Slide Number Placeholder 3"/>
+          <p:cNvSpPr>
+            <a:spLocks noGrp="1"/>
+          </p:cNvSpPr>
+          <p:nvPr>
+            <p:ph type="sldNum" idx="5" sz="quarter"/>
+          </p:nvPr>
+        </p:nvSpPr>
+        <p:spPr/>
+      </p:sp>
+    </p:spTree>
+  </p:cSld>
+  <p:clrMapOvr>
+    <a:masterClrMapping/>
+  </p:clrMapOvr>
+</p:notes>
+</file>
+
+<file path=ppt/notesSlides/notesSlide22.xml><?xml version="1.0" encoding="utf-8"?>
+<p:notes xmlns:a="http://schemas.openxmlformats.org/drawingml/2006/main" xmlns:p="http://schemas.openxmlformats.org/presentationml/2006/main" xmlns:r="http://schemas.openxmlformats.org/officeDocument/2006/relationships">
+  <p:cSld>
+    <p:spTree>
+      <p:nvGrpSpPr>
+        <p:cNvPr id="1" name=""/>
+        <p:cNvGrpSpPr/>
+        <p:nvPr/>
+      </p:nvGrpSpPr>
+      <p:grpSpPr>
+        <a:xfrm>
+          <a:off x="0" y="0"/>
+          <a:ext cx="0" cy="0"/>
+          <a:chOff x="0" y="0"/>
+          <a:chExt cx="0" cy="0"/>
+        </a:xfrm>
+      </p:grpSpPr>
+      <p:sp>
+        <p:nvSpPr>
+          <p:cNvPr id="2" name="Slide Image Placeholder 1"/>
+          <p:cNvSpPr>
+            <a:spLocks noGrp="1"/>
+          </p:cNvSpPr>
+          <p:nvPr>
+            <p:ph type="sldImg" idx="2"/>
+          </p:nvPr>
+        </p:nvSpPr>
+        <p:spPr/>
+      </p:sp>
+      <p:sp>
+        <p:nvSpPr>
+          <p:cNvPr id="3" name="Notes Placeholder 2"/>
+          <p:cNvSpPr>
+            <a:spLocks noGrp="1"/>
+          </p:cNvSpPr>
+          <p:nvPr>
+            <p:ph type="body" idx="3" sz="quarter"/>
+          </p:nvPr>
+        </p:nvSpPr>
+        <p:spPr/>
+        <p:txBody>
+          <a:bodyPr/>
+          <a:lstStyle/>
+          <a:p>
+            <a:r>
+              <a:t>Доказать на примере: два разбиения с одинаковой Misclassification, но разной энтропией/Джини — объяснить, почему второе предпочтительнее.</a:t>
+            </a:r>
+          </a:p>
+        </p:txBody>
+      </p:sp>
+      <p:sp>
+        <p:nvSpPr>
+          <p:cNvPr id="4" name="Slide Number Placeholder 3"/>
+          <p:cNvSpPr>
+            <a:spLocks noGrp="1"/>
+          </p:cNvSpPr>
+          <p:nvPr>
+            <p:ph type="sldNum" idx="5" sz="quarter"/>
+          </p:nvPr>
+        </p:nvSpPr>
+        <p:spPr/>
+      </p:sp>
+    </p:spTree>
+  </p:cSld>
+  <p:clrMapOvr>
+    <a:masterClrMapping/>
+  </p:clrMapOvr>
+</p:notes>
+</file>
+
+<file path=ppt/notesSlides/notesSlide23.xml><?xml version="1.0" encoding="utf-8"?>
+<p:notes xmlns:a="http://schemas.openxmlformats.org/drawingml/2006/main" xmlns:p="http://schemas.openxmlformats.org/presentationml/2006/main" xmlns:r="http://schemas.openxmlformats.org/officeDocument/2006/relationships">
+  <p:cSld>
+    <p:spTree>
+      <p:nvGrpSpPr>
+        <p:cNvPr id="1" name=""/>
+        <p:cNvGrpSpPr/>
+        <p:nvPr/>
+      </p:nvGrpSpPr>
+      <p:grpSpPr>
+        <a:xfrm>
+          <a:off x="0" y="0"/>
+          <a:ext cx="0" cy="0"/>
+          <a:chOff x="0" y="0"/>
+          <a:chExt cx="0" cy="0"/>
+        </a:xfrm>
+      </p:grpSpPr>
+      <p:sp>
+        <p:nvSpPr>
+          <p:cNvPr id="2" name="Slide Image Placeholder 1"/>
+          <p:cNvSpPr>
+            <a:spLocks noGrp="1"/>
+          </p:cNvSpPr>
+          <p:nvPr>
+            <p:ph type="sldImg" idx="2"/>
+          </p:nvPr>
+        </p:nvSpPr>
+        <p:spPr/>
+      </p:sp>
+      <p:sp>
+        <p:nvSpPr>
+          <p:cNvPr id="3" name="Notes Placeholder 2"/>
+          <p:cNvSpPr>
+            <a:spLocks noGrp="1"/>
+          </p:cNvSpPr>
+          <p:nvPr>
+            <p:ph type="body" idx="3" sz="quarter"/>
+          </p:nvPr>
+        </p:nvSpPr>
+        <p:spPr/>
+        <p:txBody>
+          <a:bodyPr/>
+          <a:lstStyle/>
+          <a:p>
+            <a:r>
+              <a:t>Рекомендация: начинать с Gini (быстрее, sklearn по умолчанию), при желании попробовать entropy. Не тратить время на тонкую настройку этого параметра.</a:t>
+            </a:r>
+          </a:p>
+        </p:txBody>
+      </p:sp>
+      <p:sp>
+        <p:nvSpPr>
+          <p:cNvPr id="4" name="Slide Number Placeholder 3"/>
+          <p:cNvSpPr>
+            <a:spLocks noGrp="1"/>
+          </p:cNvSpPr>
+          <p:nvPr>
+            <p:ph type="sldNum" idx="5" sz="quarter"/>
+          </p:nvPr>
+        </p:nvSpPr>
+        <p:spPr/>
+      </p:sp>
+    </p:spTree>
+  </p:cSld>
+  <p:clrMapOvr>
+    <a:masterClrMapping/>
+  </p:clrMapOvr>
+</p:notes>
+</file>
+
 <file path=ppt/notesSlides/notesSlide3.xml><?xml version="1.0" encoding="utf-8"?>
 <p:notes xmlns:a="http://schemas.openxmlformats.org/drawingml/2006/main" xmlns:p="http://schemas.openxmlformats.org/presentationml/2006/main" xmlns:r="http://schemas.openxmlformats.org/officeDocument/2006/relationships">
   <p:cSld>
@@ -1500,7 +1855,7 @@
           <a:lstStyle/>
           <a:p>
             <a:r>
-              <a:t>Показать графики обеих функций для бинарного случая (p от 0 до 1). Обратить внимание, что обе достигают максимума при p=0.5 и минимума при p=0 или 1.</a:t>
+              <a:t>Показать графики обеих функций для бинарного случая (p от 0 до 1). Обе достигают максимума при p=0.5 и минимума при p=0 или 1.</a:t>
             </a:r>
           </a:p>
         </p:txBody>
@@ -1570,7 +1925,7 @@
           <a:lstStyle/>
           <a:p>
             <a:r>
-              <a:t>Подчеркнуть контраст с логистической регрессией, где для K классов нужно обучать K классификаторов или использовать softmax.</a:t>
+              <a:t>Показать графики обеих функций для бинарного случая (p от 0 до 1). Обратить внимание, что обе достигают максимума при p=0.5 и минимума при p=0 или 1.</a:t>
             </a:r>
           </a:p>
         </p:txBody>
@@ -1640,7 +1995,7 @@
           <a:lstStyle/>
           <a:p>
             <a:r>
-              <a:t>Показать пример: если добавить столбец Номер строки от 1 до N, дерево выберет его как лучший признак — он разделит все объекты идеально, но с нулевой обобщающей способностью.</a:t>
+              <a:t>Подчеркнуть контраст с логистической регрессией, где для K классов нужно обучать K классификаторов или использовать softmax.</a:t>
             </a:r>
           </a:p>
         </p:txBody>
@@ -1710,7 +2065,7 @@
           <a:lstStyle/>
           <a:p>
             <a:r>
-              <a:t>Упомянуть: точность (precision), полноту (recall), F1-меру для каждого класса. Показать, как class_weight влияет на выбор разбиения.</a:t>
+              <a:t>Показать пример: если добавить столбец Номер строки от 1 до N, дерево выберет его как лучший признак — он разделит все объекты идеально, но с нулевой обобщающей способностью.</a:t>
             </a:r>
           </a:p>
         </p:txBody>
@@ -4904,7 +5259,7 @@
               </a:defRPr>
             </a:pPr>
             <a:r>
-              <a:t>Оценка качества дерева</a:t>
+              <a:t>Предвзятость дерева: Bias towards high-cardinality features</a:t>
             </a:r>
           </a:p>
         </p:txBody>
@@ -4938,40 +5293,40 @@
               <a:defRPr sz="2000"/>
             </a:pPr>
             <a:r>
-              <a:t>Accuracy недостаточна для несбалансированных данных</a:t>
-            </a:r>
-          </a:p>
-          <a:p>
-            <a:pPr>
-              <a:spcAft>
-                <a:spcPts val="800"/>
-              </a:spcAft>
-              <a:defRPr sz="2000"/>
-            </a:pPr>
-            <a:r>
-              <a:t>Для многоклассовой классификации — микро/макро-усреднение метрик</a:t>
-            </a:r>
-          </a:p>
-          <a:p>
-            <a:pPr>
-              <a:spcAft>
-                <a:spcPts val="800"/>
-              </a:spcAft>
-              <a:defRPr sz="2000"/>
-            </a:pPr>
-            <a:r>
-              <a:t>DecisionTreeClassifier: class_weight=balanced — автоматически увеличивает вес минорных классов при подсчёте impurity</a:t>
-            </a:r>
-          </a:p>
-          <a:p>
-            <a:pPr>
-              <a:spcAft>
-                <a:spcPts val="800"/>
-              </a:spcAft>
-              <a:defRPr sz="2000"/>
-            </a:pPr>
-            <a:r>
-              <a:t>Это частично решает проблему дисбаланса</a:t>
+              <a:t>Дерево склонно выбирать признаки с большим числом уникальных значений (ID, дата рождения, имя)</a:t>
+            </a:r>
+          </a:p>
+          <a:p>
+            <a:pPr>
+              <a:spcAft>
+                <a:spcPts val="800"/>
+              </a:spcAft>
+              <a:defRPr sz="2000"/>
+            </a:pPr>
+            <a:r>
+              <a:t>Такой признак может идеально разделить выборку — каждому объекту свой лист → переобучение</a:t>
+            </a:r>
+          </a:p>
+          <a:p>
+            <a:pPr>
+              <a:spcAft>
+                <a:spcPts val="800"/>
+              </a:spcAft>
+              <a:defRPr sz="2000"/>
+            </a:pPr>
+            <a:r>
+              <a:t>Решение: Gain Ratio (C4.5), ограничение глубины, min_samples_leaf</a:t>
+            </a:r>
+          </a:p>
+          <a:p>
+            <a:pPr>
+              <a:spcAft>
+                <a:spcPts val="800"/>
+              </a:spcAft>
+              <a:defRPr sz="2000"/>
+            </a:pPr>
+            <a:r>
+              <a:t>Если есть ID или строка-идентификатор — УДАЛИТЕ перед обучением!</a:t>
             </a:r>
           </a:p>
         </p:txBody>
@@ -4985,6 +5340,126 @@
 </file>
 
 <file path=ppt/slides/slide11.xml><?xml version="1.0" encoding="utf-8"?>
+<p:sld xmlns:a="http://schemas.openxmlformats.org/drawingml/2006/main" xmlns:p="http://schemas.openxmlformats.org/presentationml/2006/main" xmlns:r="http://schemas.openxmlformats.org/officeDocument/2006/relationships">
+  <p:cSld>
+    <p:spTree>
+      <p:nvGrpSpPr>
+        <p:cNvPr id="1" name=""/>
+        <p:cNvGrpSpPr/>
+        <p:nvPr/>
+      </p:nvGrpSpPr>
+      <p:grpSpPr/>
+      <p:sp>
+        <p:nvSpPr>
+          <p:cNvPr id="2" name="TextBox 1"/>
+          <p:cNvSpPr txBox="1"/>
+          <p:nvPr/>
+        </p:nvSpPr>
+        <p:spPr>
+          <a:xfrm>
+            <a:off x="457200" y="274320"/>
+            <a:ext cx="11247120" cy="914400"/>
+          </a:xfrm>
+          <a:prstGeom prst="rect">
+            <a:avLst/>
+          </a:prstGeom>
+          <a:noFill/>
+        </p:spPr>
+        <p:txBody>
+          <a:bodyPr wrap="square">
+            <a:spAutoFit/>
+          </a:bodyPr>
+          <a:lstStyle/>
+          <a:p>
+            <a:pPr>
+              <a:defRPr sz="3200" b="1">
+                <a:solidFill>
+                  <a:srgbClr val="1A1A2E"/>
+                </a:solidFill>
+              </a:defRPr>
+            </a:pPr>
+            <a:r>
+              <a:t>Оценка качества дерева</a:t>
+            </a:r>
+          </a:p>
+        </p:txBody>
+      </p:sp>
+      <p:sp>
+        <p:nvSpPr>
+          <p:cNvPr id="3" name="TextBox 2"/>
+          <p:cNvSpPr txBox="1"/>
+          <p:nvPr/>
+        </p:nvSpPr>
+        <p:spPr>
+          <a:xfrm>
+            <a:off x="640080" y="1371600"/>
+            <a:ext cx="6858000" cy="5029200"/>
+          </a:xfrm>
+          <a:prstGeom prst="rect">
+            <a:avLst/>
+          </a:prstGeom>
+          <a:noFill/>
+        </p:spPr>
+        <p:txBody>
+          <a:bodyPr wrap="square">
+            <a:spAutoFit/>
+          </a:bodyPr>
+          <a:lstStyle/>
+          <a:p>
+            <a:pPr>
+              <a:spcAft>
+                <a:spcPts val="800"/>
+              </a:spcAft>
+              <a:defRPr sz="2000"/>
+            </a:pPr>
+            <a:r>
+              <a:t>Accuracy недостаточна для несбалансированных данных</a:t>
+            </a:r>
+          </a:p>
+          <a:p>
+            <a:pPr>
+              <a:spcAft>
+                <a:spcPts val="800"/>
+              </a:spcAft>
+              <a:defRPr sz="2000"/>
+            </a:pPr>
+            <a:r>
+              <a:t>Для многоклассовой классификации — микро/макро-усреднение метрик</a:t>
+            </a:r>
+          </a:p>
+          <a:p>
+            <a:pPr>
+              <a:spcAft>
+                <a:spcPts val="800"/>
+              </a:spcAft>
+              <a:defRPr sz="2000"/>
+            </a:pPr>
+            <a:r>
+              <a:t>DecisionTreeClassifier: class_weight=balanced — автоматически увеличивает вес минорных классов при подсчёте impurity</a:t>
+            </a:r>
+          </a:p>
+          <a:p>
+            <a:pPr>
+              <a:spcAft>
+                <a:spcPts val="800"/>
+              </a:spcAft>
+              <a:defRPr sz="2000"/>
+            </a:pPr>
+            <a:r>
+              <a:t>Это частично решает проблему дисбаланса</a:t>
+            </a:r>
+          </a:p>
+        </p:txBody>
+      </p:sp>
+    </p:spTree>
+  </p:cSld>
+  <p:clrMapOvr>
+    <a:masterClrMapping/>
+  </p:clrMapOvr>
+</p:sld>
+</file>
+
+<file path=ppt/slides/slide12.xml><?xml version="1.0" encoding="utf-8"?>
 <p:sld xmlns:a="http://schemas.openxmlformats.org/drawingml/2006/main" xmlns:p="http://schemas.openxmlformats.org/presentationml/2006/main" xmlns:r="http://schemas.openxmlformats.org/officeDocument/2006/relationships">
   <p:cSld>
     <p:spTree>
@@ -5139,7 +5614,7 @@
 </p:sld>
 </file>
 
-<file path=ppt/slides/slide12.xml><?xml version="1.0" encoding="utf-8"?>
+<file path=ppt/slides/slide13.xml><?xml version="1.0" encoding="utf-8"?>
 <p:sld xmlns:a="http://schemas.openxmlformats.org/drawingml/2006/main" xmlns:p="http://schemas.openxmlformats.org/presentationml/2006/main" xmlns:r="http://schemas.openxmlformats.org/officeDocument/2006/relationships">
   <p:cSld>
     <p:spTree>
@@ -5259,7 +5734,7 @@
 </p:sld>
 </file>
 
-<file path=ppt/slides/slide13.xml><?xml version="1.0" encoding="utf-8"?>
+<file path=ppt/slides/slide14.xml><?xml version="1.0" encoding="utf-8"?>
 <p:sld xmlns:a="http://schemas.openxmlformats.org/drawingml/2006/main" xmlns:p="http://schemas.openxmlformats.org/presentationml/2006/main" xmlns:r="http://schemas.openxmlformats.org/officeDocument/2006/relationships">
   <p:cSld>
     <p:spTree>
@@ -5392,7 +5867,7 @@
 </p:sld>
 </file>
 
-<file path=ppt/slides/slide14.xml><?xml version="1.0" encoding="utf-8"?>
+<file path=ppt/slides/slide15.xml><?xml version="1.0" encoding="utf-8"?>
 <p:sld xmlns:a="http://schemas.openxmlformats.org/drawingml/2006/main" xmlns:p="http://schemas.openxmlformats.org/presentationml/2006/main" xmlns:r="http://schemas.openxmlformats.org/officeDocument/2006/relationships">
   <p:cSld>
     <p:spTree>
@@ -5500,137 +5975,6 @@
             </a:pPr>
             <a:r>
               <a:t>Выбросы: дерево не чувствительно к выбросам в X, но чувствительно к выбросам в y — лучше чистить данные или использовать MAE</a:t>
-            </a:r>
-          </a:p>
-        </p:txBody>
-      </p:sp>
-    </p:spTree>
-  </p:cSld>
-  <p:clrMapOvr>
-    <a:masterClrMapping/>
-  </p:clrMapOvr>
-</p:sld>
-</file>
-
-<file path=ppt/slides/slide15.xml><?xml version="1.0" encoding="utf-8"?>
-<p:sld xmlns:a="http://schemas.openxmlformats.org/drawingml/2006/main" xmlns:p="http://schemas.openxmlformats.org/presentationml/2006/main" xmlns:r="http://schemas.openxmlformats.org/officeDocument/2006/relationships">
-  <p:cSld>
-    <p:spTree>
-      <p:nvGrpSpPr>
-        <p:cNvPr id="1" name=""/>
-        <p:cNvGrpSpPr/>
-        <p:nvPr/>
-      </p:nvGrpSpPr>
-      <p:grpSpPr/>
-      <p:sp>
-        <p:nvSpPr>
-          <p:cNvPr id="2" name="TextBox 1"/>
-          <p:cNvSpPr txBox="1"/>
-          <p:nvPr/>
-        </p:nvSpPr>
-        <p:spPr>
-          <a:xfrm>
-            <a:off x="457200" y="274320"/>
-            <a:ext cx="11247120" cy="914400"/>
-          </a:xfrm>
-          <a:prstGeom prst="rect">
-            <a:avLst/>
-          </a:prstGeom>
-          <a:noFill/>
-        </p:spPr>
-        <p:txBody>
-          <a:bodyPr wrap="square">
-            <a:spAutoFit/>
-          </a:bodyPr>
-          <a:lstStyle/>
-          <a:p>
-            <a:pPr>
-              <a:defRPr sz="3200" b="1">
-                <a:solidFill>
-                  <a:srgbClr val="1A1A2E"/>
-                </a:solidFill>
-              </a:defRPr>
-            </a:pPr>
-            <a:r>
-              <a:t>Ансамбли деревьев — мостик к следующему занятию</a:t>
-            </a:r>
-          </a:p>
-        </p:txBody>
-      </p:sp>
-      <p:sp>
-        <p:nvSpPr>
-          <p:cNvPr id="3" name="TextBox 2"/>
-          <p:cNvSpPr txBox="1"/>
-          <p:nvPr/>
-        </p:nvSpPr>
-        <p:spPr>
-          <a:xfrm>
-            <a:off x="640080" y="1371600"/>
-            <a:ext cx="6858000" cy="5029200"/>
-          </a:xfrm>
-          <a:prstGeom prst="rect">
-            <a:avLst/>
-          </a:prstGeom>
-          <a:noFill/>
-        </p:spPr>
-        <p:txBody>
-          <a:bodyPr wrap="square">
-            <a:spAutoFit/>
-          </a:bodyPr>
-          <a:lstStyle/>
-          <a:p>
-            <a:pPr>
-              <a:spcAft>
-                <a:spcPts val="800"/>
-              </a:spcAft>
-              <a:defRPr sz="2000"/>
-            </a:pPr>
-            <a:r>
-              <a:t>Одно дерево — нестабильно и склонно к переобучению</a:t>
-            </a:r>
-          </a:p>
-          <a:p>
-            <a:pPr>
-              <a:spcAft>
-                <a:spcPts val="800"/>
-              </a:spcAft>
-              <a:defRPr sz="2000"/>
-            </a:pPr>
-            <a:r>
-              <a:t>Решение: строить много деревьев и усреднять их ответы</a:t>
-            </a:r>
-          </a:p>
-          <a:p>
-            <a:pPr>
-              <a:spcAft>
-                <a:spcPts val="800"/>
-              </a:spcAft>
-              <a:defRPr sz="2000"/>
-            </a:pPr>
-            <a:r>
-              <a:t>Random Forest: случайные подвыборки данных и признаков → независимые деревья → среднее</a:t>
-            </a:r>
-          </a:p>
-          <a:p>
-            <a:pPr>
-              <a:spcAft>
-                <a:spcPts val="800"/>
-              </a:spcAft>
-              <a:defRPr sz="2000"/>
-            </a:pPr>
-            <a:r>
-              <a:t>Gradient Boosting: деревья строятся последовательно, каждое исправляет ошибки предыдущего</a:t>
-            </a:r>
-          </a:p>
-          <a:p>
-            <a:pPr>
-              <a:spcAft>
-                <a:spcPts val="800"/>
-              </a:spcAft>
-              <a:defRPr sz="2000"/>
-            </a:pPr>
-            <a:r>
-              <a:t>Оба подхода используют жадные деревья как слабых учеников</a:t>
             </a:r>
           </a:p>
         </p:txBody>
@@ -5683,7 +6027,7 @@
               </a:defRPr>
             </a:pPr>
             <a:r>
-              <a:t>Визуализация деревьев в sklearn</a:t>
+              <a:t>Ансамбли деревьев — мостик к следующему занятию</a:t>
             </a:r>
           </a:p>
         </p:txBody>
@@ -5717,29 +6061,51 @@
               <a:defRPr sz="2000"/>
             </a:pPr>
             <a:r>
-              <a:t>sklearn.tree.plot_tree(clf, filled=True) — графическое дерево с цветом классов</a:t>
-            </a:r>
-          </a:p>
-          <a:p>
-            <a:pPr>
-              <a:spcAft>
-                <a:spcPts val="800"/>
-              </a:spcAft>
-              <a:defRPr sz="2000"/>
-            </a:pPr>
-            <a:r>
-              <a:t>export_graphviz — экспорт для Graphviz (dot-формат)</a:t>
-            </a:r>
-          </a:p>
-          <a:p>
-            <a:pPr>
-              <a:spcAft>
-                <a:spcPts val="800"/>
-              </a:spcAft>
-              <a:defRPr sz="2000"/>
-            </a:pPr>
-            <a:r>
-              <a:t>export_text — текстовое представление: правила вида X[0] &lt;= 2.5 → class=1</a:t>
+              <a:t>Одно дерево — нестабильно и склонно к переобучению</a:t>
+            </a:r>
+          </a:p>
+          <a:p>
+            <a:pPr>
+              <a:spcAft>
+                <a:spcPts val="800"/>
+              </a:spcAft>
+              <a:defRPr sz="2000"/>
+            </a:pPr>
+            <a:r>
+              <a:t>Решение: строить много деревьев и усреднять их ответы</a:t>
+            </a:r>
+          </a:p>
+          <a:p>
+            <a:pPr>
+              <a:spcAft>
+                <a:spcPts val="800"/>
+              </a:spcAft>
+              <a:defRPr sz="2000"/>
+            </a:pPr>
+            <a:r>
+              <a:t>Random Forest: случайные подвыборки данных и признаков → независимые деревья → среднее</a:t>
+            </a:r>
+          </a:p>
+          <a:p>
+            <a:pPr>
+              <a:spcAft>
+                <a:spcPts val="800"/>
+              </a:spcAft>
+              <a:defRPr sz="2000"/>
+            </a:pPr>
+            <a:r>
+              <a:t>Gradient Boosting: деревья строятся последовательно, каждое исправляет ошибки предыдущего</a:t>
+            </a:r>
+          </a:p>
+          <a:p>
+            <a:pPr>
+              <a:spcAft>
+                <a:spcPts val="800"/>
+              </a:spcAft>
+              <a:defRPr sz="2000"/>
+            </a:pPr>
+            <a:r>
+              <a:t>Оба подхода используют жадные деревья как слабых учеников</a:t>
             </a:r>
           </a:p>
         </p:txBody>
@@ -5753,6 +6119,115 @@
 </file>
 
 <file path=ppt/slides/slide17.xml><?xml version="1.0" encoding="utf-8"?>
+<p:sld xmlns:a="http://schemas.openxmlformats.org/drawingml/2006/main" xmlns:p="http://schemas.openxmlformats.org/presentationml/2006/main" xmlns:r="http://schemas.openxmlformats.org/officeDocument/2006/relationships">
+  <p:cSld>
+    <p:spTree>
+      <p:nvGrpSpPr>
+        <p:cNvPr id="1" name=""/>
+        <p:cNvGrpSpPr/>
+        <p:nvPr/>
+      </p:nvGrpSpPr>
+      <p:grpSpPr/>
+      <p:sp>
+        <p:nvSpPr>
+          <p:cNvPr id="2" name="TextBox 1"/>
+          <p:cNvSpPr txBox="1"/>
+          <p:nvPr/>
+        </p:nvSpPr>
+        <p:spPr>
+          <a:xfrm>
+            <a:off x="457200" y="274320"/>
+            <a:ext cx="11247120" cy="914400"/>
+          </a:xfrm>
+          <a:prstGeom prst="rect">
+            <a:avLst/>
+          </a:prstGeom>
+          <a:noFill/>
+        </p:spPr>
+        <p:txBody>
+          <a:bodyPr wrap="square">
+            <a:spAutoFit/>
+          </a:bodyPr>
+          <a:lstStyle/>
+          <a:p>
+            <a:pPr>
+              <a:defRPr sz="3200" b="1">
+                <a:solidFill>
+                  <a:srgbClr val="1A1A2E"/>
+                </a:solidFill>
+              </a:defRPr>
+            </a:pPr>
+            <a:r>
+              <a:t>Визуализация деревьев в sklearn</a:t>
+            </a:r>
+          </a:p>
+        </p:txBody>
+      </p:sp>
+      <p:sp>
+        <p:nvSpPr>
+          <p:cNvPr id="3" name="TextBox 2"/>
+          <p:cNvSpPr txBox="1"/>
+          <p:nvPr/>
+        </p:nvSpPr>
+        <p:spPr>
+          <a:xfrm>
+            <a:off x="640080" y="1371600"/>
+            <a:ext cx="6858000" cy="5029200"/>
+          </a:xfrm>
+          <a:prstGeom prst="rect">
+            <a:avLst/>
+          </a:prstGeom>
+          <a:noFill/>
+        </p:spPr>
+        <p:txBody>
+          <a:bodyPr wrap="square">
+            <a:spAutoFit/>
+          </a:bodyPr>
+          <a:lstStyle/>
+          <a:p>
+            <a:pPr>
+              <a:spcAft>
+                <a:spcPts val="800"/>
+              </a:spcAft>
+              <a:defRPr sz="2000"/>
+            </a:pPr>
+            <a:r>
+              <a:t>sklearn.tree.plot_tree(clf, filled=True) — графическое дерево с цветом классов</a:t>
+            </a:r>
+          </a:p>
+          <a:p>
+            <a:pPr>
+              <a:spcAft>
+                <a:spcPts val="800"/>
+              </a:spcAft>
+              <a:defRPr sz="2000"/>
+            </a:pPr>
+            <a:r>
+              <a:t>export_graphviz — экспорт для Graphviz (dot-формат)</a:t>
+            </a:r>
+          </a:p>
+          <a:p>
+            <a:pPr>
+              <a:spcAft>
+                <a:spcPts val="800"/>
+              </a:spcAft>
+              <a:defRPr sz="2000"/>
+            </a:pPr>
+            <a:r>
+              <a:t>export_text — текстовое представление: правила вида X[0] &lt;= 2.5 → class=1</a:t>
+            </a:r>
+          </a:p>
+        </p:txBody>
+      </p:sp>
+    </p:spTree>
+  </p:cSld>
+  <p:clrMapOvr>
+    <a:masterClrMapping/>
+  </p:clrMapOvr>
+</p:sld>
+</file>
+
+<file path=ppt/slides/slide18.xml><?xml version="1.0" encoding="utf-8"?>
 <p:sld xmlns:a="http://schemas.openxmlformats.org/drawingml/2006/main" xmlns:p="http://schemas.openxmlformats.org/presentationml/2006/main" xmlns:r="http://schemas.openxmlformats.org/officeDocument/2006/relationships">
   <p:cSld>
     <p:spTree>
@@ -5885,7 +6360,7 @@
 </p:sld>
 </file>
 
-<file path=ppt/slides/slide18.xml><?xml version="1.0" encoding="utf-8"?>
+<file path=ppt/slides/slide19.xml><?xml version="1.0" encoding="utf-8"?>
 <p:sld xmlns:a="http://schemas.openxmlformats.org/drawingml/2006/main" xmlns:p="http://schemas.openxmlformats.org/presentationml/2006/main" xmlns:r="http://schemas.openxmlformats.org/officeDocument/2006/relationships">
   <p:cSld>
     <p:spTree>
@@ -5993,126 +6468,6 @@
             </a:pPr>
             <a:r>
               <a:t>Q: Почему дерево может быть хуже случайного леса? A: Высокая дисперсия — ответ сильно меняется от малых изменений данных</a:t>
-            </a:r>
-          </a:p>
-        </p:txBody>
-      </p:sp>
-    </p:spTree>
-  </p:cSld>
-  <p:clrMapOvr>
-    <a:masterClrMapping/>
-  </p:clrMapOvr>
-</p:sld>
-</file>
-
-<file path=ppt/slides/slide19.xml><?xml version="1.0" encoding="utf-8"?>
-<p:sld xmlns:a="http://schemas.openxmlformats.org/drawingml/2006/main" xmlns:p="http://schemas.openxmlformats.org/presentationml/2006/main" xmlns:r="http://schemas.openxmlformats.org/officeDocument/2006/relationships">
-  <p:cSld>
-    <p:spTree>
-      <p:nvGrpSpPr>
-        <p:cNvPr id="1" name=""/>
-        <p:cNvGrpSpPr/>
-        <p:nvPr/>
-      </p:nvGrpSpPr>
-      <p:grpSpPr/>
-      <p:sp>
-        <p:nvSpPr>
-          <p:cNvPr id="2" name="TextBox 1"/>
-          <p:cNvSpPr txBox="1"/>
-          <p:nvPr/>
-        </p:nvSpPr>
-        <p:spPr>
-          <a:xfrm>
-            <a:off x="457200" y="274320"/>
-            <a:ext cx="11247120" cy="914400"/>
-          </a:xfrm>
-          <a:prstGeom prst="rect">
-            <a:avLst/>
-          </a:prstGeom>
-          <a:noFill/>
-        </p:spPr>
-        <p:txBody>
-          <a:bodyPr wrap="square">
-            <a:spAutoFit/>
-          </a:bodyPr>
-          <a:lstStyle/>
-          <a:p>
-            <a:pPr>
-              <a:defRPr sz="3200" b="1">
-                <a:solidFill>
-                  <a:srgbClr val="1A1A2E"/>
-                </a:solidFill>
-              </a:defRPr>
-            </a:pPr>
-            <a:r>
-              <a:t>Зачем нужно дерево в эпоху нейросетей?</a:t>
-            </a:r>
-          </a:p>
-        </p:txBody>
-      </p:sp>
-      <p:sp>
-        <p:nvSpPr>
-          <p:cNvPr id="3" name="TextBox 2"/>
-          <p:cNvSpPr txBox="1"/>
-          <p:nvPr/>
-        </p:nvSpPr>
-        <p:spPr>
-          <a:xfrm>
-            <a:off x="640080" y="1371600"/>
-            <a:ext cx="6858000" cy="5029200"/>
-          </a:xfrm>
-          <a:prstGeom prst="rect">
-            <a:avLst/>
-          </a:prstGeom>
-          <a:noFill/>
-        </p:spPr>
-        <p:txBody>
-          <a:bodyPr wrap="square">
-            <a:spAutoFit/>
-          </a:bodyPr>
-          <a:lstStyle/>
-          <a:p>
-            <a:pPr>
-              <a:spcAft>
-                <a:spcPts val="800"/>
-              </a:spcAft>
-              <a:defRPr sz="2000"/>
-            </a:pPr>
-            <a:r>
-              <a:t>Скорость и память: работает на слабых устройствах (микроконтроллеры, старые ноутбуки)</a:t>
-            </a:r>
-          </a:p>
-          <a:p>
-            <a:pPr>
-              <a:spcAft>
-                <a:spcPts val="800"/>
-              </a:spcAft>
-              <a:defRPr sz="2000"/>
-            </a:pPr>
-            <a:r>
-              <a:t>Интерпретируемость: решение можно объяснить пошагово (в отличие от нейросети)</a:t>
-            </a:r>
-          </a:p>
-          <a:p>
-            <a:pPr>
-              <a:spcAft>
-                <a:spcPts val="800"/>
-              </a:spcAft>
-              <a:defRPr sz="2000"/>
-            </a:pPr>
-            <a:r>
-              <a:t>Чем лучше логистической регрессии? — ловит нелинейности без ручного создания признаков</a:t>
-            </a:r>
-          </a:p>
-          <a:p>
-            <a:pPr>
-              <a:spcAft>
-                <a:spcPts val="800"/>
-              </a:spcAft>
-              <a:defRPr sz="2000"/>
-            </a:pPr>
-            <a:r>
-              <a:t>Чем лучше KNN? — не нужно хранить все данные; быстрое предсказание (O(log n))</a:t>
             </a:r>
           </a:p>
         </p:txBody>
@@ -6261,6 +6616,650 @@
           </a:prstGeom>
         </p:spPr>
       </p:pic>
+    </p:spTree>
+  </p:cSld>
+  <p:clrMapOvr>
+    <a:masterClrMapping/>
+  </p:clrMapOvr>
+</p:sld>
+</file>
+
+<file path=ppt/slides/slide20.xml><?xml version="1.0" encoding="utf-8"?>
+<p:sld xmlns:a="http://schemas.openxmlformats.org/drawingml/2006/main" xmlns:p="http://schemas.openxmlformats.org/presentationml/2006/main" xmlns:r="http://schemas.openxmlformats.org/officeDocument/2006/relationships">
+  <p:cSld>
+    <p:spTree>
+      <p:nvGrpSpPr>
+        <p:cNvPr id="1" name=""/>
+        <p:cNvGrpSpPr/>
+        <p:nvPr/>
+      </p:nvGrpSpPr>
+      <p:grpSpPr/>
+      <p:sp>
+        <p:nvSpPr>
+          <p:cNvPr id="2" name="TextBox 1"/>
+          <p:cNvSpPr txBox="1"/>
+          <p:nvPr/>
+        </p:nvSpPr>
+        <p:spPr>
+          <a:xfrm>
+            <a:off x="457200" y="274320"/>
+            <a:ext cx="11247120" cy="914400"/>
+          </a:xfrm>
+          <a:prstGeom prst="rect">
+            <a:avLst/>
+          </a:prstGeom>
+          <a:noFill/>
+        </p:spPr>
+        <p:txBody>
+          <a:bodyPr wrap="square">
+            <a:spAutoFit/>
+          </a:bodyPr>
+          <a:lstStyle/>
+          <a:p>
+            <a:pPr>
+              <a:defRPr sz="3200" b="1">
+                <a:solidFill>
+                  <a:srgbClr val="1A1A2E"/>
+                </a:solidFill>
+              </a:defRPr>
+            </a:pPr>
+            <a:r>
+              <a:t>Зачем нужно дерево в эпоху нейросетей?</a:t>
+            </a:r>
+          </a:p>
+        </p:txBody>
+      </p:sp>
+      <p:sp>
+        <p:nvSpPr>
+          <p:cNvPr id="3" name="TextBox 2"/>
+          <p:cNvSpPr txBox="1"/>
+          <p:nvPr/>
+        </p:nvSpPr>
+        <p:spPr>
+          <a:xfrm>
+            <a:off x="640080" y="1371600"/>
+            <a:ext cx="6858000" cy="5029200"/>
+          </a:xfrm>
+          <a:prstGeom prst="rect">
+            <a:avLst/>
+          </a:prstGeom>
+          <a:noFill/>
+        </p:spPr>
+        <p:txBody>
+          <a:bodyPr wrap="square">
+            <a:spAutoFit/>
+          </a:bodyPr>
+          <a:lstStyle/>
+          <a:p>
+            <a:pPr>
+              <a:spcAft>
+                <a:spcPts val="800"/>
+              </a:spcAft>
+              <a:defRPr sz="2000"/>
+            </a:pPr>
+            <a:r>
+              <a:t>Скорость и память: работает на слабых устройствах (микроконтроллеры, старые ноутбуки)</a:t>
+            </a:r>
+          </a:p>
+          <a:p>
+            <a:pPr>
+              <a:spcAft>
+                <a:spcPts val="800"/>
+              </a:spcAft>
+              <a:defRPr sz="2000"/>
+            </a:pPr>
+            <a:r>
+              <a:t>Интерпретируемость: решение можно объяснить пошагово (в отличие от нейросети)</a:t>
+            </a:r>
+          </a:p>
+          <a:p>
+            <a:pPr>
+              <a:spcAft>
+                <a:spcPts val="800"/>
+              </a:spcAft>
+              <a:defRPr sz="2000"/>
+            </a:pPr>
+            <a:r>
+              <a:t>Чем лучше логистической регрессии? — ловит нелинейности без ручного создания признаков</a:t>
+            </a:r>
+          </a:p>
+          <a:p>
+            <a:pPr>
+              <a:spcAft>
+                <a:spcPts val="800"/>
+              </a:spcAft>
+              <a:defRPr sz="2000"/>
+            </a:pPr>
+            <a:r>
+              <a:t>Чем лучше KNN? — не нужно хранить все данные; быстрое предсказание (O(log n))</a:t>
+            </a:r>
+          </a:p>
+        </p:txBody>
+      </p:sp>
+    </p:spTree>
+  </p:cSld>
+  <p:clrMapOvr>
+    <a:masterClrMapping/>
+  </p:clrMapOvr>
+</p:sld>
+</file>
+
+<file path=ppt/slides/slide21.xml><?xml version="1.0" encoding="utf-8"?>
+<p:sld xmlns:a="http://schemas.openxmlformats.org/drawingml/2006/main" xmlns:p="http://schemas.openxmlformats.org/presentationml/2006/main" xmlns:r="http://schemas.openxmlformats.org/officeDocument/2006/relationships">
+  <p:cSld>
+    <p:spTree>
+      <p:nvGrpSpPr>
+        <p:cNvPr id="1" name=""/>
+        <p:cNvGrpSpPr/>
+        <p:nvPr/>
+      </p:nvGrpSpPr>
+      <p:grpSpPr/>
+      <p:sp>
+        <p:nvSpPr>
+          <p:cNvPr id="2" name="TextBox 1"/>
+          <p:cNvSpPr txBox="1"/>
+          <p:nvPr/>
+        </p:nvSpPr>
+        <p:spPr>
+          <a:xfrm>
+            <a:off x="457200" y="274320"/>
+            <a:ext cx="11247120" cy="914400"/>
+          </a:xfrm>
+          <a:prstGeom prst="rect">
+            <a:avLst/>
+          </a:prstGeom>
+          <a:noFill/>
+        </p:spPr>
+        <p:txBody>
+          <a:bodyPr wrap="square">
+            <a:spAutoFit/>
+          </a:bodyPr>
+          <a:lstStyle/>
+          <a:p>
+            <a:pPr>
+              <a:defRPr sz="3200" b="1">
+                <a:solidFill>
+                  <a:srgbClr val="1A1A2E"/>
+                </a:solidFill>
+              </a:defRPr>
+            </a:pPr>
+            <a:r>
+              <a:t>Почему в узле мы выбираем только один признак и только вопросы вида «x &lt; a»?</a:t>
+            </a:r>
+          </a:p>
+        </p:txBody>
+      </p:sp>
+      <p:sp>
+        <p:nvSpPr>
+          <p:cNvPr id="3" name="TextBox 2"/>
+          <p:cNvSpPr txBox="1"/>
+          <p:nvPr/>
+        </p:nvSpPr>
+        <p:spPr>
+          <a:xfrm>
+            <a:off x="640080" y="1371600"/>
+            <a:ext cx="6858000" cy="5029200"/>
+          </a:xfrm>
+          <a:prstGeom prst="rect">
+            <a:avLst/>
+          </a:prstGeom>
+          <a:noFill/>
+        </p:spPr>
+        <p:txBody>
+          <a:bodyPr wrap="square">
+            <a:spAutoFit/>
+          </a:bodyPr>
+          <a:lstStyle/>
+          <a:p>
+            <a:pPr>
+              <a:spcAft>
+                <a:spcPts val="800"/>
+              </a:spcAft>
+              <a:defRPr sz="2000"/>
+            </a:pPr>
+            <a:r>
+              <a:t>Перебор комбинаций признаков в каждом узле вырос бы экспоненциально</a:t>
+            </a:r>
+          </a:p>
+          <a:p>
+            <a:pPr>
+              <a:spcAft>
+                <a:spcPts val="800"/>
+              </a:spcAft>
+              <a:defRPr sz="2000"/>
+            </a:pPr>
+            <a:r>
+              <a:t>Интерпретируемость: простые, понятные правила (если x &lt; a, то …)</a:t>
+            </a:r>
+          </a:p>
+          <a:p>
+            <a:pPr>
+              <a:spcAft>
+                <a:spcPts val="800"/>
+              </a:spcAft>
+              <a:defRPr sz="2000"/>
+            </a:pPr>
+            <a:r>
+              <a:t>Один признак → прямоугольные области, которыми можно приблизить любую функцию (теорема о приближении)</a:t>
+            </a:r>
+          </a:p>
+          <a:p>
+            <a:pPr>
+              <a:spcAft>
+                <a:spcPts val="800"/>
+              </a:spcAft>
+              <a:defRPr sz="2000"/>
+            </a:pPr>
+            <a:r>
+              <a:t>Сложные комбинации в одном узле резко повышают риск переобучения</a:t>
+            </a:r>
+          </a:p>
+          <a:p>
+            <a:pPr>
+              <a:spcAft>
+                <a:spcPts val="800"/>
+              </a:spcAft>
+              <a:defRPr sz="2000"/>
+            </a:pPr>
+            <a:r>
+              <a:t>Исключение: ID3/C4.5 для категориальных признаков допускают небинарные узлы, но каждый узел всё равно соответствует одному признаку</a:t>
+            </a:r>
+          </a:p>
+        </p:txBody>
+      </p:sp>
+    </p:spTree>
+  </p:cSld>
+  <p:clrMapOvr>
+    <a:masterClrMapping/>
+  </p:clrMapOvr>
+</p:sld>
+</file>
+
+<file path=ppt/slides/slide22.xml><?xml version="1.0" encoding="utf-8"?>
+<p:sld xmlns:a="http://schemas.openxmlformats.org/drawingml/2006/main" xmlns:p="http://schemas.openxmlformats.org/presentationml/2006/main" xmlns:r="http://schemas.openxmlformats.org/officeDocument/2006/relationships">
+  <p:cSld>
+    <p:spTree>
+      <p:nvGrpSpPr>
+        <p:cNvPr id="1" name=""/>
+        <p:cNvGrpSpPr/>
+        <p:nvPr/>
+      </p:nvGrpSpPr>
+      <p:grpSpPr/>
+      <p:sp>
+        <p:nvSpPr>
+          <p:cNvPr id="2" name="TextBox 1"/>
+          <p:cNvSpPr txBox="1"/>
+          <p:nvPr/>
+        </p:nvSpPr>
+        <p:spPr>
+          <a:xfrm>
+            <a:off x="457200" y="274320"/>
+            <a:ext cx="11247120" cy="914400"/>
+          </a:xfrm>
+          <a:prstGeom prst="rect">
+            <a:avLst/>
+          </a:prstGeom>
+          <a:noFill/>
+        </p:spPr>
+        <p:txBody>
+          <a:bodyPr wrap="square">
+            <a:spAutoFit/>
+          </a:bodyPr>
+          <a:lstStyle/>
+          <a:p>
+            <a:pPr>
+              <a:defRPr sz="3200" b="1">
+                <a:solidFill>
+                  <a:srgbClr val="1A1A2E"/>
+                </a:solidFill>
+              </a:defRPr>
+            </a:pPr>
+            <a:r>
+              <a:t>Почему мы строим дерево жадно?</a:t>
+            </a:r>
+          </a:p>
+        </p:txBody>
+      </p:sp>
+      <p:sp>
+        <p:nvSpPr>
+          <p:cNvPr id="3" name="TextBox 2"/>
+          <p:cNvSpPr txBox="1"/>
+          <p:nvPr/>
+        </p:nvSpPr>
+        <p:spPr>
+          <a:xfrm>
+            <a:off x="640080" y="1371600"/>
+            <a:ext cx="6858000" cy="5029200"/>
+          </a:xfrm>
+          <a:prstGeom prst="rect">
+            <a:avLst/>
+          </a:prstGeom>
+          <a:noFill/>
+        </p:spPr>
+        <p:txBody>
+          <a:bodyPr wrap="square">
+            <a:spAutoFit/>
+          </a:bodyPr>
+          <a:lstStyle/>
+          <a:p>
+            <a:pPr>
+              <a:spcAft>
+                <a:spcPts val="800"/>
+              </a:spcAft>
+              <a:defRPr sz="2000"/>
+            </a:pPr>
+            <a:r>
+              <a:t>Краткий ответ: это компромисс между качеством, временем и переобучением</a:t>
+            </a:r>
+          </a:p>
+          <a:p>
+            <a:pPr>
+              <a:spcAft>
+                <a:spcPts val="800"/>
+              </a:spcAft>
+              <a:defRPr sz="2000"/>
+            </a:pPr>
+            <a:r>
+              <a:t>Полный перебор оптимального дерева — NP-трудная задача (доказано)</a:t>
+            </a:r>
+          </a:p>
+          <a:p>
+            <a:pPr>
+              <a:spcAft>
+                <a:spcPts val="800"/>
+              </a:spcAft>
+              <a:defRPr sz="2000"/>
+            </a:pPr>
+            <a:r>
+              <a:t>Жадный алгоритм работает за разумное время: O(n_features · n_samples · log n_samples) на узел</a:t>
+            </a:r>
+          </a:p>
+          <a:p>
+            <a:pPr>
+              <a:spcAft>
+                <a:spcPts val="800"/>
+              </a:spcAft>
+              <a:defRPr sz="2000"/>
+            </a:pPr>
+            <a:r>
+              <a:t>Жадность даёт возможность контролировать сложность (остановка, прунинг)</a:t>
+            </a:r>
+          </a:p>
+          <a:p>
+            <a:pPr>
+              <a:spcAft>
+                <a:spcPts val="800"/>
+              </a:spcAft>
+              <a:defRPr sz="2000"/>
+            </a:pPr>
+            <a:r>
+              <a:t>Недостатки жадности становятся достоинствами в ансамблях (Random Forest, Gradient Boosting)</a:t>
+            </a:r>
+          </a:p>
+        </p:txBody>
+      </p:sp>
+    </p:spTree>
+  </p:cSld>
+  <p:clrMapOvr>
+    <a:masterClrMapping/>
+  </p:clrMapOvr>
+</p:sld>
+</file>
+
+<file path=ppt/slides/slide23.xml><?xml version="1.0" encoding="utf-8"?>
+<p:sld xmlns:a="http://schemas.openxmlformats.org/drawingml/2006/main" xmlns:p="http://schemas.openxmlformats.org/presentationml/2006/main" xmlns:r="http://schemas.openxmlformats.org/officeDocument/2006/relationships">
+  <p:cSld>
+    <p:spTree>
+      <p:nvGrpSpPr>
+        <p:cNvPr id="1" name=""/>
+        <p:cNvGrpSpPr/>
+        <p:nvPr/>
+      </p:nvGrpSpPr>
+      <p:grpSpPr/>
+      <p:sp>
+        <p:nvSpPr>
+          <p:cNvPr id="2" name="TextBox 1"/>
+          <p:cNvSpPr txBox="1"/>
+          <p:nvPr/>
+        </p:nvSpPr>
+        <p:spPr>
+          <a:xfrm>
+            <a:off x="457200" y="274320"/>
+            <a:ext cx="11247120" cy="914400"/>
+          </a:xfrm>
+          <a:prstGeom prst="rect">
+            <a:avLst/>
+          </a:prstGeom>
+          <a:noFill/>
+        </p:spPr>
+        <p:txBody>
+          <a:bodyPr wrap="square">
+            <a:spAutoFit/>
+          </a:bodyPr>
+          <a:lstStyle/>
+          <a:p>
+            <a:pPr>
+              <a:defRPr sz="3200" b="1">
+                <a:solidFill>
+                  <a:srgbClr val="1A1A2E"/>
+                </a:solidFill>
+              </a:defRPr>
+            </a:pPr>
+            <a:r>
+              <a:t>Почему нам важна строгая вогнутость, если мы не используем градиенты?</a:t>
+            </a:r>
+          </a:p>
+        </p:txBody>
+      </p:sp>
+      <p:sp>
+        <p:nvSpPr>
+          <p:cNvPr id="3" name="TextBox 2"/>
+          <p:cNvSpPr txBox="1"/>
+          <p:nvPr/>
+        </p:nvSpPr>
+        <p:spPr>
+          <a:xfrm>
+            <a:off x="640080" y="1371600"/>
+            <a:ext cx="6858000" cy="5029200"/>
+          </a:xfrm>
+          <a:prstGeom prst="rect">
+            <a:avLst/>
+          </a:prstGeom>
+          <a:noFill/>
+        </p:spPr>
+        <p:txBody>
+          <a:bodyPr wrap="square">
+            <a:spAutoFit/>
+          </a:bodyPr>
+          <a:lstStyle/>
+          <a:p>
+            <a:pPr>
+              <a:spcAft>
+                <a:spcPts val="800"/>
+              </a:spcAft>
+              <a:defRPr sz="2000"/>
+            </a:pPr>
+            <a:r>
+              <a:t>Гладкость не является причиной (она не обязательна для выбора разбиения)</a:t>
+            </a:r>
+          </a:p>
+          <a:p>
+            <a:pPr>
+              <a:spcAft>
+                <a:spcPts val="800"/>
+              </a:spcAft>
+              <a:defRPr sz="2000"/>
+            </a:pPr>
+            <a:r>
+              <a:t>Проблема Misclassification impurity: она кусочно-линейна, а не строго вогнута</a:t>
+            </a:r>
+          </a:p>
+          <a:p>
+            <a:pPr>
+              <a:spcAft>
+                <a:spcPts val="800"/>
+              </a:spcAft>
+              <a:defRPr sz="2000"/>
+            </a:pPr>
+            <a:r>
+              <a:t>При K ≥ 3 может давать одинаковые значения для разных распределений (например, (0.6, 0.2, 0.2) и (0.6, 0.1, 0.3) → I = 0.4)</a:t>
+            </a:r>
+          </a:p>
+          <a:p>
+            <a:pPr>
+              <a:spcAft>
+                <a:spcPts val="800"/>
+              </a:spcAft>
+              <a:defRPr sz="2000"/>
+            </a:pPr>
+            <a:r>
+              <a:t>Она смотрит только на самый большой класс, игнорируя распределение остальных</a:t>
+            </a:r>
+          </a:p>
+          <a:p>
+            <a:pPr>
+              <a:spcAft>
+                <a:spcPts val="800"/>
+              </a:spcAft>
+              <a:defRPr sz="2000"/>
+            </a:pPr>
+            <a:r>
+              <a:t>Энтропия и Джини строго вогнуты — каждое изменение распределения даёт различный прирост, алгоритм выбирает лучший порог однозначно</a:t>
+            </a:r>
+          </a:p>
+        </p:txBody>
+      </p:sp>
+    </p:spTree>
+  </p:cSld>
+  <p:clrMapOvr>
+    <a:masterClrMapping/>
+  </p:clrMapOvr>
+</p:sld>
+</file>
+
+<file path=ppt/slides/slide24.xml><?xml version="1.0" encoding="utf-8"?>
+<p:sld xmlns:a="http://schemas.openxmlformats.org/drawingml/2006/main" xmlns:p="http://schemas.openxmlformats.org/presentationml/2006/main" xmlns:r="http://schemas.openxmlformats.org/officeDocument/2006/relationships">
+  <p:cSld>
+    <p:spTree>
+      <p:nvGrpSpPr>
+        <p:cNvPr id="1" name=""/>
+        <p:cNvGrpSpPr/>
+        <p:nvPr/>
+      </p:nvGrpSpPr>
+      <p:grpSpPr/>
+      <p:sp>
+        <p:nvSpPr>
+          <p:cNvPr id="2" name="TextBox 1"/>
+          <p:cNvSpPr txBox="1"/>
+          <p:nvPr/>
+        </p:nvSpPr>
+        <p:spPr>
+          <a:xfrm>
+            <a:off x="457200" y="274320"/>
+            <a:ext cx="11247120" cy="914400"/>
+          </a:xfrm>
+          <a:prstGeom prst="rect">
+            <a:avLst/>
+          </a:prstGeom>
+          <a:noFill/>
+        </p:spPr>
+        <p:txBody>
+          <a:bodyPr wrap="square">
+            <a:spAutoFit/>
+          </a:bodyPr>
+          <a:lstStyle/>
+          <a:p>
+            <a:pPr>
+              <a:defRPr sz="3200" b="1">
+                <a:solidFill>
+                  <a:srgbClr val="1A1A2E"/>
+                </a:solidFill>
+              </a:defRPr>
+            </a:pPr>
+            <a:r>
+              <a:t>Джини или энтропия?</a:t>
+            </a:r>
+          </a:p>
+        </p:txBody>
+      </p:sp>
+      <p:sp>
+        <p:nvSpPr>
+          <p:cNvPr id="3" name="TextBox 2"/>
+          <p:cNvSpPr txBox="1"/>
+          <p:nvPr/>
+        </p:nvSpPr>
+        <p:spPr>
+          <a:xfrm>
+            <a:off x="640080" y="1371600"/>
+            <a:ext cx="6858000" cy="5029200"/>
+          </a:xfrm>
+          <a:prstGeom prst="rect">
+            <a:avLst/>
+          </a:prstGeom>
+          <a:noFill/>
+        </p:spPr>
+        <p:txBody>
+          <a:bodyPr wrap="square">
+            <a:spAutoFit/>
+          </a:bodyPr>
+          <a:lstStyle/>
+          <a:p>
+            <a:pPr>
+              <a:spcAft>
+                <a:spcPts val="800"/>
+              </a:spcAft>
+              <a:defRPr sz="2000"/>
+            </a:pPr>
+            <a:r>
+              <a:t>Джини считается быстрее (только квадраты), энтропия требует логарифмов, но разница несущественна</a:t>
+            </a:r>
+          </a:p>
+          <a:p>
+            <a:pPr>
+              <a:spcAft>
+                <a:spcPts val="800"/>
+              </a:spcAft>
+              <a:defRPr sz="2000"/>
+            </a:pPr>
+            <a:r>
+              <a:t>Энтропия имеет удобную информационную интерпретацию (среднее количество бит)</a:t>
+            </a:r>
+          </a:p>
+          <a:p>
+            <a:pPr>
+              <a:spcAft>
+                <a:spcPts val="800"/>
+              </a:spcAft>
+              <a:defRPr sz="2000"/>
+            </a:pPr>
+            <a:r>
+              <a:t>Джини — квадратичное приближение энтропии вблизи равномерного распределения, результаты обычно очень похожи</a:t>
+            </a:r>
+          </a:p>
+          <a:p>
+            <a:pPr>
+              <a:spcAft>
+                <a:spcPts val="800"/>
+              </a:spcAft>
+              <a:defRPr sz="2000"/>
+            </a:pPr>
+            <a:r>
+              <a:t>Вблизи чистых узлов (p_k ≈ 1) энтропия сильнее «штрафует» за появление редкого класса</a:t>
+            </a:r>
+          </a:p>
+          <a:p>
+            <a:pPr>
+              <a:spcAft>
+                <a:spcPts val="800"/>
+              </a:spcAft>
+              <a:defRPr sz="2000"/>
+            </a:pPr>
+            <a:r>
+              <a:t>На практике выбор между ними редко критичен — деревья получаются почти одинаковыми</a:t>
+            </a:r>
+          </a:p>
+        </p:txBody>
+      </p:sp>
     </p:spTree>
   </p:cSld>
   <p:clrMapOvr>
@@ -6895,6 +7894,137 @@
               </a:defRPr>
             </a:pPr>
             <a:r>
+              <a:t>Альтернатива: энтропия и индекс Джини</a:t>
+            </a:r>
+          </a:p>
+        </p:txBody>
+      </p:sp>
+      <p:sp>
+        <p:nvSpPr>
+          <p:cNvPr id="3" name="TextBox 2"/>
+          <p:cNvSpPr txBox="1"/>
+          <p:nvPr/>
+        </p:nvSpPr>
+        <p:spPr>
+          <a:xfrm>
+            <a:off x="640080" y="1371600"/>
+            <a:ext cx="6858000" cy="5029200"/>
+          </a:xfrm>
+          <a:prstGeom prst="rect">
+            <a:avLst/>
+          </a:prstGeom>
+          <a:noFill/>
+        </p:spPr>
+        <p:txBody>
+          <a:bodyPr wrap="square">
+            <a:spAutoFit/>
+          </a:bodyPr>
+          <a:lstStyle/>
+          <a:p>
+            <a:pPr>
+              <a:spcAft>
+                <a:spcPts val="800"/>
+              </a:spcAft>
+              <a:defRPr sz="2000"/>
+            </a:pPr>
+            <a:r>
+              <a:t>Энтропия: H = -∑ p_k · log₂(p_k)</a:t>
+            </a:r>
+          </a:p>
+          <a:p>
+            <a:pPr>
+              <a:spcAft>
+                <a:spcPts val="800"/>
+              </a:spcAft>
+              <a:defRPr sz="2000"/>
+            </a:pPr>
+            <a:r>
+              <a:t>Индекс Джини: G = ∑ p_k · (1-p_k) = 1 - ∑ p_k²</a:t>
+            </a:r>
+          </a:p>
+          <a:p>
+            <a:pPr>
+              <a:spcAft>
+                <a:spcPts val="800"/>
+              </a:spcAft>
+              <a:defRPr sz="2000"/>
+            </a:pPr>
+            <a:r>
+              <a:t>Обе функции строго вогнуты — учитывают распределение всех классов</a:t>
+            </a:r>
+          </a:p>
+          <a:p>
+            <a:pPr>
+              <a:spcAft>
+                <a:spcPts val="800"/>
+              </a:spcAft>
+              <a:defRPr sz="2000"/>
+            </a:pPr>
+            <a:r>
+              <a:t>Именно их используют на практике (sklearn: criterion='gini' или 'entropy')</a:t>
+            </a:r>
+          </a:p>
+          <a:p>
+            <a:pPr>
+              <a:spcAft>
+                <a:spcPts val="800"/>
+              </a:spcAft>
+              <a:defRPr sz="2000"/>
+            </a:pPr>
+            <a:r>
+              <a:t>Почему они лучше Misclassification — объясним позже</a:t>
+            </a:r>
+          </a:p>
+        </p:txBody>
+      </p:sp>
+    </p:spTree>
+  </p:cSld>
+  <p:clrMapOvr>
+    <a:masterClrMapping/>
+  </p:clrMapOvr>
+</p:sld>
+</file>
+
+<file path=ppt/slides/slide8.xml><?xml version="1.0" encoding="utf-8"?>
+<p:sld xmlns:a="http://schemas.openxmlformats.org/drawingml/2006/main" xmlns:p="http://schemas.openxmlformats.org/presentationml/2006/main" xmlns:r="http://schemas.openxmlformats.org/officeDocument/2006/relationships">
+  <p:cSld>
+    <p:spTree>
+      <p:nvGrpSpPr>
+        <p:cNvPr id="1" name=""/>
+        <p:cNvGrpSpPr/>
+        <p:nvPr/>
+      </p:nvGrpSpPr>
+      <p:grpSpPr/>
+      <p:sp>
+        <p:nvSpPr>
+          <p:cNvPr id="2" name="TextBox 1"/>
+          <p:cNvSpPr txBox="1"/>
+          <p:nvPr/>
+        </p:nvSpPr>
+        <p:spPr>
+          <a:xfrm>
+            <a:off x="457200" y="274320"/>
+            <a:ext cx="11247120" cy="914400"/>
+          </a:xfrm>
+          <a:prstGeom prst="rect">
+            <a:avLst/>
+          </a:prstGeom>
+          <a:noFill/>
+        </p:spPr>
+        <p:txBody>
+          <a:bodyPr wrap="square">
+            <a:spAutoFit/>
+          </a:bodyPr>
+          <a:lstStyle/>
+          <a:p>
+            <a:pPr>
+              <a:defRPr sz="3200" b="1">
+                <a:solidFill>
+                  <a:srgbClr val="1A1A2E"/>
+                </a:solidFill>
+              </a:defRPr>
+            </a:pPr>
+            <a:r>
               <a:t>Энтропия и индекс Джини</a:t>
             </a:r>
           </a:p>
@@ -7010,7 +8140,7 @@
 </p:sld>
 </file>
 
-<file path=ppt/slides/slide8.xml><?xml version="1.0" encoding="utf-8"?>
+<file path=ppt/slides/slide9.xml><?xml version="1.0" encoding="utf-8"?>
 <p:sld xmlns:a="http://schemas.openxmlformats.org/drawingml/2006/main" xmlns:p="http://schemas.openxmlformats.org/presentationml/2006/main" xmlns:r="http://schemas.openxmlformats.org/officeDocument/2006/relationships">
   <p:cSld>
     <p:spTree>
@@ -7118,126 +8248,6 @@
             </a:pPr>
             <a:r>
               <a:t>Никаких one-vs-rest, никаких дополнительных моделей</a:t>
-            </a:r>
-          </a:p>
-        </p:txBody>
-      </p:sp>
-    </p:spTree>
-  </p:cSld>
-  <p:clrMapOvr>
-    <a:masterClrMapping/>
-  </p:clrMapOvr>
-</p:sld>
-</file>
-
-<file path=ppt/slides/slide9.xml><?xml version="1.0" encoding="utf-8"?>
-<p:sld xmlns:a="http://schemas.openxmlformats.org/drawingml/2006/main" xmlns:p="http://schemas.openxmlformats.org/presentationml/2006/main" xmlns:r="http://schemas.openxmlformats.org/officeDocument/2006/relationships">
-  <p:cSld>
-    <p:spTree>
-      <p:nvGrpSpPr>
-        <p:cNvPr id="1" name=""/>
-        <p:cNvGrpSpPr/>
-        <p:nvPr/>
-      </p:nvGrpSpPr>
-      <p:grpSpPr/>
-      <p:sp>
-        <p:nvSpPr>
-          <p:cNvPr id="2" name="TextBox 1"/>
-          <p:cNvSpPr txBox="1"/>
-          <p:nvPr/>
-        </p:nvSpPr>
-        <p:spPr>
-          <a:xfrm>
-            <a:off x="457200" y="274320"/>
-            <a:ext cx="11247120" cy="914400"/>
-          </a:xfrm>
-          <a:prstGeom prst="rect">
-            <a:avLst/>
-          </a:prstGeom>
-          <a:noFill/>
-        </p:spPr>
-        <p:txBody>
-          <a:bodyPr wrap="square">
-            <a:spAutoFit/>
-          </a:bodyPr>
-          <a:lstStyle/>
-          <a:p>
-            <a:pPr>
-              <a:defRPr sz="3200" b="1">
-                <a:solidFill>
-                  <a:srgbClr val="1A1A2E"/>
-                </a:solidFill>
-              </a:defRPr>
-            </a:pPr>
-            <a:r>
-              <a:t>Предвзятость дерева: Bias towards high-cardinality features</a:t>
-            </a:r>
-          </a:p>
-        </p:txBody>
-      </p:sp>
-      <p:sp>
-        <p:nvSpPr>
-          <p:cNvPr id="3" name="TextBox 2"/>
-          <p:cNvSpPr txBox="1"/>
-          <p:nvPr/>
-        </p:nvSpPr>
-        <p:spPr>
-          <a:xfrm>
-            <a:off x="640080" y="1371600"/>
-            <a:ext cx="6858000" cy="5029200"/>
-          </a:xfrm>
-          <a:prstGeom prst="rect">
-            <a:avLst/>
-          </a:prstGeom>
-          <a:noFill/>
-        </p:spPr>
-        <p:txBody>
-          <a:bodyPr wrap="square">
-            <a:spAutoFit/>
-          </a:bodyPr>
-          <a:lstStyle/>
-          <a:p>
-            <a:pPr>
-              <a:spcAft>
-                <a:spcPts val="800"/>
-              </a:spcAft>
-              <a:defRPr sz="2000"/>
-            </a:pPr>
-            <a:r>
-              <a:t>Дерево склонно выбирать признаки с большим числом уникальных значений (ID, дата рождения, имя)</a:t>
-            </a:r>
-          </a:p>
-          <a:p>
-            <a:pPr>
-              <a:spcAft>
-                <a:spcPts val="800"/>
-              </a:spcAft>
-              <a:defRPr sz="2000"/>
-            </a:pPr>
-            <a:r>
-              <a:t>Такой признак может идеально разделить выборку — каждому объекту свой лист → переобучение</a:t>
-            </a:r>
-          </a:p>
-          <a:p>
-            <a:pPr>
-              <a:spcAft>
-                <a:spcPts val="800"/>
-              </a:spcAft>
-              <a:defRPr sz="2000"/>
-            </a:pPr>
-            <a:r>
-              <a:t>Решение: Gain Ratio (C4.5), ограничение глубины, min_samples_leaf</a:t>
-            </a:r>
-          </a:p>
-          <a:p>
-            <a:pPr>
-              <a:spcAft>
-                <a:spcPts val="800"/>
-              </a:spcAft>
-              <a:defRPr sz="2000"/>
-            </a:pPr>
-            <a:r>
-              <a:t>Если есть ID или строка-идентификатор — УДАЛИТЕ перед обучением!</a:t>
             </a:r>
           </a:p>
         </p:txBody>

--- a/lessons/derevo_resheniy/presentation.pptx
+++ b/lessons/derevo_resheniy/presentation.pptx
@@ -7819,17 +7819,6 @@
               <a:defRPr sz="2000"/>
             </a:pPr>
             <a:r>
-              <a:t>I_mis(t) = 1 - max_k p_k, где p_k — доля класса k в узле t</a:t>
-            </a:r>
-          </a:p>
-          <a:p>
-            <a:pPr>
-              <a:spcAft>
-                <a:spcPts val="800"/>
-              </a:spcAft>
-              <a:defRPr sz="2000"/>
-            </a:pPr>
-            <a:r>
               <a:t>Интуиция: если бы мы ответили самым частым классом, какова вероятность ошибки?</a:t>
             </a:r>
           </a:p>
@@ -7843,6 +7832,67 @@
             <a:r>
               <a:t>Простой и интуитивный, но есть недостатки (обсудим на слайде 21)</a:t>
             </a:r>
+          </a:p>
+        </p:txBody>
+      </p:sp>
+      <p:sp>
+        <p:nvSpPr>
+          <p:cNvPr id="4" name="TextBox 3"/>
+          <p:cNvSpPr txBox="1"/>
+          <p:nvPr/>
+        </p:nvSpPr>
+        <p:spPr>
+          <a:xfrm>
+            <a:off x="7772400" y="1371600"/>
+            <a:ext cx="4114800" cy="2286000"/>
+          </a:xfrm>
+          <a:prstGeom prst="rect">
+            <a:avLst/>
+          </a:prstGeom>
+          <a:noFill/>
+        </p:spPr>
+        <p:txBody>
+          <a:bodyPr wrap="square">
+            <a:spAutoFit/>
+          </a:bodyPr>
+          <a:lstStyle/>
+          <a:p>
+            <a:pPr>
+              <a:spcAft>
+                <a:spcPts val="600"/>
+              </a:spcAft>
+              <a:defRPr sz="1600">
+                <a:solidFill>
+                  <a:srgbClr val="555555"/>
+                </a:solidFill>
+              </a:defRPr>
+            </a:pPr>
+            <a:r>
+              <a:t>Misclassification impurity</a:t>
+            </a:r>
+          </a:p>
+          <a:p>
+            <a:pPr>
+              <a:spcAft>
+                <a:spcPts val="1000"/>
+              </a:spcAft>
+            </a:pPr>
+            <ns0:m xmlns:ns0="http://schemas.microsoft.com/office/drawing/2010/main">
+              <ns1:oMath xmlns:ns1="http://schemas.openxmlformats.org/officeDocument/2006/math">
+                <ns1:sSub>
+                  <ns1:e>
+                    <ns1:r>
+                      <ns1:t>I</ns1:t>
+                    </ns1:r>
+                  </ns1:e>
+                  <ns1:sub>
+                    <ns1:r>
+                      <ns1:t>mis</ns1:t>
+                    </ns1:r>
+                  </ns1:sub>
+                </ns1:sSub>
+              </ns1:oMath>
+            </ns0:m>
           </a:p>
         </p:txBody>
       </p:sp>
@@ -7928,28 +7978,6 @@
               <a:defRPr sz="2000"/>
             </a:pPr>
             <a:r>
-              <a:t>Энтропия: H = -∑ p_k · log₂(p_k)</a:t>
-            </a:r>
-          </a:p>
-          <a:p>
-            <a:pPr>
-              <a:spcAft>
-                <a:spcPts val="800"/>
-              </a:spcAft>
-              <a:defRPr sz="2000"/>
-            </a:pPr>
-            <a:r>
-              <a:t>Индекс Джини: G = ∑ p_k · (1-p_k) = 1 - ∑ p_k²</a:t>
-            </a:r>
-          </a:p>
-          <a:p>
-            <a:pPr>
-              <a:spcAft>
-                <a:spcPts val="800"/>
-              </a:spcAft>
-              <a:defRPr sz="2000"/>
-            </a:pPr>
-            <a:r>
               <a:t>Обе функции строго вогнуты — учитывают распределение всех классов</a:t>
             </a:r>
           </a:p>
@@ -7974,6 +8002,72 @@
             <a:r>
               <a:t>Почему они лучше Misclassification — объясним позже</a:t>
             </a:r>
+          </a:p>
+        </p:txBody>
+      </p:sp>
+      <p:sp>
+        <p:nvSpPr>
+          <p:cNvPr id="4" name="TextBox 3"/>
+          <p:cNvSpPr txBox="1"/>
+          <p:nvPr/>
+        </p:nvSpPr>
+        <p:spPr>
+          <a:xfrm>
+            <a:off x="7772400" y="1371600"/>
+            <a:ext cx="4114800" cy="2286000"/>
+          </a:xfrm>
+          <a:prstGeom prst="rect">
+            <a:avLst/>
+          </a:prstGeom>
+          <a:noFill/>
+        </p:spPr>
+        <p:txBody>
+          <a:bodyPr wrap="square">
+            <a:spAutoFit/>
+          </a:bodyPr>
+          <a:lstStyle/>
+          <a:p>
+            <a:pPr>
+              <a:spcAft>
+                <a:spcPts val="600"/>
+              </a:spcAft>
+              <a:defRPr sz="1600">
+                <a:solidFill>
+                  <a:srgbClr val="555555"/>
+                </a:solidFill>
+              </a:defRPr>
+            </a:pPr>
+            <a:r>
+              <a:t>Энтропия и индекс Джини</a:t>
+            </a:r>
+          </a:p>
+          <a:p>
+            <a:pPr>
+              <a:spcAft>
+                <a:spcPts val="1000"/>
+              </a:spcAft>
+            </a:pPr>
+            <ns0:m xmlns:ns0="http://schemas.microsoft.com/office/drawing/2010/main">
+              <ns1:oMath xmlns:ns1="http://schemas.openxmlformats.org/officeDocument/2006/math">
+                <ns1:r>
+                  <ns1:t>H=−</ns1:t>
+                </ns1:r>
+              </ns1:oMath>
+            </ns0:m>
+          </a:p>
+          <a:p>
+            <a:pPr>
+              <a:spcAft>
+                <a:spcPts val="1000"/>
+              </a:spcAft>
+            </a:pPr>
+            <ns0:m xmlns:ns0="http://schemas.microsoft.com/office/drawing/2010/main">
+              <ns1:oMath xmlns:ns1="http://schemas.openxmlformats.org/officeDocument/2006/math">
+                <ns1:r>
+                  <ns1:t>G=</ns1:t>
+                </ns1:r>
+              </ns1:oMath>
+            </ns0:m>
           </a:p>
         </p:txBody>
       </p:sp>

--- a/lessons/derevo_resheniy/presentation.pptx
+++ b/lessons/derevo_resheniy/presentation.pptx
@@ -1155,7 +1155,7 @@
           <a:lstStyle/>
           <a:p>
             <a:r>
-              <a:t>Можно раздать как памятку или вывести на экран во время обсуждения.</a:t>
+              <a:t>Обсудить компромисс: точность vs интерпретируемость. Где важна объяснимость (медицина, кредитный скоринг) — дерево может быть предпочтительнее нейросети.</a:t>
             </a:r>
           </a:p>
         </p:txBody>
@@ -1225,7 +1225,7 @@
           <a:lstStyle/>
           <a:p>
             <a:r>
-              <a:t>Обсудить компромисс: точность vs интерпретируемость. Где важна объяснимость (медицина, кредитный скоринг) — дерево может быть предпочтительнее нейросети.</a:t>
+              <a:t>Показать пример: номинативный признак «цвет» с Label Encoding ломает интерпретацию дерева.</a:t>
             </a:r>
           </a:p>
         </p:txBody>
@@ -1435,7 +1435,7 @@
           <a:lstStyle/>
           <a:p>
             <a:r>
-              <a:t>Объяснить, почему жадность — вынужденная необходимость, а не лень разработчиков. Привести аналогию: жадный алгоритм как выбор лучшего хода в шахматах без просчёта всей партии.</a:t>
+              <a:t>Аналогия: жадный ход в шахматах без просчёта всей партии. Жадность — вынужденная необходимость, не «лень разработчиков».</a:t>
             </a:r>
           </a:p>
         </p:txBody>
@@ -1505,7 +1505,7 @@
           <a:lstStyle/>
           <a:p>
             <a:r>
-              <a:t>Доказать на примере: два разбиения с одинаковой Misclassification, но разной энтропией/Джини — объяснить, почему второе предпочтительнее.</a:t>
+              <a:t>На доске: два разбиения с одинаковой misclassification, но разной энтропией — почему второе предпочтительнее. Подчеркнуть: важна именно строгая вогнутость, а не «выпуклость».</a:t>
             </a:r>
           </a:p>
         </p:txBody>
@@ -1575,7 +1575,7 @@
           <a:lstStyle/>
           <a:p>
             <a:r>
-              <a:t>Рекомендация: начинать с Gini (быстрее, sklearn по умолчанию), при желании попробовать entropy. Не тратить время на тонкую настройку этого параметра.</a:t>
+              <a:t>Краткое резюме. Можно пропустить при нехватке времени — суть уже на предыдущем слайде.</a:t>
             </a:r>
           </a:p>
         </p:txBody>
@@ -1925,7 +1925,7 @@
           <a:lstStyle/>
           <a:p>
             <a:r>
-              <a:t>Показать графики обеих функций для бинарного случая (p от 0 до 1). Обратить внимание, что обе достигают максимума при p=0.5 и минимума при p=0 или 1.</a:t>
+              <a:t>Краткая историческая справка: от ID3 к промышленным библиотекам.</a:t>
             </a:r>
           </a:p>
         </p:txBody>
@@ -1995,7 +1995,7 @@
           <a:lstStyle/>
           <a:p>
             <a:r>
-              <a:t>Подчеркнуть контраст с логистической регрессией, где для K классов нужно обучать K классификаторов или использовать softmax.</a:t>
+              <a:t>Контраст: softmax — одна линейная модель, но другая архитектура; дерево — другой принцип разбиений.</a:t>
             </a:r>
           </a:p>
         </p:txBody>
@@ -5251,14 +5251,12 @@
           </a:bodyPr>
           <a:lstStyle/>
           <a:p>
-            <a:pPr>
-              <a:defRPr sz="3200" b="1">
+            <a:r>
+              <a:rPr lang="ru-RU" dirty="0" sz="3200" b="1">
                 <a:solidFill>
                   <a:srgbClr val="1A1A2E"/>
                 </a:solidFill>
-              </a:defRPr>
-            </a:pPr>
-            <a:r>
+              </a:rPr>
               <a:t>Предвзятость дерева: Bias towards high-cardinality features</a:t>
             </a:r>
           </a:p>
@@ -5273,7 +5271,7 @@
         <p:spPr>
           <a:xfrm>
             <a:off x="640080" y="1371600"/>
-            <a:ext cx="6858000" cy="5029200"/>
+            <a:ext cx="11247120" cy="5029200"/>
           </a:xfrm>
           <a:prstGeom prst="rect">
             <a:avLst/>
@@ -5290,9 +5288,13 @@
               <a:spcAft>
                 <a:spcPts val="800"/>
               </a:spcAft>
-              <a:defRPr sz="2000"/>
-            </a:pPr>
-            <a:r>
+            </a:pPr>
+            <a:r>
+              <a:rPr lang="ru-RU" dirty="0" sz="2000">
+                <a:solidFill>
+                  <a:srgbClr val="000000"/>
+                </a:solidFill>
+              </a:rPr>
               <a:t>Дерево склонно выбирать признаки с большим числом уникальных значений (ID, дата рождения, имя)</a:t>
             </a:r>
           </a:p>
@@ -5301,9 +5303,13 @@
               <a:spcAft>
                 <a:spcPts val="800"/>
               </a:spcAft>
-              <a:defRPr sz="2000"/>
-            </a:pPr>
-            <a:r>
+            </a:pPr>
+            <a:r>
+              <a:rPr lang="ru-RU" dirty="0" sz="2000">
+                <a:solidFill>
+                  <a:srgbClr val="000000"/>
+                </a:solidFill>
+              </a:rPr>
               <a:t>Такой признак может идеально разделить выборку — каждому объекту свой лист → переобучение</a:t>
             </a:r>
           </a:p>
@@ -5312,10 +5318,14 @@
               <a:spcAft>
                 <a:spcPts val="800"/>
               </a:spcAft>
-              <a:defRPr sz="2000"/>
-            </a:pPr>
-            <a:r>
-              <a:t>Решение: Gain Ratio (C4.5), ограничение глубины, min_samples_leaf</a:t>
+            </a:pPr>
+            <a:r>
+              <a:rPr lang="ru-RU" dirty="0" sz="2000">
+                <a:solidFill>
+                  <a:srgbClr val="000000"/>
+                </a:solidFill>
+              </a:rPr>
+              <a:t>Решение: Gain Ratio в C4.5 (нормирует gain на split information), ограничение глубины, min_samples_leaf</a:t>
             </a:r>
           </a:p>
           <a:p>
@@ -5323,9 +5333,13 @@
               <a:spcAft>
                 <a:spcPts val="800"/>
               </a:spcAft>
-              <a:defRPr sz="2000"/>
-            </a:pPr>
-            <a:r>
+            </a:pPr>
+            <a:r>
+              <a:rPr lang="ru-RU" dirty="0" sz="2000">
+                <a:solidFill>
+                  <a:srgbClr val="000000"/>
+                </a:solidFill>
+              </a:rPr>
               <a:t>Если есть ID или строка-идентификатор — УДАЛИТЕ перед обучением!</a:t>
             </a:r>
           </a:p>
@@ -5371,14 +5385,12 @@
           </a:bodyPr>
           <a:lstStyle/>
           <a:p>
-            <a:pPr>
-              <a:defRPr sz="3200" b="1">
+            <a:r>
+              <a:rPr lang="ru-RU" dirty="0" sz="3200" b="1">
                 <a:solidFill>
                   <a:srgbClr val="1A1A2E"/>
                 </a:solidFill>
-              </a:defRPr>
-            </a:pPr>
-            <a:r>
+              </a:rPr>
               <a:t>Оценка качества дерева</a:t>
             </a:r>
           </a:p>
@@ -5393,7 +5405,7 @@
         <p:spPr>
           <a:xfrm>
             <a:off x="640080" y="1371600"/>
-            <a:ext cx="6858000" cy="5029200"/>
+            <a:ext cx="11247120" cy="5029200"/>
           </a:xfrm>
           <a:prstGeom prst="rect">
             <a:avLst/>
@@ -5410,10 +5422,14 @@
               <a:spcAft>
                 <a:spcPts val="800"/>
               </a:spcAft>
-              <a:defRPr sz="2000"/>
-            </a:pPr>
-            <a:r>
-              <a:t>Accuracy недостаточна для несбалансированных данных</a:t>
+            </a:pPr>
+            <a:r>
+              <a:rPr lang="ru-RU" dirty="0" sz="2000">
+                <a:solidFill>
+                  <a:srgbClr val="000000"/>
+                </a:solidFill>
+              </a:rPr>
+              <a:t>Accuracy недостаточна для несбалансированных данных — смотрите precision, recall, F1 по классам</a:t>
             </a:r>
           </a:p>
           <a:p>
@@ -5421,9 +5437,13 @@
               <a:spcAft>
                 <a:spcPts val="800"/>
               </a:spcAft>
-              <a:defRPr sz="2000"/>
-            </a:pPr>
-            <a:r>
+            </a:pPr>
+            <a:r>
+              <a:rPr lang="ru-RU" dirty="0" sz="2000">
+                <a:solidFill>
+                  <a:srgbClr val="000000"/>
+                </a:solidFill>
+              </a:rPr>
               <a:t>Для многоклассовой классификации — микро/макро-усреднение метрик</a:t>
             </a:r>
           </a:p>
@@ -5432,10 +5452,14 @@
               <a:spcAft>
                 <a:spcPts val="800"/>
               </a:spcAft>
-              <a:defRPr sz="2000"/>
-            </a:pPr>
-            <a:r>
-              <a:t>DecisionTreeClassifier: class_weight=balanced — автоматически увеличивает вес минорных классов при подсчёте impurity</a:t>
+            </a:pPr>
+            <a:r>
+              <a:rPr lang="ru-RU" dirty="0" sz="2000">
+                <a:solidFill>
+                  <a:srgbClr val="000000"/>
+                </a:solidFill>
+              </a:rPr>
+              <a:t>DecisionTreeClassifier: class_weight='balanced' — увеличивает вес минорных классов при подсчёте impurity при построении дерева (не при predict)</a:t>
             </a:r>
           </a:p>
           <a:p>
@@ -5443,9 +5467,13 @@
               <a:spcAft>
                 <a:spcPts val="800"/>
               </a:spcAft>
-              <a:defRPr sz="2000"/>
-            </a:pPr>
-            <a:r>
+            </a:pPr>
+            <a:r>
+              <a:rPr lang="ru-RU" dirty="0" sz="2000">
+                <a:solidFill>
+                  <a:srgbClr val="000000"/>
+                </a:solidFill>
+              </a:rPr>
               <a:t>Это частично решает проблему дисбаланса</a:t>
             </a:r>
           </a:p>
@@ -5491,14 +5519,12 @@
           </a:bodyPr>
           <a:lstStyle/>
           <a:p>
-            <a:pPr>
-              <a:defRPr sz="3200" b="1">
+            <a:r>
+              <a:rPr lang="ru-RU" dirty="0" sz="3200" b="1">
                 <a:solidFill>
                   <a:srgbClr val="1A1A2E"/>
                 </a:solidFill>
-              </a:defRPr>
-            </a:pPr>
-            <a:r>
+              </a:rPr>
               <a:t>Переобучение и его решение</a:t>
             </a:r>
           </a:p>
@@ -5530,9 +5556,13 @@
               <a:spcAft>
                 <a:spcPts val="800"/>
               </a:spcAft>
-              <a:defRPr sz="2000"/>
-            </a:pPr>
-            <a:r>
+            </a:pPr>
+            <a:r>
+              <a:rPr lang="ru-RU" dirty="0" sz="2000">
+                <a:solidFill>
+                  <a:srgbClr val="000000"/>
+                </a:solidFill>
+              </a:rPr>
               <a:t>Переобучение: дерево идеально запоминает шум — accuracy 100% на train, низкая на test</a:t>
             </a:r>
           </a:p>
@@ -5541,9 +5571,13 @@
               <a:spcAft>
                 <a:spcPts val="800"/>
               </a:spcAft>
-              <a:defRPr sz="2000"/>
-            </a:pPr>
-            <a:r>
+            </a:pPr>
+            <a:r>
+              <a:rPr lang="ru-RU" dirty="0" sz="2000">
+                <a:solidFill>
+                  <a:srgbClr val="000000"/>
+                </a:solidFill>
+              </a:rPr>
               <a:t>Нестабильность (высокая дисперсия): малое изменение данных → полностью другое дерево</a:t>
             </a:r>
           </a:p>
@@ -5552,9 +5586,13 @@
               <a:spcAft>
                 <a:spcPts val="800"/>
               </a:spcAft>
-              <a:defRPr sz="2000"/>
-            </a:pPr>
-            <a:r>
+            </a:pPr>
+            <a:r>
+              <a:rPr lang="ru-RU" dirty="0" sz="2000">
+                <a:solidFill>
+                  <a:srgbClr val="000000"/>
+                </a:solidFill>
+              </a:rPr>
               <a:t>Одно дерево — плохая идея в продакшене из-за этой нестабильности</a:t>
             </a:r>
           </a:p>
@@ -5563,9 +5601,13 @@
               <a:spcAft>
                 <a:spcPts val="800"/>
               </a:spcAft>
-              <a:defRPr sz="2000"/>
-            </a:pPr>
-            <a:r>
+            </a:pPr>
+            <a:r>
+              <a:rPr lang="ru-RU" dirty="0" sz="2000">
+                <a:solidFill>
+                  <a:srgbClr val="000000"/>
+                </a:solidFill>
+              </a:rPr>
               <a:t>Оценка: обязательно train/test split! Ошибка на тех же данных — грубейшая ошибка!</a:t>
             </a:r>
           </a:p>
@@ -5574,9 +5616,13 @@
               <a:spcAft>
                 <a:spcPts val="800"/>
               </a:spcAft>
-              <a:defRPr sz="2000"/>
-            </a:pPr>
-            <a:r>
+            </a:pPr>
+            <a:r>
+              <a:rPr lang="ru-RU" dirty="0" sz="2000">
+                <a:solidFill>
+                  <a:srgbClr val="000000"/>
+                </a:solidFill>
+              </a:rPr>
               <a:t>Прунинг (ccp_alpha): вырастить глубокое дерево, затем обрезать ветки с малым приростом качества — эффективнее жёсткого max_depth</a:t>
             </a:r>
           </a:p>
@@ -5646,14 +5692,12 @@
           </a:bodyPr>
           <a:lstStyle/>
           <a:p>
-            <a:pPr>
-              <a:defRPr sz="3200" b="1">
+            <a:r>
+              <a:rPr lang="ru-RU" dirty="0" sz="3200" b="1">
                 <a:solidFill>
                   <a:srgbClr val="1A1A2E"/>
                 </a:solidFill>
-              </a:defRPr>
-            </a:pPr>
-            <a:r>
+              </a:rPr>
               <a:t>Дерево решений в sklearn</a:t>
             </a:r>
           </a:p>
@@ -5668,7 +5712,7 @@
         <p:spPr>
           <a:xfrm>
             <a:off x="640080" y="1371600"/>
-            <a:ext cx="6858000" cy="5029200"/>
+            <a:ext cx="11247120" cy="5029200"/>
           </a:xfrm>
           <a:prstGeom prst="rect">
             <a:avLst/>
@@ -5685,9 +5729,13 @@
               <a:spcAft>
                 <a:spcPts val="800"/>
               </a:spcAft>
-              <a:defRPr sz="2000"/>
-            </a:pPr>
-            <a:r>
+            </a:pPr>
+            <a:r>
+              <a:rPr lang="ru-RU" dirty="0" sz="2000">
+                <a:solidFill>
+                  <a:srgbClr val="000000"/>
+                </a:solidFill>
+              </a:rPr>
               <a:t>clf = DecisionTreeClassifier(max_depth=3, ccp_alpha=0.01, random_state=42)</a:t>
             </a:r>
           </a:p>
@@ -5696,9 +5744,13 @@
               <a:spcAft>
                 <a:spcPts val="800"/>
               </a:spcAft>
-              <a:defRPr sz="2000"/>
-            </a:pPr>
-            <a:r>
+            </a:pPr>
+            <a:r>
+              <a:rPr lang="ru-RU" dirty="0" sz="2000">
+                <a:solidFill>
+                  <a:srgbClr val="000000"/>
+                </a:solidFill>
+              </a:rPr>
               <a:t>clf.fit(X, y)</a:t>
             </a:r>
           </a:p>
@@ -5707,9 +5759,13 @@
               <a:spcAft>
                 <a:spcPts val="800"/>
               </a:spcAft>
-              <a:defRPr sz="2000"/>
-            </a:pPr>
-            <a:r>
+            </a:pPr>
+            <a:r>
+              <a:rPr lang="ru-RU" dirty="0" sz="2000">
+                <a:solidFill>
+                  <a:srgbClr val="000000"/>
+                </a:solidFill>
+              </a:rPr>
               <a:t>Важные параметры: max_depth, min_samples_leaf, ccp_alpha, criterion (gini/entropy)</a:t>
             </a:r>
           </a:p>
@@ -5718,9 +5774,13 @@
               <a:spcAft>
                 <a:spcPts val="800"/>
               </a:spcAft>
-              <a:defRPr sz="2000"/>
-            </a:pPr>
-            <a:r>
+            </a:pPr>
+            <a:r>
+              <a:rPr lang="ru-RU" dirty="0" sz="2000">
+                <a:solidFill>
+                  <a:srgbClr val="000000"/>
+                </a:solidFill>
+              </a:rPr>
               <a:t>Для воспроизводимости: random_state фиксирует случайность при равной информативности разбиений</a:t>
             </a:r>
           </a:p>
@@ -5766,14 +5826,12 @@
           </a:bodyPr>
           <a:lstStyle/>
           <a:p>
-            <a:pPr>
-              <a:defRPr sz="3200" b="1">
+            <a:r>
+              <a:rPr lang="ru-RU" dirty="0" sz="3200" b="1">
                 <a:solidFill>
                   <a:srgbClr val="1A1A2E"/>
                 </a:solidFill>
-              </a:defRPr>
-            </a:pPr>
-            <a:r>
+              </a:rPr>
               <a:t>Интерпретируемость и важность признаков</a:t>
             </a:r>
           </a:p>
@@ -5805,9 +5863,13 @@
               <a:spcAft>
                 <a:spcPts val="800"/>
               </a:spcAft>
-              <a:defRPr sz="2000"/>
-            </a:pPr>
-            <a:r>
+            </a:pPr>
+            <a:r>
+              <a:rPr lang="ru-RU" dirty="0" sz="2000">
+                <a:solidFill>
+                  <a:srgbClr val="000000"/>
+                </a:solidFill>
+              </a:rPr>
               <a:t>Важность признака: суммарное уменьшение impurity во всех узлах, где он используется, взвешенное на число объектов</a:t>
             </a:r>
           </a:p>
@@ -5816,9 +5878,13 @@
               <a:spcAft>
                 <a:spcPts val="800"/>
               </a:spcAft>
-              <a:defRPr sz="2000"/>
-            </a:pPr>
-            <a:r>
+            </a:pPr>
+            <a:r>
+              <a:rPr lang="ru-RU" dirty="0" sz="2000">
+                <a:solidFill>
+                  <a:srgbClr val="000000"/>
+                </a:solidFill>
+              </a:rPr>
               <a:t>Можно отсортировать признаки по важности — понять, что реально влияет</a:t>
             </a:r>
           </a:p>
@@ -5827,9 +5893,13 @@
               <a:spcAft>
                 <a:spcPts val="800"/>
               </a:spcAft>
-              <a:defRPr sz="2000"/>
-            </a:pPr>
-            <a:r>
+            </a:pPr>
+            <a:r>
+              <a:rPr lang="ru-RU" dirty="0" sz="2000">
+                <a:solidFill>
+                  <a:srgbClr val="000000"/>
+                </a:solidFill>
+              </a:rPr>
               <a:t>Важно помнить о bias: модель может выучить несправедливые закономерности (пол, национальность) — дерево их воспроизведёт</a:t>
             </a:r>
           </a:p>
@@ -5899,14 +5969,12 @@
           </a:bodyPr>
           <a:lstStyle/>
           <a:p>
-            <a:pPr>
-              <a:defRPr sz="3200" b="1">
+            <a:r>
+              <a:rPr lang="ru-RU" dirty="0" sz="3200" b="1">
                 <a:solidFill>
                   <a:srgbClr val="1A1A2E"/>
                 </a:solidFill>
-              </a:defRPr>
-            </a:pPr>
-            <a:r>
+              </a:rPr>
               <a:t>Дерево решений для регрессии</a:t>
             </a:r>
           </a:p>
@@ -5921,7 +5989,7 @@
         <p:spPr>
           <a:xfrm>
             <a:off x="640080" y="1371600"/>
-            <a:ext cx="6858000" cy="5029200"/>
+            <a:ext cx="11247120" cy="5029200"/>
           </a:xfrm>
           <a:prstGeom prst="rect">
             <a:avLst/>
@@ -5938,9 +6006,13 @@
               <a:spcAft>
                 <a:spcPts val="800"/>
               </a:spcAft>
-              <a:defRPr sz="2000"/>
-            </a:pPr>
-            <a:r>
+            </a:pPr>
+            <a:r>
+              <a:rPr lang="ru-RU" dirty="0" sz="2000">
+                <a:solidFill>
+                  <a:srgbClr val="000000"/>
+                </a:solidFill>
+              </a:rPr>
               <a:t>Критерий разбиения — MSE (средний квадрат ошибки)</a:t>
             </a:r>
           </a:p>
@@ -5949,9 +6021,13 @@
               <a:spcAft>
                 <a:spcPts val="800"/>
               </a:spcAft>
-              <a:defRPr sz="2000"/>
-            </a:pPr>
-            <a:r>
+            </a:pPr>
+            <a:r>
+              <a:rPr lang="ru-RU" dirty="0" sz="2000">
+                <a:solidFill>
+                  <a:srgbClr val="000000"/>
+                </a:solidFill>
+              </a:rPr>
               <a:t>Значение в листе — среднее арифметическое целевой переменной</a:t>
             </a:r>
           </a:p>
@@ -5960,9 +6036,13 @@
               <a:spcAft>
                 <a:spcPts val="800"/>
               </a:spcAft>
-              <a:defRPr sz="2000"/>
-            </a:pPr>
-            <a:r>
+            </a:pPr>
+            <a:r>
+              <a:rPr lang="ru-RU" dirty="0" sz="2000">
+                <a:solidFill>
+                  <a:srgbClr val="000000"/>
+                </a:solidFill>
+              </a:rPr>
               <a:t>Отличие от классификации: не голосование, а среднее</a:t>
             </a:r>
           </a:p>
@@ -5971,10 +6051,14 @@
               <a:spcAft>
                 <a:spcPts val="800"/>
               </a:spcAft>
-              <a:defRPr sz="2000"/>
-            </a:pPr>
-            <a:r>
-              <a:t>Выбросы: дерево не чувствительно к выбросам в X, но чувствительно к выбросам в y — лучше чистить данные или использовать MAE</a:t>
+            </a:pPr>
+            <a:r>
+              <a:rPr lang="ru-RU" dirty="0" sz="2000">
+                <a:solidFill>
+                  <a:srgbClr val="000000"/>
+                </a:solidFill>
+              </a:rPr>
+              <a:t>Выбросы в y: чувствительны при MSE; в sklearn — DecisionTreeRegressor(criterion='absolute_error') или чистка данных</a:t>
             </a:r>
           </a:p>
         </p:txBody>
@@ -6019,14 +6103,12 @@
           </a:bodyPr>
           <a:lstStyle/>
           <a:p>
-            <a:pPr>
-              <a:defRPr sz="3200" b="1">
+            <a:r>
+              <a:rPr lang="ru-RU" dirty="0" sz="3200" b="1">
                 <a:solidFill>
                   <a:srgbClr val="1A1A2E"/>
                 </a:solidFill>
-              </a:defRPr>
-            </a:pPr>
-            <a:r>
+              </a:rPr>
               <a:t>Ансамбли деревьев — мостик к следующему занятию</a:t>
             </a:r>
           </a:p>
@@ -6041,7 +6123,7 @@
         <p:spPr>
           <a:xfrm>
             <a:off x="640080" y="1371600"/>
-            <a:ext cx="6858000" cy="5029200"/>
+            <a:ext cx="11247120" cy="5029200"/>
           </a:xfrm>
           <a:prstGeom prst="rect">
             <a:avLst/>
@@ -6058,9 +6140,13 @@
               <a:spcAft>
                 <a:spcPts val="800"/>
               </a:spcAft>
-              <a:defRPr sz="2000"/>
-            </a:pPr>
-            <a:r>
+            </a:pPr>
+            <a:r>
+              <a:rPr lang="ru-RU" dirty="0" sz="2000">
+                <a:solidFill>
+                  <a:srgbClr val="000000"/>
+                </a:solidFill>
+              </a:rPr>
               <a:t>Одно дерево — нестабильно и склонно к переобучению</a:t>
             </a:r>
           </a:p>
@@ -6069,9 +6155,13 @@
               <a:spcAft>
                 <a:spcPts val="800"/>
               </a:spcAft>
-              <a:defRPr sz="2000"/>
-            </a:pPr>
-            <a:r>
+            </a:pPr>
+            <a:r>
+              <a:rPr lang="ru-RU" dirty="0" sz="2000">
+                <a:solidFill>
+                  <a:srgbClr val="000000"/>
+                </a:solidFill>
+              </a:rPr>
               <a:t>Решение: строить много деревьев и усреднять их ответы</a:t>
             </a:r>
           </a:p>
@@ -6080,9 +6170,13 @@
               <a:spcAft>
                 <a:spcPts val="800"/>
               </a:spcAft>
-              <a:defRPr sz="2000"/>
-            </a:pPr>
-            <a:r>
+            </a:pPr>
+            <a:r>
+              <a:rPr lang="ru-RU" dirty="0" sz="2000">
+                <a:solidFill>
+                  <a:srgbClr val="000000"/>
+                </a:solidFill>
+              </a:rPr>
               <a:t>Random Forest: случайные подвыборки данных и признаков → независимые деревья → среднее</a:t>
             </a:r>
           </a:p>
@@ -6091,9 +6185,13 @@
               <a:spcAft>
                 <a:spcPts val="800"/>
               </a:spcAft>
-              <a:defRPr sz="2000"/>
-            </a:pPr>
-            <a:r>
+            </a:pPr>
+            <a:r>
+              <a:rPr lang="ru-RU" dirty="0" sz="2000">
+                <a:solidFill>
+                  <a:srgbClr val="000000"/>
+                </a:solidFill>
+              </a:rPr>
               <a:t>Gradient Boosting: деревья строятся последовательно, каждое исправляет ошибки предыдущего</a:t>
             </a:r>
           </a:p>
@@ -6102,9 +6200,13 @@
               <a:spcAft>
                 <a:spcPts val="800"/>
               </a:spcAft>
-              <a:defRPr sz="2000"/>
-            </a:pPr>
-            <a:r>
+            </a:pPr>
+            <a:r>
+              <a:rPr lang="ru-RU" dirty="0" sz="2000">
+                <a:solidFill>
+                  <a:srgbClr val="000000"/>
+                </a:solidFill>
+              </a:rPr>
               <a:t>Оба подхода используют жадные деревья как слабых учеников</a:t>
             </a:r>
           </a:p>
@@ -6150,14 +6252,12 @@
           </a:bodyPr>
           <a:lstStyle/>
           <a:p>
-            <a:pPr>
-              <a:defRPr sz="3200" b="1">
+            <a:r>
+              <a:rPr lang="ru-RU" dirty="0" sz="3200" b="1">
                 <a:solidFill>
                   <a:srgbClr val="1A1A2E"/>
                 </a:solidFill>
-              </a:defRPr>
-            </a:pPr>
-            <a:r>
+              </a:rPr>
               <a:t>Визуализация деревьев в sklearn</a:t>
             </a:r>
           </a:p>
@@ -6172,7 +6272,7 @@
         <p:spPr>
           <a:xfrm>
             <a:off x="640080" y="1371600"/>
-            <a:ext cx="6858000" cy="5029200"/>
+            <a:ext cx="11247120" cy="5029200"/>
           </a:xfrm>
           <a:prstGeom prst="rect">
             <a:avLst/>
@@ -6189,9 +6289,13 @@
               <a:spcAft>
                 <a:spcPts val="800"/>
               </a:spcAft>
-              <a:defRPr sz="2000"/>
-            </a:pPr>
-            <a:r>
+            </a:pPr>
+            <a:r>
+              <a:rPr lang="ru-RU" dirty="0" sz="2000">
+                <a:solidFill>
+                  <a:srgbClr val="000000"/>
+                </a:solidFill>
+              </a:rPr>
               <a:t>sklearn.tree.plot_tree(clf, filled=True) — графическое дерево с цветом классов</a:t>
             </a:r>
           </a:p>
@@ -6200,9 +6304,13 @@
               <a:spcAft>
                 <a:spcPts val="800"/>
               </a:spcAft>
-              <a:defRPr sz="2000"/>
-            </a:pPr>
-            <a:r>
+            </a:pPr>
+            <a:r>
+              <a:rPr lang="ru-RU" dirty="0" sz="2000">
+                <a:solidFill>
+                  <a:srgbClr val="000000"/>
+                </a:solidFill>
+              </a:rPr>
               <a:t>export_graphviz — экспорт для Graphviz (dot-формат)</a:t>
             </a:r>
           </a:p>
@@ -6211,9 +6319,13 @@
               <a:spcAft>
                 <a:spcPts val="800"/>
               </a:spcAft>
-              <a:defRPr sz="2000"/>
-            </a:pPr>
-            <a:r>
+            </a:pPr>
+            <a:r>
+              <a:rPr lang="ru-RU" dirty="0" sz="2000">
+                <a:solidFill>
+                  <a:srgbClr val="000000"/>
+                </a:solidFill>
+              </a:rPr>
               <a:t>export_text — текстовое представление: правила вида X[0] &lt;= 2.5 → class=1</a:t>
             </a:r>
           </a:p>
@@ -6259,14 +6371,12 @@
           </a:bodyPr>
           <a:lstStyle/>
           <a:p>
-            <a:pPr>
-              <a:defRPr sz="3200" b="1">
+            <a:r>
+              <a:rPr lang="ru-RU" dirty="0" sz="3200" b="1">
                 <a:solidFill>
                   <a:srgbClr val="1A1A2E"/>
                 </a:solidFill>
-              </a:defRPr>
-            </a:pPr>
-            <a:r>
+              </a:rPr>
               <a:t>Границы решения: оси-параллельные прямоугольники</a:t>
             </a:r>
           </a:p>
@@ -6298,9 +6408,13 @@
               <a:spcAft>
                 <a:spcPts val="800"/>
               </a:spcAft>
-              <a:defRPr sz="2000"/>
-            </a:pPr>
-            <a:r>
+            </a:pPr>
+            <a:r>
+              <a:rPr lang="ru-RU" dirty="0" sz="2000">
+                <a:solidFill>
+                  <a:srgbClr val="000000"/>
+                </a:solidFill>
+              </a:rPr>
               <a:t>Дерево делит пространство признаков на прямоугольники (оси-параллельные)</a:t>
             </a:r>
           </a:p>
@@ -6309,9 +6423,13 @@
               <a:spcAft>
                 <a:spcPts val="800"/>
               </a:spcAft>
-              <a:defRPr sz="2000"/>
-            </a:pPr>
-            <a:r>
+            </a:pPr>
+            <a:r>
+              <a:rPr lang="ru-RU" dirty="0" sz="2000">
+                <a:solidFill>
+                  <a:srgbClr val="000000"/>
+                </a:solidFill>
+              </a:rPr>
               <a:t>Проблема лестницы: дерево не может провести диагональные или круговые границы</a:t>
             </a:r>
           </a:p>
@@ -6320,9 +6438,13 @@
               <a:spcAft>
                 <a:spcPts val="800"/>
               </a:spcAft>
-              <a:defRPr sz="2000"/>
-            </a:pPr>
-            <a:r>
+            </a:pPr>
+            <a:r>
+              <a:rPr lang="ru-RU" dirty="0" sz="2000">
+                <a:solidFill>
+                  <a:srgbClr val="000000"/>
+                </a:solidFill>
+              </a:rPr>
               <a:t>Для регрессии — кусочно-постоянная аппроксимация (в каждом прямоугольнике — своя константа)</a:t>
             </a:r>
           </a:p>
@@ -6392,15 +6514,13 @@
           </a:bodyPr>
           <a:lstStyle/>
           <a:p>
-            <a:pPr>
-              <a:defRPr sz="3200" b="1">
+            <a:r>
+              <a:rPr lang="ru-RU" dirty="0" sz="3200" b="1">
                 <a:solidFill>
                   <a:srgbClr val="1A1A2E"/>
                 </a:solidFill>
-              </a:defRPr>
-            </a:pPr>
-            <a:r>
-              <a:t>Частые вопросы школьников</a:t>
+              </a:rPr>
+              <a:t>Зачем дерево решений сегодня?</a:t>
             </a:r>
           </a:p>
         </p:txBody>
@@ -6414,7 +6534,7 @@
         <p:spPr>
           <a:xfrm>
             <a:off x="640080" y="1371600"/>
-            <a:ext cx="6858000" cy="5029200"/>
+            <a:ext cx="11247120" cy="5029200"/>
           </a:xfrm>
           <a:prstGeom prst="rect">
             <a:avLst/>
@@ -6431,10 +6551,14 @@
               <a:spcAft>
                 <a:spcPts val="800"/>
               </a:spcAft>
-              <a:defRPr sz="2000"/>
-            </a:pPr>
-            <a:r>
-              <a:t>Q: Дерево всегда находит лучшее разбиение? A: Жадно — локально лучшее, не глобально (NP-трудная задача)</a:t>
+            </a:pPr>
+            <a:r>
+              <a:rPr lang="ru-RU" dirty="0" sz="2000">
+                <a:solidFill>
+                  <a:srgbClr val="000000"/>
+                </a:solidFill>
+              </a:rPr>
+              <a:t>Скорость и память: работает на слабых устройствах (микроконтроллеры, старые ноутбуки)</a:t>
             </a:r>
           </a:p>
           <a:p>
@@ -6442,10 +6566,14 @@
               <a:spcAft>
                 <a:spcPts val="800"/>
               </a:spcAft>
-              <a:defRPr sz="2000"/>
-            </a:pPr>
-            <a:r>
-              <a:t>Q: Почему вопросы только x &lt; a? A: Иначе перебор комбинаций растёт экспоненциально</a:t>
+            </a:pPr>
+            <a:r>
+              <a:rPr lang="ru-RU" dirty="0" sz="2000">
+                <a:solidFill>
+                  <a:srgbClr val="000000"/>
+                </a:solidFill>
+              </a:rPr>
+              <a:t>Интерпретируемость: решение можно объяснить пошагово (в отличие от нейросети)</a:t>
             </a:r>
           </a:p>
           <a:p>
@@ -6453,10 +6581,14 @@
               <a:spcAft>
                 <a:spcPts val="800"/>
               </a:spcAft>
-              <a:defRPr sz="2000"/>
-            </a:pPr>
-            <a:r>
-              <a:t>Q: Что делать с пропусками? A: Заполнять средним/медианой (sklearn не умеет сам)</a:t>
+            </a:pPr>
+            <a:r>
+              <a:rPr lang="ru-RU" dirty="0" sz="2000">
+                <a:solidFill>
+                  <a:srgbClr val="000000"/>
+                </a:solidFill>
+              </a:rPr>
+              <a:t>Чем лучше логистической регрессии? — ловит нелинейности без ручного создания признаков</a:t>
             </a:r>
           </a:p>
           <a:p>
@@ -6464,10 +6596,14 @@
               <a:spcAft>
                 <a:spcPts val="800"/>
               </a:spcAft>
-              <a:defRPr sz="2000"/>
-            </a:pPr>
-            <a:r>
-              <a:t>Q: Почему дерево может быть хуже случайного леса? A: Высокая дисперсия — ответ сильно меняется от малых изменений данных</a:t>
+            </a:pPr>
+            <a:r>
+              <a:rPr lang="ru-RU" dirty="0" sz="2000">
+                <a:solidFill>
+                  <a:srgbClr val="000000"/>
+                </a:solidFill>
+              </a:rPr>
+              <a:t>Чем лучше KNN? — не хранит обучающую выборку; предсказание за O(глубина дерева)</a:t>
             </a:r>
           </a:p>
         </p:txBody>
@@ -6512,14 +6648,12 @@
           </a:bodyPr>
           <a:lstStyle/>
           <a:p>
-            <a:pPr>
-              <a:defRPr sz="3200" b="1">
+            <a:r>
+              <a:rPr lang="ru-RU" dirty="0" sz="3200" b="1">
                 <a:solidFill>
                   <a:srgbClr val="1A1A2E"/>
                 </a:solidFill>
-              </a:defRPr>
-            </a:pPr>
-            <a:r>
+              </a:rPr>
               <a:t>Дерево решений: от игры к математике</a:t>
             </a:r>
           </a:p>
@@ -6551,9 +6685,13 @@
               <a:spcAft>
                 <a:spcPts val="800"/>
               </a:spcAft>
-              <a:defRPr sz="2000"/>
-            </a:pPr>
-            <a:r>
+            </a:pPr>
+            <a:r>
+              <a:rPr lang="ru-RU" dirty="0" sz="2000">
+                <a:solidFill>
+                  <a:srgbClr val="000000"/>
+                </a:solidFill>
+              </a:rPr>
               <a:t>Игра 'Угадай число': последовательность вопросов → структура дерева</a:t>
             </a:r>
           </a:p>
@@ -6562,9 +6700,13 @@
               <a:spcAft>
                 <a:spcPts val="800"/>
               </a:spcAft>
-              <a:defRPr sz="2000"/>
-            </a:pPr>
-            <a:r>
+            </a:pPr>
+            <a:r>
+              <a:rPr lang="ru-RU" dirty="0" sz="2000">
+                <a:solidFill>
+                  <a:srgbClr val="000000"/>
+                </a:solidFill>
+              </a:rPr>
               <a:t>Каждый вопрос разделяет множество вариантов на подмножества</a:t>
             </a:r>
           </a:p>
@@ -6573,9 +6715,13 @@
               <a:spcAft>
                 <a:spcPts val="800"/>
               </a:spcAft>
-              <a:defRPr sz="2000"/>
-            </a:pPr>
-            <a:r>
+            </a:pPr>
+            <a:r>
+              <a:rPr lang="ru-RU" dirty="0" sz="2000">
+                <a:solidFill>
+                  <a:srgbClr val="000000"/>
+                </a:solidFill>
+              </a:rPr>
               <a:t>Дерево: связный ациклический граф с корнем, внутренними узлами (вопросы) и листьями (ответы)</a:t>
             </a:r>
           </a:p>
@@ -6584,9 +6730,13 @@
               <a:spcAft>
                 <a:spcPts val="800"/>
               </a:spcAft>
-              <a:defRPr sz="2000"/>
-            </a:pPr>
-            <a:r>
+            </a:pPr>
+            <a:r>
+              <a:rPr lang="ru-RU" dirty="0" sz="2000">
+                <a:solidFill>
+                  <a:srgbClr val="000000"/>
+                </a:solidFill>
+              </a:rPr>
               <a:t>Глубина дерева — максимальное число вопросов до ответа</a:t>
             </a:r>
           </a:p>
@@ -6656,15 +6806,13 @@
           </a:bodyPr>
           <a:lstStyle/>
           <a:p>
-            <a:pPr>
-              <a:defRPr sz="3200" b="1">
+            <a:r>
+              <a:rPr lang="ru-RU" dirty="0" sz="3200" b="1">
                 <a:solidFill>
                   <a:srgbClr val="1A1A2E"/>
                 </a:solidFill>
-              </a:defRPr>
-            </a:pPr>
-            <a:r>
-              <a:t>Зачем нужно дерево в эпоху нейросетей?</a:t>
+              </a:rPr>
+              <a:t>Какая предобработка нужна деревьям?</a:t>
             </a:r>
           </a:p>
         </p:txBody>
@@ -6678,7 +6826,7 @@
         <p:spPr>
           <a:xfrm>
             <a:off x="640080" y="1371600"/>
-            <a:ext cx="6858000" cy="5029200"/>
+            <a:ext cx="11247120" cy="5029200"/>
           </a:xfrm>
           <a:prstGeom prst="rect">
             <a:avLst/>
@@ -6695,10 +6843,14 @@
               <a:spcAft>
                 <a:spcPts val="800"/>
               </a:spcAft>
-              <a:defRPr sz="2000"/>
-            </a:pPr>
-            <a:r>
-              <a:t>Скорость и память: работает на слабых устройствах (микроконтроллеры, старые ноутбуки)</a:t>
+            </a:pPr>
+            <a:r>
+              <a:rPr lang="ru-RU" dirty="0" sz="2000">
+                <a:solidFill>
+                  <a:srgbClr val="000000"/>
+                </a:solidFill>
+              </a:rPr>
+              <a:t>Нормализация не нужна — масштабирование не меняет порядок значений, структура дерева не изменится</a:t>
             </a:r>
           </a:p>
           <a:p>
@@ -6706,10 +6858,14 @@
               <a:spcAft>
                 <a:spcPts val="800"/>
               </a:spcAft>
-              <a:defRPr sz="2000"/>
-            </a:pPr>
-            <a:r>
-              <a:t>Интерпретируемость: решение можно объяснить пошагово (в отличие от нейросети)</a:t>
+            </a:pPr>
+            <a:r>
+              <a:rPr lang="ru-RU" dirty="0" sz="2000">
+                <a:solidFill>
+                  <a:srgbClr val="000000"/>
+                </a:solidFill>
+              </a:rPr>
+              <a:t>Пропуски нужно заполнять (impute); sklearn DecisionTree не работает с NaN (в отличие от XGBoost)</a:t>
             </a:r>
           </a:p>
           <a:p>
@@ -6717,10 +6873,14 @@
               <a:spcAft>
                 <a:spcPts val="800"/>
               </a:spcAft>
-              <a:defRPr sz="2000"/>
-            </a:pPr>
-            <a:r>
-              <a:t>Чем лучше логистической регрессии? — ловит нелинейности без ручного создания признаков</a:t>
+            </a:pPr>
+            <a:r>
+              <a:rPr lang="ru-RU" dirty="0" sz="2000">
+                <a:solidFill>
+                  <a:srgbClr val="000000"/>
+                </a:solidFill>
+              </a:rPr>
+              <a:t>Категориальные признаки: sklearn не принимает строки — нужно кодирование</a:t>
             </a:r>
           </a:p>
           <a:p>
@@ -6728,10 +6888,44 @@
               <a:spcAft>
                 <a:spcPts val="800"/>
               </a:spcAft>
-              <a:defRPr sz="2000"/>
-            </a:pPr>
-            <a:r>
-              <a:t>Чем лучше KNN? — не нужно хранить все данные; быстрое предсказание (O(log n))</a:t>
+            </a:pPr>
+            <a:r>
+              <a:rPr lang="ru-RU" dirty="0" sz="2000">
+                <a:solidFill>
+                  <a:srgbClr val="000000"/>
+                </a:solidFill>
+              </a:rPr>
+              <a:t>Порядковые категории (младший, средний, старший): Label Encoding (0, 1, 2)</a:t>
+            </a:r>
+          </a:p>
+          <a:p>
+            <a:pPr>
+              <a:spcAft>
+                <a:spcPts val="800"/>
+              </a:spcAft>
+            </a:pPr>
+            <a:r>
+              <a:rPr lang="ru-RU" dirty="0" sz="2000">
+                <a:solidFill>
+                  <a:srgbClr val="000000"/>
+                </a:solidFill>
+              </a:rPr>
+              <a:t>Номинативные (цвет, город, пол): только One-Hot Encoding — иначе вопросы вида «цвет &lt; 2.5» бессмысленны</a:t>
+            </a:r>
+          </a:p>
+          <a:p>
+            <a:pPr>
+              <a:spcAft>
+                <a:spcPts val="800"/>
+              </a:spcAft>
+            </a:pPr>
+            <a:r>
+              <a:rPr lang="ru-RU" dirty="0" sz="2000">
+                <a:solidFill>
+                  <a:srgbClr val="000000"/>
+                </a:solidFill>
+              </a:rPr>
+              <a:t>One-Hot при 100+ категориях — разреженность и замедление; альтернатива — целевое кодирование</a:t>
             </a:r>
           </a:p>
         </p:txBody>
@@ -6776,14 +6970,12 @@
           </a:bodyPr>
           <a:lstStyle/>
           <a:p>
-            <a:pPr>
-              <a:defRPr sz="3200" b="1">
+            <a:r>
+              <a:rPr lang="ru-RU" dirty="0" sz="3200" b="1">
                 <a:solidFill>
                   <a:srgbClr val="1A1A2E"/>
                 </a:solidFill>
-              </a:defRPr>
-            </a:pPr>
-            <a:r>
+              </a:rPr>
               <a:t>Почему в узле мы выбираем только один признак и только вопросы вида «x &lt; a»?</a:t>
             </a:r>
           </a:p>
@@ -6798,7 +6990,7 @@
         <p:spPr>
           <a:xfrm>
             <a:off x="640080" y="1371600"/>
-            <a:ext cx="6858000" cy="5029200"/>
+            <a:ext cx="11247120" cy="5029200"/>
           </a:xfrm>
           <a:prstGeom prst="rect">
             <a:avLst/>
@@ -6815,9 +7007,13 @@
               <a:spcAft>
                 <a:spcPts val="800"/>
               </a:spcAft>
-              <a:defRPr sz="2000"/>
-            </a:pPr>
-            <a:r>
+            </a:pPr>
+            <a:r>
+              <a:rPr lang="ru-RU" dirty="0" sz="2000">
+                <a:solidFill>
+                  <a:srgbClr val="000000"/>
+                </a:solidFill>
+              </a:rPr>
               <a:t>Перебор комбинаций признаков в каждом узле вырос бы экспоненциально</a:t>
             </a:r>
           </a:p>
@@ -6826,9 +7022,13 @@
               <a:spcAft>
                 <a:spcPts val="800"/>
               </a:spcAft>
-              <a:defRPr sz="2000"/>
-            </a:pPr>
-            <a:r>
+            </a:pPr>
+            <a:r>
+              <a:rPr lang="ru-RU" dirty="0" sz="2000">
+                <a:solidFill>
+                  <a:srgbClr val="000000"/>
+                </a:solidFill>
+              </a:rPr>
               <a:t>Интерпретируемость: простые, понятные правила (если x &lt; a, то …)</a:t>
             </a:r>
           </a:p>
@@ -6837,10 +7037,14 @@
               <a:spcAft>
                 <a:spcPts val="800"/>
               </a:spcAft>
-              <a:defRPr sz="2000"/>
-            </a:pPr>
-            <a:r>
-              <a:t>Один признак → прямоугольные области, которыми можно приблизить любую функцию (теорема о приближении)</a:t>
+            </a:pPr>
+            <a:r>
+              <a:rPr lang="ru-RU" dirty="0" sz="2000">
+                <a:solidFill>
+                  <a:srgbClr val="000000"/>
+                </a:solidFill>
+              </a:rPr>
+              <a:t>Один признак → оси-параллельные прямоугольные области; при достаточной глубине ими можно аппроксимировать сложные границы</a:t>
             </a:r>
           </a:p>
           <a:p>
@@ -6848,9 +7052,13 @@
               <a:spcAft>
                 <a:spcPts val="800"/>
               </a:spcAft>
-              <a:defRPr sz="2000"/>
-            </a:pPr>
-            <a:r>
+            </a:pPr>
+            <a:r>
+              <a:rPr lang="ru-RU" dirty="0" sz="2000">
+                <a:solidFill>
+                  <a:srgbClr val="000000"/>
+                </a:solidFill>
+              </a:rPr>
               <a:t>Сложные комбинации в одном узле резко повышают риск переобучения</a:t>
             </a:r>
           </a:p>
@@ -6859,9 +7067,13 @@
               <a:spcAft>
                 <a:spcPts val="800"/>
               </a:spcAft>
-              <a:defRPr sz="2000"/>
-            </a:pPr>
-            <a:r>
+            </a:pPr>
+            <a:r>
+              <a:rPr lang="ru-RU" dirty="0" sz="2000">
+                <a:solidFill>
+                  <a:srgbClr val="000000"/>
+                </a:solidFill>
+              </a:rPr>
               <a:t>Исключение: ID3/C4.5 для категориальных признаков допускают небинарные узлы, но каждый узел всё равно соответствует одному признаку</a:t>
             </a:r>
           </a:p>
@@ -6907,14 +7119,12 @@
           </a:bodyPr>
           <a:lstStyle/>
           <a:p>
-            <a:pPr>
-              <a:defRPr sz="3200" b="1">
+            <a:r>
+              <a:rPr lang="ru-RU" dirty="0" sz="3200" b="1">
                 <a:solidFill>
                   <a:srgbClr val="1A1A2E"/>
                 </a:solidFill>
-              </a:defRPr>
-            </a:pPr>
-            <a:r>
+              </a:rPr>
               <a:t>Почему мы строим дерево жадно?</a:t>
             </a:r>
           </a:p>
@@ -6929,7 +7139,7 @@
         <p:spPr>
           <a:xfrm>
             <a:off x="640080" y="1371600"/>
-            <a:ext cx="6858000" cy="5029200"/>
+            <a:ext cx="11247120" cy="5029200"/>
           </a:xfrm>
           <a:prstGeom prst="rect">
             <a:avLst/>
@@ -6946,10 +7156,14 @@
               <a:spcAft>
                 <a:spcPts val="800"/>
               </a:spcAft>
-              <a:defRPr sz="2000"/>
-            </a:pPr>
-            <a:r>
-              <a:t>Краткий ответ: это компромисс между качеством, временем и переобучением</a:t>
+            </a:pPr>
+            <a:r>
+              <a:rPr lang="ru-RU" dirty="0" sz="2000">
+                <a:solidFill>
+                  <a:srgbClr val="000000"/>
+                </a:solidFill>
+              </a:rPr>
+              <a:t>Краткий ответ: компромисс между качеством, временем и переобучением</a:t>
             </a:r>
           </a:p>
           <a:p>
@@ -6957,9 +7171,13 @@
               <a:spcAft>
                 <a:spcPts val="800"/>
               </a:spcAft>
-              <a:defRPr sz="2000"/>
-            </a:pPr>
-            <a:r>
+            </a:pPr>
+            <a:r>
+              <a:rPr lang="ru-RU" dirty="0" sz="2000">
+                <a:solidFill>
+                  <a:srgbClr val="000000"/>
+                </a:solidFill>
+              </a:rPr>
               <a:t>Полный перебор оптимального дерева — NP-трудная задача (доказано)</a:t>
             </a:r>
           </a:p>
@@ -6968,10 +7186,80 @@
               <a:spcAft>
                 <a:spcPts val="800"/>
               </a:spcAft>
-              <a:defRPr sz="2000"/>
-            </a:pPr>
-            <a:r>
-              <a:t>Жадный алгоритм работает за разумное время: O(n_features · n_samples · log n_samples) на узел</a:t>
+            </a:pPr>
+            <a:r>
+              <a:rPr lang="ru-RU" dirty="0" sz="2000">
+                <a:solidFill>
+                  <a:srgbClr val="000000"/>
+                </a:solidFill>
+              </a:rPr>
+              <a:t xml:space="preserve">Жадный алгоритм: </a:t>
+            </a:r>
+            <ns0:m xmlns:ns0="http://schemas.microsoft.com/office/drawing/2010/main">
+              <m:oMath xmlns:m="http://schemas.openxmlformats.org/officeDocument/2006/math">
+                <m:r>
+                  <m:t>O(</m:t>
+                </m:r>
+                <m:sSub>
+                  <m:e>
+                    <m:r>
+                      <m:t>n</m:t>
+                    </m:r>
+                  </m:e>
+                  <m:sub>
+                    <m:r>
+                      <m:t>features</m:t>
+                    </m:r>
+                  </m:sub>
+                </m:sSub>
+                <m:r>
+                  <m:t>·</m:t>
+                </m:r>
+                <m:sSub>
+                  <m:e>
+                    <m:r>
+                      <m:t>n</m:t>
+                    </m:r>
+                  </m:e>
+                  <m:sub>
+                    <m:r>
+                      <m:t>samples</m:t>
+                    </m:r>
+                  </m:sub>
+                </m:sSub>
+                <m:r>
+                  <m:t>·</m:t>
+                </m:r>
+                <m:r>
+                  <m:rPr>
+                    <m:sty m:val="p"/>
+                  </m:rPr>
+                  <m:t>log</m:t>
+                </m:r>
+                <m:sSub>
+                  <m:e>
+                    <m:r>
+                      <m:t>n</m:t>
+                    </m:r>
+                  </m:e>
+                  <m:sub>
+                    <m:r>
+                      <m:t>samples</m:t>
+                    </m:r>
+                  </m:sub>
+                </m:sSub>
+                <m:r>
+                  <m:t>)</m:t>
+                </m:r>
+              </m:oMath>
+            </ns0:m>
+            <a:r>
+              <a:rPr lang="ru-RU" dirty="0" sz="2000">
+                <a:solidFill>
+                  <a:srgbClr val="000000"/>
+                </a:solidFill>
+              </a:rPr>
+              <a:t xml:space="preserve"> на узел (в sklearn — сортировка по признаку)</a:t>
             </a:r>
           </a:p>
           <a:p>
@@ -6979,10 +7267,14 @@
               <a:spcAft>
                 <a:spcPts val="800"/>
               </a:spcAft>
-              <a:defRPr sz="2000"/>
-            </a:pPr>
-            <a:r>
-              <a:t>Жадность даёт возможность контролировать сложность (остановка, прунинг)</a:t>
+            </a:pPr>
+            <a:r>
+              <a:rPr lang="ru-RU" dirty="0" sz="2000">
+                <a:solidFill>
+                  <a:srgbClr val="000000"/>
+                </a:solidFill>
+              </a:rPr>
+              <a:t>Жадность даёт интерпретируемые результаты и контроль сложности (остановка, прунинг)</a:t>
             </a:r>
           </a:p>
           <a:p>
@@ -6990,10 +7282,14 @@
               <a:spcAft>
                 <a:spcPts val="800"/>
               </a:spcAft>
-              <a:defRPr sz="2000"/>
-            </a:pPr>
-            <a:r>
-              <a:t>Недостатки жадности становятся достоинствами в ансамблях (Random Forest, Gradient Boosting)</a:t>
+            </a:pPr>
+            <a:r>
+              <a:rPr lang="ru-RU" dirty="0" sz="2000">
+                <a:solidFill>
+                  <a:srgbClr val="000000"/>
+                </a:solidFill>
+              </a:rPr>
+              <a:t>Недостатки жадности — плюс в ансамблях: много слабых деревьев лучше одного сильного</a:t>
             </a:r>
           </a:p>
         </p:txBody>
@@ -7038,14 +7334,12 @@
           </a:bodyPr>
           <a:lstStyle/>
           <a:p>
-            <a:pPr>
-              <a:defRPr sz="3200" b="1">
+            <a:r>
+              <a:rPr lang="ru-RU" dirty="0" sz="3200" b="1">
                 <a:solidFill>
                   <a:srgbClr val="1A1A2E"/>
                 </a:solidFill>
-              </a:defRPr>
-            </a:pPr>
-            <a:r>
+              </a:rPr>
               <a:t>Почему нам важна строгая вогнутость, если мы не используем градиенты?</a:t>
             </a:r>
           </a:p>
@@ -7060,7 +7354,7 @@
         <p:spPr>
           <a:xfrm>
             <a:off x="640080" y="1371600"/>
-            <a:ext cx="6858000" cy="5029200"/>
+            <a:ext cx="11247120" cy="5029200"/>
           </a:xfrm>
           <a:prstGeom prst="rect">
             <a:avLst/>
@@ -7077,9 +7371,13 @@
               <a:spcAft>
                 <a:spcPts val="800"/>
               </a:spcAft>
-              <a:defRPr sz="2000"/>
-            </a:pPr>
-            <a:r>
+            </a:pPr>
+            <a:r>
+              <a:rPr lang="ru-RU" dirty="0" sz="2000">
+                <a:solidFill>
+                  <a:srgbClr val="000000"/>
+                </a:solidFill>
+              </a:rPr>
               <a:t>Гладкость не является причиной (она не обязательна для выбора разбиения)</a:t>
             </a:r>
           </a:p>
@@ -7088,10 +7386,14 @@
               <a:spcAft>
                 <a:spcPts val="800"/>
               </a:spcAft>
-              <a:defRPr sz="2000"/>
-            </a:pPr>
-            <a:r>
-              <a:t>Проблема Misclassification impurity: она кусочно-линейна, а не строго вогнута</a:t>
+            </a:pPr>
+            <a:r>
+              <a:rPr lang="ru-RU" dirty="0" sz="2000">
+                <a:solidFill>
+                  <a:srgbClr val="000000"/>
+                </a:solidFill>
+              </a:rPr>
+              <a:t>Misclassification impurity кусочно-линейна и не является строго вогнутой — в этом суть проблемы</a:t>
             </a:r>
           </a:p>
           <a:p>
@@ -7099,10 +7401,29 @@
               <a:spcAft>
                 <a:spcPts val="800"/>
               </a:spcAft>
-              <a:defRPr sz="2000"/>
-            </a:pPr>
-            <a:r>
-              <a:t>При K ≥ 3 может давать одинаковые значения для разных распределений (например, (0.6, 0.2, 0.2) и (0.6, 0.1, 0.3) → I = 0.4)</a:t>
+            </a:pPr>
+            <a:r>
+              <a:rPr lang="ru-RU" dirty="0" sz="2000">
+                <a:solidFill>
+                  <a:srgbClr val="000000"/>
+                </a:solidFill>
+              </a:rPr>
+              <a:t xml:space="preserve">При </a:t>
+            </a:r>
+            <ns0:m xmlns:ns0="http://schemas.microsoft.com/office/drawing/2010/main">
+              <m:oMath xmlns:m="http://schemas.openxmlformats.org/officeDocument/2006/math">
+                <m:r>
+                  <m:t>K≥3</m:t>
+                </m:r>
+              </m:oMath>
+            </ns0:m>
+            <a:r>
+              <a:rPr lang="ru-RU" dirty="0" sz="2000">
+                <a:solidFill>
+                  <a:srgbClr val="000000"/>
+                </a:solidFill>
+              </a:rPr>
+              <a:t xml:space="preserve"> misclassification может совпадать на разных распределениях классов</a:t>
             </a:r>
           </a:p>
           <a:p>
@@ -7110,10 +7431,105 @@
               <a:spcAft>
                 <a:spcPts val="800"/>
               </a:spcAft>
-              <a:defRPr sz="2000"/>
-            </a:pPr>
-            <a:r>
-              <a:t>Она смотрит только на самый большой класс, игнорируя распределение остальных</a:t>
+            </a:pPr>
+            <a:r>
+              <a:rPr lang="ru-RU" dirty="0" sz="2000">
+                <a:solidFill>
+                  <a:srgbClr val="000000"/>
+                </a:solidFill>
+              </a:rPr>
+              <a:t xml:space="preserve">Пример: </a:t>
+            </a:r>
+            <ns0:m xmlns:ns0="http://schemas.microsoft.com/office/drawing/2010/main">
+              <m:oMath xmlns:m="http://schemas.openxmlformats.org/officeDocument/2006/math">
+                <m:d>
+                  <m:dPr>
+                    <m:sepChr m:val=","/>
+                  </m:dPr>
+                  <m:e>
+                    <m:r>
+                      <m:t>0.6</m:t>
+                    </m:r>
+                  </m:e>
+                  <m:e>
+                    <m:r>
+                      <m:t>0.2</m:t>
+                    </m:r>
+                  </m:e>
+                  <m:e>
+                    <m:r>
+                      <m:t>0.2</m:t>
+                    </m:r>
+                  </m:e>
+                </m:d>
+              </m:oMath>
+            </ns0:m>
+            <a:r>
+              <a:rPr lang="ru-RU" dirty="0" sz="2000">
+                <a:solidFill>
+                  <a:srgbClr val="000000"/>
+                </a:solidFill>
+              </a:rPr>
+              <a:t xml:space="preserve"> и </a:t>
+            </a:r>
+            <ns0:m xmlns:ns0="http://schemas.microsoft.com/office/drawing/2010/main">
+              <m:oMath xmlns:m="http://schemas.openxmlformats.org/officeDocument/2006/math">
+                <m:d>
+                  <m:dPr>
+                    <m:sepChr m:val=","/>
+                  </m:dPr>
+                  <m:e>
+                    <m:r>
+                      <m:t>0.6</m:t>
+                    </m:r>
+                  </m:e>
+                  <m:e>
+                    <m:r>
+                      <m:t>0.1</m:t>
+                    </m:r>
+                  </m:e>
+                  <m:e>
+                    <m:r>
+                      <m:t>0.3</m:t>
+                    </m:r>
+                  </m:e>
+                </m:d>
+              </m:oMath>
+            </ns0:m>
+            <a:r>
+              <a:rPr lang="ru-RU" dirty="0" sz="2000">
+                <a:solidFill>
+                  <a:srgbClr val="000000"/>
+                </a:solidFill>
+              </a:rPr>
+              <a:t xml:space="preserve"> дают </a:t>
+            </a:r>
+            <ns0:m xmlns:ns0="http://schemas.microsoft.com/office/drawing/2010/main">
+              <m:oMath xmlns:m="http://schemas.openxmlformats.org/officeDocument/2006/math">
+                <m:sSub>
+                  <m:e>
+                    <m:r>
+                      <m:t>I</m:t>
+                    </m:r>
+                  </m:e>
+                  <m:sub>
+                    <m:r>
+                      <m:t>mis</m:t>
+                    </m:r>
+                  </m:sub>
+                </m:sSub>
+                <m:r>
+                  <m:t>=0.4</m:t>
+                </m:r>
+              </m:oMath>
+            </ns0:m>
+            <a:r>
+              <a:rPr lang="ru-RU" dirty="0" sz="2000">
+                <a:solidFill>
+                  <a:srgbClr val="000000"/>
+                </a:solidFill>
+              </a:rPr>
+              <a:t>, но разную энтропию и Джини</a:t>
             </a:r>
           </a:p>
           <a:p>
@@ -7121,10 +7537,44 @@
               <a:spcAft>
                 <a:spcPts val="800"/>
               </a:spcAft>
-              <a:defRPr sz="2000"/>
-            </a:pPr>
-            <a:r>
-              <a:t>Энтропия и Джини строго вогнуты — каждое изменение распределения даёт различный прирост, алгоритм выбирает лучший порог однозначно</a:t>
+            </a:pPr>
+            <a:r>
+              <a:rPr lang="ru-RU" dirty="0" sz="2000">
+                <a:solidFill>
+                  <a:srgbClr val="000000"/>
+                </a:solidFill>
+              </a:rPr>
+              <a:t>Misclassification смотрит только на самый большой класс, игнорируя остальные</a:t>
+            </a:r>
+          </a:p>
+          <a:p>
+            <a:pPr>
+              <a:spcAft>
+                <a:spcPts val="800"/>
+              </a:spcAft>
+            </a:pPr>
+            <a:r>
+              <a:rPr lang="ru-RU" dirty="0" sz="2000">
+                <a:solidFill>
+                  <a:srgbClr val="000000"/>
+                </a:solidFill>
+              </a:rPr>
+              <a:t>Энтропия и Джини строго вогнуты — прирост разбиения однозначен, меньше случайности в выборе порога</a:t>
+            </a:r>
+          </a:p>
+          <a:p>
+            <a:pPr>
+              <a:spcAft>
+                <a:spcPts val="800"/>
+              </a:spcAft>
+            </a:pPr>
+            <a:r>
+              <a:rPr lang="ru-RU" dirty="0" sz="2000">
+                <a:solidFill>
+                  <a:srgbClr val="000000"/>
+                </a:solidFill>
+              </a:rPr>
+              <a:t>Вывод: misclassification на практике почти не используют; деревья с Gini и entropy обычно близки по качеству</a:t>
             </a:r>
           </a:p>
         </p:txBody>
@@ -7169,14 +7619,12 @@
           </a:bodyPr>
           <a:lstStyle/>
           <a:p>
-            <a:pPr>
-              <a:defRPr sz="3200" b="1">
+            <a:r>
+              <a:rPr lang="ru-RU" dirty="0" sz="3200" b="1">
                 <a:solidFill>
                   <a:srgbClr val="1A1A2E"/>
                 </a:solidFill>
-              </a:defRPr>
-            </a:pPr>
-            <a:r>
+              </a:rPr>
               <a:t>Джини или энтропия?</a:t>
             </a:r>
           </a:p>
@@ -7191,7 +7639,7 @@
         <p:spPr>
           <a:xfrm>
             <a:off x="640080" y="1371600"/>
-            <a:ext cx="6858000" cy="5029200"/>
+            <a:ext cx="11247120" cy="5029200"/>
           </a:xfrm>
           <a:prstGeom prst="rect">
             <a:avLst/>
@@ -7208,10 +7656,41 @@
               <a:spcAft>
                 <a:spcPts val="800"/>
               </a:spcAft>
-              <a:defRPr sz="2000"/>
-            </a:pPr>
-            <a:r>
-              <a:t>Джини считается быстрее (только квадраты), энтропия требует логарифмов, но разница несущественна</a:t>
+            </a:pPr>
+            <a:r>
+              <a:rPr lang="ru-RU" dirty="0" sz="2000">
+                <a:solidFill>
+                  <a:srgbClr val="000000"/>
+                </a:solidFill>
+              </a:rPr>
+              <a:t xml:space="preserve">Джини быстрее (только квадраты), энтропия требует </a:t>
+            </a:r>
+            <ns0:m xmlns:ns0="http://schemas.microsoft.com/office/drawing/2010/main">
+              <m:oMath xmlns:m="http://schemas.openxmlformats.org/officeDocument/2006/math">
+                <m:sSub>
+                  <m:e>
+                    <m:r>
+                      <m:rPr>
+                        <m:sty m:val="p"/>
+                      </m:rPr>
+                      <m:t>log</m:t>
+                    </m:r>
+                  </m:e>
+                  <m:sub>
+                    <m:r>
+                      <m:t>2</m:t>
+                    </m:r>
+                  </m:sub>
+                </m:sSub>
+              </m:oMath>
+            </ns0:m>
+            <a:r>
+              <a:rPr lang="ru-RU" dirty="0" sz="2000">
+                <a:solidFill>
+                  <a:srgbClr val="000000"/>
+                </a:solidFill>
+              </a:rPr>
+              <a:t xml:space="preserve"> — на современных данных разница несущественна</a:t>
             </a:r>
           </a:p>
           <a:p>
@@ -7219,10 +7698,14 @@
               <a:spcAft>
                 <a:spcPts val="800"/>
               </a:spcAft>
-              <a:defRPr sz="2000"/>
-            </a:pPr>
-            <a:r>
-              <a:t>Энтропия имеет удобную информационную интерпретацию (среднее количество бит)</a:t>
+            </a:pPr>
+            <a:r>
+              <a:rPr lang="ru-RU" dirty="0" sz="2000">
+                <a:solidFill>
+                  <a:srgbClr val="000000"/>
+                </a:solidFill>
+              </a:rPr>
+              <a:t>Энтропия: интерпретация в битах; Джини — квадратичное приближение энтропии вблизи равномерного распределения</a:t>
             </a:r>
           </a:p>
           <a:p>
@@ -7230,10 +7713,41 @@
               <a:spcAft>
                 <a:spcPts val="800"/>
               </a:spcAft>
-              <a:defRPr sz="2000"/>
-            </a:pPr>
-            <a:r>
-              <a:t>Джини — квадратичное приближение энтропии вблизи равномерного распределения, результаты обычно очень похожи</a:t>
+            </a:pPr>
+            <a:r>
+              <a:rPr lang="ru-RU" dirty="0" sz="2000">
+                <a:solidFill>
+                  <a:srgbClr val="000000"/>
+                </a:solidFill>
+              </a:rPr>
+              <a:t>Вблизи чистых узлов (</a:t>
+            </a:r>
+            <ns0:m xmlns:ns0="http://schemas.microsoft.com/office/drawing/2010/main">
+              <m:oMath xmlns:m="http://schemas.openxmlformats.org/officeDocument/2006/math">
+                <m:sSub>
+                  <m:e>
+                    <m:r>
+                      <m:t>p</m:t>
+                    </m:r>
+                  </m:e>
+                  <m:sub>
+                    <m:r>
+                      <m:t>k</m:t>
+                    </m:r>
+                  </m:sub>
+                </m:sSub>
+                <m:r>
+                  <m:t>≈1</m:t>
+                </m:r>
+              </m:oMath>
+            </ns0:m>
+            <a:r>
+              <a:rPr lang="ru-RU" dirty="0" sz="2000">
+                <a:solidFill>
+                  <a:srgbClr val="000000"/>
+                </a:solidFill>
+              </a:rPr>
+              <a:t>) энтропия сильнее штрафует редкий класс</a:t>
             </a:r>
           </a:p>
           <a:p>
@@ -7241,21 +7755,14 @@
               <a:spcAft>
                 <a:spcPts val="800"/>
               </a:spcAft>
-              <a:defRPr sz="2000"/>
-            </a:pPr>
-            <a:r>
-              <a:t>Вблизи чистых узлов (p_k ≈ 1) энтропия сильнее «штрафует» за появление редкого класса</a:t>
-            </a:r>
-          </a:p>
-          <a:p>
-            <a:pPr>
-              <a:spcAft>
-                <a:spcPts val="800"/>
-              </a:spcAft>
-              <a:defRPr sz="2000"/>
-            </a:pPr>
-            <a:r>
-              <a:t>На практике выбор между ними редко критичен — деревья получаются почти одинаковыми</a:t>
+            </a:pPr>
+            <a:r>
+              <a:rPr lang="ru-RU" dirty="0" sz="2000">
+                <a:solidFill>
+                  <a:srgbClr val="000000"/>
+                </a:solidFill>
+              </a:rPr>
+              <a:t>На практике деревья почти одинаковы — начинайте с Gini (default в sklearn), не тратьте время на тонкую настройку</a:t>
             </a:r>
           </a:p>
         </p:txBody>
@@ -7300,14 +7807,12 @@
           </a:bodyPr>
           <a:lstStyle/>
           <a:p>
-            <a:pPr>
-              <a:defRPr sz="3200" b="1">
+            <a:r>
+              <a:rPr lang="ru-RU" dirty="0" sz="3200" b="1">
                 <a:solidFill>
                   <a:srgbClr val="1A1A2E"/>
                 </a:solidFill>
-              </a:defRPr>
-            </a:pPr>
-            <a:r>
+              </a:rPr>
               <a:t>Акинатор: дерево в действии</a:t>
             </a:r>
           </a:p>
@@ -7339,9 +7844,13 @@
               <a:spcAft>
                 <a:spcPts val="800"/>
               </a:spcAft>
-              <a:defRPr sz="2000"/>
-            </a:pPr>
-            <a:r>
+            </a:pPr>
+            <a:r>
+              <a:rPr lang="ru-RU" dirty="0" sz="2000">
+                <a:solidFill>
+                  <a:srgbClr val="000000"/>
+                </a:solidFill>
+              </a:rPr>
               <a:t>Акинатор угадывает персонажа/объект по серии вопросов ('да/нет')</a:t>
             </a:r>
           </a:p>
@@ -7350,9 +7859,13 @@
               <a:spcAft>
                 <a:spcPts val="800"/>
               </a:spcAft>
-              <a:defRPr sz="2000"/>
-            </a:pPr>
-            <a:r>
+            </a:pPr>
+            <a:r>
+              <a:rPr lang="ru-RU" dirty="0" sz="2000">
+                <a:solidFill>
+                  <a:srgbClr val="000000"/>
+                </a:solidFill>
+              </a:rPr>
               <a:t>Каждый ответ ведёт к следующему вопросу — структура дерева</a:t>
             </a:r>
           </a:p>
@@ -7361,9 +7874,13 @@
               <a:spcAft>
                 <a:spcPts val="800"/>
               </a:spcAft>
-              <a:defRPr sz="2000"/>
-            </a:pPr>
-            <a:r>
+            </a:pPr>
+            <a:r>
+              <a:rPr lang="ru-RU" dirty="0" sz="2000">
+                <a:solidFill>
+                  <a:srgbClr val="000000"/>
+                </a:solidFill>
+              </a:rPr>
               <a:t>Листья — конкретные персонажи/объекты</a:t>
             </a:r>
           </a:p>
@@ -7372,9 +7889,13 @@
               <a:spcAft>
                 <a:spcPts val="800"/>
               </a:spcAft>
-              <a:defRPr sz="2000"/>
-            </a:pPr>
-            <a:r>
+            </a:pPr>
+            <a:r>
+              <a:rPr lang="ru-RU" dirty="0" sz="2000">
+                <a:solidFill>
+                  <a:srgbClr val="000000"/>
+                </a:solidFill>
+              </a:rPr>
               <a:t>Демонстрация: дерево решений уже используется в повседневных приложениях</a:t>
             </a:r>
           </a:p>
@@ -7427,13 +7948,21 @@
           <a:lstStyle/>
           <a:p>
             <a:r>
+              <a:rPr lang="ru-RU" dirty="0" sz="1400">
+                <a:solidFill>
+                  <a:srgbClr val="3366CC"/>
+                </a:solidFill>
+              </a:rPr>
+              <a:t xml:space="preserve">Поиграть в Акинатора: </a:t>
+            </a:r>
+            <a:r>
               <a:rPr sz="1400">
                 <a:solidFill>
                   <a:srgbClr val="3366CC"/>
                 </a:solidFill>
                 <a:hlinkClick r:id="rId3"/>
               </a:rPr>
-              <a:t>Поиграть в Акинатора: https://en.akinator.com/</a:t>
+              <a:t>https://en.akinator.com/</a:t>
             </a:r>
           </a:p>
         </p:txBody>
@@ -7502,14 +8031,12 @@
           </a:bodyPr>
           <a:lstStyle/>
           <a:p>
-            <a:pPr>
-              <a:defRPr sz="3200" b="1">
+            <a:r>
+              <a:rPr lang="ru-RU" dirty="0" sz="3200" b="1">
                 <a:solidFill>
                   <a:srgbClr val="1A1A2E"/>
                 </a:solidFill>
-              </a:defRPr>
-            </a:pPr>
-            <a:r>
+              </a:rPr>
               <a:t>Бинарная классификация деревом</a:t>
             </a:r>
           </a:p>
@@ -7541,9 +8068,13 @@
               <a:spcAft>
                 <a:spcPts val="800"/>
               </a:spcAft>
-              <a:defRPr sz="2000"/>
-            </a:pPr>
-            <a:r>
+            </a:pPr>
+            <a:r>
+              <a:rPr lang="ru-RU" dirty="0" sz="2000">
+                <a:solidFill>
+                  <a:srgbClr val="000000"/>
+                </a:solidFill>
+              </a:rPr>
               <a:t>Дано: объекты с признаками (x₁, x₂, ..., xₙ) и меткой класса (0 или 1)</a:t>
             </a:r>
           </a:p>
@@ -7552,9 +8083,13 @@
               <a:spcAft>
                 <a:spcPts val="800"/>
               </a:spcAft>
-              <a:defRPr sz="2000"/>
-            </a:pPr>
-            <a:r>
+            </a:pPr>
+            <a:r>
+              <a:rPr lang="ru-RU" dirty="0" sz="2000">
+                <a:solidFill>
+                  <a:srgbClr val="000000"/>
+                </a:solidFill>
+              </a:rPr>
               <a:t>Дерево задаёт вопросы вида xᵢ &lt; a — ровно один признак в узле</a:t>
             </a:r>
           </a:p>
@@ -7563,9 +8098,13 @@
               <a:spcAft>
                 <a:spcPts val="800"/>
               </a:spcAft>
-              <a:defRPr sz="2000"/>
-            </a:pPr>
-            <a:r>
+            </a:pPr>
+            <a:r>
+              <a:rPr lang="ru-RU" dirty="0" sz="2000">
+                <a:solidFill>
+                  <a:srgbClr val="000000"/>
+                </a:solidFill>
+              </a:rPr>
               <a:t>Да → левый потомок, Нет → правый потомок</a:t>
             </a:r>
           </a:p>
@@ -7574,9 +8113,13 @@
               <a:spcAft>
                 <a:spcPts val="800"/>
               </a:spcAft>
-              <a:defRPr sz="2000"/>
-            </a:pPr>
-            <a:r>
+            </a:pPr>
+            <a:r>
+              <a:rPr lang="ru-RU" dirty="0" sz="2000">
+                <a:solidFill>
+                  <a:srgbClr val="000000"/>
+                </a:solidFill>
+              </a:rPr>
               <a:t>В листе: ответ — мажоритарный класс среди попавших туда объектов</a:t>
             </a:r>
           </a:p>
@@ -7585,9 +8128,13 @@
               <a:spcAft>
                 <a:spcPts val="800"/>
               </a:spcAft>
-              <a:defRPr sz="2000"/>
-            </a:pPr>
-            <a:r>
+            </a:pPr>
+            <a:r>
+              <a:rPr lang="ru-RU" dirty="0" sz="2000">
+                <a:solidFill>
+                  <a:srgbClr val="000000"/>
+                </a:solidFill>
+              </a:rPr>
               <a:t>Граница решения: оси-параллельные прямоугольники</a:t>
             </a:r>
           </a:p>
@@ -7657,14 +8204,12 @@
           </a:bodyPr>
           <a:lstStyle/>
           <a:p>
-            <a:pPr>
-              <a:defRPr sz="3200" b="1">
+            <a:r>
+              <a:rPr lang="ru-RU" dirty="0" sz="3200" b="1">
                 <a:solidFill>
                   <a:srgbClr val="1A1A2E"/>
                 </a:solidFill>
-              </a:defRPr>
-            </a:pPr>
-            <a:r>
+              </a:rPr>
               <a:t>Как построить дерево?</a:t>
             </a:r>
           </a:p>
@@ -7679,7 +8224,7 @@
         <p:spPr>
           <a:xfrm>
             <a:off x="640080" y="1371600"/>
-            <a:ext cx="6858000" cy="5029200"/>
+            <a:ext cx="11247120" cy="5029200"/>
           </a:xfrm>
           <a:prstGeom prst="rect">
             <a:avLst/>
@@ -7696,9 +8241,13 @@
               <a:spcAft>
                 <a:spcPts val="800"/>
               </a:spcAft>
-              <a:defRPr sz="2000"/>
-            </a:pPr>
-            <a:r>
+            </a:pPr>
+            <a:r>
+              <a:rPr lang="ru-RU" dirty="0" sz="2000">
+                <a:solidFill>
+                  <a:srgbClr val="000000"/>
+                </a:solidFill>
+              </a:rPr>
               <a:t>Перебираем все признаки, для каждого — все возможные пороги (их конечное число, т.к. между соседними объектами impurity не меняется)</a:t>
             </a:r>
           </a:p>
@@ -7707,10 +8256,14 @@
               <a:spcAft>
                 <a:spcPts val="800"/>
               </a:spcAft>
-              <a:defRPr sz="2000"/>
-            </a:pPr>
-            <a:r>
-              <a:t>Выбираем разбиение с максимальным уменьшением impurity (Gini/энтропия)</a:t>
+            </a:pPr>
+            <a:r>
+              <a:rPr lang="ru-RU" dirty="0" sz="2000">
+                <a:solidFill>
+                  <a:srgbClr val="000000"/>
+                </a:solidFill>
+              </a:rPr>
+              <a:t>Выбираем разбиение с максимальным уменьшением неоднородности узла — критерии misclassification, энтропия и Джини на следующих слайдах</a:t>
             </a:r>
           </a:p>
           <a:p>
@@ -7718,9 +8271,13 @@
               <a:spcAft>
                 <a:spcPts val="800"/>
               </a:spcAft>
-              <a:defRPr sz="2000"/>
-            </a:pPr>
-            <a:r>
+            </a:pPr>
+            <a:r>
+              <a:rPr lang="ru-RU" dirty="0" sz="2000">
+                <a:solidFill>
+                  <a:srgbClr val="000000"/>
+                </a:solidFill>
+              </a:rPr>
               <a:t>Критерии остановки: max_depth, min_samples_leaf — чтобы не переобучаться</a:t>
             </a:r>
           </a:p>
@@ -7729,9 +8286,13 @@
               <a:spcAft>
                 <a:spcPts val="800"/>
               </a:spcAft>
-              <a:defRPr sz="2000"/>
-            </a:pPr>
-            <a:r>
+            </a:pPr>
+            <a:r>
+              <a:rPr lang="ru-RU" dirty="0" sz="2000">
+                <a:solidFill>
+                  <a:srgbClr val="000000"/>
+                </a:solidFill>
+              </a:rPr>
               <a:t>В листе: ответ — мажоритарный класс попавших туда объектов</a:t>
             </a:r>
           </a:p>
@@ -7777,14 +8338,12 @@
           </a:bodyPr>
           <a:lstStyle/>
           <a:p>
-            <a:pPr>
-              <a:defRPr sz="3200" b="1">
+            <a:r>
+              <a:rPr lang="ru-RU" dirty="0" sz="3200" b="1">
                 <a:solidFill>
                   <a:srgbClr val="1A1A2E"/>
                 </a:solidFill>
-              </a:defRPr>
-            </a:pPr>
-            <a:r>
+              </a:rPr>
               <a:t>Критерий качества разбиения: Misclassification Impurity</a:t>
             </a:r>
           </a:p>
@@ -7799,7 +8358,7 @@
         <p:spPr>
           <a:xfrm>
             <a:off x="640080" y="1371600"/>
-            <a:ext cx="6858000" cy="5029200"/>
+            <a:ext cx="11247120" cy="5029200"/>
           </a:xfrm>
           <a:prstGeom prst="rect">
             <a:avLst/>
@@ -7816,10 +8375,57 @@
               <a:spcAft>
                 <a:spcPts val="800"/>
               </a:spcAft>
-              <a:defRPr sz="2000"/>
-            </a:pPr>
-            <a:r>
-              <a:t>Интуиция: если бы мы ответили самым частым классом, какова вероятность ошибки?</a:t>
+            </a:pPr>
+            <ns0:m xmlns:ns0="http://schemas.microsoft.com/office/drawing/2010/main">
+              <m:oMath xmlns:m="http://schemas.openxmlformats.org/officeDocument/2006/math">
+                <m:sSub>
+                  <m:e>
+                    <m:r>
+                      <m:t>I</m:t>
+                    </m:r>
+                  </m:e>
+                  <m:sub>
+                    <m:r>
+                      <m:t>mis</m:t>
+                    </m:r>
+                  </m:sub>
+                </m:sSub>
+                <m:r>
+                  <m:t>(t)=1−</m:t>
+                </m:r>
+                <m:sSub>
+                  <m:e>
+                    <m:r>
+                      <m:t>max</m:t>
+                    </m:r>
+                  </m:e>
+                  <m:sub>
+                    <m:r>
+                      <m:t>k</m:t>
+                    </m:r>
+                  </m:sub>
+                </m:sSub>
+                <m:sSub>
+                  <m:e>
+                    <m:r>
+                      <m:t>p</m:t>
+                    </m:r>
+                  </m:e>
+                  <m:sub>
+                    <m:r>
+                      <m:t>k</m:t>
+                    </m:r>
+                  </m:sub>
+                </m:sSub>
+              </m:oMath>
+            </ns0:m>
+            <a:r>
+              <a:rPr lang="ru-RU" dirty="0" sz="2000">
+                <a:solidFill>
+                  <a:srgbClr val="000000"/>
+                </a:solidFill>
+              </a:rPr>
+              <a:t xml:space="preserve"> — если ответить самым частым классом, какова вероятность ошибки?</a:t>
             </a:r>
           </a:p>
           <a:p>
@@ -7827,72 +8433,30 @@
               <a:spcAft>
                 <a:spcPts val="800"/>
               </a:spcAft>
-              <a:defRPr sz="2000"/>
-            </a:pPr>
-            <a:r>
-              <a:t>Простой и интуитивный, но есть недостатки (обсудим на слайде 21)</a:t>
-            </a:r>
-          </a:p>
-        </p:txBody>
-      </p:sp>
-      <p:sp>
-        <p:nvSpPr>
-          <p:cNvPr id="4" name="TextBox 3"/>
-          <p:cNvSpPr txBox="1"/>
-          <p:nvPr/>
-        </p:nvSpPr>
-        <p:spPr>
-          <a:xfrm>
-            <a:off x="7772400" y="1371600"/>
-            <a:ext cx="4114800" cy="2286000"/>
-          </a:xfrm>
-          <a:prstGeom prst="rect">
-            <a:avLst/>
-          </a:prstGeom>
-          <a:noFill/>
-        </p:spPr>
-        <p:txBody>
-          <a:bodyPr wrap="square">
-            <a:spAutoFit/>
-          </a:bodyPr>
-          <a:lstStyle/>
-          <a:p>
-            <a:pPr>
-              <a:spcAft>
-                <a:spcPts val="600"/>
-              </a:spcAft>
-              <a:defRPr sz="1600">
-                <a:solidFill>
-                  <a:srgbClr val="555555"/>
-                </a:solidFill>
-              </a:defRPr>
-            </a:pPr>
-            <a:r>
-              <a:t>Misclassification impurity</a:t>
-            </a:r>
-          </a:p>
-          <a:p>
-            <a:pPr>
-              <a:spcAft>
-                <a:spcPts val="1000"/>
-              </a:spcAft>
-            </a:pPr>
+            </a:pPr>
+            <a:r>
+              <a:rPr lang="ru-RU" dirty="0" sz="2000">
+                <a:solidFill>
+                  <a:srgbClr val="000000"/>
+                </a:solidFill>
+              </a:rPr>
+              <a:t xml:space="preserve">Простой и интуитивный, но есть недостатки при </a:t>
+            </a:r>
             <ns0:m xmlns:ns0="http://schemas.microsoft.com/office/drawing/2010/main">
-              <ns1:oMath xmlns:ns1="http://schemas.openxmlformats.org/officeDocument/2006/math">
-                <ns1:sSub>
-                  <ns1:e>
-                    <ns1:r>
-                      <ns1:t>I</ns1:t>
-                    </ns1:r>
-                  </ns1:e>
-                  <ns1:sub>
-                    <ns1:r>
-                      <ns1:t>mis</ns1:t>
-                    </ns1:r>
-                  </ns1:sub>
-                </ns1:sSub>
-              </ns1:oMath>
+              <m:oMath xmlns:m="http://schemas.openxmlformats.org/officeDocument/2006/math">
+                <m:r>
+                  <m:t>K≥3</m:t>
+                </m:r>
+              </m:oMath>
             </ns0:m>
+            <a:r>
+              <a:rPr lang="ru-RU" dirty="0" sz="2000">
+                <a:solidFill>
+                  <a:srgbClr val="000000"/>
+                </a:solidFill>
+              </a:rPr>
+              <a:t xml:space="preserve"> — разберём в теоретическом блоке</a:t>
+            </a:r>
           </a:p>
         </p:txBody>
       </p:sp>
@@ -7936,15 +8500,13 @@
           </a:bodyPr>
           <a:lstStyle/>
           <a:p>
-            <a:pPr>
-              <a:defRPr sz="3200" b="1">
+            <a:r>
+              <a:rPr lang="ru-RU" dirty="0" sz="3200" b="1">
                 <a:solidFill>
                   <a:srgbClr val="1A1A2E"/>
                 </a:solidFill>
-              </a:defRPr>
-            </a:pPr>
-            <a:r>
-              <a:t>Альтернатива: энтропия и индекс Джини</a:t>
+              </a:rPr>
+              <a:t>Энтропия и индекс Джини</a:t>
             </a:r>
           </a:p>
         </p:txBody>
@@ -7975,185 +8537,210 @@
               <a:spcAft>
                 <a:spcPts val="800"/>
               </a:spcAft>
-              <a:defRPr sz="2000"/>
-            </a:pPr>
-            <a:r>
-              <a:t>Обе функции строго вогнуты — учитывают распределение всех классов</a:t>
-            </a:r>
+            </a:pPr>
+            <a:r>
+              <a:rPr lang="ru-RU" dirty="0" sz="2000">
+                <a:solidFill>
+                  <a:srgbClr val="000000"/>
+                </a:solidFill>
+              </a:rPr>
+              <a:t xml:space="preserve">Энтропия: </a:t>
+            </a:r>
+            <ns0:m xmlns:ns0="http://schemas.microsoft.com/office/drawing/2010/main">
+              <m:oMath xmlns:m="http://schemas.openxmlformats.org/officeDocument/2006/math">
+                <m:r>
+                  <m:t>H=−</m:t>
+                </m:r>
+                <m:nary>
+                  <m:naryPr>
+                    <m:chr m:val="∑"/>
+                    <m:limLoc m:val="subSup"/>
+                    <m:grow m:val="1"/>
+                    <m:subHide m:val="off"/>
+                    <m:supHide m:val="on"/>
+                  </m:naryPr>
+                  <m:sub>
+                    <m:r>
+                      <m:t>k</m:t>
+                    </m:r>
+                  </m:sub>
+                  <m:sup/>
+                  <m:e>
+                    <m:sSub>
+                      <m:e>
+                        <m:r>
+                          <m:t>p</m:t>
+                        </m:r>
+                      </m:e>
+                      <m:sub>
+                        <m:r>
+                          <m:t>k</m:t>
+                        </m:r>
+                      </m:sub>
+                    </m:sSub>
+                  </m:e>
+                </m:nary>
+                <m:sSub>
+                  <m:e>
+                    <m:r>
+                      <m:rPr>
+                        <m:sty m:val="p"/>
+                      </m:rPr>
+                      <m:t>log</m:t>
+                    </m:r>
+                  </m:e>
+                  <m:sub>
+                    <m:r>
+                      <m:t>2</m:t>
+                    </m:r>
+                  </m:sub>
+                </m:sSub>
+                <m:sSub>
+                  <m:e>
+                    <m:r>
+                      <m:t>p</m:t>
+                    </m:r>
+                  </m:e>
+                  <m:sub>
+                    <m:r>
+                      <m:t>k</m:t>
+                    </m:r>
+                  </m:sub>
+                </m:sSub>
+              </m:oMath>
+            </ns0:m>
           </a:p>
           <a:p>
             <a:pPr>
               <a:spcAft>
                 <a:spcPts val="800"/>
               </a:spcAft>
-              <a:defRPr sz="2000"/>
-            </a:pPr>
-            <a:r>
-              <a:t>Именно их используют на практике (sklearn: criterion='gini' или 'entropy')</a:t>
-            </a:r>
+            </a:pPr>
+            <a:r>
+              <a:rPr lang="ru-RU" dirty="0" sz="2000">
+                <a:solidFill>
+                  <a:srgbClr val="000000"/>
+                </a:solidFill>
+              </a:rPr>
+              <a:t xml:space="preserve">Индекс Джини: </a:t>
+            </a:r>
+            <ns0:m xmlns:ns0="http://schemas.microsoft.com/office/drawing/2010/main">
+              <m:oMath xmlns:m="http://schemas.openxmlformats.org/officeDocument/2006/math">
+                <m:r>
+                  <m:t>G=</m:t>
+                </m:r>
+                <m:nary>
+                  <m:naryPr>
+                    <m:chr m:val="∑"/>
+                    <m:limLoc m:val="subSup"/>
+                    <m:grow m:val="1"/>
+                    <m:subHide m:val="off"/>
+                    <m:supHide m:val="on"/>
+                  </m:naryPr>
+                  <m:sub>
+                    <m:r>
+                      <m:t>k</m:t>
+                    </m:r>
+                  </m:sub>
+                  <m:sup/>
+                  <m:e>
+                    <m:sSub>
+                      <m:e>
+                        <m:r>
+                          <m:t>p</m:t>
+                        </m:r>
+                      </m:e>
+                      <m:sub>
+                        <m:r>
+                          <m:t>k</m:t>
+                        </m:r>
+                      </m:sub>
+                    </m:sSub>
+                  </m:e>
+                </m:nary>
+                <m:r>
+                  <m:t>(1−</m:t>
+                </m:r>
+                <m:sSub>
+                  <m:e>
+                    <m:r>
+                      <m:t>p</m:t>
+                    </m:r>
+                  </m:e>
+                  <m:sub>
+                    <m:r>
+                      <m:t>k</m:t>
+                    </m:r>
+                  </m:sub>
+                </m:sSub>
+                <m:r>
+                  <m:t>)=1−</m:t>
+                </m:r>
+                <m:nary>
+                  <m:naryPr>
+                    <m:chr m:val="∑"/>
+                    <m:limLoc m:val="subSup"/>
+                    <m:grow m:val="1"/>
+                    <m:subHide m:val="off"/>
+                    <m:supHide m:val="on"/>
+                  </m:naryPr>
+                  <m:sub>
+                    <m:r>
+                      <m:t>k</m:t>
+                    </m:r>
+                  </m:sub>
+                  <m:sup/>
+                  <m:e>
+                    <m:sSubSup>
+                      <m:e>
+                        <m:r>
+                          <m:t>p</m:t>
+                        </m:r>
+                      </m:e>
+                      <m:sub>
+                        <m:r>
+                          <m:t>k</m:t>
+                        </m:r>
+                      </m:sub>
+                      <m:sup>
+                        <m:r>
+                          <m:t>2</m:t>
+                        </m:r>
+                      </m:sup>
+                    </m:sSubSup>
+                  </m:e>
+                </m:nary>
+              </m:oMath>
+            </ns0:m>
           </a:p>
           <a:p>
             <a:pPr>
               <a:spcAft>
                 <a:spcPts val="800"/>
               </a:spcAft>
-              <a:defRPr sz="2000"/>
-            </a:pPr>
-            <a:r>
-              <a:t>Почему они лучше Misclassification — объясним позже</a:t>
-            </a:r>
-          </a:p>
-        </p:txBody>
-      </p:sp>
-      <p:sp>
-        <p:nvSpPr>
-          <p:cNvPr id="4" name="TextBox 3"/>
-          <p:cNvSpPr txBox="1"/>
-          <p:nvPr/>
-        </p:nvSpPr>
-        <p:spPr>
-          <a:xfrm>
-            <a:off x="7772400" y="1371600"/>
-            <a:ext cx="4114800" cy="2286000"/>
-          </a:xfrm>
-          <a:prstGeom prst="rect">
-            <a:avLst/>
-          </a:prstGeom>
-          <a:noFill/>
-        </p:spPr>
-        <p:txBody>
-          <a:bodyPr wrap="square">
-            <a:spAutoFit/>
-          </a:bodyPr>
-          <a:lstStyle/>
-          <a:p>
-            <a:pPr>
-              <a:spcAft>
-                <a:spcPts val="600"/>
-              </a:spcAft>
-              <a:defRPr sz="1600">
-                <a:solidFill>
-                  <a:srgbClr val="555555"/>
-                </a:solidFill>
-              </a:defRPr>
-            </a:pPr>
-            <a:r>
-              <a:t>Энтропия и индекс Джини</a:t>
-            </a:r>
-          </a:p>
-          <a:p>
-            <a:pPr>
-              <a:spcAft>
-                <a:spcPts val="1000"/>
-              </a:spcAft>
-            </a:pPr>
-            <ns0:m xmlns:ns0="http://schemas.microsoft.com/office/drawing/2010/main">
-              <ns1:oMath xmlns:ns1="http://schemas.openxmlformats.org/officeDocument/2006/math">
-                <ns1:r>
-                  <ns1:t>H=−</ns1:t>
-                </ns1:r>
-              </ns1:oMath>
-            </ns0:m>
-          </a:p>
-          <a:p>
-            <a:pPr>
-              <a:spcAft>
-                <a:spcPts val="1000"/>
-              </a:spcAft>
-            </a:pPr>
-            <ns0:m xmlns:ns0="http://schemas.microsoft.com/office/drawing/2010/main">
-              <ns1:oMath xmlns:ns1="http://schemas.openxmlformats.org/officeDocument/2006/math">
-                <ns1:r>
-                  <ns1:t>G=</ns1:t>
-                </ns1:r>
-              </ns1:oMath>
-            </ns0:m>
-          </a:p>
-        </p:txBody>
-      </p:sp>
-    </p:spTree>
-  </p:cSld>
-  <p:clrMapOvr>
-    <a:masterClrMapping/>
-  </p:clrMapOvr>
-</p:sld>
-</file>
-
-<file path=ppt/slides/slide8.xml><?xml version="1.0" encoding="utf-8"?>
-<p:sld xmlns:a="http://schemas.openxmlformats.org/drawingml/2006/main" xmlns:p="http://schemas.openxmlformats.org/presentationml/2006/main" xmlns:r="http://schemas.openxmlformats.org/officeDocument/2006/relationships">
-  <p:cSld>
-    <p:spTree>
-      <p:nvGrpSpPr>
-        <p:cNvPr id="1" name=""/>
-        <p:cNvGrpSpPr/>
-        <p:nvPr/>
-      </p:nvGrpSpPr>
-      <p:grpSpPr/>
-      <p:sp>
-        <p:nvSpPr>
-          <p:cNvPr id="2" name="TextBox 1"/>
-          <p:cNvSpPr txBox="1"/>
-          <p:nvPr/>
-        </p:nvSpPr>
-        <p:spPr>
-          <a:xfrm>
-            <a:off x="457200" y="274320"/>
-            <a:ext cx="11247120" cy="914400"/>
-          </a:xfrm>
-          <a:prstGeom prst="rect">
-            <a:avLst/>
-          </a:prstGeom>
-          <a:noFill/>
-        </p:spPr>
-        <p:txBody>
-          <a:bodyPr wrap="square">
-            <a:spAutoFit/>
-          </a:bodyPr>
-          <a:lstStyle/>
-          <a:p>
-            <a:pPr>
-              <a:defRPr sz="3200" b="1">
-                <a:solidFill>
-                  <a:srgbClr val="1A1A2E"/>
-                </a:solidFill>
-              </a:defRPr>
-            </a:pPr>
-            <a:r>
-              <a:t>Энтропия и индекс Джини</a:t>
-            </a:r>
-          </a:p>
-        </p:txBody>
-      </p:sp>
-      <p:sp>
-        <p:nvSpPr>
-          <p:cNvPr id="3" name="TextBox 2"/>
-          <p:cNvSpPr txBox="1"/>
-          <p:nvPr/>
-        </p:nvSpPr>
-        <p:spPr>
-          <a:xfrm>
-            <a:off x="640080" y="1371600"/>
-            <a:ext cx="6858000" cy="5029200"/>
-          </a:xfrm>
-          <a:prstGeom prst="rect">
-            <a:avLst/>
-          </a:prstGeom>
-          <a:noFill/>
-        </p:spPr>
-        <p:txBody>
-          <a:bodyPr wrap="square">
-            <a:spAutoFit/>
-          </a:bodyPr>
-          <a:lstStyle/>
+            </a:pPr>
+            <a:r>
+              <a:rPr lang="ru-RU" dirty="0" sz="2000">
+                <a:solidFill>
+                  <a:srgbClr val="000000"/>
+                </a:solidFill>
+              </a:rPr>
+              <a:t>Обе функции строго вогнуты — учитывают распределение всех классов</a:t>
+            </a:r>
+          </a:p>
           <a:p>
             <a:pPr>
               <a:spcAft>
                 <a:spcPts val="800"/>
               </a:spcAft>
-              <a:defRPr sz="2000"/>
-            </a:pPr>
-            <a:r>
-              <a:t>Энтропия: H = -∑ p_k · log₂(p_k)</a:t>
+            </a:pPr>
+            <a:r>
+              <a:rPr lang="ru-RU" dirty="0" sz="2000">
+                <a:solidFill>
+                  <a:srgbClr val="000000"/>
+                </a:solidFill>
+              </a:rPr>
+              <a:t>Именно их используют на практике (sklearn: criterion='gini' или 'entropy')</a:t>
             </a:r>
           </a:p>
           <a:p>
@@ -8161,43 +8748,14 @@
               <a:spcAft>
                 <a:spcPts val="800"/>
               </a:spcAft>
-              <a:defRPr sz="2000"/>
-            </a:pPr>
-            <a:r>
-              <a:t>Индекс Джини: G = ∑ p_k · (1-p_k) = 1 - ∑ p_k²</a:t>
-            </a:r>
-          </a:p>
-          <a:p>
-            <a:pPr>
-              <a:spcAft>
-                <a:spcPts val="800"/>
-              </a:spcAft>
-              <a:defRPr sz="2000"/>
-            </a:pPr>
-            <a:r>
-              <a:t>Обе функции строго вогнуты — учитывают распределение всех классов</a:t>
-            </a:r>
-          </a:p>
-          <a:p>
-            <a:pPr>
-              <a:spcAft>
-                <a:spcPts val="800"/>
-              </a:spcAft>
-              <a:defRPr sz="2000"/>
-            </a:pPr>
-            <a:r>
-              <a:t>Именно их используют на практике (sklearn criterion=gini или entropy)</a:t>
-            </a:r>
-          </a:p>
-          <a:p>
-            <a:pPr>
-              <a:spcAft>
-                <a:spcPts val="800"/>
-              </a:spcAft>
-              <a:defRPr sz="2000"/>
-            </a:pPr>
-            <a:r>
-              <a:t>Почему они лучше Misclassification — объясним позже</a:t>
+            </a:pPr>
+            <a:r>
+              <a:rPr lang="ru-RU" dirty="0" sz="2000">
+                <a:solidFill>
+                  <a:srgbClr val="000000"/>
+                </a:solidFill>
+              </a:rPr>
+              <a:t>Почему misclassification слабее — разберём в теоретическом блоке</a:t>
             </a:r>
           </a:p>
         </p:txBody>
@@ -8234,6 +8792,140 @@
 </p:sld>
 </file>
 
+<file path=ppt/slides/slide8.xml><?xml version="1.0" encoding="utf-8"?>
+<p:sld xmlns:a="http://schemas.openxmlformats.org/drawingml/2006/main" xmlns:p="http://schemas.openxmlformats.org/presentationml/2006/main" xmlns:r="http://schemas.openxmlformats.org/officeDocument/2006/relationships">
+  <p:cSld>
+    <p:spTree>
+      <p:nvGrpSpPr>
+        <p:cNvPr id="1" name=""/>
+        <p:cNvGrpSpPr/>
+        <p:nvPr/>
+      </p:nvGrpSpPr>
+      <p:grpSpPr/>
+      <p:sp>
+        <p:nvSpPr>
+          <p:cNvPr id="2" name="TextBox 1"/>
+          <p:cNvSpPr txBox="1"/>
+          <p:nvPr/>
+        </p:nvSpPr>
+        <p:spPr>
+          <a:xfrm>
+            <a:off x="457200" y="274320"/>
+            <a:ext cx="11247120" cy="914400"/>
+          </a:xfrm>
+          <a:prstGeom prst="rect">
+            <a:avLst/>
+          </a:prstGeom>
+          <a:noFill/>
+        </p:spPr>
+        <p:txBody>
+          <a:bodyPr wrap="square">
+            <a:spAutoFit/>
+          </a:bodyPr>
+          <a:lstStyle/>
+          <a:p>
+            <a:r>
+              <a:rPr lang="ru-RU" dirty="0" sz="3200" b="1">
+                <a:solidFill>
+                  <a:srgbClr val="1A1A2E"/>
+                </a:solidFill>
+              </a:rPr>
+              <a:t>Классические алгоритмы деревьев решений</a:t>
+            </a:r>
+          </a:p>
+        </p:txBody>
+      </p:sp>
+      <p:sp>
+        <p:nvSpPr>
+          <p:cNvPr id="3" name="TextBox 2"/>
+          <p:cNvSpPr txBox="1"/>
+          <p:nvPr/>
+        </p:nvSpPr>
+        <p:spPr>
+          <a:xfrm>
+            <a:off x="640080" y="1371600"/>
+            <a:ext cx="11247120" cy="5029200"/>
+          </a:xfrm>
+          <a:prstGeom prst="rect">
+            <a:avLst/>
+          </a:prstGeom>
+          <a:noFill/>
+        </p:spPr>
+        <p:txBody>
+          <a:bodyPr wrap="square">
+            <a:spAutoFit/>
+          </a:bodyPr>
+          <a:lstStyle/>
+          <a:p>
+            <a:pPr>
+              <a:spcAft>
+                <a:spcPts val="800"/>
+              </a:spcAft>
+            </a:pPr>
+            <a:r>
+              <a:rPr lang="ru-RU" dirty="0" sz="2000">
+                <a:solidFill>
+                  <a:srgbClr val="000000"/>
+                </a:solidFill>
+              </a:rPr>
+              <a:t>ID3 (Iterative Dichotomiser 3, Quinlan, 1986) — энтропия, категориальные признаки, без прунинга</a:t>
+            </a:r>
+          </a:p>
+          <a:p>
+            <a:pPr>
+              <a:spcAft>
+                <a:spcPts val="800"/>
+              </a:spcAft>
+            </a:pPr>
+            <a:r>
+              <a:rPr lang="ru-RU" dirty="0" sz="2000">
+                <a:solidFill>
+                  <a:srgbClr val="000000"/>
+                </a:solidFill>
+              </a:rPr>
+              <a:t>C4.5 — наследник ID3: непрерывные признаки (пороги), Gain Ratio против high-cardinality, прунинг</a:t>
+            </a:r>
+          </a:p>
+          <a:p>
+            <a:pPr>
+              <a:spcAft>
+                <a:spcPts val="800"/>
+              </a:spcAft>
+            </a:pPr>
+            <a:r>
+              <a:rPr lang="ru-RU" dirty="0" sz="2000">
+                <a:solidFill>
+                  <a:srgbClr val="000000"/>
+                </a:solidFill>
+              </a:rPr>
+              <a:t>CART (Classification and Regression Trees, Breiman, 1984) — Gini/MSE, только бинарные разбиения</a:t>
+            </a:r>
+          </a:p>
+          <a:p>
+            <a:pPr>
+              <a:spcAft>
+                <a:spcPts val="800"/>
+              </a:spcAft>
+            </a:pPr>
+            <a:r>
+              <a:rPr lang="ru-RU" dirty="0" sz="2000">
+                <a:solidFill>
+                  <a:srgbClr val="000000"/>
+                </a:solidFill>
+              </a:rPr>
+              <a:t>sklearn DecisionTreeClassifier/Regressor — реализация в духе CART</a:t>
+            </a:r>
+          </a:p>
+        </p:txBody>
+      </p:sp>
+    </p:spTree>
+  </p:cSld>
+  <p:clrMapOvr>
+    <a:masterClrMapping/>
+  </p:clrMapOvr>
+</p:sld>
+</file>
+
 <file path=ppt/slides/slide9.xml><?xml version="1.0" encoding="utf-8"?>
 <p:sld xmlns:a="http://schemas.openxmlformats.org/drawingml/2006/main" xmlns:p="http://schemas.openxmlformats.org/presentationml/2006/main" xmlns:r="http://schemas.openxmlformats.org/officeDocument/2006/relationships">
   <p:cSld>
@@ -8266,14 +8958,12 @@
           </a:bodyPr>
           <a:lstStyle/>
           <a:p>
-            <a:pPr>
-              <a:defRPr sz="3200" b="1">
+            <a:r>
+              <a:rPr lang="ru-RU" dirty="0" sz="3200" b="1">
                 <a:solidFill>
                   <a:srgbClr val="1A1A2E"/>
                 </a:solidFill>
-              </a:defRPr>
-            </a:pPr>
-            <a:r>
+              </a:rPr>
               <a:t>Многоклассовая классификация без усилий</a:t>
             </a:r>
           </a:p>
@@ -8288,7 +8978,7 @@
         <p:spPr>
           <a:xfrm>
             <a:off x="640080" y="1371600"/>
-            <a:ext cx="6858000" cy="5029200"/>
+            <a:ext cx="11247120" cy="5029200"/>
           </a:xfrm>
           <a:prstGeom prst="rect">
             <a:avLst/>
@@ -8305,10 +8995,14 @@
               <a:spcAft>
                 <a:spcPts val="800"/>
               </a:spcAft>
-              <a:defRPr sz="2000"/>
-            </a:pPr>
-            <a:r>
-              <a:t>Линейным моделям нужно K бинарных классификаторов (one-vs-rest)</a:t>
+            </a:pPr>
+            <a:r>
+              <a:rPr lang="ru-RU" dirty="0" sz="2000">
+                <a:solidFill>
+                  <a:srgbClr val="000000"/>
+                </a:solidFill>
+              </a:rPr>
+              <a:t>Для K классов линейные модели часто используют one-vs-rest или одну модель с softmax</a:t>
             </a:r>
           </a:p>
           <a:p>
@@ -8316,10 +9010,14 @@
               <a:spcAft>
                 <a:spcPts val="800"/>
               </a:spcAft>
-              <a:defRPr sz="2000"/>
-            </a:pPr>
-            <a:r>
-              <a:t>Дерево решений обобщается на K классов естественно</a:t>
+            </a:pPr>
+            <a:r>
+              <a:rPr lang="ru-RU" dirty="0" sz="2000">
+                <a:solidFill>
+                  <a:srgbClr val="000000"/>
+                </a:solidFill>
+              </a:rPr>
+              <a:t>Дерево решений обобщается на K классов естественно — одна модель на все классы</a:t>
             </a:r>
           </a:p>
           <a:p>
@@ -8327,10 +9025,14 @@
               <a:spcAft>
                 <a:spcPts val="800"/>
               </a:spcAft>
-              <a:defRPr sz="2000"/>
-            </a:pPr>
-            <a:r>
-              <a:t>Просто подставляем K классов в формулы энтропии/Джини — алгоритм не меняется</a:t>
+            </a:pPr>
+            <a:r>
+              <a:rPr lang="ru-RU" dirty="0" sz="2000">
+                <a:solidFill>
+                  <a:srgbClr val="000000"/>
+                </a:solidFill>
+              </a:rPr>
+              <a:t>Подставляем K классов в формулы энтропии/Джини — алгоритм построения не меняется</a:t>
             </a:r>
           </a:p>
           <a:p>
@@ -8338,10 +9040,14 @@
               <a:spcAft>
                 <a:spcPts val="800"/>
               </a:spcAft>
-              <a:defRPr sz="2000"/>
-            </a:pPr>
-            <a:r>
-              <a:t>Никаких one-vs-rest, никаких дополнительных моделей</a:t>
+            </a:pPr>
+            <a:r>
+              <a:rPr lang="ru-RU" dirty="0" sz="2000">
+                <a:solidFill>
+                  <a:srgbClr val="000000"/>
+                </a:solidFill>
+              </a:rPr>
+              <a:t>Никаких дополнительных моделей и схем one-vs-rest</a:t>
             </a:r>
           </a:p>
         </p:txBody>

--- a/lessons/derevo_resheniy/presentation.pptx
+++ b/lessons/derevo_resheniy/presentation.pptx
@@ -5206,7 +5206,7 @@
               </a:defRPr>
             </a:pPr>
             <a:r>
-              <a:t>27.06.2026</a:t>
+              <a:t>28.06.2026</a:t>
             </a:r>
           </a:p>
         </p:txBody>

--- a/lessons/derevo_resheniy/presentation.pptx
+++ b/lessons/derevo_resheniy/presentation.pptx
@@ -29,6 +29,7 @@
     <p:sldId id="277" r:id="rId29"/>
     <p:sldId id="278" r:id="rId30"/>
     <p:sldId id="279" r:id="rId31"/>
+    <p:sldId id="280" r:id="rId32"/>
   </p:sldIdLst>
   <p:sldSz cx="12191695" cy="6858000" type="screen4x3"/>
   <p:notesSz cx="6858000" cy="9144000"/>
@@ -1576,6 +1577,76 @@
           <a:p>
             <a:r>
               <a:t>Краткое резюме. Можно пропустить при нехватке времени — суть уже на предыдущем слайде.</a:t>
+            </a:r>
+          </a:p>
+        </p:txBody>
+      </p:sp>
+      <p:sp>
+        <p:nvSpPr>
+          <p:cNvPr id="4" name="Slide Number Placeholder 3"/>
+          <p:cNvSpPr>
+            <a:spLocks noGrp="1"/>
+          </p:cNvSpPr>
+          <p:nvPr>
+            <p:ph type="sldNum" idx="5" sz="quarter"/>
+          </p:nvPr>
+        </p:nvSpPr>
+        <p:spPr/>
+      </p:sp>
+    </p:spTree>
+  </p:cSld>
+  <p:clrMapOvr>
+    <a:masterClrMapping/>
+  </p:clrMapOvr>
+</p:notes>
+</file>
+
+<file path=ppt/notesSlides/notesSlide24.xml><?xml version="1.0" encoding="utf-8"?>
+<p:notes xmlns:a="http://schemas.openxmlformats.org/drawingml/2006/main" xmlns:p="http://schemas.openxmlformats.org/presentationml/2006/main" xmlns:r="http://schemas.openxmlformats.org/officeDocument/2006/relationships">
+  <p:cSld>
+    <p:spTree>
+      <p:nvGrpSpPr>
+        <p:cNvPr id="1" name=""/>
+        <p:cNvGrpSpPr/>
+        <p:nvPr/>
+      </p:nvGrpSpPr>
+      <p:grpSpPr>
+        <a:xfrm>
+          <a:off x="0" y="0"/>
+          <a:ext cx="0" cy="0"/>
+          <a:chOff x="0" y="0"/>
+          <a:chExt cx="0" cy="0"/>
+        </a:xfrm>
+      </p:grpSpPr>
+      <p:sp>
+        <p:nvSpPr>
+          <p:cNvPr id="2" name="Slide Image Placeholder 1"/>
+          <p:cNvSpPr>
+            <a:spLocks noGrp="1"/>
+          </p:cNvSpPr>
+          <p:nvPr>
+            <p:ph type="sldImg" idx="2"/>
+          </p:nvPr>
+        </p:nvSpPr>
+        <p:spPr/>
+      </p:sp>
+      <p:sp>
+        <p:nvSpPr>
+          <p:cNvPr id="3" name="Notes Placeholder 2"/>
+          <p:cNvSpPr>
+            <a:spLocks noGrp="1"/>
+          </p:cNvSpPr>
+          <p:nvPr>
+            <p:ph type="body" idx="3" sz="quarter"/>
+          </p:nvPr>
+        </p:nvSpPr>
+        <p:spPr/>
+        <p:txBody>
+          <a:bodyPr/>
+          <a:lstStyle/>
+          <a:p>
+            <a:r>
+              <a:t>Colab-ссылки обновляются агентом при --apply.</a:t>
             </a:r>
           </a:p>
         </p:txBody>
@@ -5644,8 +5715,8 @@
         </p:blipFill>
         <p:spPr>
           <a:xfrm>
-            <a:off x="7772400" y="1371600"/>
-            <a:ext cx="4114800" cy="2571750"/>
+            <a:off x="7635240" y="2208847"/>
+            <a:ext cx="4343400" cy="2714625"/>
           </a:xfrm>
           <a:prstGeom prst="rect">
             <a:avLst/>
@@ -5921,8 +5992,8 @@
         </p:blipFill>
         <p:spPr>
           <a:xfrm>
-            <a:off x="7772400" y="1371600"/>
-            <a:ext cx="4114800" cy="2571750"/>
+            <a:off x="7635240" y="2208847"/>
+            <a:ext cx="4343400" cy="2714625"/>
           </a:xfrm>
           <a:prstGeom prst="rect">
             <a:avLst/>
@@ -6466,8 +6537,8 @@
         </p:blipFill>
         <p:spPr>
           <a:xfrm>
-            <a:off x="7772400" y="1371600"/>
-            <a:ext cx="4114800" cy="3086100"/>
+            <a:off x="7635240" y="1937384"/>
+            <a:ext cx="4343400" cy="3257550"/>
           </a:xfrm>
           <a:prstGeom prst="rect">
             <a:avLst/>
@@ -6758,8 +6829,8 @@
         </p:blipFill>
         <p:spPr>
           <a:xfrm>
-            <a:off x="7772400" y="1371600"/>
-            <a:ext cx="4114800" cy="2185477"/>
+            <a:off x="7635240" y="2412714"/>
+            <a:ext cx="4343400" cy="2306892"/>
           </a:xfrm>
           <a:prstGeom prst="rect">
             <a:avLst/>
@@ -7775,6 +7846,470 @@
 </p:sld>
 </file>
 
+<file path=ppt/slides/slide25.xml><?xml version="1.0" encoding="utf-8"?>
+<p:sld xmlns:a="http://schemas.openxmlformats.org/drawingml/2006/main" xmlns:p="http://schemas.openxmlformats.org/presentationml/2006/main" xmlns:r="http://schemas.openxmlformats.org/officeDocument/2006/relationships">
+  <p:cSld>
+    <p:spTree>
+      <p:nvGrpSpPr>
+        <p:cNvPr id="1" name=""/>
+        <p:cNvGrpSpPr/>
+        <p:nvPr/>
+      </p:nvGrpSpPr>
+      <p:grpSpPr/>
+      <p:sp>
+        <p:nvSpPr>
+          <p:cNvPr id="2" name="TextBox 1"/>
+          <p:cNvSpPr txBox="1"/>
+          <p:nvPr/>
+        </p:nvSpPr>
+        <p:spPr>
+          <a:xfrm>
+            <a:off x="457200" y="274320"/>
+            <a:ext cx="11247120" cy="914400"/>
+          </a:xfrm>
+          <a:prstGeom prst="rect">
+            <a:avLst/>
+          </a:prstGeom>
+          <a:noFill/>
+        </p:spPr>
+        <p:txBody>
+          <a:bodyPr wrap="square">
+            <a:spAutoFit/>
+          </a:bodyPr>
+          <a:lstStyle/>
+          <a:p>
+            <a:r>
+              <a:rPr lang="ru-RU" dirty="0" sz="3200" b="1">
+                <a:solidFill>
+                  <a:srgbClr val="1A1A2E"/>
+                </a:solidFill>
+              </a:rPr>
+              <a:t>Источники и практика</a:t>
+            </a:r>
+          </a:p>
+        </p:txBody>
+      </p:sp>
+      <p:sp>
+        <p:nvSpPr>
+          <p:cNvPr id="3" name="TextBox 2"/>
+          <p:cNvSpPr txBox="1"/>
+          <p:nvPr/>
+        </p:nvSpPr>
+        <p:spPr>
+          <a:xfrm>
+            <a:off x="640080" y="1325880"/>
+            <a:ext cx="6583680" cy="320040"/>
+          </a:xfrm>
+          <a:prstGeom prst="rect">
+            <a:avLst/>
+          </a:prstGeom>
+          <a:noFill/>
+        </p:spPr>
+        <p:txBody>
+          <a:bodyPr wrap="none">
+            <a:spAutoFit/>
+          </a:bodyPr>
+          <a:lstStyle/>
+          <a:p>
+            <a:pPr>
+              <a:defRPr sz="1800" b="1">
+                <a:solidFill>
+                  <a:srgbClr val="000000"/>
+                </a:solidFill>
+              </a:defRPr>
+            </a:pPr>
+            <a:r>
+              <a:t>Литература</a:t>
+            </a:r>
+          </a:p>
+        </p:txBody>
+      </p:sp>
+      <p:sp>
+        <p:nvSpPr>
+          <p:cNvPr id="4" name="TextBox 3"/>
+          <p:cNvSpPr txBox="1"/>
+          <p:nvPr/>
+        </p:nvSpPr>
+        <p:spPr>
+          <a:xfrm>
+            <a:off x="640080" y="1673352"/>
+            <a:ext cx="6583680" cy="566928"/>
+          </a:xfrm>
+          <a:prstGeom prst="rect">
+            <a:avLst/>
+          </a:prstGeom>
+          <a:noFill/>
+        </p:spPr>
+        <p:txBody>
+          <a:bodyPr wrap="square">
+            <a:spAutoFit/>
+          </a:bodyPr>
+          <a:lstStyle/>
+          <a:p>
+            <a:pPr>
+              <a:spcAft>
+                <a:spcPts val="400"/>
+              </a:spcAft>
+            </a:pPr>
+            <a:r>
+              <a:rPr lang="ru-RU" dirty="0" sz="1600">
+                <a:solidFill>
+                  <a:srgbClr val="000000"/>
+                </a:solidFill>
+              </a:rPr>
+              <a:t xml:space="preserve">• </a:t>
+            </a:r>
+            <a:r>
+              <a:rPr sz="1600">
+                <a:solidFill>
+                  <a:srgbClr val="3366CC"/>
+                </a:solidFill>
+                <a:hlinkClick r:id="rId2"/>
+              </a:rPr>
+              <a:t>Breiman L., Friedman J., Olshen R., Stone C. (1984). Classification and Regression Trees</a:t>
+            </a:r>
+          </a:p>
+        </p:txBody>
+      </p:sp>
+      <p:sp>
+        <p:nvSpPr>
+          <p:cNvPr id="5" name="TextBox 4"/>
+          <p:cNvSpPr txBox="1"/>
+          <p:nvPr/>
+        </p:nvSpPr>
+        <p:spPr>
+          <a:xfrm>
+            <a:off x="640080" y="2240280"/>
+            <a:ext cx="6583680" cy="566928"/>
+          </a:xfrm>
+          <a:prstGeom prst="rect">
+            <a:avLst/>
+          </a:prstGeom>
+          <a:noFill/>
+        </p:spPr>
+        <p:txBody>
+          <a:bodyPr wrap="square">
+            <a:spAutoFit/>
+          </a:bodyPr>
+          <a:lstStyle/>
+          <a:p>
+            <a:pPr>
+              <a:spcAft>
+                <a:spcPts val="400"/>
+              </a:spcAft>
+            </a:pPr>
+            <a:r>
+              <a:rPr lang="ru-RU" dirty="0" sz="1600">
+                <a:solidFill>
+                  <a:srgbClr val="000000"/>
+                </a:solidFill>
+              </a:rPr>
+              <a:t xml:space="preserve">• </a:t>
+            </a:r>
+            <a:r>
+              <a:rPr sz="1600">
+                <a:solidFill>
+                  <a:srgbClr val="3366CC"/>
+                </a:solidFill>
+                <a:hlinkClick r:id="rId3"/>
+              </a:rPr>
+              <a:t>Quinlan J.R. (1986). Induction of Decision Trees</a:t>
+            </a:r>
+          </a:p>
+        </p:txBody>
+      </p:sp>
+      <p:sp>
+        <p:nvSpPr>
+          <p:cNvPr id="6" name="TextBox 5"/>
+          <p:cNvSpPr txBox="1"/>
+          <p:nvPr/>
+        </p:nvSpPr>
+        <p:spPr>
+          <a:xfrm>
+            <a:off x="640080" y="2807208"/>
+            <a:ext cx="6583680" cy="566928"/>
+          </a:xfrm>
+          <a:prstGeom prst="rect">
+            <a:avLst/>
+          </a:prstGeom>
+          <a:noFill/>
+        </p:spPr>
+        <p:txBody>
+          <a:bodyPr wrap="square">
+            <a:spAutoFit/>
+          </a:bodyPr>
+          <a:lstStyle/>
+          <a:p>
+            <a:pPr>
+              <a:spcAft>
+                <a:spcPts val="400"/>
+              </a:spcAft>
+            </a:pPr>
+            <a:r>
+              <a:rPr lang="ru-RU" dirty="0" sz="1600">
+                <a:solidFill>
+                  <a:srgbClr val="000000"/>
+                </a:solidFill>
+              </a:rPr>
+              <a:t xml:space="preserve">• </a:t>
+            </a:r>
+            <a:r>
+              <a:rPr sz="1600">
+                <a:solidFill>
+                  <a:srgbClr val="3366CC"/>
+                </a:solidFill>
+                <a:hlinkClick r:id="rId4"/>
+              </a:rPr>
+              <a:t>Breiman L. (2001). Random Forests</a:t>
+            </a:r>
+          </a:p>
+        </p:txBody>
+      </p:sp>
+      <p:sp>
+        <p:nvSpPr>
+          <p:cNvPr id="7" name="TextBox 6"/>
+          <p:cNvSpPr txBox="1"/>
+          <p:nvPr/>
+        </p:nvSpPr>
+        <p:spPr>
+          <a:xfrm>
+            <a:off x="640080" y="3374136"/>
+            <a:ext cx="6583680" cy="320040"/>
+          </a:xfrm>
+          <a:prstGeom prst="rect">
+            <a:avLst/>
+          </a:prstGeom>
+          <a:noFill/>
+        </p:spPr>
+        <p:txBody>
+          <a:bodyPr wrap="none">
+            <a:spAutoFit/>
+          </a:bodyPr>
+          <a:lstStyle/>
+          <a:p>
+            <a:pPr>
+              <a:defRPr sz="1800" b="1">
+                <a:solidFill>
+                  <a:srgbClr val="000000"/>
+                </a:solidFill>
+              </a:defRPr>
+            </a:pPr>
+            <a:r>
+              <a:t>Практика в Colab</a:t>
+            </a:r>
+          </a:p>
+        </p:txBody>
+      </p:sp>
+      <p:sp>
+        <p:nvSpPr>
+          <p:cNvPr id="8" name="TextBox 7"/>
+          <p:cNvSpPr txBox="1"/>
+          <p:nvPr/>
+        </p:nvSpPr>
+        <p:spPr>
+          <a:xfrm>
+            <a:off x="640080" y="3721608"/>
+            <a:ext cx="6583680" cy="457200"/>
+          </a:xfrm>
+          <a:prstGeom prst="rect">
+            <a:avLst/>
+          </a:prstGeom>
+          <a:noFill/>
+        </p:spPr>
+        <p:txBody>
+          <a:bodyPr wrap="square">
+            <a:spAutoFit/>
+          </a:bodyPr>
+          <a:lstStyle/>
+          <a:p>
+            <a:r>
+              <a:rPr lang="ru-RU" dirty="0" sz="1500">
+                <a:solidFill>
+                  <a:srgbClr val="000000"/>
+                </a:solidFill>
+              </a:rPr>
+              <a:t xml:space="preserve">• Примеры по слайдам: </a:t>
+            </a:r>
+            <a:r>
+              <a:rPr sz="1400">
+                <a:solidFill>
+                  <a:srgbClr val="3366CC"/>
+                </a:solidFill>
+                <a:hlinkClick r:id="rId5"/>
+              </a:rPr>
+              <a:t>https://colab.research.google.com/github/gurovic/ml-lessons/blob/feature/references-and-slide-code/lessons/derevo_resheniy/code.ipynb</a:t>
+            </a:r>
+          </a:p>
+        </p:txBody>
+      </p:sp>
+      <p:sp>
+        <p:nvSpPr>
+          <p:cNvPr id="9" name="TextBox 8"/>
+          <p:cNvSpPr txBox="1"/>
+          <p:nvPr/>
+        </p:nvSpPr>
+        <p:spPr>
+          <a:xfrm>
+            <a:off x="640080" y="4178808"/>
+            <a:ext cx="6583680" cy="457200"/>
+          </a:xfrm>
+          <a:prstGeom prst="rect">
+            <a:avLst/>
+          </a:prstGeom>
+          <a:noFill/>
+        </p:spPr>
+        <p:txBody>
+          <a:bodyPr wrap="square">
+            <a:spAutoFit/>
+          </a:bodyPr>
+          <a:lstStyle/>
+          <a:p>
+            <a:r>
+              <a:rPr lang="ru-RU" dirty="0" sz="1500">
+                <a:solidFill>
+                  <a:srgbClr val="000000"/>
+                </a:solidFill>
+              </a:rPr>
+              <a:t xml:space="preserve">• Мини-проект: </a:t>
+            </a:r>
+            <a:r>
+              <a:rPr sz="1400">
+                <a:solidFill>
+                  <a:srgbClr val="3366CC"/>
+                </a:solidFill>
+                <a:hlinkClick r:id="rId6"/>
+              </a:rPr>
+              <a:t>https://colab.research.google.com/github/gurovic/ml-lessons/blob/feature/references-and-slide-code/lessons/derevo_resheniy/project.ipynb</a:t>
+            </a:r>
+          </a:p>
+        </p:txBody>
+      </p:sp>
+      <p:pic>
+        <p:nvPicPr>
+          <p:cNvPr id="10" name="Picture 9" descr="_qr_ref_24_0.png"/>
+          <p:cNvPicPr>
+            <a:picLocks noChangeAspect="1"/>
+          </p:cNvPicPr>
+          <p:nvPr/>
+        </p:nvPicPr>
+        <p:blipFill>
+          <a:blip r:embed="rId7"/>
+          <a:stretch>
+            <a:fillRect/>
+          </a:stretch>
+        </p:blipFill>
+        <p:spPr>
+          <a:xfrm>
+            <a:off x="8229600" y="1463040"/>
+            <a:ext cx="1051560" cy="1051560"/>
+          </a:xfrm>
+          <a:prstGeom prst="rect">
+            <a:avLst/>
+          </a:prstGeom>
+        </p:spPr>
+      </p:pic>
+      <p:sp>
+        <p:nvSpPr>
+          <p:cNvPr id="11" name="TextBox 10"/>
+          <p:cNvSpPr txBox="1"/>
+          <p:nvPr/>
+        </p:nvSpPr>
+        <p:spPr>
+          <a:xfrm>
+            <a:off x="8138160" y="2532888"/>
+            <a:ext cx="1417319" cy="274320"/>
+          </a:xfrm>
+          <a:prstGeom prst="rect">
+            <a:avLst/>
+          </a:prstGeom>
+          <a:noFill/>
+        </p:spPr>
+        <p:txBody>
+          <a:bodyPr wrap="none">
+            <a:spAutoFit/>
+          </a:bodyPr>
+          <a:lstStyle/>
+          <a:p>
+            <a:pPr algn="ctr">
+              <a:defRPr sz="1000">
+                <a:solidFill>
+                  <a:srgbClr val="555555"/>
+                </a:solidFill>
+              </a:defRPr>
+            </a:pPr>
+            <a:r>
+              <a:t>Примеры по слайдам</a:t>
+            </a:r>
+          </a:p>
+        </p:txBody>
+      </p:sp>
+      <p:pic>
+        <p:nvPicPr>
+          <p:cNvPr id="12" name="Picture 11" descr="_qr_ref_24_1.png"/>
+          <p:cNvPicPr>
+            <a:picLocks noChangeAspect="1"/>
+          </p:cNvPicPr>
+          <p:nvPr/>
+        </p:nvPicPr>
+        <p:blipFill>
+          <a:blip r:embed="rId8"/>
+          <a:stretch>
+            <a:fillRect/>
+          </a:stretch>
+        </p:blipFill>
+        <p:spPr>
+          <a:xfrm>
+            <a:off x="8229600" y="3063240"/>
+            <a:ext cx="1051560" cy="1051560"/>
+          </a:xfrm>
+          <a:prstGeom prst="rect">
+            <a:avLst/>
+          </a:prstGeom>
+        </p:spPr>
+      </p:pic>
+      <p:sp>
+        <p:nvSpPr>
+          <p:cNvPr id="13" name="TextBox 12"/>
+          <p:cNvSpPr txBox="1"/>
+          <p:nvPr/>
+        </p:nvSpPr>
+        <p:spPr>
+          <a:xfrm>
+            <a:off x="8138160" y="4133087"/>
+            <a:ext cx="1417319" cy="274320"/>
+          </a:xfrm>
+          <a:prstGeom prst="rect">
+            <a:avLst/>
+          </a:prstGeom>
+          <a:noFill/>
+        </p:spPr>
+        <p:txBody>
+          <a:bodyPr wrap="none">
+            <a:spAutoFit/>
+          </a:bodyPr>
+          <a:lstStyle/>
+          <a:p>
+            <a:pPr algn="ctr">
+              <a:defRPr sz="1000">
+                <a:solidFill>
+                  <a:srgbClr val="555555"/>
+                </a:solidFill>
+              </a:defRPr>
+            </a:pPr>
+            <a:r>
+              <a:t>Мини-проект</a:t>
+            </a:r>
+          </a:p>
+        </p:txBody>
+      </p:sp>
+    </p:spTree>
+  </p:cSld>
+  <p:clrMapOvr>
+    <a:masterClrMapping/>
+  </p:clrMapOvr>
+</p:sld>
+</file>
+
 <file path=ppt/slides/slide3.xml><?xml version="1.0" encoding="utf-8"?>
 <p:sld xmlns:a="http://schemas.openxmlformats.org/drawingml/2006/main" xmlns:p="http://schemas.openxmlformats.org/presentationml/2006/main" xmlns:r="http://schemas.openxmlformats.org/officeDocument/2006/relationships">
   <p:cSld>
@@ -7917,8 +8452,8 @@
         </p:blipFill>
         <p:spPr>
           <a:xfrm>
-            <a:off x="7772400" y="1371600"/>
-            <a:ext cx="4114800" cy="2375472"/>
+            <a:off x="7635240" y="2312438"/>
+            <a:ext cx="4343400" cy="2507442"/>
           </a:xfrm>
           <a:prstGeom prst="rect">
             <a:avLst/>
@@ -8156,8 +8691,8 @@
         </p:blipFill>
         <p:spPr>
           <a:xfrm>
-            <a:off x="7772400" y="1371600"/>
-            <a:ext cx="4114800" cy="3086100"/>
+            <a:off x="7635240" y="1937384"/>
+            <a:ext cx="4343400" cy="3257550"/>
           </a:xfrm>
           <a:prstGeom prst="rect">
             <a:avLst/>
@@ -8776,8 +9311,8 @@
         </p:blipFill>
         <p:spPr>
           <a:xfrm>
-            <a:off x="7772400" y="1371600"/>
-            <a:ext cx="4114800" cy="2571750"/>
+            <a:off x="7635240" y="2208847"/>
+            <a:ext cx="4343400" cy="2714625"/>
           </a:xfrm>
           <a:prstGeom prst="rect">
             <a:avLst/>

--- a/lessons/derevo_resheniy/presentation.pptx
+++ b/lessons/derevo_resheniy/presentation.pptx
@@ -5342,7 +5342,7 @@
         <p:spPr>
           <a:xfrm>
             <a:off x="640080" y="1371600"/>
-            <a:ext cx="11247120" cy="5029200"/>
+            <a:ext cx="11247120" cy="1810512"/>
           </a:xfrm>
           <a:prstGeom prst="rect">
             <a:avLst/>
@@ -5476,7 +5476,7 @@
         <p:spPr>
           <a:xfrm>
             <a:off x="640080" y="1371600"/>
-            <a:ext cx="11247120" cy="5029200"/>
+            <a:ext cx="11247120" cy="1810512"/>
           </a:xfrm>
           <a:prstGeom prst="rect">
             <a:avLst/>
@@ -5546,6 +5546,173 @@
                 </a:solidFill>
               </a:rPr>
               <a:t>Это частично решает проблему дисбаланса</a:t>
+            </a:r>
+          </a:p>
+        </p:txBody>
+      </p:sp>
+      <p:sp>
+        <p:nvSpPr>
+          <p:cNvPr id="4" name="Rectangle 3"/>
+          <p:cNvSpPr/>
+          <p:nvPr/>
+        </p:nvSpPr>
+        <p:spPr>
+          <a:xfrm>
+            <a:off x="640080" y="3291840"/>
+            <a:ext cx="11155680" cy="804672"/>
+          </a:xfrm>
+          <a:prstGeom prst="rect">
+            <a:avLst/>
+          </a:prstGeom>
+          <a:solidFill>
+            <a:srgbClr val="F5F5F5"/>
+          </a:solidFill>
+          <a:ln>
+            <a:solidFill>
+              <a:srgbClr val="DDDDDD"/>
+            </a:solidFill>
+          </a:ln>
+        </p:spPr>
+        <p:style>
+          <a:lnRef idx="1">
+            <a:schemeClr val="accent1"/>
+          </a:lnRef>
+          <a:fillRef idx="3">
+            <a:schemeClr val="accent1"/>
+          </a:fillRef>
+          <a:effectRef idx="2">
+            <a:schemeClr val="accent1"/>
+          </a:effectRef>
+          <a:fontRef idx="minor">
+            <a:schemeClr val="lt1"/>
+          </a:fontRef>
+        </p:style>
+        <p:txBody>
+          <a:bodyPr rtlCol="0" anchor="ctr"/>
+          <a:lstStyle/>
+          <a:p>
+            <a:pPr algn="ctr"/>
+          </a:p>
+        </p:txBody>
+      </p:sp>
+      <p:sp>
+        <p:nvSpPr>
+          <p:cNvPr id="5" name="TextBox 4"/>
+          <p:cNvSpPr txBox="1"/>
+          <p:nvPr/>
+        </p:nvSpPr>
+        <p:spPr>
+          <a:xfrm>
+            <a:off x="713231" y="3328416"/>
+            <a:ext cx="11009376" cy="731520"/>
+          </a:xfrm>
+          <a:prstGeom prst="rect">
+            <a:avLst/>
+          </a:prstGeom>
+          <a:noFill/>
+        </p:spPr>
+        <p:txBody>
+          <a:bodyPr wrap="square">
+            <a:noAutofit/>
+          </a:bodyPr>
+          <a:lstStyle/>
+          <a:p>
+            <a:pPr>
+              <a:spcAft>
+                <a:spcPts val="0"/>
+              </a:spcAft>
+              <a:defRPr sz="1100">
+                <a:solidFill>
+                  <a:srgbClr val="000000"/>
+                </a:solidFill>
+                <a:latin typeface="Consolas"/>
+              </a:defRPr>
+            </a:pPr>
+            <a:r>
+              <a:t>from sklearn.metrics import accuracy_score, f1_score</a:t>
+            </a:r>
+          </a:p>
+          <a:p>
+            <a:pPr>
+              <a:spcAft>
+                <a:spcPts val="0"/>
+              </a:spcAft>
+              <a:defRPr sz="1100">
+                <a:solidFill>
+                  <a:srgbClr val="000000"/>
+                </a:solidFill>
+                <a:latin typeface="Consolas"/>
+              </a:defRPr>
+            </a:pPr>
+            <a:r>
+              <a:t>y_pred = clf.predict(X_test)</a:t>
+            </a:r>
+          </a:p>
+          <a:p>
+            <a:pPr>
+              <a:spcAft>
+                <a:spcPts val="0"/>
+              </a:spcAft>
+              <a:defRPr sz="1100">
+                <a:solidFill>
+                  <a:srgbClr val="000000"/>
+                </a:solidFill>
+                <a:latin typeface="Consolas"/>
+              </a:defRPr>
+            </a:pPr>
+            <a:r>
+              <a:t>print(accuracy_score(y_test, y_pred))</a:t>
+            </a:r>
+          </a:p>
+          <a:p>
+            <a:pPr>
+              <a:spcAft>
+                <a:spcPts val="0"/>
+              </a:spcAft>
+              <a:defRPr sz="1100">
+                <a:solidFill>
+                  <a:srgbClr val="000000"/>
+                </a:solidFill>
+                <a:latin typeface="Consolas"/>
+              </a:defRPr>
+            </a:pPr>
+            <a:r>
+              <a:t>print(f1_score(y_test, y_pred, average='macro'))</a:t>
+            </a:r>
+          </a:p>
+        </p:txBody>
+      </p:sp>
+      <p:sp>
+        <p:nvSpPr>
+          <p:cNvPr id="6" name="TextBox 5"/>
+          <p:cNvSpPr txBox="1"/>
+          <p:nvPr/>
+        </p:nvSpPr>
+        <p:spPr>
+          <a:xfrm>
+            <a:off x="640080" y="4151376"/>
+            <a:ext cx="11155680" cy="201168"/>
+          </a:xfrm>
+          <a:prstGeom prst="rect">
+            <a:avLst/>
+          </a:prstGeom>
+          <a:noFill/>
+        </p:spPr>
+        <p:txBody>
+          <a:bodyPr wrap="none">
+            <a:spAutoFit/>
+          </a:bodyPr>
+          <a:lstStyle/>
+          <a:p>
+            <a:pPr algn="l">
+              <a:defRPr sz="1000" i="1">
+                <a:solidFill>
+                  <a:srgbClr val="555555"/>
+                </a:solidFill>
+              </a:defRPr>
+            </a:pPr>
+            <a:r>
+              <a:t>Accuracy и F1</a:t>
             </a:r>
           </a:p>
         </p:txBody>
@@ -5610,7 +5777,7 @@
         <p:spPr>
           <a:xfrm>
             <a:off x="640080" y="1371600"/>
-            <a:ext cx="6858000" cy="5029200"/>
+            <a:ext cx="6858000" cy="2194560"/>
           </a:xfrm>
           <a:prstGeom prst="rect">
             <a:avLst/>
@@ -5699,9 +5866,160 @@
           </a:p>
         </p:txBody>
       </p:sp>
+      <p:sp>
+        <p:nvSpPr>
+          <p:cNvPr id="4" name="Rectangle 3"/>
+          <p:cNvSpPr/>
+          <p:nvPr/>
+        </p:nvSpPr>
+        <p:spPr>
+          <a:xfrm>
+            <a:off x="640080" y="3675887"/>
+            <a:ext cx="6766560" cy="630936"/>
+          </a:xfrm>
+          <a:prstGeom prst="rect">
+            <a:avLst/>
+          </a:prstGeom>
+          <a:solidFill>
+            <a:srgbClr val="F5F5F5"/>
+          </a:solidFill>
+          <a:ln>
+            <a:solidFill>
+              <a:srgbClr val="DDDDDD"/>
+            </a:solidFill>
+          </a:ln>
+        </p:spPr>
+        <p:style>
+          <a:lnRef idx="1">
+            <a:schemeClr val="accent1"/>
+          </a:lnRef>
+          <a:fillRef idx="3">
+            <a:schemeClr val="accent1"/>
+          </a:fillRef>
+          <a:effectRef idx="2">
+            <a:schemeClr val="accent1"/>
+          </a:effectRef>
+          <a:fontRef idx="minor">
+            <a:schemeClr val="lt1"/>
+          </a:fontRef>
+        </p:style>
+        <p:txBody>
+          <a:bodyPr rtlCol="0" anchor="ctr"/>
+          <a:lstStyle/>
+          <a:p>
+            <a:pPr algn="ctr"/>
+          </a:p>
+        </p:txBody>
+      </p:sp>
+      <p:sp>
+        <p:nvSpPr>
+          <p:cNvPr id="5" name="TextBox 4"/>
+          <p:cNvSpPr txBox="1"/>
+          <p:nvPr/>
+        </p:nvSpPr>
+        <p:spPr>
+          <a:xfrm>
+            <a:off x="713231" y="3712463"/>
+            <a:ext cx="6620256" cy="557784"/>
+          </a:xfrm>
+          <a:prstGeom prst="rect">
+            <a:avLst/>
+          </a:prstGeom>
+          <a:noFill/>
+        </p:spPr>
+        <p:txBody>
+          <a:bodyPr wrap="square">
+            <a:noAutofit/>
+          </a:bodyPr>
+          <a:lstStyle/>
+          <a:p>
+            <a:pPr>
+              <a:spcAft>
+                <a:spcPts val="0"/>
+              </a:spcAft>
+              <a:defRPr sz="1100">
+                <a:solidFill>
+                  <a:srgbClr val="000000"/>
+                </a:solidFill>
+                <a:latin typeface="Consolas"/>
+              </a:defRPr>
+            </a:pPr>
+            <a:r>
+              <a:t>clf_deep = DecisionTreeClassifier(max_depth=None)</a:t>
+            </a:r>
+          </a:p>
+          <a:p>
+            <a:pPr>
+              <a:spcAft>
+                <a:spcPts val="0"/>
+              </a:spcAft>
+              <a:defRPr sz="1100">
+                <a:solidFill>
+                  <a:srgbClr val="000000"/>
+                </a:solidFill>
+                <a:latin typeface="Consolas"/>
+              </a:defRPr>
+            </a:pPr>
+            <a:r>
+              <a:t>clf_reg = DecisionTreeClassifier(max_depth=3)</a:t>
+            </a:r>
+          </a:p>
+          <a:p>
+            <a:pPr>
+              <a:spcAft>
+                <a:spcPts val="0"/>
+              </a:spcAft>
+              <a:defRPr sz="1100">
+                <a:solidFill>
+                  <a:srgbClr val="000000"/>
+                </a:solidFill>
+                <a:latin typeface="Consolas"/>
+              </a:defRPr>
+            </a:pPr>
+            <a:r>
+              <a:t># глубокое дерево: высокий train, низкий test</a:t>
+            </a:r>
+          </a:p>
+        </p:txBody>
+      </p:sp>
+      <p:sp>
+        <p:nvSpPr>
+          <p:cNvPr id="6" name="TextBox 5"/>
+          <p:cNvSpPr txBox="1"/>
+          <p:nvPr/>
+        </p:nvSpPr>
+        <p:spPr>
+          <a:xfrm>
+            <a:off x="640080" y="4361688"/>
+            <a:ext cx="6766560" cy="201168"/>
+          </a:xfrm>
+          <a:prstGeom prst="rect">
+            <a:avLst/>
+          </a:prstGeom>
+          <a:noFill/>
+        </p:spPr>
+        <p:txBody>
+          <a:bodyPr wrap="none">
+            <a:spAutoFit/>
+          </a:bodyPr>
+          <a:lstStyle/>
+          <a:p>
+            <a:pPr algn="l">
+              <a:defRPr sz="1000" i="1">
+                <a:solidFill>
+                  <a:srgbClr val="555555"/>
+                </a:solidFill>
+              </a:defRPr>
+            </a:pPr>
+            <a:r>
+              <a:t>Ограничение max_depth</a:t>
+            </a:r>
+          </a:p>
+        </p:txBody>
+      </p:sp>
       <p:pic>
         <p:nvPicPr>
-          <p:cNvPr id="4" name="Picture 3" descr="overfitting_curve.png"/>
+          <p:cNvPr id="7" name="Picture 6" descr="overfitting_curve.png"/>
           <p:cNvPicPr>
             <a:picLocks noChangeAspect="1"/>
           </p:cNvPicPr>
@@ -5783,7 +6101,7 @@
         <p:spPr>
           <a:xfrm>
             <a:off x="640080" y="1371600"/>
-            <a:ext cx="11247120" cy="5029200"/>
+            <a:ext cx="11247120" cy="1810512"/>
           </a:xfrm>
           <a:prstGeom prst="rect">
             <a:avLst/>
@@ -5853,6 +6171,173 @@
                 </a:solidFill>
               </a:rPr>
               <a:t>Для воспроизводимости: random_state фиксирует случайность при равной информативности разбиений</a:t>
+            </a:r>
+          </a:p>
+        </p:txBody>
+      </p:sp>
+      <p:sp>
+        <p:nvSpPr>
+          <p:cNvPr id="4" name="Rectangle 3"/>
+          <p:cNvSpPr/>
+          <p:nvPr/>
+        </p:nvSpPr>
+        <p:spPr>
+          <a:xfrm>
+            <a:off x="640080" y="3291840"/>
+            <a:ext cx="11155680" cy="804672"/>
+          </a:xfrm>
+          <a:prstGeom prst="rect">
+            <a:avLst/>
+          </a:prstGeom>
+          <a:solidFill>
+            <a:srgbClr val="F5F5F5"/>
+          </a:solidFill>
+          <a:ln>
+            <a:solidFill>
+              <a:srgbClr val="DDDDDD"/>
+            </a:solidFill>
+          </a:ln>
+        </p:spPr>
+        <p:style>
+          <a:lnRef idx="1">
+            <a:schemeClr val="accent1"/>
+          </a:lnRef>
+          <a:fillRef idx="3">
+            <a:schemeClr val="accent1"/>
+          </a:fillRef>
+          <a:effectRef idx="2">
+            <a:schemeClr val="accent1"/>
+          </a:effectRef>
+          <a:fontRef idx="minor">
+            <a:schemeClr val="lt1"/>
+          </a:fontRef>
+        </p:style>
+        <p:txBody>
+          <a:bodyPr rtlCol="0" anchor="ctr"/>
+          <a:lstStyle/>
+          <a:p>
+            <a:pPr algn="ctr"/>
+          </a:p>
+        </p:txBody>
+      </p:sp>
+      <p:sp>
+        <p:nvSpPr>
+          <p:cNvPr id="5" name="TextBox 4"/>
+          <p:cNvSpPr txBox="1"/>
+          <p:nvPr/>
+        </p:nvSpPr>
+        <p:spPr>
+          <a:xfrm>
+            <a:off x="713231" y="3328416"/>
+            <a:ext cx="11009376" cy="731520"/>
+          </a:xfrm>
+          <a:prstGeom prst="rect">
+            <a:avLst/>
+          </a:prstGeom>
+          <a:noFill/>
+        </p:spPr>
+        <p:txBody>
+          <a:bodyPr wrap="square">
+            <a:noAutofit/>
+          </a:bodyPr>
+          <a:lstStyle/>
+          <a:p>
+            <a:pPr>
+              <a:spcAft>
+                <a:spcPts val="0"/>
+              </a:spcAft>
+              <a:defRPr sz="1100">
+                <a:solidFill>
+                  <a:srgbClr val="000000"/>
+                </a:solidFill>
+                <a:latin typeface="Consolas"/>
+              </a:defRPr>
+            </a:pPr>
+            <a:r>
+              <a:t>from sklearn.tree import DecisionTreeClassifier</a:t>
+            </a:r>
+          </a:p>
+          <a:p>
+            <a:pPr>
+              <a:spcAft>
+                <a:spcPts val="0"/>
+              </a:spcAft>
+              <a:defRPr sz="1100">
+                <a:solidFill>
+                  <a:srgbClr val="000000"/>
+                </a:solidFill>
+                <a:latin typeface="Consolas"/>
+              </a:defRPr>
+            </a:pPr>
+            <a:r>
+              <a:t>clf = DecisionTreeClassifier(max_depth=3, random_state=42)</a:t>
+            </a:r>
+          </a:p>
+          <a:p>
+            <a:pPr>
+              <a:spcAft>
+                <a:spcPts val="0"/>
+              </a:spcAft>
+              <a:defRPr sz="1100">
+                <a:solidFill>
+                  <a:srgbClr val="000000"/>
+                </a:solidFill>
+                <a:latin typeface="Consolas"/>
+              </a:defRPr>
+            </a:pPr>
+            <a:r>
+              <a:t>clf.fit(X_train, y_train)</a:t>
+            </a:r>
+          </a:p>
+          <a:p>
+            <a:pPr>
+              <a:spcAft>
+                <a:spcPts val="0"/>
+              </a:spcAft>
+              <a:defRPr sz="1100">
+                <a:solidFill>
+                  <a:srgbClr val="000000"/>
+                </a:solidFill>
+                <a:latin typeface="Consolas"/>
+              </a:defRPr>
+            </a:pPr>
+            <a:r>
+              <a:t>clf.predict(X_test)</a:t>
+            </a:r>
+          </a:p>
+        </p:txBody>
+      </p:sp>
+      <p:sp>
+        <p:nvSpPr>
+          <p:cNvPr id="6" name="TextBox 5"/>
+          <p:cNvSpPr txBox="1"/>
+          <p:nvPr/>
+        </p:nvSpPr>
+        <p:spPr>
+          <a:xfrm>
+            <a:off x="640080" y="4151376"/>
+            <a:ext cx="11155680" cy="201168"/>
+          </a:xfrm>
+          <a:prstGeom prst="rect">
+            <a:avLst/>
+          </a:prstGeom>
+          <a:noFill/>
+        </p:spPr>
+        <p:txBody>
+          <a:bodyPr wrap="none">
+            <a:spAutoFit/>
+          </a:bodyPr>
+          <a:lstStyle/>
+          <a:p>
+            <a:pPr algn="l">
+              <a:defRPr sz="1000" i="1">
+                <a:solidFill>
+                  <a:srgbClr val="555555"/>
+                </a:solidFill>
+              </a:defRPr>
+            </a:pPr>
+            <a:r>
+              <a:t>DecisionTreeClassifier</a:t>
             </a:r>
           </a:p>
         </p:txBody>
@@ -5917,7 +6402,7 @@
         <p:spPr>
           <a:xfrm>
             <a:off x="640080" y="1371600"/>
-            <a:ext cx="6858000" cy="5029200"/>
+            <a:ext cx="6858000" cy="1645920"/>
           </a:xfrm>
           <a:prstGeom prst="rect">
             <a:avLst/>
@@ -5976,9 +6461,160 @@
           </a:p>
         </p:txBody>
       </p:sp>
+      <p:sp>
+        <p:nvSpPr>
+          <p:cNvPr id="4" name="Rectangle 3"/>
+          <p:cNvSpPr/>
+          <p:nvPr/>
+        </p:nvSpPr>
+        <p:spPr>
+          <a:xfrm>
+            <a:off x="640080" y="3127248"/>
+            <a:ext cx="6766560" cy="630936"/>
+          </a:xfrm>
+          <a:prstGeom prst="rect">
+            <a:avLst/>
+          </a:prstGeom>
+          <a:solidFill>
+            <a:srgbClr val="F5F5F5"/>
+          </a:solidFill>
+          <a:ln>
+            <a:solidFill>
+              <a:srgbClr val="DDDDDD"/>
+            </a:solidFill>
+          </a:ln>
+        </p:spPr>
+        <p:style>
+          <a:lnRef idx="1">
+            <a:schemeClr val="accent1"/>
+          </a:lnRef>
+          <a:fillRef idx="3">
+            <a:schemeClr val="accent1"/>
+          </a:fillRef>
+          <a:effectRef idx="2">
+            <a:schemeClr val="accent1"/>
+          </a:effectRef>
+          <a:fontRef idx="minor">
+            <a:schemeClr val="lt1"/>
+          </a:fontRef>
+        </p:style>
+        <p:txBody>
+          <a:bodyPr rtlCol="0" anchor="ctr"/>
+          <a:lstStyle/>
+          <a:p>
+            <a:pPr algn="ctr"/>
+          </a:p>
+        </p:txBody>
+      </p:sp>
+      <p:sp>
+        <p:nvSpPr>
+          <p:cNvPr id="5" name="TextBox 4"/>
+          <p:cNvSpPr txBox="1"/>
+          <p:nvPr/>
+        </p:nvSpPr>
+        <p:spPr>
+          <a:xfrm>
+            <a:off x="713231" y="3163824"/>
+            <a:ext cx="6620256" cy="557784"/>
+          </a:xfrm>
+          <a:prstGeom prst="rect">
+            <a:avLst/>
+          </a:prstGeom>
+          <a:noFill/>
+        </p:spPr>
+        <p:txBody>
+          <a:bodyPr wrap="square">
+            <a:noAutofit/>
+          </a:bodyPr>
+          <a:lstStyle/>
+          <a:p>
+            <a:pPr>
+              <a:spcAft>
+                <a:spcPts val="0"/>
+              </a:spcAft>
+              <a:defRPr sz="1100">
+                <a:solidFill>
+                  <a:srgbClr val="000000"/>
+                </a:solidFill>
+                <a:latin typeface="Consolas"/>
+              </a:defRPr>
+            </a:pPr>
+            <a:r>
+              <a:t>import pandas as pd</a:t>
+            </a:r>
+          </a:p>
+          <a:p>
+            <a:pPr>
+              <a:spcAft>
+                <a:spcPts val="0"/>
+              </a:spcAft>
+              <a:defRPr sz="1100">
+                <a:solidFill>
+                  <a:srgbClr val="000000"/>
+                </a:solidFill>
+                <a:latin typeface="Consolas"/>
+              </a:defRPr>
+            </a:pPr>
+            <a:r>
+              <a:t>imp = pd.Series(clf.feature_importances_, index=feature_names)</a:t>
+            </a:r>
+          </a:p>
+          <a:p>
+            <a:pPr>
+              <a:spcAft>
+                <a:spcPts val="0"/>
+              </a:spcAft>
+              <a:defRPr sz="1100">
+                <a:solidFill>
+                  <a:srgbClr val="000000"/>
+                </a:solidFill>
+                <a:latin typeface="Consolas"/>
+              </a:defRPr>
+            </a:pPr>
+            <a:r>
+              <a:t>imp.sort_values(ascending=False).head()</a:t>
+            </a:r>
+          </a:p>
+        </p:txBody>
+      </p:sp>
+      <p:sp>
+        <p:nvSpPr>
+          <p:cNvPr id="6" name="TextBox 5"/>
+          <p:cNvSpPr txBox="1"/>
+          <p:nvPr/>
+        </p:nvSpPr>
+        <p:spPr>
+          <a:xfrm>
+            <a:off x="640080" y="3813048"/>
+            <a:ext cx="6766560" cy="201168"/>
+          </a:xfrm>
+          <a:prstGeom prst="rect">
+            <a:avLst/>
+          </a:prstGeom>
+          <a:noFill/>
+        </p:spPr>
+        <p:txBody>
+          <a:bodyPr wrap="none">
+            <a:spAutoFit/>
+          </a:bodyPr>
+          <a:lstStyle/>
+          <a:p>
+            <a:pPr algn="l">
+              <a:defRPr sz="1000" i="1">
+                <a:solidFill>
+                  <a:srgbClr val="555555"/>
+                </a:solidFill>
+              </a:defRPr>
+            </a:pPr>
+            <a:r>
+              <a:t>feature_importances_</a:t>
+            </a:r>
+          </a:p>
+        </p:txBody>
+      </p:sp>
       <p:pic>
         <p:nvPicPr>
-          <p:cNvPr id="4" name="Picture 3" descr="feature_importance.png"/>
+          <p:cNvPr id="7" name="Picture 6" descr="feature_importance.png"/>
           <p:cNvPicPr>
             <a:picLocks noChangeAspect="1"/>
           </p:cNvPicPr>
@@ -6060,7 +6696,7 @@
         <p:spPr>
           <a:xfrm>
             <a:off x="640080" y="1371600"/>
-            <a:ext cx="11247120" cy="5029200"/>
+            <a:ext cx="11247120" cy="1810512"/>
           </a:xfrm>
           <a:prstGeom prst="rect">
             <a:avLst/>
@@ -6130,6 +6766,173 @@
                 </a:solidFill>
               </a:rPr>
               <a:t>Выбросы в y: чувствительны при MSE; в sklearn — DecisionTreeRegressor(criterion='absolute_error') или чистка данных</a:t>
+            </a:r>
+          </a:p>
+        </p:txBody>
+      </p:sp>
+      <p:sp>
+        <p:nvSpPr>
+          <p:cNvPr id="4" name="Rectangle 3"/>
+          <p:cNvSpPr/>
+          <p:nvPr/>
+        </p:nvSpPr>
+        <p:spPr>
+          <a:xfrm>
+            <a:off x="640080" y="3291840"/>
+            <a:ext cx="11155680" cy="804672"/>
+          </a:xfrm>
+          <a:prstGeom prst="rect">
+            <a:avLst/>
+          </a:prstGeom>
+          <a:solidFill>
+            <a:srgbClr val="F5F5F5"/>
+          </a:solidFill>
+          <a:ln>
+            <a:solidFill>
+              <a:srgbClr val="DDDDDD"/>
+            </a:solidFill>
+          </a:ln>
+        </p:spPr>
+        <p:style>
+          <a:lnRef idx="1">
+            <a:schemeClr val="accent1"/>
+          </a:lnRef>
+          <a:fillRef idx="3">
+            <a:schemeClr val="accent1"/>
+          </a:fillRef>
+          <a:effectRef idx="2">
+            <a:schemeClr val="accent1"/>
+          </a:effectRef>
+          <a:fontRef idx="minor">
+            <a:schemeClr val="lt1"/>
+          </a:fontRef>
+        </p:style>
+        <p:txBody>
+          <a:bodyPr rtlCol="0" anchor="ctr"/>
+          <a:lstStyle/>
+          <a:p>
+            <a:pPr algn="ctr"/>
+          </a:p>
+        </p:txBody>
+      </p:sp>
+      <p:sp>
+        <p:nvSpPr>
+          <p:cNvPr id="5" name="TextBox 4"/>
+          <p:cNvSpPr txBox="1"/>
+          <p:nvPr/>
+        </p:nvSpPr>
+        <p:spPr>
+          <a:xfrm>
+            <a:off x="713231" y="3328416"/>
+            <a:ext cx="11009376" cy="731520"/>
+          </a:xfrm>
+          <a:prstGeom prst="rect">
+            <a:avLst/>
+          </a:prstGeom>
+          <a:noFill/>
+        </p:spPr>
+        <p:txBody>
+          <a:bodyPr wrap="square">
+            <a:noAutofit/>
+          </a:bodyPr>
+          <a:lstStyle/>
+          <a:p>
+            <a:pPr>
+              <a:spcAft>
+                <a:spcPts val="0"/>
+              </a:spcAft>
+              <a:defRPr sz="1100">
+                <a:solidFill>
+                  <a:srgbClr val="000000"/>
+                </a:solidFill>
+                <a:latin typeface="Consolas"/>
+              </a:defRPr>
+            </a:pPr>
+            <a:r>
+              <a:t>from sklearn.tree import DecisionTreeRegressor</a:t>
+            </a:r>
+          </a:p>
+          <a:p>
+            <a:pPr>
+              <a:spcAft>
+                <a:spcPts val="0"/>
+              </a:spcAft>
+              <a:defRPr sz="1100">
+                <a:solidFill>
+                  <a:srgbClr val="000000"/>
+                </a:solidFill>
+                <a:latin typeface="Consolas"/>
+              </a:defRPr>
+            </a:pPr>
+            <a:r>
+              <a:t>reg = DecisionTreeRegressor(max_depth=4, random_state=42)</a:t>
+            </a:r>
+          </a:p>
+          <a:p>
+            <a:pPr>
+              <a:spcAft>
+                <a:spcPts val="0"/>
+              </a:spcAft>
+              <a:defRPr sz="1100">
+                <a:solidFill>
+                  <a:srgbClr val="000000"/>
+                </a:solidFill>
+                <a:latin typeface="Consolas"/>
+              </a:defRPr>
+            </a:pPr>
+            <a:r>
+              <a:t>reg.fit(X_train, y_train)</a:t>
+            </a:r>
+          </a:p>
+          <a:p>
+            <a:pPr>
+              <a:spcAft>
+                <a:spcPts val="0"/>
+              </a:spcAft>
+              <a:defRPr sz="1100">
+                <a:solidFill>
+                  <a:srgbClr val="000000"/>
+                </a:solidFill>
+                <a:latin typeface="Consolas"/>
+              </a:defRPr>
+            </a:pPr>
+            <a:r>
+              <a:t>reg.predict(X_test)</a:t>
+            </a:r>
+          </a:p>
+        </p:txBody>
+      </p:sp>
+      <p:sp>
+        <p:nvSpPr>
+          <p:cNvPr id="6" name="TextBox 5"/>
+          <p:cNvSpPr txBox="1"/>
+          <p:nvPr/>
+        </p:nvSpPr>
+        <p:spPr>
+          <a:xfrm>
+            <a:off x="640080" y="4151376"/>
+            <a:ext cx="11155680" cy="201168"/>
+          </a:xfrm>
+          <a:prstGeom prst="rect">
+            <a:avLst/>
+          </a:prstGeom>
+          <a:noFill/>
+        </p:spPr>
+        <p:txBody>
+          <a:bodyPr wrap="none">
+            <a:spAutoFit/>
+          </a:bodyPr>
+          <a:lstStyle/>
+          <a:p>
+            <a:pPr algn="l">
+              <a:defRPr sz="1000" i="1">
+                <a:solidFill>
+                  <a:srgbClr val="555555"/>
+                </a:solidFill>
+              </a:defRPr>
+            </a:pPr>
+            <a:r>
+              <a:t>DecisionTreeRegressor</a:t>
             </a:r>
           </a:p>
         </p:txBody>
@@ -6194,7 +6997,7 @@
         <p:spPr>
           <a:xfrm>
             <a:off x="640080" y="1371600"/>
-            <a:ext cx="11247120" cy="5029200"/>
+            <a:ext cx="11247120" cy="2194560"/>
           </a:xfrm>
           <a:prstGeom prst="rect">
             <a:avLst/>
@@ -6343,7 +7146,7 @@
         <p:spPr>
           <a:xfrm>
             <a:off x="640080" y="1371600"/>
-            <a:ext cx="11247120" cy="5029200"/>
+            <a:ext cx="11247120" cy="1645920"/>
           </a:xfrm>
           <a:prstGeom prst="rect">
             <a:avLst/>
@@ -6398,6 +7201,173 @@
                 </a:solidFill>
               </a:rPr>
               <a:t>export_text — текстовое представление: правила вида X[0] &lt;= 2.5 → class=1</a:t>
+            </a:r>
+          </a:p>
+        </p:txBody>
+      </p:sp>
+      <p:sp>
+        <p:nvSpPr>
+          <p:cNvPr id="4" name="Rectangle 3"/>
+          <p:cNvSpPr/>
+          <p:nvPr/>
+        </p:nvSpPr>
+        <p:spPr>
+          <a:xfrm>
+            <a:off x="640080" y="3127248"/>
+            <a:ext cx="11155680" cy="804672"/>
+          </a:xfrm>
+          <a:prstGeom prst="rect">
+            <a:avLst/>
+          </a:prstGeom>
+          <a:solidFill>
+            <a:srgbClr val="F5F5F5"/>
+          </a:solidFill>
+          <a:ln>
+            <a:solidFill>
+              <a:srgbClr val="DDDDDD"/>
+            </a:solidFill>
+          </a:ln>
+        </p:spPr>
+        <p:style>
+          <a:lnRef idx="1">
+            <a:schemeClr val="accent1"/>
+          </a:lnRef>
+          <a:fillRef idx="3">
+            <a:schemeClr val="accent1"/>
+          </a:fillRef>
+          <a:effectRef idx="2">
+            <a:schemeClr val="accent1"/>
+          </a:effectRef>
+          <a:fontRef idx="minor">
+            <a:schemeClr val="lt1"/>
+          </a:fontRef>
+        </p:style>
+        <p:txBody>
+          <a:bodyPr rtlCol="0" anchor="ctr"/>
+          <a:lstStyle/>
+          <a:p>
+            <a:pPr algn="ctr"/>
+          </a:p>
+        </p:txBody>
+      </p:sp>
+      <p:sp>
+        <p:nvSpPr>
+          <p:cNvPr id="5" name="TextBox 4"/>
+          <p:cNvSpPr txBox="1"/>
+          <p:nvPr/>
+        </p:nvSpPr>
+        <p:spPr>
+          <a:xfrm>
+            <a:off x="713231" y="3163824"/>
+            <a:ext cx="11009376" cy="731520"/>
+          </a:xfrm>
+          <a:prstGeom prst="rect">
+            <a:avLst/>
+          </a:prstGeom>
+          <a:noFill/>
+        </p:spPr>
+        <p:txBody>
+          <a:bodyPr wrap="square">
+            <a:noAutofit/>
+          </a:bodyPr>
+          <a:lstStyle/>
+          <a:p>
+            <a:pPr>
+              <a:spcAft>
+                <a:spcPts val="0"/>
+              </a:spcAft>
+              <a:defRPr sz="1100">
+                <a:solidFill>
+                  <a:srgbClr val="000000"/>
+                </a:solidFill>
+                <a:latin typeface="Consolas"/>
+              </a:defRPr>
+            </a:pPr>
+            <a:r>
+              <a:t>from sklearn.tree import plot_tree</a:t>
+            </a:r>
+          </a:p>
+          <a:p>
+            <a:pPr>
+              <a:spcAft>
+                <a:spcPts val="0"/>
+              </a:spcAft>
+              <a:defRPr sz="1100">
+                <a:solidFill>
+                  <a:srgbClr val="000000"/>
+                </a:solidFill>
+                <a:latin typeface="Consolas"/>
+              </a:defRPr>
+            </a:pPr>
+            <a:r>
+              <a:t>import matplotlib.pyplot as plt</a:t>
+            </a:r>
+          </a:p>
+          <a:p>
+            <a:pPr>
+              <a:spcAft>
+                <a:spcPts val="0"/>
+              </a:spcAft>
+              <a:defRPr sz="1100">
+                <a:solidFill>
+                  <a:srgbClr val="000000"/>
+                </a:solidFill>
+                <a:latin typeface="Consolas"/>
+              </a:defRPr>
+            </a:pPr>
+            <a:r>
+              <a:t>plot_tree(clf, feature_names=names, filled=True)</a:t>
+            </a:r>
+          </a:p>
+          <a:p>
+            <a:pPr>
+              <a:spcAft>
+                <a:spcPts val="0"/>
+              </a:spcAft>
+              <a:defRPr sz="1100">
+                <a:solidFill>
+                  <a:srgbClr val="000000"/>
+                </a:solidFill>
+                <a:latin typeface="Consolas"/>
+              </a:defRPr>
+            </a:pPr>
+            <a:r>
+              <a:t>plt.show()</a:t>
+            </a:r>
+          </a:p>
+        </p:txBody>
+      </p:sp>
+      <p:sp>
+        <p:nvSpPr>
+          <p:cNvPr id="6" name="TextBox 5"/>
+          <p:cNvSpPr txBox="1"/>
+          <p:nvPr/>
+        </p:nvSpPr>
+        <p:spPr>
+          <a:xfrm>
+            <a:off x="640080" y="3986783"/>
+            <a:ext cx="11155680" cy="201168"/>
+          </a:xfrm>
+          <a:prstGeom prst="rect">
+            <a:avLst/>
+          </a:prstGeom>
+          <a:noFill/>
+        </p:spPr>
+        <p:txBody>
+          <a:bodyPr wrap="none">
+            <a:spAutoFit/>
+          </a:bodyPr>
+          <a:lstStyle/>
+          <a:p>
+            <a:pPr algn="l">
+              <a:defRPr sz="1000" i="1">
+                <a:solidFill>
+                  <a:srgbClr val="555555"/>
+                </a:solidFill>
+              </a:defRPr>
+            </a:pPr>
+            <a:r>
+              <a:t>plot_tree</a:t>
             </a:r>
           </a:p>
         </p:txBody>
@@ -6462,7 +7432,7 @@
         <p:spPr>
           <a:xfrm>
             <a:off x="640080" y="1371600"/>
-            <a:ext cx="6858000" cy="5029200"/>
+            <a:ext cx="6858000" cy="1645920"/>
           </a:xfrm>
           <a:prstGeom prst="rect">
             <a:avLst/>
@@ -6521,9 +7491,208 @@
           </a:p>
         </p:txBody>
       </p:sp>
+      <p:sp>
+        <p:nvSpPr>
+          <p:cNvPr id="4" name="Rectangle 3"/>
+          <p:cNvSpPr/>
+          <p:nvPr/>
+        </p:nvSpPr>
+        <p:spPr>
+          <a:xfrm>
+            <a:off x="640080" y="3127248"/>
+            <a:ext cx="6766560" cy="1152144"/>
+          </a:xfrm>
+          <a:prstGeom prst="rect">
+            <a:avLst/>
+          </a:prstGeom>
+          <a:solidFill>
+            <a:srgbClr val="F5F5F5"/>
+          </a:solidFill>
+          <a:ln>
+            <a:solidFill>
+              <a:srgbClr val="DDDDDD"/>
+            </a:solidFill>
+          </a:ln>
+        </p:spPr>
+        <p:style>
+          <a:lnRef idx="1">
+            <a:schemeClr val="accent1"/>
+          </a:lnRef>
+          <a:fillRef idx="3">
+            <a:schemeClr val="accent1"/>
+          </a:fillRef>
+          <a:effectRef idx="2">
+            <a:schemeClr val="accent1"/>
+          </a:effectRef>
+          <a:fontRef idx="minor">
+            <a:schemeClr val="lt1"/>
+          </a:fontRef>
+        </p:style>
+        <p:txBody>
+          <a:bodyPr rtlCol="0" anchor="ctr"/>
+          <a:lstStyle/>
+          <a:p>
+            <a:pPr algn="ctr"/>
+          </a:p>
+        </p:txBody>
+      </p:sp>
+      <p:sp>
+        <p:nvSpPr>
+          <p:cNvPr id="5" name="TextBox 4"/>
+          <p:cNvSpPr txBox="1"/>
+          <p:nvPr/>
+        </p:nvSpPr>
+        <p:spPr>
+          <a:xfrm>
+            <a:off x="713231" y="3163824"/>
+            <a:ext cx="6620256" cy="1078992"/>
+          </a:xfrm>
+          <a:prstGeom prst="rect">
+            <a:avLst/>
+          </a:prstGeom>
+          <a:noFill/>
+        </p:spPr>
+        <p:txBody>
+          <a:bodyPr wrap="square">
+            <a:noAutofit/>
+          </a:bodyPr>
+          <a:lstStyle/>
+          <a:p>
+            <a:pPr>
+              <a:spcAft>
+                <a:spcPts val="0"/>
+              </a:spcAft>
+              <a:defRPr sz="1100">
+                <a:solidFill>
+                  <a:srgbClr val="000000"/>
+                </a:solidFill>
+                <a:latin typeface="Consolas"/>
+              </a:defRPr>
+            </a:pPr>
+            <a:r>
+              <a:t>import numpy as np</a:t>
+            </a:r>
+          </a:p>
+          <a:p>
+            <a:pPr>
+              <a:spcAft>
+                <a:spcPts val="0"/>
+              </a:spcAft>
+              <a:defRPr sz="1100">
+                <a:solidFill>
+                  <a:srgbClr val="000000"/>
+                </a:solidFill>
+                <a:latin typeface="Consolas"/>
+              </a:defRPr>
+            </a:pPr>
+            <a:r>
+              <a:t>xx, yy = np.meshgrid(</a:t>
+            </a:r>
+          </a:p>
+          <a:p>
+            <a:pPr>
+              <a:spcAft>
+                <a:spcPts val="0"/>
+              </a:spcAft>
+              <a:defRPr sz="1100">
+                <a:solidFill>
+                  <a:srgbClr val="000000"/>
+                </a:solidFill>
+                <a:latin typeface="Consolas"/>
+              </a:defRPr>
+            </a:pPr>
+            <a:r>
+              <a:t>    np.linspace(x.min(), x.max(), 200),</a:t>
+            </a:r>
+          </a:p>
+          <a:p>
+            <a:pPr>
+              <a:spcAft>
+                <a:spcPts val="0"/>
+              </a:spcAft>
+              <a:defRPr sz="1100">
+                <a:solidFill>
+                  <a:srgbClr val="000000"/>
+                </a:solidFill>
+                <a:latin typeface="Consolas"/>
+              </a:defRPr>
+            </a:pPr>
+            <a:r>
+              <a:t>    np.linspace(y.min(), y.max(), 200),</a:t>
+            </a:r>
+          </a:p>
+          <a:p>
+            <a:pPr>
+              <a:spcAft>
+                <a:spcPts val="0"/>
+              </a:spcAft>
+              <a:defRPr sz="1100">
+                <a:solidFill>
+                  <a:srgbClr val="000000"/>
+                </a:solidFill>
+                <a:latin typeface="Consolas"/>
+              </a:defRPr>
+            </a:pPr>
+            <a:r>
+              <a:t>)</a:t>
+            </a:r>
+          </a:p>
+          <a:p>
+            <a:pPr>
+              <a:spcAft>
+                <a:spcPts val="0"/>
+              </a:spcAft>
+              <a:defRPr sz="1100">
+                <a:solidFill>
+                  <a:srgbClr val="000000"/>
+                </a:solidFill>
+                <a:latin typeface="Consolas"/>
+              </a:defRPr>
+            </a:pPr>
+            <a:r>
+              <a:t>Z = clf.predict(np.c_[xx.ravel(), yy.ravel()]).reshape(xx.shape)</a:t>
+            </a:r>
+          </a:p>
+        </p:txBody>
+      </p:sp>
+      <p:sp>
+        <p:nvSpPr>
+          <p:cNvPr id="6" name="TextBox 5"/>
+          <p:cNvSpPr txBox="1"/>
+          <p:nvPr/>
+        </p:nvSpPr>
+        <p:spPr>
+          <a:xfrm>
+            <a:off x="640080" y="4334256"/>
+            <a:ext cx="6766560" cy="201168"/>
+          </a:xfrm>
+          <a:prstGeom prst="rect">
+            <a:avLst/>
+          </a:prstGeom>
+          <a:noFill/>
+        </p:spPr>
+        <p:txBody>
+          <a:bodyPr wrap="none">
+            <a:spAutoFit/>
+          </a:bodyPr>
+          <a:lstStyle/>
+          <a:p>
+            <a:pPr algn="l">
+              <a:defRPr sz="1000" i="1">
+                <a:solidFill>
+                  <a:srgbClr val="555555"/>
+                </a:solidFill>
+              </a:defRPr>
+            </a:pPr>
+            <a:r>
+              <a:t>Сетка для границы</a:t>
+            </a:r>
+          </a:p>
+        </p:txBody>
+      </p:sp>
       <p:pic>
         <p:nvPicPr>
-          <p:cNvPr id="4" name="Picture 3" descr="decision_boundary.png"/>
+          <p:cNvPr id="7" name="Picture 6" descr="decision_boundary.png"/>
           <p:cNvPicPr>
             <a:picLocks noChangeAspect="1"/>
           </p:cNvPicPr>
@@ -6605,7 +7774,7 @@
         <p:spPr>
           <a:xfrm>
             <a:off x="640080" y="1371600"/>
-            <a:ext cx="11247120" cy="5029200"/>
+            <a:ext cx="11247120" cy="1810512"/>
           </a:xfrm>
           <a:prstGeom prst="rect">
             <a:avLst/>
@@ -6739,7 +7908,7 @@
         <p:spPr>
           <a:xfrm>
             <a:off x="640080" y="1371600"/>
-            <a:ext cx="6858000" cy="5029200"/>
+            <a:ext cx="6858000" cy="1810512"/>
           </a:xfrm>
           <a:prstGeom prst="rect">
             <a:avLst/>
@@ -6897,7 +8066,7 @@
         <p:spPr>
           <a:xfrm>
             <a:off x="640080" y="1371600"/>
-            <a:ext cx="11247120" cy="5029200"/>
+            <a:ext cx="11247120" cy="2578608"/>
           </a:xfrm>
           <a:prstGeom prst="rect">
             <a:avLst/>
@@ -6997,6 +8166,173 @@
                 </a:solidFill>
               </a:rPr>
               <a:t>One-Hot при 100+ категориях — разреженность и замедление; альтернатива — целевое кодирование</a:t>
+            </a:r>
+          </a:p>
+        </p:txBody>
+      </p:sp>
+      <p:sp>
+        <p:nvSpPr>
+          <p:cNvPr id="4" name="Rectangle 3"/>
+          <p:cNvSpPr/>
+          <p:nvPr/>
+        </p:nvSpPr>
+        <p:spPr>
+          <a:xfrm>
+            <a:off x="640080" y="4059936"/>
+            <a:ext cx="11155680" cy="804672"/>
+          </a:xfrm>
+          <a:prstGeom prst="rect">
+            <a:avLst/>
+          </a:prstGeom>
+          <a:solidFill>
+            <a:srgbClr val="F5F5F5"/>
+          </a:solidFill>
+          <a:ln>
+            <a:solidFill>
+              <a:srgbClr val="DDDDDD"/>
+            </a:solidFill>
+          </a:ln>
+        </p:spPr>
+        <p:style>
+          <a:lnRef idx="1">
+            <a:schemeClr val="accent1"/>
+          </a:lnRef>
+          <a:fillRef idx="3">
+            <a:schemeClr val="accent1"/>
+          </a:fillRef>
+          <a:effectRef idx="2">
+            <a:schemeClr val="accent1"/>
+          </a:effectRef>
+          <a:fontRef idx="minor">
+            <a:schemeClr val="lt1"/>
+          </a:fontRef>
+        </p:style>
+        <p:txBody>
+          <a:bodyPr rtlCol="0" anchor="ctr"/>
+          <a:lstStyle/>
+          <a:p>
+            <a:pPr algn="ctr"/>
+          </a:p>
+        </p:txBody>
+      </p:sp>
+      <p:sp>
+        <p:nvSpPr>
+          <p:cNvPr id="5" name="TextBox 4"/>
+          <p:cNvSpPr txBox="1"/>
+          <p:nvPr/>
+        </p:nvSpPr>
+        <p:spPr>
+          <a:xfrm>
+            <a:off x="713231" y="4096512"/>
+            <a:ext cx="11009376" cy="731520"/>
+          </a:xfrm>
+          <a:prstGeom prst="rect">
+            <a:avLst/>
+          </a:prstGeom>
+          <a:noFill/>
+        </p:spPr>
+        <p:txBody>
+          <a:bodyPr wrap="square">
+            <a:noAutofit/>
+          </a:bodyPr>
+          <a:lstStyle/>
+          <a:p>
+            <a:pPr>
+              <a:spcAft>
+                <a:spcPts val="0"/>
+              </a:spcAft>
+              <a:defRPr sz="1100">
+                <a:solidFill>
+                  <a:srgbClr val="000000"/>
+                </a:solidFill>
+                <a:latin typeface="Consolas"/>
+              </a:defRPr>
+            </a:pPr>
+            <a:r>
+              <a:t>from sklearn.tree import DecisionTreeClassifier</a:t>
+            </a:r>
+          </a:p>
+          <a:p>
+            <a:pPr>
+              <a:spcAft>
+                <a:spcPts val="0"/>
+              </a:spcAft>
+              <a:defRPr sz="1100">
+                <a:solidFill>
+                  <a:srgbClr val="000000"/>
+                </a:solidFill>
+                <a:latin typeface="Consolas"/>
+              </a:defRPr>
+            </a:pPr>
+            <a:r>
+              <a:t># масштабирование не обязательно</a:t>
+            </a:r>
+          </a:p>
+          <a:p>
+            <a:pPr>
+              <a:spcAft>
+                <a:spcPts val="0"/>
+              </a:spcAft>
+              <a:defRPr sz="1100">
+                <a:solidFill>
+                  <a:srgbClr val="000000"/>
+                </a:solidFill>
+                <a:latin typeface="Consolas"/>
+              </a:defRPr>
+            </a:pPr>
+            <a:r>
+              <a:t>clf = DecisionTreeClassifier(random_state=42)</a:t>
+            </a:r>
+          </a:p>
+          <a:p>
+            <a:pPr>
+              <a:spcAft>
+                <a:spcPts val="0"/>
+              </a:spcAft>
+              <a:defRPr sz="1100">
+                <a:solidFill>
+                  <a:srgbClr val="000000"/>
+                </a:solidFill>
+                <a:latin typeface="Consolas"/>
+              </a:defRPr>
+            </a:pPr>
+            <a:r>
+              <a:t>clf.fit(X_raw, y)  # можно на исходных признаках</a:t>
+            </a:r>
+          </a:p>
+        </p:txBody>
+      </p:sp>
+      <p:sp>
+        <p:nvSpPr>
+          <p:cNvPr id="6" name="TextBox 5"/>
+          <p:cNvSpPr txBox="1"/>
+          <p:nvPr/>
+        </p:nvSpPr>
+        <p:spPr>
+          <a:xfrm>
+            <a:off x="640080" y="4919472"/>
+            <a:ext cx="11155680" cy="201168"/>
+          </a:xfrm>
+          <a:prstGeom prst="rect">
+            <a:avLst/>
+          </a:prstGeom>
+          <a:noFill/>
+        </p:spPr>
+        <p:txBody>
+          <a:bodyPr wrap="none">
+            <a:spAutoFit/>
+          </a:bodyPr>
+          <a:lstStyle/>
+          <a:p>
+            <a:pPr algn="l">
+              <a:defRPr sz="1000" i="1">
+                <a:solidFill>
+                  <a:srgbClr val="555555"/>
+                </a:solidFill>
+              </a:defRPr>
+            </a:pPr>
+            <a:r>
+              <a:t>Без StandardScaler</a:t>
             </a:r>
           </a:p>
         </p:txBody>
@@ -7061,7 +8397,7 @@
         <p:spPr>
           <a:xfrm>
             <a:off x="640080" y="1371600"/>
-            <a:ext cx="11247120" cy="5029200"/>
+            <a:ext cx="11247120" cy="2194560"/>
           </a:xfrm>
           <a:prstGeom prst="rect">
             <a:avLst/>
@@ -7210,7 +8546,7 @@
         <p:spPr>
           <a:xfrm>
             <a:off x="640080" y="1371600"/>
-            <a:ext cx="11247120" cy="5029200"/>
+            <a:ext cx="11247120" cy="2194560"/>
           </a:xfrm>
           <a:prstGeom prst="rect">
             <a:avLst/>
@@ -7425,7 +8761,7 @@
         <p:spPr>
           <a:xfrm>
             <a:off x="640080" y="1371600"/>
-            <a:ext cx="11247120" cy="5029200"/>
+            <a:ext cx="11247120" cy="2962656"/>
           </a:xfrm>
           <a:prstGeom prst="rect">
             <a:avLst/>
@@ -7710,7 +9046,7 @@
         <p:spPr>
           <a:xfrm>
             <a:off x="640080" y="1371600"/>
-            <a:ext cx="11247120" cy="5029200"/>
+            <a:ext cx="11247120" cy="1810512"/>
           </a:xfrm>
           <a:prstGeom prst="rect">
             <a:avLst/>
@@ -8362,7 +9698,7 @@
         <p:spPr>
           <a:xfrm>
             <a:off x="640080" y="1371600"/>
-            <a:ext cx="6858000" cy="5029200"/>
+            <a:ext cx="6858000" cy="1810512"/>
           </a:xfrm>
           <a:prstGeom prst="rect">
             <a:avLst/>
@@ -8586,7 +9922,7 @@
         <p:spPr>
           <a:xfrm>
             <a:off x="640080" y="1371600"/>
-            <a:ext cx="6858000" cy="5029200"/>
+            <a:ext cx="6858000" cy="2194560"/>
           </a:xfrm>
           <a:prstGeom prst="rect">
             <a:avLst/>
@@ -8675,9 +10011,176 @@
           </a:p>
         </p:txBody>
       </p:sp>
+      <p:sp>
+        <p:nvSpPr>
+          <p:cNvPr id="4" name="Rectangle 3"/>
+          <p:cNvSpPr/>
+          <p:nvPr/>
+        </p:nvSpPr>
+        <p:spPr>
+          <a:xfrm>
+            <a:off x="640080" y="3675887"/>
+            <a:ext cx="6766560" cy="804672"/>
+          </a:xfrm>
+          <a:prstGeom prst="rect">
+            <a:avLst/>
+          </a:prstGeom>
+          <a:solidFill>
+            <a:srgbClr val="F5F5F5"/>
+          </a:solidFill>
+          <a:ln>
+            <a:solidFill>
+              <a:srgbClr val="DDDDDD"/>
+            </a:solidFill>
+          </a:ln>
+        </p:spPr>
+        <p:style>
+          <a:lnRef idx="1">
+            <a:schemeClr val="accent1"/>
+          </a:lnRef>
+          <a:fillRef idx="3">
+            <a:schemeClr val="accent1"/>
+          </a:fillRef>
+          <a:effectRef idx="2">
+            <a:schemeClr val="accent1"/>
+          </a:effectRef>
+          <a:fontRef idx="minor">
+            <a:schemeClr val="lt1"/>
+          </a:fontRef>
+        </p:style>
+        <p:txBody>
+          <a:bodyPr rtlCol="0" anchor="ctr"/>
+          <a:lstStyle/>
+          <a:p>
+            <a:pPr algn="ctr"/>
+          </a:p>
+        </p:txBody>
+      </p:sp>
+      <p:sp>
+        <p:nvSpPr>
+          <p:cNvPr id="5" name="TextBox 4"/>
+          <p:cNvSpPr txBox="1"/>
+          <p:nvPr/>
+        </p:nvSpPr>
+        <p:spPr>
+          <a:xfrm>
+            <a:off x="713231" y="3712463"/>
+            <a:ext cx="6620256" cy="731520"/>
+          </a:xfrm>
+          <a:prstGeom prst="rect">
+            <a:avLst/>
+          </a:prstGeom>
+          <a:noFill/>
+        </p:spPr>
+        <p:txBody>
+          <a:bodyPr wrap="square">
+            <a:noAutofit/>
+          </a:bodyPr>
+          <a:lstStyle/>
+          <a:p>
+            <a:pPr>
+              <a:spcAft>
+                <a:spcPts val="0"/>
+              </a:spcAft>
+              <a:defRPr sz="1100">
+                <a:solidFill>
+                  <a:srgbClr val="000000"/>
+                </a:solidFill>
+                <a:latin typeface="Consolas"/>
+              </a:defRPr>
+            </a:pPr>
+            <a:r>
+              <a:t>from sklearn.datasets import load_iris</a:t>
+            </a:r>
+          </a:p>
+          <a:p>
+            <a:pPr>
+              <a:spcAft>
+                <a:spcPts val="0"/>
+              </a:spcAft>
+              <a:defRPr sz="1100">
+                <a:solidFill>
+                  <a:srgbClr val="000000"/>
+                </a:solidFill>
+                <a:latin typeface="Consolas"/>
+              </a:defRPr>
+            </a:pPr>
+            <a:r>
+              <a:t>X, y = load_iris(return_X_y=True)</a:t>
+            </a:r>
+          </a:p>
+          <a:p>
+            <a:pPr>
+              <a:spcAft>
+                <a:spcPts val="0"/>
+              </a:spcAft>
+              <a:defRPr sz="1100">
+                <a:solidFill>
+                  <a:srgbClr val="000000"/>
+                </a:solidFill>
+                <a:latin typeface="Consolas"/>
+              </a:defRPr>
+            </a:pPr>
+            <a:r>
+              <a:t>X, y = X[y != 2], (y[y != 2] == 0).astype(int)</a:t>
+            </a:r>
+          </a:p>
+          <a:p>
+            <a:pPr>
+              <a:spcAft>
+                <a:spcPts val="0"/>
+              </a:spcAft>
+              <a:defRPr sz="1100">
+                <a:solidFill>
+                  <a:srgbClr val="000000"/>
+                </a:solidFill>
+                <a:latin typeface="Consolas"/>
+              </a:defRPr>
+            </a:pPr>
+            <a:r>
+              <a:t># бинарная задача: setosa vs остальные</a:t>
+            </a:r>
+          </a:p>
+        </p:txBody>
+      </p:sp>
+      <p:sp>
+        <p:nvSpPr>
+          <p:cNvPr id="6" name="TextBox 5"/>
+          <p:cNvSpPr txBox="1"/>
+          <p:nvPr/>
+        </p:nvSpPr>
+        <p:spPr>
+          <a:xfrm>
+            <a:off x="640080" y="4535423"/>
+            <a:ext cx="6766560" cy="201168"/>
+          </a:xfrm>
+          <a:prstGeom prst="rect">
+            <a:avLst/>
+          </a:prstGeom>
+          <a:noFill/>
+        </p:spPr>
+        <p:txBody>
+          <a:bodyPr wrap="none">
+            <a:spAutoFit/>
+          </a:bodyPr>
+          <a:lstStyle/>
+          <a:p>
+            <a:pPr algn="l">
+              <a:defRPr sz="1000" i="1">
+                <a:solidFill>
+                  <a:srgbClr val="555555"/>
+                </a:solidFill>
+              </a:defRPr>
+            </a:pPr>
+            <a:r>
+              <a:t>Два класса из iris</a:t>
+            </a:r>
+          </a:p>
+        </p:txBody>
+      </p:sp>
       <p:pic>
         <p:nvPicPr>
-          <p:cNvPr id="4" name="Picture 3" descr="binary_classification_rectangles.png"/>
+          <p:cNvPr id="7" name="Picture 6" descr="binary_classification_rectangles.png"/>
           <p:cNvPicPr>
             <a:picLocks noChangeAspect="1"/>
           </p:cNvPicPr>
@@ -8759,7 +10262,7 @@
         <p:spPr>
           <a:xfrm>
             <a:off x="640080" y="1371600"/>
-            <a:ext cx="11247120" cy="5029200"/>
+            <a:ext cx="11247120" cy="1810512"/>
           </a:xfrm>
           <a:prstGeom prst="rect">
             <a:avLst/>
@@ -8893,7 +10396,7 @@
         <p:spPr>
           <a:xfrm>
             <a:off x="640080" y="1371600"/>
-            <a:ext cx="11247120" cy="5029200"/>
+            <a:ext cx="11247120" cy="1645920"/>
           </a:xfrm>
           <a:prstGeom prst="rect">
             <a:avLst/>
@@ -9055,7 +10558,7 @@
         <p:spPr>
           <a:xfrm>
             <a:off x="640080" y="1371600"/>
-            <a:ext cx="6858000" cy="5029200"/>
+            <a:ext cx="6858000" cy="2194560"/>
           </a:xfrm>
           <a:prstGeom prst="rect">
             <a:avLst/>
@@ -9295,9 +10798,176 @@
           </a:p>
         </p:txBody>
       </p:sp>
+      <p:sp>
+        <p:nvSpPr>
+          <p:cNvPr id="4" name="Rectangle 3"/>
+          <p:cNvSpPr/>
+          <p:nvPr/>
+        </p:nvSpPr>
+        <p:spPr>
+          <a:xfrm>
+            <a:off x="640080" y="3675887"/>
+            <a:ext cx="6766560" cy="804672"/>
+          </a:xfrm>
+          <a:prstGeom prst="rect">
+            <a:avLst/>
+          </a:prstGeom>
+          <a:solidFill>
+            <a:srgbClr val="F5F5F5"/>
+          </a:solidFill>
+          <a:ln>
+            <a:solidFill>
+              <a:srgbClr val="DDDDDD"/>
+            </a:solidFill>
+          </a:ln>
+        </p:spPr>
+        <p:style>
+          <a:lnRef idx="1">
+            <a:schemeClr val="accent1"/>
+          </a:lnRef>
+          <a:fillRef idx="3">
+            <a:schemeClr val="accent1"/>
+          </a:fillRef>
+          <a:effectRef idx="2">
+            <a:schemeClr val="accent1"/>
+          </a:effectRef>
+          <a:fontRef idx="minor">
+            <a:schemeClr val="lt1"/>
+          </a:fontRef>
+        </p:style>
+        <p:txBody>
+          <a:bodyPr rtlCol="0" anchor="ctr"/>
+          <a:lstStyle/>
+          <a:p>
+            <a:pPr algn="ctr"/>
+          </a:p>
+        </p:txBody>
+      </p:sp>
+      <p:sp>
+        <p:nvSpPr>
+          <p:cNvPr id="5" name="TextBox 4"/>
+          <p:cNvSpPr txBox="1"/>
+          <p:nvPr/>
+        </p:nvSpPr>
+        <p:spPr>
+          <a:xfrm>
+            <a:off x="713231" y="3712463"/>
+            <a:ext cx="6620256" cy="731520"/>
+          </a:xfrm>
+          <a:prstGeom prst="rect">
+            <a:avLst/>
+          </a:prstGeom>
+          <a:noFill/>
+        </p:spPr>
+        <p:txBody>
+          <a:bodyPr wrap="square">
+            <a:noAutofit/>
+          </a:bodyPr>
+          <a:lstStyle/>
+          <a:p>
+            <a:pPr>
+              <a:spcAft>
+                <a:spcPts val="0"/>
+              </a:spcAft>
+              <a:defRPr sz="1100">
+                <a:solidFill>
+                  <a:srgbClr val="000000"/>
+                </a:solidFill>
+                <a:latin typeface="Consolas"/>
+              </a:defRPr>
+            </a:pPr>
+            <a:r>
+              <a:t>from sklearn.tree import DecisionTreeClassifier</a:t>
+            </a:r>
+          </a:p>
+          <a:p>
+            <a:pPr>
+              <a:spcAft>
+                <a:spcPts val="0"/>
+              </a:spcAft>
+              <a:defRPr sz="1100">
+                <a:solidFill>
+                  <a:srgbClr val="000000"/>
+                </a:solidFill>
+                <a:latin typeface="Consolas"/>
+              </a:defRPr>
+            </a:pPr>
+            <a:r>
+              <a:t>clf = DecisionTreeClassifier(criterion='gini')</a:t>
+            </a:r>
+          </a:p>
+          <a:p>
+            <a:pPr>
+              <a:spcAft>
+                <a:spcPts val="0"/>
+              </a:spcAft>
+              <a:defRPr sz="1100">
+                <a:solidFill>
+                  <a:srgbClr val="000000"/>
+                </a:solidFill>
+                <a:latin typeface="Consolas"/>
+              </a:defRPr>
+            </a:pPr>
+            <a:r>
+              <a:t>clf_ent = DecisionTreeClassifier(criterion='entropy')</a:t>
+            </a:r>
+          </a:p>
+          <a:p>
+            <a:pPr>
+              <a:spcAft>
+                <a:spcPts val="0"/>
+              </a:spcAft>
+              <a:defRPr sz="1100">
+                <a:solidFill>
+                  <a:srgbClr val="000000"/>
+                </a:solidFill>
+                <a:latin typeface="Consolas"/>
+              </a:defRPr>
+            </a:pPr>
+            <a:r>
+              <a:t># сравните деревья на одних данных</a:t>
+            </a:r>
+          </a:p>
+        </p:txBody>
+      </p:sp>
+      <p:sp>
+        <p:nvSpPr>
+          <p:cNvPr id="6" name="TextBox 5"/>
+          <p:cNvSpPr txBox="1"/>
+          <p:nvPr/>
+        </p:nvSpPr>
+        <p:spPr>
+          <a:xfrm>
+            <a:off x="640080" y="4535423"/>
+            <a:ext cx="6766560" cy="201168"/>
+          </a:xfrm>
+          <a:prstGeom prst="rect">
+            <a:avLst/>
+          </a:prstGeom>
+          <a:noFill/>
+        </p:spPr>
+        <p:txBody>
+          <a:bodyPr wrap="none">
+            <a:spAutoFit/>
+          </a:bodyPr>
+          <a:lstStyle/>
+          <a:p>
+            <a:pPr algn="l">
+              <a:defRPr sz="1000" i="1">
+                <a:solidFill>
+                  <a:srgbClr val="555555"/>
+                </a:solidFill>
+              </a:defRPr>
+            </a:pPr>
+            <a:r>
+              <a:t>Gini vs entropy</a:t>
+            </a:r>
+          </a:p>
+        </p:txBody>
+      </p:sp>
       <p:pic>
         <p:nvPicPr>
-          <p:cNvPr id="4" name="Picture 3" descr="impurity_functions.png"/>
+          <p:cNvPr id="7" name="Picture 6" descr="impurity_functions.png"/>
           <p:cNvPicPr>
             <a:picLocks noChangeAspect="1"/>
           </p:cNvPicPr>
@@ -9379,7 +11049,7 @@
         <p:spPr>
           <a:xfrm>
             <a:off x="640080" y="1371600"/>
-            <a:ext cx="11247120" cy="5029200"/>
+            <a:ext cx="11247120" cy="1810512"/>
           </a:xfrm>
           <a:prstGeom prst="rect">
             <a:avLst/>
@@ -9513,7 +11183,7 @@
         <p:spPr>
           <a:xfrm>
             <a:off x="640080" y="1371600"/>
-            <a:ext cx="11247120" cy="5029200"/>
+            <a:ext cx="11247120" cy="1810512"/>
           </a:xfrm>
           <a:prstGeom prst="rect">
             <a:avLst/>

--- a/lessons/derevo_resheniy/presentation.pptx
+++ b/lessons/derevo_resheniy/presentation.pptx
@@ -9473,7 +9473,7 @@
                 </a:solidFill>
                 <a:hlinkClick r:id="rId5"/>
               </a:rPr>
-              <a:t>https://colab.research.google.com/github/gurovic/ml-lessons/blob/feature/references-and-slide-code/lessons/derevo_resheniy/code.ipynb</a:t>
+              <a:t>https://colab.research.google.com/github/gurovic/ml-lessons/blob/main/lessons/derevo_resheniy/code.ipynb</a:t>
             </a:r>
           </a:p>
         </p:txBody>
@@ -9515,7 +9515,7 @@
                 </a:solidFill>
                 <a:hlinkClick r:id="rId6"/>
               </a:rPr>
-              <a:t>https://colab.research.google.com/github/gurovic/ml-lessons/blob/feature/references-and-slide-code/lessons/derevo_resheniy/project.ipynb</a:t>
+              <a:t>https://colab.research.google.com/github/gurovic/ml-lessons/blob/main/lessons/derevo_resheniy/project.ipynb</a:t>
             </a:r>
           </a:p>
         </p:txBody>

--- a/lessons/derevo_resheniy/presentation.pptx
+++ b/lessons/derevo_resheniy/presentation.pptx
@@ -5476,7 +5476,7 @@
         <p:spPr>
           <a:xfrm>
             <a:off x="640080" y="1371600"/>
-            <a:ext cx="11247120" cy="1810512"/>
+            <a:ext cx="11247120" cy="3209544"/>
           </a:xfrm>
           <a:prstGeom prst="rect">
             <a:avLst/>
@@ -5485,7 +5485,7 @@
         </p:spPr>
         <p:txBody>
           <a:bodyPr wrap="square">
-            <a:spAutoFit/>
+            <a:normAutofit/>
           </a:bodyPr>
           <a:lstStyle/>
           <a:p>
@@ -5558,7 +5558,7 @@
         </p:nvSpPr>
         <p:spPr>
           <a:xfrm>
-            <a:off x="640080" y="3291840"/>
+            <a:off x="640080" y="4690872"/>
             <a:ext cx="11155680" cy="804672"/>
           </a:xfrm>
           <a:prstGeom prst="rect">
@@ -5603,7 +5603,7 @@
         </p:nvSpPr>
         <p:spPr>
           <a:xfrm>
-            <a:off x="713231" y="3328416"/>
+            <a:off x="713231" y="4727448"/>
             <a:ext cx="11009376" cy="731520"/>
           </a:xfrm>
           <a:prstGeom prst="rect">
@@ -5612,7 +5612,7 @@
           <a:noFill/>
         </p:spPr>
         <p:txBody>
-          <a:bodyPr wrap="square">
+          <a:bodyPr wrap="none">
             <a:noAutofit/>
           </a:bodyPr>
           <a:lstStyle/>
@@ -5621,14 +5621,14 @@
               <a:spcAft>
                 <a:spcPts val="0"/>
               </a:spcAft>
-              <a:defRPr sz="1100">
+            </a:pPr>
+            <a:r>
+              <a:rPr sz="1100">
                 <a:solidFill>
                   <a:srgbClr val="000000"/>
                 </a:solidFill>
                 <a:latin typeface="Consolas"/>
-              </a:defRPr>
-            </a:pPr>
-            <a:r>
+              </a:rPr>
               <a:t>from sklearn.metrics import accuracy_score, f1_score</a:t>
             </a:r>
           </a:p>
@@ -5637,14 +5637,14 @@
               <a:spcAft>
                 <a:spcPts val="0"/>
               </a:spcAft>
-              <a:defRPr sz="1100">
+            </a:pPr>
+            <a:r>
+              <a:rPr sz="1100">
                 <a:solidFill>
                   <a:srgbClr val="000000"/>
                 </a:solidFill>
                 <a:latin typeface="Consolas"/>
-              </a:defRPr>
-            </a:pPr>
-            <a:r>
+              </a:rPr>
               <a:t>y_pred = clf.predict(X_test)</a:t>
             </a:r>
           </a:p>
@@ -5653,14 +5653,14 @@
               <a:spcAft>
                 <a:spcPts val="0"/>
               </a:spcAft>
-              <a:defRPr sz="1100">
+            </a:pPr>
+            <a:r>
+              <a:rPr sz="1100">
                 <a:solidFill>
                   <a:srgbClr val="000000"/>
                 </a:solidFill>
                 <a:latin typeface="Consolas"/>
-              </a:defRPr>
-            </a:pPr>
-            <a:r>
+              </a:rPr>
               <a:t>print(accuracy_score(y_test, y_pred))</a:t>
             </a:r>
           </a:p>
@@ -5669,14 +5669,14 @@
               <a:spcAft>
                 <a:spcPts val="0"/>
               </a:spcAft>
-              <a:defRPr sz="1100">
+            </a:pPr>
+            <a:r>
+              <a:rPr sz="1100">
                 <a:solidFill>
                   <a:srgbClr val="000000"/>
                 </a:solidFill>
                 <a:latin typeface="Consolas"/>
-              </a:defRPr>
-            </a:pPr>
-            <a:r>
+              </a:rPr>
               <a:t>print(f1_score(y_test, y_pred, average='macro'))</a:t>
             </a:r>
           </a:p>
@@ -5690,7 +5690,7 @@
         </p:nvSpPr>
         <p:spPr>
           <a:xfrm>
-            <a:off x="640080" y="4151376"/>
+            <a:off x="640080" y="5550408"/>
             <a:ext cx="11155680" cy="201168"/>
           </a:xfrm>
           <a:prstGeom prst="rect">
@@ -5777,7 +5777,7 @@
         <p:spPr>
           <a:xfrm>
             <a:off x="640080" y="1371600"/>
-            <a:ext cx="6858000" cy="2194560"/>
+            <a:ext cx="6858000" cy="3383279"/>
           </a:xfrm>
           <a:prstGeom prst="rect">
             <a:avLst/>
@@ -5786,7 +5786,7 @@
         </p:spPr>
         <p:txBody>
           <a:bodyPr wrap="square">
-            <a:spAutoFit/>
+            <a:normAutofit/>
           </a:bodyPr>
           <a:lstStyle/>
           <a:p>
@@ -5874,7 +5874,7 @@
         </p:nvSpPr>
         <p:spPr>
           <a:xfrm>
-            <a:off x="640080" y="3675887"/>
+            <a:off x="640080" y="4864607"/>
             <a:ext cx="6766560" cy="630936"/>
           </a:xfrm>
           <a:prstGeom prst="rect">
@@ -5919,7 +5919,7 @@
         </p:nvSpPr>
         <p:spPr>
           <a:xfrm>
-            <a:off x="713231" y="3712463"/>
+            <a:off x="713231" y="4901183"/>
             <a:ext cx="6620256" cy="557784"/>
           </a:xfrm>
           <a:prstGeom prst="rect">
@@ -5928,7 +5928,7 @@
           <a:noFill/>
         </p:spPr>
         <p:txBody>
-          <a:bodyPr wrap="square">
+          <a:bodyPr wrap="none">
             <a:noAutofit/>
           </a:bodyPr>
           <a:lstStyle/>
@@ -5937,14 +5937,14 @@
               <a:spcAft>
                 <a:spcPts val="0"/>
               </a:spcAft>
-              <a:defRPr sz="1100">
+            </a:pPr>
+            <a:r>
+              <a:rPr sz="1100">
                 <a:solidFill>
                   <a:srgbClr val="000000"/>
                 </a:solidFill>
                 <a:latin typeface="Consolas"/>
-              </a:defRPr>
-            </a:pPr>
-            <a:r>
+              </a:rPr>
               <a:t>clf_deep = DecisionTreeClassifier(max_depth=None)</a:t>
             </a:r>
           </a:p>
@@ -5953,14 +5953,14 @@
               <a:spcAft>
                 <a:spcPts val="0"/>
               </a:spcAft>
-              <a:defRPr sz="1100">
+            </a:pPr>
+            <a:r>
+              <a:rPr sz="1100">
                 <a:solidFill>
                   <a:srgbClr val="000000"/>
                 </a:solidFill>
                 <a:latin typeface="Consolas"/>
-              </a:defRPr>
-            </a:pPr>
-            <a:r>
+              </a:rPr>
               <a:t>clf_reg = DecisionTreeClassifier(max_depth=3)</a:t>
             </a:r>
           </a:p>
@@ -5969,14 +5969,14 @@
               <a:spcAft>
                 <a:spcPts val="0"/>
               </a:spcAft>
-              <a:defRPr sz="1100">
+            </a:pPr>
+            <a:r>
+              <a:rPr sz="1100">
                 <a:solidFill>
                   <a:srgbClr val="000000"/>
                 </a:solidFill>
                 <a:latin typeface="Consolas"/>
-              </a:defRPr>
-            </a:pPr>
-            <a:r>
+              </a:rPr>
               <a:t># глубокое дерево: высокий train, низкий test</a:t>
             </a:r>
           </a:p>
@@ -5990,7 +5990,7 @@
         </p:nvSpPr>
         <p:spPr>
           <a:xfrm>
-            <a:off x="640080" y="4361688"/>
+            <a:off x="640080" y="5550407"/>
             <a:ext cx="6766560" cy="201168"/>
           </a:xfrm>
           <a:prstGeom prst="rect">
@@ -6101,7 +6101,7 @@
         <p:spPr>
           <a:xfrm>
             <a:off x="640080" y="1371600"/>
-            <a:ext cx="11247120" cy="1810512"/>
+            <a:ext cx="11247120" cy="3209544"/>
           </a:xfrm>
           <a:prstGeom prst="rect">
             <a:avLst/>
@@ -6110,7 +6110,7 @@
         </p:spPr>
         <p:txBody>
           <a:bodyPr wrap="square">
-            <a:spAutoFit/>
+            <a:normAutofit/>
           </a:bodyPr>
           <a:lstStyle/>
           <a:p>
@@ -6183,7 +6183,7 @@
         </p:nvSpPr>
         <p:spPr>
           <a:xfrm>
-            <a:off x="640080" y="3291840"/>
+            <a:off x="640080" y="4690872"/>
             <a:ext cx="11155680" cy="804672"/>
           </a:xfrm>
           <a:prstGeom prst="rect">
@@ -6228,7 +6228,7 @@
         </p:nvSpPr>
         <p:spPr>
           <a:xfrm>
-            <a:off x="713231" y="3328416"/>
+            <a:off x="713231" y="4727448"/>
             <a:ext cx="11009376" cy="731520"/>
           </a:xfrm>
           <a:prstGeom prst="rect">
@@ -6237,7 +6237,7 @@
           <a:noFill/>
         </p:spPr>
         <p:txBody>
-          <a:bodyPr wrap="square">
+          <a:bodyPr wrap="none">
             <a:noAutofit/>
           </a:bodyPr>
           <a:lstStyle/>
@@ -6246,14 +6246,14 @@
               <a:spcAft>
                 <a:spcPts val="0"/>
               </a:spcAft>
-              <a:defRPr sz="1100">
+            </a:pPr>
+            <a:r>
+              <a:rPr sz="1100">
                 <a:solidFill>
                   <a:srgbClr val="000000"/>
                 </a:solidFill>
                 <a:latin typeface="Consolas"/>
-              </a:defRPr>
-            </a:pPr>
-            <a:r>
+              </a:rPr>
               <a:t>from sklearn.tree import DecisionTreeClassifier</a:t>
             </a:r>
           </a:p>
@@ -6262,14 +6262,14 @@
               <a:spcAft>
                 <a:spcPts val="0"/>
               </a:spcAft>
-              <a:defRPr sz="1100">
+            </a:pPr>
+            <a:r>
+              <a:rPr sz="1100">
                 <a:solidFill>
                   <a:srgbClr val="000000"/>
                 </a:solidFill>
                 <a:latin typeface="Consolas"/>
-              </a:defRPr>
-            </a:pPr>
-            <a:r>
+              </a:rPr>
               <a:t>clf = DecisionTreeClassifier(max_depth=3, random_state=42)</a:t>
             </a:r>
           </a:p>
@@ -6278,14 +6278,14 @@
               <a:spcAft>
                 <a:spcPts val="0"/>
               </a:spcAft>
-              <a:defRPr sz="1100">
+            </a:pPr>
+            <a:r>
+              <a:rPr sz="1100">
                 <a:solidFill>
                   <a:srgbClr val="000000"/>
                 </a:solidFill>
                 <a:latin typeface="Consolas"/>
-              </a:defRPr>
-            </a:pPr>
-            <a:r>
+              </a:rPr>
               <a:t>clf.fit(X_train, y_train)</a:t>
             </a:r>
           </a:p>
@@ -6294,14 +6294,14 @@
               <a:spcAft>
                 <a:spcPts val="0"/>
               </a:spcAft>
-              <a:defRPr sz="1100">
+            </a:pPr>
+            <a:r>
+              <a:rPr sz="1100">
                 <a:solidFill>
                   <a:srgbClr val="000000"/>
                 </a:solidFill>
                 <a:latin typeface="Consolas"/>
-              </a:defRPr>
-            </a:pPr>
-            <a:r>
+              </a:rPr>
               <a:t>clf.predict(X_test)</a:t>
             </a:r>
           </a:p>
@@ -6315,7 +6315,7 @@
         </p:nvSpPr>
         <p:spPr>
           <a:xfrm>
-            <a:off x="640080" y="4151376"/>
+            <a:off x="640080" y="5550408"/>
             <a:ext cx="11155680" cy="201168"/>
           </a:xfrm>
           <a:prstGeom prst="rect">
@@ -6402,7 +6402,7 @@
         <p:spPr>
           <a:xfrm>
             <a:off x="640080" y="1371600"/>
-            <a:ext cx="6858000" cy="1645920"/>
+            <a:ext cx="6858000" cy="3383279"/>
           </a:xfrm>
           <a:prstGeom prst="rect">
             <a:avLst/>
@@ -6411,7 +6411,7 @@
         </p:spPr>
         <p:txBody>
           <a:bodyPr wrap="square">
-            <a:spAutoFit/>
+            <a:normAutofit/>
           </a:bodyPr>
           <a:lstStyle/>
           <a:p>
@@ -6469,7 +6469,7 @@
         </p:nvSpPr>
         <p:spPr>
           <a:xfrm>
-            <a:off x="640080" y="3127248"/>
+            <a:off x="640080" y="4864607"/>
             <a:ext cx="6766560" cy="630936"/>
           </a:xfrm>
           <a:prstGeom prst="rect">
@@ -6514,7 +6514,7 @@
         </p:nvSpPr>
         <p:spPr>
           <a:xfrm>
-            <a:off x="713231" y="3163824"/>
+            <a:off x="713231" y="4901183"/>
             <a:ext cx="6620256" cy="557784"/>
           </a:xfrm>
           <a:prstGeom prst="rect">
@@ -6523,7 +6523,7 @@
           <a:noFill/>
         </p:spPr>
         <p:txBody>
-          <a:bodyPr wrap="square">
+          <a:bodyPr wrap="none">
             <a:noAutofit/>
           </a:bodyPr>
           <a:lstStyle/>
@@ -6532,14 +6532,14 @@
               <a:spcAft>
                 <a:spcPts val="0"/>
               </a:spcAft>
-              <a:defRPr sz="1100">
+            </a:pPr>
+            <a:r>
+              <a:rPr sz="1100">
                 <a:solidFill>
                   <a:srgbClr val="000000"/>
                 </a:solidFill>
                 <a:latin typeface="Consolas"/>
-              </a:defRPr>
-            </a:pPr>
-            <a:r>
+              </a:rPr>
               <a:t>import pandas as pd</a:t>
             </a:r>
           </a:p>
@@ -6548,14 +6548,14 @@
               <a:spcAft>
                 <a:spcPts val="0"/>
               </a:spcAft>
-              <a:defRPr sz="1100">
+            </a:pPr>
+            <a:r>
+              <a:rPr sz="1100">
                 <a:solidFill>
                   <a:srgbClr val="000000"/>
                 </a:solidFill>
                 <a:latin typeface="Consolas"/>
-              </a:defRPr>
-            </a:pPr>
-            <a:r>
+              </a:rPr>
               <a:t>imp = pd.Series(clf.feature_importances_, index=feature_names)</a:t>
             </a:r>
           </a:p>
@@ -6564,14 +6564,14 @@
               <a:spcAft>
                 <a:spcPts val="0"/>
               </a:spcAft>
-              <a:defRPr sz="1100">
+            </a:pPr>
+            <a:r>
+              <a:rPr sz="1100">
                 <a:solidFill>
                   <a:srgbClr val="000000"/>
                 </a:solidFill>
                 <a:latin typeface="Consolas"/>
-              </a:defRPr>
-            </a:pPr>
-            <a:r>
+              </a:rPr>
               <a:t>imp.sort_values(ascending=False).head()</a:t>
             </a:r>
           </a:p>
@@ -6585,7 +6585,7 @@
         </p:nvSpPr>
         <p:spPr>
           <a:xfrm>
-            <a:off x="640080" y="3813048"/>
+            <a:off x="640080" y="5550407"/>
             <a:ext cx="6766560" cy="201168"/>
           </a:xfrm>
           <a:prstGeom prst="rect">
@@ -6696,7 +6696,7 @@
         <p:spPr>
           <a:xfrm>
             <a:off x="640080" y="1371600"/>
-            <a:ext cx="11247120" cy="1810512"/>
+            <a:ext cx="11247120" cy="3209544"/>
           </a:xfrm>
           <a:prstGeom prst="rect">
             <a:avLst/>
@@ -6705,7 +6705,7 @@
         </p:spPr>
         <p:txBody>
           <a:bodyPr wrap="square">
-            <a:spAutoFit/>
+            <a:normAutofit/>
           </a:bodyPr>
           <a:lstStyle/>
           <a:p>
@@ -6778,7 +6778,7 @@
         </p:nvSpPr>
         <p:spPr>
           <a:xfrm>
-            <a:off x="640080" y="3291840"/>
+            <a:off x="640080" y="4690872"/>
             <a:ext cx="11155680" cy="804672"/>
           </a:xfrm>
           <a:prstGeom prst="rect">
@@ -6823,7 +6823,7 @@
         </p:nvSpPr>
         <p:spPr>
           <a:xfrm>
-            <a:off x="713231" y="3328416"/>
+            <a:off x="713231" y="4727448"/>
             <a:ext cx="11009376" cy="731520"/>
           </a:xfrm>
           <a:prstGeom prst="rect">
@@ -6832,7 +6832,7 @@
           <a:noFill/>
         </p:spPr>
         <p:txBody>
-          <a:bodyPr wrap="square">
+          <a:bodyPr wrap="none">
             <a:noAutofit/>
           </a:bodyPr>
           <a:lstStyle/>
@@ -6841,14 +6841,14 @@
               <a:spcAft>
                 <a:spcPts val="0"/>
               </a:spcAft>
-              <a:defRPr sz="1100">
+            </a:pPr>
+            <a:r>
+              <a:rPr sz="1100">
                 <a:solidFill>
                   <a:srgbClr val="000000"/>
                 </a:solidFill>
                 <a:latin typeface="Consolas"/>
-              </a:defRPr>
-            </a:pPr>
-            <a:r>
+              </a:rPr>
               <a:t>from sklearn.tree import DecisionTreeRegressor</a:t>
             </a:r>
           </a:p>
@@ -6857,14 +6857,14 @@
               <a:spcAft>
                 <a:spcPts val="0"/>
               </a:spcAft>
-              <a:defRPr sz="1100">
+            </a:pPr>
+            <a:r>
+              <a:rPr sz="1100">
                 <a:solidFill>
                   <a:srgbClr val="000000"/>
                 </a:solidFill>
                 <a:latin typeface="Consolas"/>
-              </a:defRPr>
-            </a:pPr>
-            <a:r>
+              </a:rPr>
               <a:t>reg = DecisionTreeRegressor(max_depth=4, random_state=42)</a:t>
             </a:r>
           </a:p>
@@ -6873,14 +6873,14 @@
               <a:spcAft>
                 <a:spcPts val="0"/>
               </a:spcAft>
-              <a:defRPr sz="1100">
+            </a:pPr>
+            <a:r>
+              <a:rPr sz="1100">
                 <a:solidFill>
                   <a:srgbClr val="000000"/>
                 </a:solidFill>
                 <a:latin typeface="Consolas"/>
-              </a:defRPr>
-            </a:pPr>
-            <a:r>
+              </a:rPr>
               <a:t>reg.fit(X_train, y_train)</a:t>
             </a:r>
           </a:p>
@@ -6889,14 +6889,14 @@
               <a:spcAft>
                 <a:spcPts val="0"/>
               </a:spcAft>
-              <a:defRPr sz="1100">
+            </a:pPr>
+            <a:r>
+              <a:rPr sz="1100">
                 <a:solidFill>
                   <a:srgbClr val="000000"/>
                 </a:solidFill>
                 <a:latin typeface="Consolas"/>
-              </a:defRPr>
-            </a:pPr>
-            <a:r>
+              </a:rPr>
               <a:t>reg.predict(X_test)</a:t>
             </a:r>
           </a:p>
@@ -6910,7 +6910,7 @@
         </p:nvSpPr>
         <p:spPr>
           <a:xfrm>
-            <a:off x="640080" y="4151376"/>
+            <a:off x="640080" y="5550408"/>
             <a:ext cx="11155680" cy="201168"/>
           </a:xfrm>
           <a:prstGeom prst="rect">
@@ -7146,7 +7146,7 @@
         <p:spPr>
           <a:xfrm>
             <a:off x="640080" y="1371600"/>
-            <a:ext cx="11247120" cy="1645920"/>
+            <a:ext cx="11247120" cy="3209544"/>
           </a:xfrm>
           <a:prstGeom prst="rect">
             <a:avLst/>
@@ -7155,7 +7155,7 @@
         </p:spPr>
         <p:txBody>
           <a:bodyPr wrap="square">
-            <a:spAutoFit/>
+            <a:normAutofit/>
           </a:bodyPr>
           <a:lstStyle/>
           <a:p>
@@ -7213,7 +7213,7 @@
         </p:nvSpPr>
         <p:spPr>
           <a:xfrm>
-            <a:off x="640080" y="3127248"/>
+            <a:off x="640080" y="4690872"/>
             <a:ext cx="11155680" cy="804672"/>
           </a:xfrm>
           <a:prstGeom prst="rect">
@@ -7258,7 +7258,7 @@
         </p:nvSpPr>
         <p:spPr>
           <a:xfrm>
-            <a:off x="713231" y="3163824"/>
+            <a:off x="713231" y="4727448"/>
             <a:ext cx="11009376" cy="731520"/>
           </a:xfrm>
           <a:prstGeom prst="rect">
@@ -7267,7 +7267,7 @@
           <a:noFill/>
         </p:spPr>
         <p:txBody>
-          <a:bodyPr wrap="square">
+          <a:bodyPr wrap="none">
             <a:noAutofit/>
           </a:bodyPr>
           <a:lstStyle/>
@@ -7276,14 +7276,14 @@
               <a:spcAft>
                 <a:spcPts val="0"/>
               </a:spcAft>
-              <a:defRPr sz="1100">
+            </a:pPr>
+            <a:r>
+              <a:rPr sz="1100">
                 <a:solidFill>
                   <a:srgbClr val="000000"/>
                 </a:solidFill>
                 <a:latin typeface="Consolas"/>
-              </a:defRPr>
-            </a:pPr>
-            <a:r>
+              </a:rPr>
               <a:t>from sklearn.tree import plot_tree</a:t>
             </a:r>
           </a:p>
@@ -7292,14 +7292,14 @@
               <a:spcAft>
                 <a:spcPts val="0"/>
               </a:spcAft>
-              <a:defRPr sz="1100">
+            </a:pPr>
+            <a:r>
+              <a:rPr sz="1100">
                 <a:solidFill>
                   <a:srgbClr val="000000"/>
                 </a:solidFill>
                 <a:latin typeface="Consolas"/>
-              </a:defRPr>
-            </a:pPr>
-            <a:r>
+              </a:rPr>
               <a:t>import matplotlib.pyplot as plt</a:t>
             </a:r>
           </a:p>
@@ -7308,14 +7308,14 @@
               <a:spcAft>
                 <a:spcPts val="0"/>
               </a:spcAft>
-              <a:defRPr sz="1100">
+            </a:pPr>
+            <a:r>
+              <a:rPr sz="1100">
                 <a:solidFill>
                   <a:srgbClr val="000000"/>
                 </a:solidFill>
                 <a:latin typeface="Consolas"/>
-              </a:defRPr>
-            </a:pPr>
-            <a:r>
+              </a:rPr>
               <a:t>plot_tree(clf, feature_names=names, filled=True)</a:t>
             </a:r>
           </a:p>
@@ -7324,14 +7324,14 @@
               <a:spcAft>
                 <a:spcPts val="0"/>
               </a:spcAft>
-              <a:defRPr sz="1100">
+            </a:pPr>
+            <a:r>
+              <a:rPr sz="1100">
                 <a:solidFill>
                   <a:srgbClr val="000000"/>
                 </a:solidFill>
                 <a:latin typeface="Consolas"/>
-              </a:defRPr>
-            </a:pPr>
-            <a:r>
+              </a:rPr>
               <a:t>plt.show()</a:t>
             </a:r>
           </a:p>
@@ -7345,7 +7345,7 @@
         </p:nvSpPr>
         <p:spPr>
           <a:xfrm>
-            <a:off x="640080" y="3986783"/>
+            <a:off x="640080" y="5550408"/>
             <a:ext cx="11155680" cy="201168"/>
           </a:xfrm>
           <a:prstGeom prst="rect">
@@ -7432,7 +7432,7 @@
         <p:spPr>
           <a:xfrm>
             <a:off x="640080" y="1371600"/>
-            <a:ext cx="6858000" cy="1645920"/>
+            <a:ext cx="6858000" cy="2862071"/>
           </a:xfrm>
           <a:prstGeom prst="rect">
             <a:avLst/>
@@ -7441,7 +7441,7 @@
         </p:spPr>
         <p:txBody>
           <a:bodyPr wrap="square">
-            <a:spAutoFit/>
+            <a:normAutofit/>
           </a:bodyPr>
           <a:lstStyle/>
           <a:p>
@@ -7499,7 +7499,7 @@
         </p:nvSpPr>
         <p:spPr>
           <a:xfrm>
-            <a:off x="640080" y="3127248"/>
+            <a:off x="640080" y="4343399"/>
             <a:ext cx="6766560" cy="1152144"/>
           </a:xfrm>
           <a:prstGeom prst="rect">
@@ -7544,7 +7544,7 @@
         </p:nvSpPr>
         <p:spPr>
           <a:xfrm>
-            <a:off x="713231" y="3163824"/>
+            <a:off x="713231" y="4379975"/>
             <a:ext cx="6620256" cy="1078992"/>
           </a:xfrm>
           <a:prstGeom prst="rect">
@@ -7553,7 +7553,7 @@
           <a:noFill/>
         </p:spPr>
         <p:txBody>
-          <a:bodyPr wrap="square">
+          <a:bodyPr wrap="none">
             <a:noAutofit/>
           </a:bodyPr>
           <a:lstStyle/>
@@ -7562,14 +7562,14 @@
               <a:spcAft>
                 <a:spcPts val="0"/>
               </a:spcAft>
-              <a:defRPr sz="1100">
+            </a:pPr>
+            <a:r>
+              <a:rPr sz="1100">
                 <a:solidFill>
                   <a:srgbClr val="000000"/>
                 </a:solidFill>
                 <a:latin typeface="Consolas"/>
-              </a:defRPr>
-            </a:pPr>
-            <a:r>
+              </a:rPr>
               <a:t>import numpy as np</a:t>
             </a:r>
           </a:p>
@@ -7578,14 +7578,14 @@
               <a:spcAft>
                 <a:spcPts val="0"/>
               </a:spcAft>
-              <a:defRPr sz="1100">
+            </a:pPr>
+            <a:r>
+              <a:rPr sz="1100">
                 <a:solidFill>
                   <a:srgbClr val="000000"/>
                 </a:solidFill>
                 <a:latin typeface="Consolas"/>
-              </a:defRPr>
-            </a:pPr>
-            <a:r>
+              </a:rPr>
               <a:t>xx, yy = np.meshgrid(</a:t>
             </a:r>
           </a:p>
@@ -7594,14 +7594,14 @@
               <a:spcAft>
                 <a:spcPts val="0"/>
               </a:spcAft>
-              <a:defRPr sz="1100">
+            </a:pPr>
+            <a:r>
+              <a:rPr sz="1100">
                 <a:solidFill>
                   <a:srgbClr val="000000"/>
                 </a:solidFill>
                 <a:latin typeface="Consolas"/>
-              </a:defRPr>
-            </a:pPr>
-            <a:r>
+              </a:rPr>
               <a:t>    np.linspace(x.min(), x.max(), 200),</a:t>
             </a:r>
           </a:p>
@@ -7610,14 +7610,14 @@
               <a:spcAft>
                 <a:spcPts val="0"/>
               </a:spcAft>
-              <a:defRPr sz="1100">
+            </a:pPr>
+            <a:r>
+              <a:rPr sz="1100">
                 <a:solidFill>
                   <a:srgbClr val="000000"/>
                 </a:solidFill>
                 <a:latin typeface="Consolas"/>
-              </a:defRPr>
-            </a:pPr>
-            <a:r>
+              </a:rPr>
               <a:t>    np.linspace(y.min(), y.max(), 200),</a:t>
             </a:r>
           </a:p>
@@ -7626,14 +7626,14 @@
               <a:spcAft>
                 <a:spcPts val="0"/>
               </a:spcAft>
-              <a:defRPr sz="1100">
+            </a:pPr>
+            <a:r>
+              <a:rPr sz="1100">
                 <a:solidFill>
                   <a:srgbClr val="000000"/>
                 </a:solidFill>
                 <a:latin typeface="Consolas"/>
-              </a:defRPr>
-            </a:pPr>
-            <a:r>
+              </a:rPr>
               <a:t>)</a:t>
             </a:r>
           </a:p>
@@ -7642,14 +7642,14 @@
               <a:spcAft>
                 <a:spcPts val="0"/>
               </a:spcAft>
-              <a:defRPr sz="1100">
+            </a:pPr>
+            <a:r>
+              <a:rPr sz="1100">
                 <a:solidFill>
                   <a:srgbClr val="000000"/>
                 </a:solidFill>
                 <a:latin typeface="Consolas"/>
-              </a:defRPr>
-            </a:pPr>
-            <a:r>
+              </a:rPr>
               <a:t>Z = clf.predict(np.c_[xx.ravel(), yy.ravel()]).reshape(xx.shape)</a:t>
             </a:r>
           </a:p>
@@ -7663,7 +7663,7 @@
         </p:nvSpPr>
         <p:spPr>
           <a:xfrm>
-            <a:off x="640080" y="4334256"/>
+            <a:off x="640080" y="5550407"/>
             <a:ext cx="6766560" cy="201168"/>
           </a:xfrm>
           <a:prstGeom prst="rect">
@@ -8066,7 +8066,7 @@
         <p:spPr>
           <a:xfrm>
             <a:off x="640080" y="1371600"/>
-            <a:ext cx="11247120" cy="2578608"/>
+            <a:ext cx="11247120" cy="3209544"/>
           </a:xfrm>
           <a:prstGeom prst="rect">
             <a:avLst/>
@@ -8075,7 +8075,7 @@
         </p:spPr>
         <p:txBody>
           <a:bodyPr wrap="square">
-            <a:spAutoFit/>
+            <a:normAutofit/>
           </a:bodyPr>
           <a:lstStyle/>
           <a:p>
@@ -8178,7 +8178,7 @@
         </p:nvSpPr>
         <p:spPr>
           <a:xfrm>
-            <a:off x="640080" y="4059936"/>
+            <a:off x="640080" y="4690872"/>
             <a:ext cx="11155680" cy="804672"/>
           </a:xfrm>
           <a:prstGeom prst="rect">
@@ -8223,7 +8223,7 @@
         </p:nvSpPr>
         <p:spPr>
           <a:xfrm>
-            <a:off x="713231" y="4096512"/>
+            <a:off x="713231" y="4727448"/>
             <a:ext cx="11009376" cy="731520"/>
           </a:xfrm>
           <a:prstGeom prst="rect">
@@ -8232,7 +8232,7 @@
           <a:noFill/>
         </p:spPr>
         <p:txBody>
-          <a:bodyPr wrap="square">
+          <a:bodyPr wrap="none">
             <a:noAutofit/>
           </a:bodyPr>
           <a:lstStyle/>
@@ -8241,14 +8241,14 @@
               <a:spcAft>
                 <a:spcPts val="0"/>
               </a:spcAft>
-              <a:defRPr sz="1100">
+            </a:pPr>
+            <a:r>
+              <a:rPr sz="1100">
                 <a:solidFill>
                   <a:srgbClr val="000000"/>
                 </a:solidFill>
                 <a:latin typeface="Consolas"/>
-              </a:defRPr>
-            </a:pPr>
-            <a:r>
+              </a:rPr>
               <a:t>from sklearn.tree import DecisionTreeClassifier</a:t>
             </a:r>
           </a:p>
@@ -8257,14 +8257,14 @@
               <a:spcAft>
                 <a:spcPts val="0"/>
               </a:spcAft>
-              <a:defRPr sz="1100">
+            </a:pPr>
+            <a:r>
+              <a:rPr sz="1100">
                 <a:solidFill>
                   <a:srgbClr val="000000"/>
                 </a:solidFill>
                 <a:latin typeface="Consolas"/>
-              </a:defRPr>
-            </a:pPr>
-            <a:r>
+              </a:rPr>
               <a:t># масштабирование не обязательно</a:t>
             </a:r>
           </a:p>
@@ -8273,14 +8273,14 @@
               <a:spcAft>
                 <a:spcPts val="0"/>
               </a:spcAft>
-              <a:defRPr sz="1100">
+            </a:pPr>
+            <a:r>
+              <a:rPr sz="1100">
                 <a:solidFill>
                   <a:srgbClr val="000000"/>
                 </a:solidFill>
                 <a:latin typeface="Consolas"/>
-              </a:defRPr>
-            </a:pPr>
-            <a:r>
+              </a:rPr>
               <a:t>clf = DecisionTreeClassifier(random_state=42)</a:t>
             </a:r>
           </a:p>
@@ -8289,14 +8289,14 @@
               <a:spcAft>
                 <a:spcPts val="0"/>
               </a:spcAft>
-              <a:defRPr sz="1100">
+            </a:pPr>
+            <a:r>
+              <a:rPr sz="1100">
                 <a:solidFill>
                   <a:srgbClr val="000000"/>
                 </a:solidFill>
                 <a:latin typeface="Consolas"/>
-              </a:defRPr>
-            </a:pPr>
-            <a:r>
+              </a:rPr>
               <a:t>clf.fit(X_raw, y)  # можно на исходных признаках</a:t>
             </a:r>
           </a:p>
@@ -8310,7 +8310,7 @@
         </p:nvSpPr>
         <p:spPr>
           <a:xfrm>
-            <a:off x="640080" y="4919472"/>
+            <a:off x="640080" y="5550408"/>
             <a:ext cx="11155680" cy="201168"/>
           </a:xfrm>
           <a:prstGeom prst="rect">
@@ -9293,16 +9293,7 @@
                   <a:srgbClr val="000000"/>
                 </a:solidFill>
               </a:rPr>
-              <a:t xml:space="preserve">• </a:t>
-            </a:r>
-            <a:r>
-              <a:rPr sz="1600">
-                <a:solidFill>
-                  <a:srgbClr val="3366CC"/>
-                </a:solidFill>
-                <a:hlinkClick r:id="rId2"/>
-              </a:rPr>
-              <a:t>Breiman L., Friedman J., Olshen R., Stone C. (1984). Classification and Regression Trees</a:t>
+              <a:t>• Breiman L., Friedman J., Olshen R., Stone C. (1984). Classification and Regression Trees</a:t>
             </a:r>
           </a:p>
         </p:txBody>
@@ -9347,7 +9338,7 @@
                 <a:solidFill>
                   <a:srgbClr val="3366CC"/>
                 </a:solidFill>
-                <a:hlinkClick r:id="rId3"/>
+                <a:hlinkClick r:id="rId2"/>
               </a:rPr>
               <a:t>Quinlan J.R. (1986). Induction of Decision Trees</a:t>
             </a:r>
@@ -9394,7 +9385,7 @@
                 <a:solidFill>
                   <a:srgbClr val="3366CC"/>
                 </a:solidFill>
-                <a:hlinkClick r:id="rId4"/>
+                <a:hlinkClick r:id="rId3"/>
               </a:rPr>
               <a:t>Breiman L. (2001). Random Forests</a:t>
             </a:r>
@@ -9471,7 +9462,7 @@
                 <a:solidFill>
                   <a:srgbClr val="3366CC"/>
                 </a:solidFill>
-                <a:hlinkClick r:id="rId5"/>
+                <a:hlinkClick r:id="rId4"/>
               </a:rPr>
               <a:t>https://colab.research.google.com/github/gurovic/ml-lessons/blob/main/lessons/derevo_resheniy/code.ipynb</a:t>
             </a:r>
@@ -9513,7 +9504,7 @@
                 <a:solidFill>
                   <a:srgbClr val="3366CC"/>
                 </a:solidFill>
-                <a:hlinkClick r:id="rId6"/>
+                <a:hlinkClick r:id="rId5"/>
               </a:rPr>
               <a:t>https://colab.research.google.com/github/gurovic/ml-lessons/blob/main/lessons/derevo_resheniy/project.ipynb</a:t>
             </a:r>
@@ -9529,7 +9520,7 @@
           <p:nvPr/>
         </p:nvPicPr>
         <p:blipFill>
-          <a:blip r:embed="rId7"/>
+          <a:blip r:embed="rId6"/>
           <a:stretch>
             <a:fillRect/>
           </a:stretch>
@@ -9588,7 +9579,7 @@
           <p:nvPr/>
         </p:nvPicPr>
         <p:blipFill>
-          <a:blip r:embed="rId8"/>
+          <a:blip r:embed="rId7"/>
           <a:stretch>
             <a:fillRect/>
           </a:stretch>
@@ -9922,7 +9913,7 @@
         <p:spPr>
           <a:xfrm>
             <a:off x="640080" y="1371600"/>
-            <a:ext cx="6858000" cy="2194560"/>
+            <a:ext cx="6858000" cy="3209544"/>
           </a:xfrm>
           <a:prstGeom prst="rect">
             <a:avLst/>
@@ -9931,7 +9922,7 @@
         </p:spPr>
         <p:txBody>
           <a:bodyPr wrap="square">
-            <a:spAutoFit/>
+            <a:normAutofit/>
           </a:bodyPr>
           <a:lstStyle/>
           <a:p>
@@ -10019,7 +10010,7 @@
         </p:nvSpPr>
         <p:spPr>
           <a:xfrm>
-            <a:off x="640080" y="3675887"/>
+            <a:off x="640080" y="4690872"/>
             <a:ext cx="6766560" cy="804672"/>
           </a:xfrm>
           <a:prstGeom prst="rect">
@@ -10064,7 +10055,7 @@
         </p:nvSpPr>
         <p:spPr>
           <a:xfrm>
-            <a:off x="713231" y="3712463"/>
+            <a:off x="713231" y="4727448"/>
             <a:ext cx="6620256" cy="731520"/>
           </a:xfrm>
           <a:prstGeom prst="rect">
@@ -10073,7 +10064,7 @@
           <a:noFill/>
         </p:spPr>
         <p:txBody>
-          <a:bodyPr wrap="square">
+          <a:bodyPr wrap="none">
             <a:noAutofit/>
           </a:bodyPr>
           <a:lstStyle/>
@@ -10082,14 +10073,14 @@
               <a:spcAft>
                 <a:spcPts val="0"/>
               </a:spcAft>
-              <a:defRPr sz="1100">
+            </a:pPr>
+            <a:r>
+              <a:rPr sz="1100">
                 <a:solidFill>
                   <a:srgbClr val="000000"/>
                 </a:solidFill>
                 <a:latin typeface="Consolas"/>
-              </a:defRPr>
-            </a:pPr>
-            <a:r>
+              </a:rPr>
               <a:t>from sklearn.datasets import load_iris</a:t>
             </a:r>
           </a:p>
@@ -10098,14 +10089,14 @@
               <a:spcAft>
                 <a:spcPts val="0"/>
               </a:spcAft>
-              <a:defRPr sz="1100">
+            </a:pPr>
+            <a:r>
+              <a:rPr sz="1100">
                 <a:solidFill>
                   <a:srgbClr val="000000"/>
                 </a:solidFill>
                 <a:latin typeface="Consolas"/>
-              </a:defRPr>
-            </a:pPr>
-            <a:r>
+              </a:rPr>
               <a:t>X, y = load_iris(return_X_y=True)</a:t>
             </a:r>
           </a:p>
@@ -10114,14 +10105,14 @@
               <a:spcAft>
                 <a:spcPts val="0"/>
               </a:spcAft>
-              <a:defRPr sz="1100">
+            </a:pPr>
+            <a:r>
+              <a:rPr sz="1100">
                 <a:solidFill>
                   <a:srgbClr val="000000"/>
                 </a:solidFill>
                 <a:latin typeface="Consolas"/>
-              </a:defRPr>
-            </a:pPr>
-            <a:r>
+              </a:rPr>
               <a:t>X, y = X[y != 2], (y[y != 2] == 0).astype(int)</a:t>
             </a:r>
           </a:p>
@@ -10130,14 +10121,14 @@
               <a:spcAft>
                 <a:spcPts val="0"/>
               </a:spcAft>
-              <a:defRPr sz="1100">
+            </a:pPr>
+            <a:r>
+              <a:rPr sz="1100">
                 <a:solidFill>
                   <a:srgbClr val="000000"/>
                 </a:solidFill>
                 <a:latin typeface="Consolas"/>
-              </a:defRPr>
-            </a:pPr>
-            <a:r>
+              </a:rPr>
               <a:t># бинарная задача: setosa vs остальные</a:t>
             </a:r>
           </a:p>
@@ -10151,7 +10142,7 @@
         </p:nvSpPr>
         <p:spPr>
           <a:xfrm>
-            <a:off x="640080" y="4535423"/>
+            <a:off x="640080" y="5550408"/>
             <a:ext cx="6766560" cy="201168"/>
           </a:xfrm>
           <a:prstGeom prst="rect">
@@ -10558,7 +10549,7 @@
         <p:spPr>
           <a:xfrm>
             <a:off x="640080" y="1371600"/>
-            <a:ext cx="6858000" cy="2194560"/>
+            <a:ext cx="6858000" cy="3209544"/>
           </a:xfrm>
           <a:prstGeom prst="rect">
             <a:avLst/>
@@ -10567,7 +10558,7 @@
         </p:spPr>
         <p:txBody>
           <a:bodyPr wrap="square">
-            <a:spAutoFit/>
+            <a:normAutofit/>
           </a:bodyPr>
           <a:lstStyle/>
           <a:p>
@@ -10806,7 +10797,7 @@
         </p:nvSpPr>
         <p:spPr>
           <a:xfrm>
-            <a:off x="640080" y="3675887"/>
+            <a:off x="640080" y="4690872"/>
             <a:ext cx="6766560" cy="804672"/>
           </a:xfrm>
           <a:prstGeom prst="rect">
@@ -10851,7 +10842,7 @@
         </p:nvSpPr>
         <p:spPr>
           <a:xfrm>
-            <a:off x="713231" y="3712463"/>
+            <a:off x="713231" y="4727448"/>
             <a:ext cx="6620256" cy="731520"/>
           </a:xfrm>
           <a:prstGeom prst="rect">
@@ -10860,7 +10851,7 @@
           <a:noFill/>
         </p:spPr>
         <p:txBody>
-          <a:bodyPr wrap="square">
+          <a:bodyPr wrap="none">
             <a:noAutofit/>
           </a:bodyPr>
           <a:lstStyle/>
@@ -10869,14 +10860,14 @@
               <a:spcAft>
                 <a:spcPts val="0"/>
               </a:spcAft>
-              <a:defRPr sz="1100">
+            </a:pPr>
+            <a:r>
+              <a:rPr sz="1100">
                 <a:solidFill>
                   <a:srgbClr val="000000"/>
                 </a:solidFill>
                 <a:latin typeface="Consolas"/>
-              </a:defRPr>
-            </a:pPr>
-            <a:r>
+              </a:rPr>
               <a:t>from sklearn.tree import DecisionTreeClassifier</a:t>
             </a:r>
           </a:p>
@@ -10885,14 +10876,14 @@
               <a:spcAft>
                 <a:spcPts val="0"/>
               </a:spcAft>
-              <a:defRPr sz="1100">
+            </a:pPr>
+            <a:r>
+              <a:rPr sz="1100">
                 <a:solidFill>
                   <a:srgbClr val="000000"/>
                 </a:solidFill>
                 <a:latin typeface="Consolas"/>
-              </a:defRPr>
-            </a:pPr>
-            <a:r>
+              </a:rPr>
               <a:t>clf = DecisionTreeClassifier(criterion='gini')</a:t>
             </a:r>
           </a:p>
@@ -10901,14 +10892,14 @@
               <a:spcAft>
                 <a:spcPts val="0"/>
               </a:spcAft>
-              <a:defRPr sz="1100">
+            </a:pPr>
+            <a:r>
+              <a:rPr sz="1100">
                 <a:solidFill>
                   <a:srgbClr val="000000"/>
                 </a:solidFill>
                 <a:latin typeface="Consolas"/>
-              </a:defRPr>
-            </a:pPr>
-            <a:r>
+              </a:rPr>
               <a:t>clf_ent = DecisionTreeClassifier(criterion='entropy')</a:t>
             </a:r>
           </a:p>
@@ -10917,14 +10908,14 @@
               <a:spcAft>
                 <a:spcPts val="0"/>
               </a:spcAft>
-              <a:defRPr sz="1100">
+            </a:pPr>
+            <a:r>
+              <a:rPr sz="1100">
                 <a:solidFill>
                   <a:srgbClr val="000000"/>
                 </a:solidFill>
                 <a:latin typeface="Consolas"/>
-              </a:defRPr>
-            </a:pPr>
-            <a:r>
+              </a:rPr>
               <a:t># сравните деревья на одних данных</a:t>
             </a:r>
           </a:p>
@@ -10938,7 +10929,7 @@
         </p:nvSpPr>
         <p:spPr>
           <a:xfrm>
-            <a:off x="640080" y="4535423"/>
+            <a:off x="640080" y="5550408"/>
             <a:ext cx="6766560" cy="201168"/>
           </a:xfrm>
           <a:prstGeom prst="rect">

--- a/lessons/derevo_resheniy/presentation.pptx
+++ b/lessons/derevo_resheniy/presentation.pptx
@@ -5277,7 +5277,7 @@
               </a:defRPr>
             </a:pPr>
             <a:r>
-              <a:t>28.06.2026</a:t>
+              <a:t>29.06.2026</a:t>
             </a:r>
           </a:p>
         </p:txBody>
@@ -5342,7 +5342,7 @@
         <p:spPr>
           <a:xfrm>
             <a:off x="640080" y="1371600"/>
-            <a:ext cx="11247120" cy="1810512"/>
+            <a:ext cx="11247120" cy="2423160"/>
           </a:xfrm>
           <a:prstGeom prst="rect">
             <a:avLst/>
@@ -5366,7 +5366,7 @@
                   <a:srgbClr val="000000"/>
                 </a:solidFill>
               </a:rPr>
-              <a:t>Дерево склонно выбирать признаки с большим числом уникальных значений (ID, дата рождения, имя)</a:t>
+              <a:t>• Дерево склонно выбирать признаки с большим числом уникальных значений (ID, дата рождения, имя)</a:t>
             </a:r>
           </a:p>
           <a:p>
@@ -5381,7 +5381,7 @@
                   <a:srgbClr val="000000"/>
                 </a:solidFill>
               </a:rPr>
-              <a:t>Такой признак может идеально разделить выборку — каждому объекту свой лист → переобучение</a:t>
+              <a:t>• Такой признак может идеально разделить выборку — каждому объекту свой лист → переобучение</a:t>
             </a:r>
           </a:p>
           <a:p>
@@ -5396,7 +5396,7 @@
                   <a:srgbClr val="000000"/>
                 </a:solidFill>
               </a:rPr>
-              <a:t>Решение: Gain Ratio в C4.5 (нормирует gain на split information), ограничение глубины, min_samples_leaf</a:t>
+              <a:t>• Решение: Gain Ratio в C4.5 (нормирует gain на split information), ограничение глубины, min_samples_leaf</a:t>
             </a:r>
           </a:p>
           <a:p>
@@ -5411,7 +5411,7 @@
                   <a:srgbClr val="000000"/>
                 </a:solidFill>
               </a:rPr>
-              <a:t>Если есть ID или строка-идентификатор — УДАЛИТЕ перед обучением!</a:t>
+              <a:t>• Если есть ID или строка-идентификатор — УДАЛИТЕ перед обучением!</a:t>
             </a:r>
           </a:p>
         </p:txBody>
@@ -5476,7 +5476,7 @@
         <p:spPr>
           <a:xfrm>
             <a:off x="640080" y="1371600"/>
-            <a:ext cx="11247120" cy="3209544"/>
+            <a:ext cx="11247120" cy="2148839"/>
           </a:xfrm>
           <a:prstGeom prst="rect">
             <a:avLst/>
@@ -5485,7 +5485,7 @@
         </p:spPr>
         <p:txBody>
           <a:bodyPr wrap="square">
-            <a:normAutofit/>
+            <a:spAutoFit/>
           </a:bodyPr>
           <a:lstStyle/>
           <a:p>
@@ -5500,7 +5500,7 @@
                   <a:srgbClr val="000000"/>
                 </a:solidFill>
               </a:rPr>
-              <a:t>Accuracy недостаточна для несбалансированных данных — смотрите precision, recall, F1 по классам</a:t>
+              <a:t>• Accuracy недостаточна для несбалансированных данных — смотрите precision, recall, F1 по классам</a:t>
             </a:r>
           </a:p>
           <a:p>
@@ -5515,7 +5515,7 @@
                   <a:srgbClr val="000000"/>
                 </a:solidFill>
               </a:rPr>
-              <a:t>Для многоклассовой классификации — микро/макро-усреднение метрик</a:t>
+              <a:t>• Для многоклассовой классификации — микро/макро-усреднение метрик</a:t>
             </a:r>
           </a:p>
           <a:p>
@@ -5530,7 +5530,7 @@
                   <a:srgbClr val="000000"/>
                 </a:solidFill>
               </a:rPr>
-              <a:t>DecisionTreeClassifier: class_weight='balanced' — увеличивает вес минорных классов при подсчёте impurity при построении дерева (не при predict)</a:t>
+              <a:t>• DecisionTreeClassifier: class_weight='balanced' — увеличивает вес минорных классов при подсчёте impurity при построении дерева (не при predict)</a:t>
             </a:r>
           </a:p>
           <a:p>
@@ -5545,7 +5545,7 @@
                   <a:srgbClr val="000000"/>
                 </a:solidFill>
               </a:rPr>
-              <a:t>Это частично решает проблему дисбаланса</a:t>
+              <a:t>• Это частично решает проблему дисбаланса</a:t>
             </a:r>
           </a:p>
         </p:txBody>
@@ -5559,7 +5559,7 @@
         <p:spPr>
           <a:xfrm>
             <a:off x="640080" y="4690872"/>
-            <a:ext cx="11155680" cy="804672"/>
+            <a:ext cx="11155680" cy="630936"/>
           </a:xfrm>
           <a:prstGeom prst="rect">
             <a:avLst/>
@@ -5604,7 +5604,7 @@
         <p:spPr>
           <a:xfrm>
             <a:off x="713231" y="4727448"/>
-            <a:ext cx="11009376" cy="731520"/>
+            <a:ext cx="11009376" cy="557784"/>
           </a:xfrm>
           <a:prstGeom prst="rect">
             <a:avLst/>
@@ -5629,22 +5629,6 @@
                 </a:solidFill>
                 <a:latin typeface="Consolas"/>
               </a:rPr>
-              <a:t>from sklearn.metrics import accuracy_score, f1_score</a:t>
-            </a:r>
-          </a:p>
-          <a:p>
-            <a:pPr>
-              <a:spcAft>
-                <a:spcPts val="0"/>
-              </a:spcAft>
-            </a:pPr>
-            <a:r>
-              <a:rPr sz="1100">
-                <a:solidFill>
-                  <a:srgbClr val="000000"/>
-                </a:solidFill>
-                <a:latin typeface="Consolas"/>
-              </a:rPr>
               <a:t>y_pred = clf.predict(X_test)</a:t>
             </a:r>
           </a:p>
@@ -5690,7 +5674,7 @@
         </p:nvSpPr>
         <p:spPr>
           <a:xfrm>
-            <a:off x="640080" y="5550408"/>
+            <a:off x="640080" y="5376672"/>
             <a:ext cx="11155680" cy="201168"/>
           </a:xfrm>
           <a:prstGeom prst="rect">
@@ -5777,7 +5761,7 @@
         <p:spPr>
           <a:xfrm>
             <a:off x="640080" y="1371600"/>
-            <a:ext cx="6858000" cy="3383279"/>
+            <a:ext cx="6263640" cy="2971800"/>
           </a:xfrm>
           <a:prstGeom prst="rect">
             <a:avLst/>
@@ -5786,7 +5770,7 @@
         </p:spPr>
         <p:txBody>
           <a:bodyPr wrap="square">
-            <a:normAutofit/>
+            <a:spAutoFit/>
           </a:bodyPr>
           <a:lstStyle/>
           <a:p>
@@ -5801,7 +5785,7 @@
                   <a:srgbClr val="000000"/>
                 </a:solidFill>
               </a:rPr>
-              <a:t>Переобучение: дерево идеально запоминает шум — accuracy 100% на train, низкая на test</a:t>
+              <a:t>• Переобучение: дерево идеально запоминает шум — accuracy 100% на train, низкая на test</a:t>
             </a:r>
           </a:p>
           <a:p>
@@ -5816,7 +5800,7 @@
                   <a:srgbClr val="000000"/>
                 </a:solidFill>
               </a:rPr>
-              <a:t>Нестабильность (высокая дисперсия): малое изменение данных → полностью другое дерево</a:t>
+              <a:t>• Нестабильность (высокая дисперсия): малое изменение данных → полностью другое дерево</a:t>
             </a:r>
           </a:p>
           <a:p>
@@ -5831,7 +5815,7 @@
                   <a:srgbClr val="000000"/>
                 </a:solidFill>
               </a:rPr>
-              <a:t>Одно дерево — плохая идея в продакшене из-за этой нестабильности</a:t>
+              <a:t>• Одно дерево — плохая идея в продакшене из-за этой нестабильности</a:t>
             </a:r>
           </a:p>
           <a:p>
@@ -5846,7 +5830,7 @@
                   <a:srgbClr val="000000"/>
                 </a:solidFill>
               </a:rPr>
-              <a:t>Оценка: обязательно train/test split! Ошибка на тех же данных — грубейшая ошибка!</a:t>
+              <a:t>• Оценка: обязательно train/test split! Ошибка на тех же данных — грубейшая ошибка!</a:t>
             </a:r>
           </a:p>
           <a:p>
@@ -5861,7 +5845,7 @@
                   <a:srgbClr val="000000"/>
                 </a:solidFill>
               </a:rPr>
-              <a:t>Прунинг (ccp_alpha): вырастить глубокое дерево, затем обрезать ветки с малым приростом качества — эффективнее жёсткого max_depth</a:t>
+              <a:t>• Прунинг (ccp_alpha): вырастить глубокое дерево, затем обрезать ветки с малым приростом качества — эффективнее жёсткого max_depth</a:t>
             </a:r>
           </a:p>
         </p:txBody>
@@ -5874,8 +5858,8 @@
         </p:nvSpPr>
         <p:spPr>
           <a:xfrm>
-            <a:off x="640080" y="4864607"/>
-            <a:ext cx="6766560" cy="630936"/>
+            <a:off x="640080" y="4690872"/>
+            <a:ext cx="6172200" cy="630936"/>
           </a:xfrm>
           <a:prstGeom prst="rect">
             <a:avLst/>
@@ -5919,8 +5903,8 @@
         </p:nvSpPr>
         <p:spPr>
           <a:xfrm>
-            <a:off x="713231" y="4901183"/>
-            <a:ext cx="6620256" cy="557784"/>
+            <a:off x="713231" y="4727448"/>
+            <a:ext cx="6025896" cy="557784"/>
           </a:xfrm>
           <a:prstGeom prst="rect">
             <a:avLst/>
@@ -5990,8 +5974,8 @@
         </p:nvSpPr>
         <p:spPr>
           <a:xfrm>
-            <a:off x="640080" y="5550407"/>
-            <a:ext cx="6766560" cy="201168"/>
+            <a:off x="640080" y="5376672"/>
+            <a:ext cx="6172200" cy="201168"/>
           </a:xfrm>
           <a:prstGeom prst="rect">
             <a:avLst/>
@@ -6033,8 +6017,8 @@
         </p:blipFill>
         <p:spPr>
           <a:xfrm>
-            <a:off x="7635240" y="2208847"/>
-            <a:ext cx="4343400" cy="2714625"/>
+            <a:off x="7269480" y="1325880"/>
+            <a:ext cx="4465015" cy="2878076"/>
           </a:xfrm>
           <a:prstGeom prst="rect">
             <a:avLst/>
@@ -6101,7 +6085,7 @@
         <p:spPr>
           <a:xfrm>
             <a:off x="640080" y="1371600"/>
-            <a:ext cx="11247120" cy="3209544"/>
+            <a:ext cx="11247120" cy="1874519"/>
           </a:xfrm>
           <a:prstGeom prst="rect">
             <a:avLst/>
@@ -6110,7 +6094,7 @@
         </p:spPr>
         <p:txBody>
           <a:bodyPr wrap="square">
-            <a:normAutofit/>
+            <a:spAutoFit/>
           </a:bodyPr>
           <a:lstStyle/>
           <a:p>
@@ -6125,7 +6109,7 @@
                   <a:srgbClr val="000000"/>
                 </a:solidFill>
               </a:rPr>
-              <a:t>clf = DecisionTreeClassifier(max_depth=3, ccp_alpha=0.01, random_state=42)</a:t>
+              <a:t>• clf = DecisionTreeClassifier(max_depth=3, ccp_alpha=0.01, random_state=42)</a:t>
             </a:r>
           </a:p>
           <a:p>
@@ -6140,7 +6124,7 @@
                   <a:srgbClr val="000000"/>
                 </a:solidFill>
               </a:rPr>
-              <a:t>clf.fit(X, y)</a:t>
+              <a:t>• clf.fit(X, y)</a:t>
             </a:r>
           </a:p>
           <a:p>
@@ -6155,7 +6139,7 @@
                   <a:srgbClr val="000000"/>
                 </a:solidFill>
               </a:rPr>
-              <a:t>Важные параметры: max_depth, min_samples_leaf, ccp_alpha, criterion (gini/entropy)</a:t>
+              <a:t>• Важные параметры: max_depth, min_samples_leaf, ccp_alpha, criterion (gini/entropy)</a:t>
             </a:r>
           </a:p>
           <a:p>
@@ -6170,7 +6154,7 @@
                   <a:srgbClr val="000000"/>
                 </a:solidFill>
               </a:rPr>
-              <a:t>Для воспроизводимости: random_state фиксирует случайность при равной информативности разбиений</a:t>
+              <a:t>• Для воспроизводимости: random_state фиксирует случайность при равной информативности разбиений</a:t>
             </a:r>
           </a:p>
         </p:txBody>
@@ -6184,7 +6168,7 @@
         <p:spPr>
           <a:xfrm>
             <a:off x="640080" y="4690872"/>
-            <a:ext cx="11155680" cy="804672"/>
+            <a:ext cx="11155680" cy="630936"/>
           </a:xfrm>
           <a:prstGeom prst="rect">
             <a:avLst/>
@@ -6229,7 +6213,7 @@
         <p:spPr>
           <a:xfrm>
             <a:off x="713231" y="4727448"/>
-            <a:ext cx="11009376" cy="731520"/>
+            <a:ext cx="11009376" cy="557784"/>
           </a:xfrm>
           <a:prstGeom prst="rect">
             <a:avLst/>
@@ -6254,22 +6238,6 @@
                 </a:solidFill>
                 <a:latin typeface="Consolas"/>
               </a:rPr>
-              <a:t>from sklearn.tree import DecisionTreeClassifier</a:t>
-            </a:r>
-          </a:p>
-          <a:p>
-            <a:pPr>
-              <a:spcAft>
-                <a:spcPts val="0"/>
-              </a:spcAft>
-            </a:pPr>
-            <a:r>
-              <a:rPr sz="1100">
-                <a:solidFill>
-                  <a:srgbClr val="000000"/>
-                </a:solidFill>
-                <a:latin typeface="Consolas"/>
-              </a:rPr>
               <a:t>clf = DecisionTreeClassifier(max_depth=3, random_state=42)</a:t>
             </a:r>
           </a:p>
@@ -6315,7 +6283,7 @@
         </p:nvSpPr>
         <p:spPr>
           <a:xfrm>
-            <a:off x="640080" y="5550408"/>
+            <a:off x="640080" y="5376672"/>
             <a:ext cx="11155680" cy="201168"/>
           </a:xfrm>
           <a:prstGeom prst="rect">
@@ -6402,7 +6370,7 @@
         <p:spPr>
           <a:xfrm>
             <a:off x="640080" y="1371600"/>
-            <a:ext cx="6858000" cy="3383279"/>
+            <a:ext cx="6263640" cy="2697480"/>
           </a:xfrm>
           <a:prstGeom prst="rect">
             <a:avLst/>
@@ -6411,7 +6379,7 @@
         </p:spPr>
         <p:txBody>
           <a:bodyPr wrap="square">
-            <a:normAutofit/>
+            <a:spAutoFit/>
           </a:bodyPr>
           <a:lstStyle/>
           <a:p>
@@ -6426,7 +6394,7 @@
                   <a:srgbClr val="000000"/>
                 </a:solidFill>
               </a:rPr>
-              <a:t>Важность признака: суммарное уменьшение impurity во всех узлах, где он используется, взвешенное на число объектов</a:t>
+              <a:t>• Важность признака: суммарное уменьшение impurity во всех узлах, где он используется, взвешенное на число объектов</a:t>
             </a:r>
           </a:p>
           <a:p>
@@ -6441,7 +6409,7 @@
                   <a:srgbClr val="000000"/>
                 </a:solidFill>
               </a:rPr>
-              <a:t>Можно отсортировать признаки по важности — понять, что реально влияет</a:t>
+              <a:t>• Можно отсортировать признаки по важности — понять, что реально влияет</a:t>
             </a:r>
           </a:p>
           <a:p>
@@ -6456,7 +6424,7 @@
                   <a:srgbClr val="000000"/>
                 </a:solidFill>
               </a:rPr>
-              <a:t>Важно помнить о bias: модель может выучить несправедливые закономерности (пол, национальность) — дерево их воспроизведёт</a:t>
+              <a:t>• Важно помнить о bias: модель может выучить несправедливые закономерности (пол, национальность) — дерево их воспроизведёт</a:t>
             </a:r>
           </a:p>
         </p:txBody>
@@ -6469,8 +6437,8 @@
         </p:nvSpPr>
         <p:spPr>
           <a:xfrm>
-            <a:off x="640080" y="4864607"/>
-            <a:ext cx="6766560" cy="630936"/>
+            <a:off x="640080" y="4892040"/>
+            <a:ext cx="6172200" cy="457200"/>
           </a:xfrm>
           <a:prstGeom prst="rect">
             <a:avLst/>
@@ -6514,8 +6482,8 @@
         </p:nvSpPr>
         <p:spPr>
           <a:xfrm>
-            <a:off x="713231" y="4901183"/>
-            <a:ext cx="6620256" cy="557784"/>
+            <a:off x="713231" y="4928616"/>
+            <a:ext cx="6025896" cy="384048"/>
           </a:xfrm>
           <a:prstGeom prst="rect">
             <a:avLst/>
@@ -6540,22 +6508,6 @@
                 </a:solidFill>
                 <a:latin typeface="Consolas"/>
               </a:rPr>
-              <a:t>import pandas as pd</a:t>
-            </a:r>
-          </a:p>
-          <a:p>
-            <a:pPr>
-              <a:spcAft>
-                <a:spcPts val="0"/>
-              </a:spcAft>
-            </a:pPr>
-            <a:r>
-              <a:rPr sz="1100">
-                <a:solidFill>
-                  <a:srgbClr val="000000"/>
-                </a:solidFill>
-                <a:latin typeface="Consolas"/>
-              </a:rPr>
               <a:t>imp = pd.Series(clf.feature_importances_, index=feature_names)</a:t>
             </a:r>
           </a:p>
@@ -6585,8 +6537,8 @@
         </p:nvSpPr>
         <p:spPr>
           <a:xfrm>
-            <a:off x="640080" y="5550407"/>
-            <a:ext cx="6766560" cy="201168"/>
+            <a:off x="640080" y="5404104"/>
+            <a:ext cx="6172200" cy="201168"/>
           </a:xfrm>
           <a:prstGeom prst="rect">
             <a:avLst/>
@@ -6628,8 +6580,8 @@
         </p:blipFill>
         <p:spPr>
           <a:xfrm>
-            <a:off x="7635240" y="2208847"/>
-            <a:ext cx="4343400" cy="2714625"/>
+            <a:off x="7269480" y="1325880"/>
+            <a:ext cx="4465015" cy="2227866"/>
           </a:xfrm>
           <a:prstGeom prst="rect">
             <a:avLst/>
@@ -6696,7 +6648,7 @@
         <p:spPr>
           <a:xfrm>
             <a:off x="640080" y="1371600"/>
-            <a:ext cx="11247120" cy="3209544"/>
+            <a:ext cx="11247120" cy="1874519"/>
           </a:xfrm>
           <a:prstGeom prst="rect">
             <a:avLst/>
@@ -6705,7 +6657,7 @@
         </p:spPr>
         <p:txBody>
           <a:bodyPr wrap="square">
-            <a:normAutofit/>
+            <a:spAutoFit/>
           </a:bodyPr>
           <a:lstStyle/>
           <a:p>
@@ -6720,7 +6672,7 @@
                   <a:srgbClr val="000000"/>
                 </a:solidFill>
               </a:rPr>
-              <a:t>Критерий разбиения — MSE (средний квадрат ошибки)</a:t>
+              <a:t>• Критерий разбиения — MSE (средний квадрат ошибки)</a:t>
             </a:r>
           </a:p>
           <a:p>
@@ -6735,7 +6687,7 @@
                   <a:srgbClr val="000000"/>
                 </a:solidFill>
               </a:rPr>
-              <a:t>Значение в листе — среднее арифметическое целевой переменной</a:t>
+              <a:t>• Значение в листе — среднее арифметическое целевой переменной</a:t>
             </a:r>
           </a:p>
           <a:p>
@@ -6750,7 +6702,7 @@
                   <a:srgbClr val="000000"/>
                 </a:solidFill>
               </a:rPr>
-              <a:t>Отличие от классификации: не голосование, а среднее</a:t>
+              <a:t>• Отличие от классификации: не голосование, а среднее</a:t>
             </a:r>
           </a:p>
           <a:p>
@@ -6765,7 +6717,7 @@
                   <a:srgbClr val="000000"/>
                 </a:solidFill>
               </a:rPr>
-              <a:t>Выбросы в y: чувствительны при MSE; в sklearn — DecisionTreeRegressor(criterion='absolute_error') или чистка данных</a:t>
+              <a:t>• Выбросы в y: чувствительны при MSE; в sklearn — DecisionTreeRegressor(criterion='absolute_error') или чистка данных</a:t>
             </a:r>
           </a:p>
         </p:txBody>
@@ -6779,7 +6731,7 @@
         <p:spPr>
           <a:xfrm>
             <a:off x="640080" y="4690872"/>
-            <a:ext cx="11155680" cy="804672"/>
+            <a:ext cx="11155680" cy="630936"/>
           </a:xfrm>
           <a:prstGeom prst="rect">
             <a:avLst/>
@@ -6824,7 +6776,7 @@
         <p:spPr>
           <a:xfrm>
             <a:off x="713231" y="4727448"/>
-            <a:ext cx="11009376" cy="731520"/>
+            <a:ext cx="11009376" cy="557784"/>
           </a:xfrm>
           <a:prstGeom prst="rect">
             <a:avLst/>
@@ -6849,22 +6801,6 @@
                 </a:solidFill>
                 <a:latin typeface="Consolas"/>
               </a:rPr>
-              <a:t>from sklearn.tree import DecisionTreeRegressor</a:t>
-            </a:r>
-          </a:p>
-          <a:p>
-            <a:pPr>
-              <a:spcAft>
-                <a:spcPts val="0"/>
-              </a:spcAft>
-            </a:pPr>
-            <a:r>
-              <a:rPr sz="1100">
-                <a:solidFill>
-                  <a:srgbClr val="000000"/>
-                </a:solidFill>
-                <a:latin typeface="Consolas"/>
-              </a:rPr>
               <a:t>reg = DecisionTreeRegressor(max_depth=4, random_state=42)</a:t>
             </a:r>
           </a:p>
@@ -6910,7 +6846,7 @@
         </p:nvSpPr>
         <p:spPr>
           <a:xfrm>
-            <a:off x="640080" y="5550408"/>
+            <a:off x="640080" y="5376672"/>
             <a:ext cx="11155680" cy="201168"/>
           </a:xfrm>
           <a:prstGeom prst="rect">
@@ -6997,7 +6933,7 @@
         <p:spPr>
           <a:xfrm>
             <a:off x="640080" y="1371600"/>
-            <a:ext cx="11247120" cy="2194560"/>
+            <a:ext cx="5532120" cy="2148839"/>
           </a:xfrm>
           <a:prstGeom prst="rect">
             <a:avLst/>
@@ -7021,7 +6957,7 @@
                   <a:srgbClr val="000000"/>
                 </a:solidFill>
               </a:rPr>
-              <a:t>Одно дерево — нестабильно и склонно к переобучению</a:t>
+              <a:t>• Одно дерево — нестабильно и склонно к переобучению</a:t>
             </a:r>
           </a:p>
           <a:p>
@@ -7036,7 +6972,7 @@
                   <a:srgbClr val="000000"/>
                 </a:solidFill>
               </a:rPr>
-              <a:t>Решение: строить много деревьев и усреднять их ответы</a:t>
+              <a:t>• Решение: строить много деревьев и усреднять их ответы</a:t>
             </a:r>
           </a:p>
           <a:p>
@@ -7051,9 +6987,32 @@
                   <a:srgbClr val="000000"/>
                 </a:solidFill>
               </a:rPr>
-              <a:t>Random Forest: случайные подвыборки данных и признаков → независимые деревья → среднее</a:t>
-            </a:r>
-          </a:p>
+              <a:t>• Random Forest: случайные подвыборки данных и признаков → независимые деревья → среднее</a:t>
+            </a:r>
+          </a:p>
+        </p:txBody>
+      </p:sp>
+      <p:sp>
+        <p:nvSpPr>
+          <p:cNvPr id="4" name="TextBox 3"/>
+          <p:cNvSpPr txBox="1"/>
+          <p:nvPr/>
+        </p:nvSpPr>
+        <p:spPr>
+          <a:xfrm>
+            <a:off x="6355080" y="1371600"/>
+            <a:ext cx="5532120" cy="2148839"/>
+          </a:xfrm>
+          <a:prstGeom prst="rect">
+            <a:avLst/>
+          </a:prstGeom>
+          <a:noFill/>
+        </p:spPr>
+        <p:txBody>
+          <a:bodyPr wrap="square">
+            <a:spAutoFit/>
+          </a:bodyPr>
+          <a:lstStyle/>
           <a:p>
             <a:pPr>
               <a:spcAft>
@@ -7066,7 +7025,7 @@
                   <a:srgbClr val="000000"/>
                 </a:solidFill>
               </a:rPr>
-              <a:t>Gradient Boosting: деревья строятся последовательно, каждое исправляет ошибки предыдущего</a:t>
+              <a:t>• Gradient Boosting: деревья строятся последовательно, каждое исправляет ошибки предыдущего</a:t>
             </a:r>
           </a:p>
           <a:p>
@@ -7081,7 +7040,7 @@
                   <a:srgbClr val="000000"/>
                 </a:solidFill>
               </a:rPr>
-              <a:t>Оба подхода используют жадные деревья как слабых учеников</a:t>
+              <a:t>• Оба подхода используют жадные деревья как слабых учеников</a:t>
             </a:r>
           </a:p>
         </p:txBody>
@@ -7146,7 +7105,7 @@
         <p:spPr>
           <a:xfrm>
             <a:off x="640080" y="1371600"/>
-            <a:ext cx="11247120" cy="3209544"/>
+            <a:ext cx="11247120" cy="1325880"/>
           </a:xfrm>
           <a:prstGeom prst="rect">
             <a:avLst/>
@@ -7155,7 +7114,7 @@
         </p:spPr>
         <p:txBody>
           <a:bodyPr wrap="square">
-            <a:normAutofit/>
+            <a:spAutoFit/>
           </a:bodyPr>
           <a:lstStyle/>
           <a:p>
@@ -7170,7 +7129,7 @@
                   <a:srgbClr val="000000"/>
                 </a:solidFill>
               </a:rPr>
-              <a:t>sklearn.tree.plot_tree(clf, filled=True) — графическое дерево с цветом классов</a:t>
+              <a:t>• sklearn.tree.plot_tree(clf, filled=True) — графическое дерево с цветом классов</a:t>
             </a:r>
           </a:p>
           <a:p>
@@ -7185,7 +7144,7 @@
                   <a:srgbClr val="000000"/>
                 </a:solidFill>
               </a:rPr>
-              <a:t>export_graphviz — экспорт для Graphviz (dot-формат)</a:t>
+              <a:t>• export_graphviz — экспорт для Graphviz (dot-формат)</a:t>
             </a:r>
           </a:p>
           <a:p>
@@ -7200,7 +7159,7 @@
                   <a:srgbClr val="000000"/>
                 </a:solidFill>
               </a:rPr>
-              <a:t>export_text — текстовое представление: правила вида X[0] &lt;= 2.5 → class=1</a:t>
+              <a:t>• export_text — текстовое представление: правила вида X[0] &lt;= 2.5 → class=1</a:t>
             </a:r>
           </a:p>
         </p:txBody>
@@ -7213,8 +7172,8 @@
         </p:nvSpPr>
         <p:spPr>
           <a:xfrm>
-            <a:off x="640080" y="4690872"/>
-            <a:ext cx="11155680" cy="804672"/>
+            <a:off x="640080" y="4892040"/>
+            <a:ext cx="11155680" cy="457200"/>
           </a:xfrm>
           <a:prstGeom prst="rect">
             <a:avLst/>
@@ -7258,8 +7217,8 @@
         </p:nvSpPr>
         <p:spPr>
           <a:xfrm>
-            <a:off x="713231" y="4727448"/>
-            <a:ext cx="11009376" cy="731520"/>
+            <a:off x="713231" y="4928616"/>
+            <a:ext cx="11009376" cy="384048"/>
           </a:xfrm>
           <a:prstGeom prst="rect">
             <a:avLst/>
@@ -7284,38 +7243,6 @@
                 </a:solidFill>
                 <a:latin typeface="Consolas"/>
               </a:rPr>
-              <a:t>from sklearn.tree import plot_tree</a:t>
-            </a:r>
-          </a:p>
-          <a:p>
-            <a:pPr>
-              <a:spcAft>
-                <a:spcPts val="0"/>
-              </a:spcAft>
-            </a:pPr>
-            <a:r>
-              <a:rPr sz="1100">
-                <a:solidFill>
-                  <a:srgbClr val="000000"/>
-                </a:solidFill>
-                <a:latin typeface="Consolas"/>
-              </a:rPr>
-              <a:t>import matplotlib.pyplot as plt</a:t>
-            </a:r>
-          </a:p>
-          <a:p>
-            <a:pPr>
-              <a:spcAft>
-                <a:spcPts val="0"/>
-              </a:spcAft>
-            </a:pPr>
-            <a:r>
-              <a:rPr sz="1100">
-                <a:solidFill>
-                  <a:srgbClr val="000000"/>
-                </a:solidFill>
-                <a:latin typeface="Consolas"/>
-              </a:rPr>
               <a:t>plot_tree(clf, feature_names=names, filled=True)</a:t>
             </a:r>
           </a:p>
@@ -7345,7 +7272,7 @@
         </p:nvSpPr>
         <p:spPr>
           <a:xfrm>
-            <a:off x="640080" y="5550408"/>
+            <a:off x="640080" y="5404104"/>
             <a:ext cx="11155680" cy="201168"/>
           </a:xfrm>
           <a:prstGeom prst="rect">
@@ -7432,7 +7359,7 @@
         <p:spPr>
           <a:xfrm>
             <a:off x="640080" y="1371600"/>
-            <a:ext cx="6858000" cy="2862071"/>
+            <a:ext cx="6263640" cy="2148839"/>
           </a:xfrm>
           <a:prstGeom prst="rect">
             <a:avLst/>
@@ -7441,7 +7368,7 @@
         </p:spPr>
         <p:txBody>
           <a:bodyPr wrap="square">
-            <a:normAutofit/>
+            <a:spAutoFit/>
           </a:bodyPr>
           <a:lstStyle/>
           <a:p>
@@ -7456,7 +7383,7 @@
                   <a:srgbClr val="000000"/>
                 </a:solidFill>
               </a:rPr>
-              <a:t>Дерево делит пространство признаков на прямоугольники (оси-параллельные)</a:t>
+              <a:t>• Дерево делит пространство признаков на прямоугольники (оси-параллельные)</a:t>
             </a:r>
           </a:p>
           <a:p>
@@ -7471,7 +7398,7 @@
                   <a:srgbClr val="000000"/>
                 </a:solidFill>
               </a:rPr>
-              <a:t>Проблема лестницы: дерево не может провести диагональные или круговые границы</a:t>
+              <a:t>• Проблема лестницы: дерево не может провести диагональные или круговые границы</a:t>
             </a:r>
           </a:p>
           <a:p>
@@ -7486,7 +7413,7 @@
                   <a:srgbClr val="000000"/>
                 </a:solidFill>
               </a:rPr>
-              <a:t>Для регрессии — кусочно-постоянная аппроксимация (в каждом прямоугольнике — своя константа)</a:t>
+              <a:t>• Для регрессии — кусочно-постоянная аппроксимация (в каждом прямоугольнике — своя константа)</a:t>
             </a:r>
           </a:p>
         </p:txBody>
@@ -7499,8 +7426,8 @@
         </p:nvSpPr>
         <p:spPr>
           <a:xfrm>
-            <a:off x="640080" y="4343399"/>
-            <a:ext cx="6766560" cy="1152144"/>
+            <a:off x="640080" y="4288536"/>
+            <a:ext cx="6172200" cy="978407"/>
           </a:xfrm>
           <a:prstGeom prst="rect">
             <a:avLst/>
@@ -7544,8 +7471,8 @@
         </p:nvSpPr>
         <p:spPr>
           <a:xfrm>
-            <a:off x="713231" y="4379975"/>
-            <a:ext cx="6620256" cy="1078992"/>
+            <a:off x="713231" y="4325112"/>
+            <a:ext cx="6025896" cy="905255"/>
           </a:xfrm>
           <a:prstGeom prst="rect">
             <a:avLst/>
@@ -7570,22 +7497,6 @@
                 </a:solidFill>
                 <a:latin typeface="Consolas"/>
               </a:rPr>
-              <a:t>import numpy as np</a:t>
-            </a:r>
-          </a:p>
-          <a:p>
-            <a:pPr>
-              <a:spcAft>
-                <a:spcPts val="0"/>
-              </a:spcAft>
-            </a:pPr>
-            <a:r>
-              <a:rPr sz="1100">
-                <a:solidFill>
-                  <a:srgbClr val="000000"/>
-                </a:solidFill>
-                <a:latin typeface="Consolas"/>
-              </a:rPr>
               <a:t>xx, yy = np.meshgrid(</a:t>
             </a:r>
           </a:p>
@@ -7663,8 +7574,8 @@
         </p:nvSpPr>
         <p:spPr>
           <a:xfrm>
-            <a:off x="640080" y="5550407"/>
-            <a:ext cx="6766560" cy="201168"/>
+            <a:off x="640080" y="5321807"/>
+            <a:ext cx="6172200" cy="201168"/>
           </a:xfrm>
           <a:prstGeom prst="rect">
             <a:avLst/>
@@ -7706,8 +7617,8 @@
         </p:blipFill>
         <p:spPr>
           <a:xfrm>
-            <a:off x="7635240" y="1937384"/>
-            <a:ext cx="4343400" cy="3257550"/>
+            <a:off x="7269480" y="1325880"/>
+            <a:ext cx="4465015" cy="2578036"/>
           </a:xfrm>
           <a:prstGeom prst="rect">
             <a:avLst/>
@@ -7774,7 +7685,7 @@
         <p:spPr>
           <a:xfrm>
             <a:off x="640080" y="1371600"/>
-            <a:ext cx="11247120" cy="1810512"/>
+            <a:ext cx="11247120" cy="1828800"/>
           </a:xfrm>
           <a:prstGeom prst="rect">
             <a:avLst/>
@@ -7798,7 +7709,7 @@
                   <a:srgbClr val="000000"/>
                 </a:solidFill>
               </a:rPr>
-              <a:t>Скорость и память: работает на слабых устройствах (микроконтроллеры, старые ноутбуки)</a:t>
+              <a:t>• Скорость и память: работает на слабых устройствах (микроконтроллеры, старые ноутбуки)</a:t>
             </a:r>
           </a:p>
           <a:p>
@@ -7813,7 +7724,7 @@
                   <a:srgbClr val="000000"/>
                 </a:solidFill>
               </a:rPr>
-              <a:t>Интерпретируемость: решение можно объяснить пошагово (в отличие от нейросети)</a:t>
+              <a:t>• Интерпретируемость: решение можно объяснить пошагово (в отличие от нейросети)</a:t>
             </a:r>
           </a:p>
           <a:p>
@@ -7828,7 +7739,7 @@
                   <a:srgbClr val="000000"/>
                 </a:solidFill>
               </a:rPr>
-              <a:t>Чем лучше логистической регрессии? — ловит нелинейности без ручного создания признаков</a:t>
+              <a:t>• Чем лучше логистической регрессии? — ловит нелинейности без ручного создания признаков</a:t>
             </a:r>
           </a:p>
           <a:p>
@@ -7843,7 +7754,7 @@
                   <a:srgbClr val="000000"/>
                 </a:solidFill>
               </a:rPr>
-              <a:t>Чем лучше KNN? — не хранит обучающую выборку; предсказание за O(глубина дерева)</a:t>
+              <a:t>• Чем лучше KNN? — не хранит обучающую выборку; предсказание за O(глубина дерева)</a:t>
             </a:r>
           </a:p>
         </p:txBody>
@@ -7908,7 +7819,7 @@
         <p:spPr>
           <a:xfrm>
             <a:off x="640080" y="1371600"/>
-            <a:ext cx="6858000" cy="1810512"/>
+            <a:ext cx="6263640" cy="2697480"/>
           </a:xfrm>
           <a:prstGeom prst="rect">
             <a:avLst/>
@@ -7932,7 +7843,7 @@
                   <a:srgbClr val="000000"/>
                 </a:solidFill>
               </a:rPr>
-              <a:t>Игра 'Угадай число': последовательность вопросов → структура дерева</a:t>
+              <a:t>• Игра 'Угадай число': последовательность вопросов → структура дерева</a:t>
             </a:r>
           </a:p>
           <a:p>
@@ -7947,7 +7858,7 @@
                   <a:srgbClr val="000000"/>
                 </a:solidFill>
               </a:rPr>
-              <a:t>Каждый вопрос разделяет множество вариантов на подмножества</a:t>
+              <a:t>• Каждый вопрос разделяет множество вариантов на подмножества</a:t>
             </a:r>
           </a:p>
           <a:p>
@@ -7962,7 +7873,7 @@
                   <a:srgbClr val="000000"/>
                 </a:solidFill>
               </a:rPr>
-              <a:t>Дерево: связный ациклический граф с корнем, внутренними узлами (вопросы) и листьями (ответы)</a:t>
+              <a:t>• Дерево: связный ациклический граф с корнем, внутренними узлами (вопросы) и листьями (ответы)</a:t>
             </a:r>
           </a:p>
           <a:p>
@@ -7977,7 +7888,7 @@
                   <a:srgbClr val="000000"/>
                 </a:solidFill>
               </a:rPr>
-              <a:t>Глубина дерева — максимальное число вопросов до ответа</a:t>
+              <a:t>• Глубина дерева — максимальное число вопросов до ответа</a:t>
             </a:r>
           </a:p>
         </p:txBody>
@@ -7998,8 +7909,8 @@
         </p:blipFill>
         <p:spPr>
           <a:xfrm>
-            <a:off x="7635240" y="2412714"/>
-            <a:ext cx="4343400" cy="2306892"/>
+            <a:off x="7269480" y="1325880"/>
+            <a:ext cx="4465015" cy="2495677"/>
           </a:xfrm>
           <a:prstGeom prst="rect">
             <a:avLst/>
@@ -8066,7 +7977,7 @@
         <p:spPr>
           <a:xfrm>
             <a:off x="640080" y="1371600"/>
-            <a:ext cx="11247120" cy="3209544"/>
+            <a:ext cx="5532120" cy="2697480"/>
           </a:xfrm>
           <a:prstGeom prst="rect">
             <a:avLst/>
@@ -8075,7 +7986,7 @@
         </p:spPr>
         <p:txBody>
           <a:bodyPr wrap="square">
-            <a:normAutofit/>
+            <a:spAutoFit/>
           </a:bodyPr>
           <a:lstStyle/>
           <a:p>
@@ -8090,7 +8001,7 @@
                   <a:srgbClr val="000000"/>
                 </a:solidFill>
               </a:rPr>
-              <a:t>Нормализация не нужна — масштабирование не меняет порядок значений, структура дерева не изменится</a:t>
+              <a:t>• Нормализация не нужна — масштабирование не меняет порядок значений, структура дерева не изменится</a:t>
             </a:r>
           </a:p>
           <a:p>
@@ -8105,7 +8016,7 @@
                   <a:srgbClr val="000000"/>
                 </a:solidFill>
               </a:rPr>
-              <a:t>Пропуски нужно заполнять (impute); sklearn DecisionTree не работает с NaN (в отличие от XGBoost)</a:t>
+              <a:t>• Пропуски нужно заполнять (impute); sklearn DecisionTree не работает с NaN (в отличие от XGBoost)</a:t>
             </a:r>
           </a:p>
           <a:p>
@@ -8120,9 +8031,32 @@
                   <a:srgbClr val="000000"/>
                 </a:solidFill>
               </a:rPr>
-              <a:t>Категориальные признаки: sklearn не принимает строки — нужно кодирование</a:t>
-            </a:r>
-          </a:p>
+              <a:t>• Категориальные признаки: sklearn не принимает строки — нужно кодирование</a:t>
+            </a:r>
+          </a:p>
+        </p:txBody>
+      </p:sp>
+      <p:sp>
+        <p:nvSpPr>
+          <p:cNvPr id="4" name="TextBox 3"/>
+          <p:cNvSpPr txBox="1"/>
+          <p:nvPr/>
+        </p:nvSpPr>
+        <p:spPr>
+          <a:xfrm>
+            <a:off x="6355080" y="1371600"/>
+            <a:ext cx="5532120" cy="2697480"/>
+          </a:xfrm>
+          <a:prstGeom prst="rect">
+            <a:avLst/>
+          </a:prstGeom>
+          <a:noFill/>
+        </p:spPr>
+        <p:txBody>
+          <a:bodyPr wrap="square">
+            <a:spAutoFit/>
+          </a:bodyPr>
+          <a:lstStyle/>
           <a:p>
             <a:pPr>
               <a:spcAft>
@@ -8135,7 +8069,7 @@
                   <a:srgbClr val="000000"/>
                 </a:solidFill>
               </a:rPr>
-              <a:t>Порядковые категории (младший, средний, старший): Label Encoding (0, 1, 2)</a:t>
+              <a:t>• Порядковые категории (младший, средний, старший): Label Encoding (0, 1, 2)</a:t>
             </a:r>
           </a:p>
           <a:p>
@@ -8150,7 +8084,7 @@
                   <a:srgbClr val="000000"/>
                 </a:solidFill>
               </a:rPr>
-              <a:t>Номинативные (цвет, город, пол): только One-Hot Encoding — иначе вопросы вида «цвет &lt; 2.5» бессмысленны</a:t>
+              <a:t>• Номинативные (цвет, город, пол): только One-Hot Encoding — иначе вопросы вида «цвет &lt; 2.5» бессмысленны</a:t>
             </a:r>
           </a:p>
           <a:p>
@@ -8165,21 +8099,21 @@
                   <a:srgbClr val="000000"/>
                 </a:solidFill>
               </a:rPr>
-              <a:t>One-Hot при 100+ категориях — разреженность и замедление; альтернатива — целевое кодирование</a:t>
-            </a:r>
-          </a:p>
-        </p:txBody>
-      </p:sp>
-      <p:sp>
-        <p:nvSpPr>
-          <p:cNvPr id="4" name="Rectangle 3"/>
+              <a:t>• One-Hot при 100+ категориях — разреженность и замедление; альтернатива — целевое кодирование</a:t>
+            </a:r>
+          </a:p>
+        </p:txBody>
+      </p:sp>
+      <p:sp>
+        <p:nvSpPr>
+          <p:cNvPr id="5" name="Rectangle 4"/>
           <p:cNvSpPr/>
           <p:nvPr/>
         </p:nvSpPr>
         <p:spPr>
           <a:xfrm>
             <a:off x="640080" y="4690872"/>
-            <a:ext cx="11155680" cy="804672"/>
+            <a:ext cx="11155680" cy="630936"/>
           </a:xfrm>
           <a:prstGeom prst="rect">
             <a:avLst/>
@@ -8217,14 +8151,14 @@
       </p:sp>
       <p:sp>
         <p:nvSpPr>
-          <p:cNvPr id="5" name="TextBox 4"/>
+          <p:cNvPr id="6" name="TextBox 5"/>
           <p:cNvSpPr txBox="1"/>
           <p:nvPr/>
         </p:nvSpPr>
         <p:spPr>
           <a:xfrm>
             <a:off x="713231" y="4727448"/>
-            <a:ext cx="11009376" cy="731520"/>
+            <a:ext cx="11009376" cy="557784"/>
           </a:xfrm>
           <a:prstGeom prst="rect">
             <a:avLst/>
@@ -8249,7 +8183,7 @@
                 </a:solidFill>
                 <a:latin typeface="Consolas"/>
               </a:rPr>
-              <a:t>from sklearn.tree import DecisionTreeClassifier</a:t>
+              <a:t># масштабирование не обязательно</a:t>
             </a:r>
           </a:p>
           <a:p>
@@ -8265,7 +8199,7 @@
                 </a:solidFill>
                 <a:latin typeface="Consolas"/>
               </a:rPr>
-              <a:t># масштабирование не обязательно</a:t>
+              <a:t>clf = DecisionTreeClassifier(random_state=42)</a:t>
             </a:r>
           </a:p>
           <a:p>
@@ -8281,22 +8215,6 @@
                 </a:solidFill>
                 <a:latin typeface="Consolas"/>
               </a:rPr>
-              <a:t>clf = DecisionTreeClassifier(random_state=42)</a:t>
-            </a:r>
-          </a:p>
-          <a:p>
-            <a:pPr>
-              <a:spcAft>
-                <a:spcPts val="0"/>
-              </a:spcAft>
-            </a:pPr>
-            <a:r>
-              <a:rPr sz="1100">
-                <a:solidFill>
-                  <a:srgbClr val="000000"/>
-                </a:solidFill>
-                <a:latin typeface="Consolas"/>
-              </a:rPr>
               <a:t>clf.fit(X_raw, y)  # можно на исходных признаках</a:t>
             </a:r>
           </a:p>
@@ -8304,13 +8222,13 @@
       </p:sp>
       <p:sp>
         <p:nvSpPr>
-          <p:cNvPr id="6" name="TextBox 5"/>
+          <p:cNvPr id="7" name="TextBox 6"/>
           <p:cNvSpPr txBox="1"/>
           <p:nvPr/>
         </p:nvSpPr>
         <p:spPr>
           <a:xfrm>
-            <a:off x="640080" y="5550408"/>
+            <a:off x="640080" y="5376672"/>
             <a:ext cx="11155680" cy="201168"/>
           </a:xfrm>
           <a:prstGeom prst="rect">
@@ -8397,7 +8315,7 @@
         <p:spPr>
           <a:xfrm>
             <a:off x="640080" y="1371600"/>
-            <a:ext cx="11247120" cy="2194560"/>
+            <a:ext cx="5532120" cy="2423160"/>
           </a:xfrm>
           <a:prstGeom prst="rect">
             <a:avLst/>
@@ -8421,7 +8339,7 @@
                   <a:srgbClr val="000000"/>
                 </a:solidFill>
               </a:rPr>
-              <a:t>Перебор комбинаций признаков в каждом узле вырос бы экспоненциально</a:t>
+              <a:t>• Перебор комбинаций признаков в каждом узле вырос бы экспоненциально</a:t>
             </a:r>
           </a:p>
           <a:p>
@@ -8436,7 +8354,7 @@
                   <a:srgbClr val="000000"/>
                 </a:solidFill>
               </a:rPr>
-              <a:t>Интерпретируемость: простые, понятные правила (если x &lt; a, то …)</a:t>
+              <a:t>• Интерпретируемость: простые, понятные правила (если x &lt; a, то …)</a:t>
             </a:r>
           </a:p>
           <a:p>
@@ -8451,9 +8369,32 @@
                   <a:srgbClr val="000000"/>
                 </a:solidFill>
               </a:rPr>
-              <a:t>Один признак → оси-параллельные прямоугольные области; при достаточной глубине ими можно аппроксимировать сложные границы</a:t>
-            </a:r>
-          </a:p>
+              <a:t>• Один признак → оси-параллельные прямоугольные области; при достаточной глубине ими можно аппроксимировать сложные границы</a:t>
+            </a:r>
+          </a:p>
+        </p:txBody>
+      </p:sp>
+      <p:sp>
+        <p:nvSpPr>
+          <p:cNvPr id="4" name="TextBox 3"/>
+          <p:cNvSpPr txBox="1"/>
+          <p:nvPr/>
+        </p:nvSpPr>
+        <p:spPr>
+          <a:xfrm>
+            <a:off x="6355080" y="1371600"/>
+            <a:ext cx="5532120" cy="2423160"/>
+          </a:xfrm>
+          <a:prstGeom prst="rect">
+            <a:avLst/>
+          </a:prstGeom>
+          <a:noFill/>
+        </p:spPr>
+        <p:txBody>
+          <a:bodyPr wrap="square">
+            <a:spAutoFit/>
+          </a:bodyPr>
+          <a:lstStyle/>
           <a:p>
             <a:pPr>
               <a:spcAft>
@@ -8466,7 +8407,7 @@
                   <a:srgbClr val="000000"/>
                 </a:solidFill>
               </a:rPr>
-              <a:t>Сложные комбинации в одном узле резко повышают риск переобучения</a:t>
+              <a:t>• Сложные комбинации в одном узле резко повышают риск переобучения</a:t>
             </a:r>
           </a:p>
           <a:p>
@@ -8481,7 +8422,7 @@
                   <a:srgbClr val="000000"/>
                 </a:solidFill>
               </a:rPr>
-              <a:t>Исключение: ID3/C4.5 для категориальных признаков допускают небинарные узлы, но каждый узел всё равно соответствует одному признаку</a:t>
+              <a:t>• Исключение: ID3/C4.5 для категориальных признаков допускают небинарные узлы, но каждый узел всё равно соответствует одному признаку</a:t>
             </a:r>
           </a:p>
         </p:txBody>
@@ -8546,7 +8487,7 @@
         <p:spPr>
           <a:xfrm>
             <a:off x="640080" y="1371600"/>
-            <a:ext cx="11247120" cy="2194560"/>
+            <a:ext cx="5532120" cy="2423160"/>
           </a:xfrm>
           <a:prstGeom prst="rect">
             <a:avLst/>
@@ -8570,7 +8511,7 @@
                   <a:srgbClr val="000000"/>
                 </a:solidFill>
               </a:rPr>
-              <a:t>Краткий ответ: компромисс между качеством, временем и переобучением</a:t>
+              <a:t>• Краткий ответ: компромисс между качеством, временем и переобучением</a:t>
             </a:r>
           </a:p>
           <a:p>
@@ -8585,7 +8526,7 @@
                   <a:srgbClr val="000000"/>
                 </a:solidFill>
               </a:rPr>
-              <a:t>Полный перебор оптимального дерева — NP-трудная задача (доказано)</a:t>
+              <a:t>• Полный перебор оптимального дерева — NP-трудная задача (доказано)</a:t>
             </a:r>
           </a:p>
           <a:p>
@@ -8600,7 +8541,7 @@
                   <a:srgbClr val="000000"/>
                 </a:solidFill>
               </a:rPr>
-              <a:t xml:space="preserve">Жадный алгоритм: </a:t>
+              <a:t xml:space="preserve">• Жадный алгоритм: </a:t>
             </a:r>
             <ns0:m xmlns:ns0="http://schemas.microsoft.com/office/drawing/2010/main">
               <m:oMath xmlns:m="http://schemas.openxmlformats.org/officeDocument/2006/math">
@@ -8669,6 +8610,29 @@
               <a:t xml:space="preserve"> на узел (в sklearn — сортировка по признаку)</a:t>
             </a:r>
           </a:p>
+        </p:txBody>
+      </p:sp>
+      <p:sp>
+        <p:nvSpPr>
+          <p:cNvPr id="4" name="TextBox 3"/>
+          <p:cNvSpPr txBox="1"/>
+          <p:nvPr/>
+        </p:nvSpPr>
+        <p:spPr>
+          <a:xfrm>
+            <a:off x="6355080" y="1371600"/>
+            <a:ext cx="5532120" cy="2423160"/>
+          </a:xfrm>
+          <a:prstGeom prst="rect">
+            <a:avLst/>
+          </a:prstGeom>
+          <a:noFill/>
+        </p:spPr>
+        <p:txBody>
+          <a:bodyPr wrap="square">
+            <a:spAutoFit/>
+          </a:bodyPr>
+          <a:lstStyle/>
           <a:p>
             <a:pPr>
               <a:spcAft>
@@ -8681,7 +8645,7 @@
                   <a:srgbClr val="000000"/>
                 </a:solidFill>
               </a:rPr>
-              <a:t>Жадность даёт интерпретируемые результаты и контроль сложности (остановка, прунинг)</a:t>
+              <a:t>• Жадность даёт интерпретируемые результаты и контроль сложности (остановка, прунинг)</a:t>
             </a:r>
           </a:p>
           <a:p>
@@ -8696,7 +8660,7 @@
                   <a:srgbClr val="000000"/>
                 </a:solidFill>
               </a:rPr>
-              <a:t>Недостатки жадности — плюс в ансамблях: много слабых деревьев лучше одного сильного</a:t>
+              <a:t>• Недостатки жадности — плюс в ансамблях: много слабых деревьев лучше одного сильного</a:t>
             </a:r>
           </a:p>
         </p:txBody>
@@ -8761,7 +8725,7 @@
         <p:spPr>
           <a:xfrm>
             <a:off x="640080" y="1371600"/>
-            <a:ext cx="11247120" cy="2962656"/>
+            <a:ext cx="5532120" cy="3246120"/>
           </a:xfrm>
           <a:prstGeom prst="rect">
             <a:avLst/>
@@ -8785,7 +8749,7 @@
                   <a:srgbClr val="000000"/>
                 </a:solidFill>
               </a:rPr>
-              <a:t>Гладкость не является причиной (она не обязательна для выбора разбиения)</a:t>
+              <a:t>• Гладкость не является причиной (она не обязательна для выбора разбиения)</a:t>
             </a:r>
           </a:p>
           <a:p>
@@ -8800,7 +8764,7 @@
                   <a:srgbClr val="000000"/>
                 </a:solidFill>
               </a:rPr>
-              <a:t>Misclassification impurity кусочно-линейна и не является строго вогнутой — в этом суть проблемы</a:t>
+              <a:t>• Misclassification impurity кусочно-линейна и не является строго вогнутой — в этом суть проблемы</a:t>
             </a:r>
           </a:p>
           <a:p>
@@ -8815,7 +8779,7 @@
                   <a:srgbClr val="000000"/>
                 </a:solidFill>
               </a:rPr>
-              <a:t xml:space="preserve">При </a:t>
+              <a:t xml:space="preserve">• При </a:t>
             </a:r>
             <ns0:m xmlns:ns0="http://schemas.microsoft.com/office/drawing/2010/main">
               <m:oMath xmlns:m="http://schemas.openxmlformats.org/officeDocument/2006/math">
@@ -8845,7 +8809,7 @@
                   <a:srgbClr val="000000"/>
                 </a:solidFill>
               </a:rPr>
-              <a:t xml:space="preserve">Пример: </a:t>
+              <a:t xml:space="preserve">• Пример: </a:t>
             </a:r>
             <ns0:m xmlns:ns0="http://schemas.microsoft.com/office/drawing/2010/main">
               <m:oMath xmlns:m="http://schemas.openxmlformats.org/officeDocument/2006/math">
@@ -8939,6 +8903,29 @@
               <a:t>, но разную энтропию и Джини</a:t>
             </a:r>
           </a:p>
+        </p:txBody>
+      </p:sp>
+      <p:sp>
+        <p:nvSpPr>
+          <p:cNvPr id="4" name="TextBox 3"/>
+          <p:cNvSpPr txBox="1"/>
+          <p:nvPr/>
+        </p:nvSpPr>
+        <p:spPr>
+          <a:xfrm>
+            <a:off x="6355080" y="1371600"/>
+            <a:ext cx="5532120" cy="3246120"/>
+          </a:xfrm>
+          <a:prstGeom prst="rect">
+            <a:avLst/>
+          </a:prstGeom>
+          <a:noFill/>
+        </p:spPr>
+        <p:txBody>
+          <a:bodyPr wrap="square">
+            <a:spAutoFit/>
+          </a:bodyPr>
+          <a:lstStyle/>
           <a:p>
             <a:pPr>
               <a:spcAft>
@@ -8951,7 +8938,7 @@
                   <a:srgbClr val="000000"/>
                 </a:solidFill>
               </a:rPr>
-              <a:t>Misclassification смотрит только на самый большой класс, игнорируя остальные</a:t>
+              <a:t>• Misclassification смотрит только на самый большой класс, игнорируя остальные</a:t>
             </a:r>
           </a:p>
           <a:p>
@@ -8966,7 +8953,7 @@
                   <a:srgbClr val="000000"/>
                 </a:solidFill>
               </a:rPr>
-              <a:t>Энтропия и Джини строго вогнуты — прирост разбиения однозначен, меньше случайности в выборе порога</a:t>
+              <a:t>• Энтропия и Джини строго вогнуты — прирост разбиения однозначен, меньше случайности в выборе порога</a:t>
             </a:r>
           </a:p>
           <a:p>
@@ -8981,7 +8968,7 @@
                   <a:srgbClr val="000000"/>
                 </a:solidFill>
               </a:rPr>
-              <a:t>Вывод: misclassification на практике почти не используют; деревья с Gini и entropy обычно близки по качеству</a:t>
+              <a:t>• Вывод: misclassification на практике почти не используют; деревья с Gini и entropy обычно близки по качеству</a:t>
             </a:r>
           </a:p>
         </p:txBody>
@@ -9046,7 +9033,7 @@
         <p:spPr>
           <a:xfrm>
             <a:off x="640080" y="1371600"/>
-            <a:ext cx="11247120" cy="1810512"/>
+            <a:ext cx="11247120" cy="2423160"/>
           </a:xfrm>
           <a:prstGeom prst="rect">
             <a:avLst/>
@@ -9070,7 +9057,7 @@
                   <a:srgbClr val="000000"/>
                 </a:solidFill>
               </a:rPr>
-              <a:t xml:space="preserve">Джини быстрее (только квадраты), энтропия требует </a:t>
+              <a:t xml:space="preserve">• Джини быстрее (только квадраты), энтропия требует </a:t>
             </a:r>
             <ns0:m xmlns:ns0="http://schemas.microsoft.com/office/drawing/2010/main">
               <m:oMath xmlns:m="http://schemas.openxmlformats.org/officeDocument/2006/math">
@@ -9112,7 +9099,7 @@
                   <a:srgbClr val="000000"/>
                 </a:solidFill>
               </a:rPr>
-              <a:t>Энтропия: интерпретация в битах; Джини — квадратичное приближение энтропии вблизи равномерного распределения</a:t>
+              <a:t>• Энтропия: интерпретация в битах; Джини — квадратичное приближение энтропии вблизи равномерного распределения</a:t>
             </a:r>
           </a:p>
           <a:p>
@@ -9127,7 +9114,7 @@
                   <a:srgbClr val="000000"/>
                 </a:solidFill>
               </a:rPr>
-              <a:t>Вблизи чистых узлов (</a:t>
+              <a:t>• Вблизи чистых узлов (</a:t>
             </a:r>
             <ns0:m xmlns:ns0="http://schemas.microsoft.com/office/drawing/2010/main">
               <m:oMath xmlns:m="http://schemas.openxmlformats.org/officeDocument/2006/math">
@@ -9169,7 +9156,7 @@
                   <a:srgbClr val="000000"/>
                 </a:solidFill>
               </a:rPr>
-              <a:t>На практике деревья почти одинаковы — начинайте с Gini (default в sklearn), не тратьте время на тонкую настройку</a:t>
+              <a:t>• На практике деревья почти одинаковы — начинайте с Gini (default в sklearn), не тратьте время на тонкую настройку</a:t>
             </a:r>
           </a:p>
         </p:txBody>
@@ -9689,7 +9676,7 @@
         <p:spPr>
           <a:xfrm>
             <a:off x="640080" y="1371600"/>
-            <a:ext cx="6858000" cy="1810512"/>
+            <a:ext cx="6263640" cy="2423160"/>
           </a:xfrm>
           <a:prstGeom prst="rect">
             <a:avLst/>
@@ -9713,7 +9700,7 @@
                   <a:srgbClr val="000000"/>
                 </a:solidFill>
               </a:rPr>
-              <a:t>Акинатор угадывает персонажа/объект по серии вопросов ('да/нет')</a:t>
+              <a:t>• Акинатор угадывает персонажа/объект по серии вопросов ('да/нет')</a:t>
             </a:r>
           </a:p>
           <a:p>
@@ -9728,7 +9715,7 @@
                   <a:srgbClr val="000000"/>
                 </a:solidFill>
               </a:rPr>
-              <a:t>Каждый ответ ведёт к следующему вопросу — структура дерева</a:t>
+              <a:t>• Каждый ответ ведёт к следующему вопросу — структура дерева</a:t>
             </a:r>
           </a:p>
           <a:p>
@@ -9743,7 +9730,7 @@
                   <a:srgbClr val="000000"/>
                 </a:solidFill>
               </a:rPr>
-              <a:t>Листья — конкретные персонажи/объекты</a:t>
+              <a:t>• Листья — конкретные персонажи/объекты</a:t>
             </a:r>
           </a:p>
           <a:p>
@@ -9758,7 +9745,7 @@
                   <a:srgbClr val="000000"/>
                 </a:solidFill>
               </a:rPr>
-              <a:t>Демонстрация: дерево решений уже используется в повседневных приложениях</a:t>
+              <a:t>• Демонстрация: дерево решений уже используется в повседневных приложениях</a:t>
             </a:r>
           </a:p>
         </p:txBody>
@@ -9779,8 +9766,8 @@
         </p:blipFill>
         <p:spPr>
           <a:xfrm>
-            <a:off x="7635240" y="2312438"/>
-            <a:ext cx="4343400" cy="2507442"/>
+            <a:off x="7269480" y="1325880"/>
+            <a:ext cx="4465015" cy="2907852"/>
           </a:xfrm>
           <a:prstGeom prst="rect">
             <a:avLst/>
@@ -9913,7 +9900,7 @@
         <p:spPr>
           <a:xfrm>
             <a:off x="640080" y="1371600"/>
-            <a:ext cx="6858000" cy="3209544"/>
+            <a:ext cx="6263640" cy="2697480"/>
           </a:xfrm>
           <a:prstGeom prst="rect">
             <a:avLst/>
@@ -9922,7 +9909,7 @@
         </p:spPr>
         <p:txBody>
           <a:bodyPr wrap="square">
-            <a:normAutofit/>
+            <a:spAutoFit/>
           </a:bodyPr>
           <a:lstStyle/>
           <a:p>
@@ -9937,7 +9924,7 @@
                   <a:srgbClr val="000000"/>
                 </a:solidFill>
               </a:rPr>
-              <a:t>Дано: объекты с признаками (x₁, x₂, ..., xₙ) и меткой класса (0 или 1)</a:t>
+              <a:t>• Дано: объекты с признаками (x₁, x₂, ..., xₙ) и меткой класса (0 или 1)</a:t>
             </a:r>
           </a:p>
           <a:p>
@@ -9952,7 +9939,7 @@
                   <a:srgbClr val="000000"/>
                 </a:solidFill>
               </a:rPr>
-              <a:t>Дерево задаёт вопросы вида xᵢ &lt; a — ровно один признак в узле</a:t>
+              <a:t>• Дерево задаёт вопросы вида xᵢ &lt; a — ровно один признак в узле</a:t>
             </a:r>
           </a:p>
           <a:p>
@@ -9967,7 +9954,7 @@
                   <a:srgbClr val="000000"/>
                 </a:solidFill>
               </a:rPr>
-              <a:t>Да → левый потомок, Нет → правый потомок</a:t>
+              <a:t>• Да → левый потомок, Нет → правый потомок</a:t>
             </a:r>
           </a:p>
           <a:p>
@@ -9982,7 +9969,7 @@
                   <a:srgbClr val="000000"/>
                 </a:solidFill>
               </a:rPr>
-              <a:t>В листе: ответ — мажоритарный класс среди попавших туда объектов</a:t>
+              <a:t>• В листе: ответ — мажоритарный класс среди попавших туда объектов</a:t>
             </a:r>
           </a:p>
           <a:p>
@@ -9997,7 +9984,7 @@
                   <a:srgbClr val="000000"/>
                 </a:solidFill>
               </a:rPr>
-              <a:t>Граница решения: оси-параллельные прямоугольники</a:t>
+              <a:t>• Граница решения: оси-параллельные прямоугольники</a:t>
             </a:r>
           </a:p>
         </p:txBody>
@@ -10010,8 +9997,8 @@
         </p:nvSpPr>
         <p:spPr>
           <a:xfrm>
-            <a:off x="640080" y="4690872"/>
-            <a:ext cx="6766560" cy="804672"/>
+            <a:off x="640080" y="4489703"/>
+            <a:ext cx="6172200" cy="804672"/>
           </a:xfrm>
           <a:prstGeom prst="rect">
             <a:avLst/>
@@ -10055,8 +10042,8 @@
         </p:nvSpPr>
         <p:spPr>
           <a:xfrm>
-            <a:off x="713231" y="4727448"/>
-            <a:ext cx="6620256" cy="731520"/>
+            <a:off x="713231" y="4526279"/>
+            <a:ext cx="6025896" cy="731520"/>
           </a:xfrm>
           <a:prstGeom prst="rect">
             <a:avLst/>
@@ -10142,8 +10129,8 @@
         </p:nvSpPr>
         <p:spPr>
           <a:xfrm>
-            <a:off x="640080" y="5550408"/>
-            <a:ext cx="6766560" cy="201168"/>
+            <a:off x="640080" y="5349240"/>
+            <a:ext cx="6172200" cy="201168"/>
           </a:xfrm>
           <a:prstGeom prst="rect">
             <a:avLst/>
@@ -10185,8 +10172,8 @@
         </p:blipFill>
         <p:spPr>
           <a:xfrm>
-            <a:off x="7635240" y="1937384"/>
-            <a:ext cx="4343400" cy="3257550"/>
+            <a:off x="7269480" y="1325880"/>
+            <a:ext cx="4465015" cy="2578036"/>
           </a:xfrm>
           <a:prstGeom prst="rect">
             <a:avLst/>
@@ -10253,7 +10240,7 @@
         <p:spPr>
           <a:xfrm>
             <a:off x="640080" y="1371600"/>
-            <a:ext cx="11247120" cy="1810512"/>
+            <a:ext cx="11247120" cy="2148839"/>
           </a:xfrm>
           <a:prstGeom prst="rect">
             <a:avLst/>
@@ -10277,7 +10264,7 @@
                   <a:srgbClr val="000000"/>
                 </a:solidFill>
               </a:rPr>
-              <a:t>Перебираем все признаки, для каждого — все возможные пороги (их конечное число, т.к. между соседними объектами impurity не меняется)</a:t>
+              <a:t>• Перебираем все признаки, для каждого — все возможные пороги (их конечное число, т.к. между соседними объектами impurity не меняется)</a:t>
             </a:r>
           </a:p>
           <a:p>
@@ -10292,7 +10279,7 @@
                   <a:srgbClr val="000000"/>
                 </a:solidFill>
               </a:rPr>
-              <a:t>Выбираем разбиение с максимальным уменьшением неоднородности узла — критерии misclassification, энтропия и Джини на следующих слайдах</a:t>
+              <a:t>• Выбираем разбиение с максимальным уменьшением неоднородности узла — критерии misclassification, энтропия и Джини на следующих слайдах</a:t>
             </a:r>
           </a:p>
           <a:p>
@@ -10307,7 +10294,7 @@
                   <a:srgbClr val="000000"/>
                 </a:solidFill>
               </a:rPr>
-              <a:t>Критерии остановки: max_depth, min_samples_leaf — чтобы не переобучаться</a:t>
+              <a:t>• Критерии остановки: max_depth, min_samples_leaf — чтобы не переобучаться</a:t>
             </a:r>
           </a:p>
           <a:p>
@@ -10322,7 +10309,7 @@
                   <a:srgbClr val="000000"/>
                 </a:solidFill>
               </a:rPr>
-              <a:t>В листе: ответ — мажоритарный класс попавших туда объектов</a:t>
+              <a:t>• В листе: ответ — мажоритарный класс попавших туда объектов</a:t>
             </a:r>
           </a:p>
         </p:txBody>
@@ -10387,7 +10374,7 @@
         <p:spPr>
           <a:xfrm>
             <a:off x="640080" y="1371600"/>
-            <a:ext cx="11247120" cy="1645920"/>
+            <a:ext cx="11247120" cy="1828800"/>
           </a:xfrm>
           <a:prstGeom prst="rect">
             <a:avLst/>
@@ -10405,6 +10392,14 @@
                 <a:spcPts val="800"/>
               </a:spcAft>
             </a:pPr>
+            <a:r>
+              <a:rPr lang="ru-RU" dirty="0" sz="2000">
+                <a:solidFill>
+                  <a:srgbClr val="000000"/>
+                </a:solidFill>
+              </a:rPr>
+              <a:t xml:space="preserve">• </a:t>
+            </a:r>
             <ns0:m xmlns:ns0="http://schemas.microsoft.com/office/drawing/2010/main">
               <m:oMath xmlns:m="http://schemas.openxmlformats.org/officeDocument/2006/math">
                 <m:sSub>
@@ -10469,22 +10464,7 @@
                   <a:srgbClr val="000000"/>
                 </a:solidFill>
               </a:rPr>
-              <a:t xml:space="preserve">Простой и интуитивный, но есть недостатки при </a:t>
-            </a:r>
-            <ns0:m xmlns:ns0="http://schemas.microsoft.com/office/drawing/2010/main">
-              <m:oMath xmlns:m="http://schemas.openxmlformats.org/officeDocument/2006/math">
-                <m:r>
-                  <m:t>K≥3</m:t>
-                </m:r>
-              </m:oMath>
-            </ns0:m>
-            <a:r>
-              <a:rPr lang="ru-RU" dirty="0" sz="2000">
-                <a:solidFill>
-                  <a:srgbClr val="000000"/>
-                </a:solidFill>
-              </a:rPr>
-              <a:t xml:space="preserve"> — разберём в теоретическом блоке</a:t>
+              <a:t>• Простой и интуитивный, но есть недостатки (обсудим на слайде 21)</a:t>
             </a:r>
           </a:p>
         </p:txBody>
@@ -10549,7 +10529,7 @@
         <p:spPr>
           <a:xfrm>
             <a:off x="640080" y="1371600"/>
-            <a:ext cx="6858000" cy="3209544"/>
+            <a:ext cx="6263640" cy="2971800"/>
           </a:xfrm>
           <a:prstGeom prst="rect">
             <a:avLst/>
@@ -10558,7 +10538,7 @@
         </p:spPr>
         <p:txBody>
           <a:bodyPr wrap="square">
-            <a:normAutofit/>
+            <a:spAutoFit/>
           </a:bodyPr>
           <a:lstStyle/>
           <a:p>
@@ -10573,7 +10553,7 @@
                   <a:srgbClr val="000000"/>
                 </a:solidFill>
               </a:rPr>
-              <a:t xml:space="preserve">Энтропия: </a:t>
+              <a:t xml:space="preserve">• Энтропия: </a:t>
             </a:r>
             <ns0:m xmlns:ns0="http://schemas.microsoft.com/office/drawing/2010/main">
               <m:oMath xmlns:m="http://schemas.openxmlformats.org/officeDocument/2006/math">
@@ -10651,7 +10631,7 @@
                   <a:srgbClr val="000000"/>
                 </a:solidFill>
               </a:rPr>
-              <a:t xml:space="preserve">Индекс Джини: </a:t>
+              <a:t xml:space="preserve">• Индекс Джини: </a:t>
             </a:r>
             <ns0:m xmlns:ns0="http://schemas.microsoft.com/office/drawing/2010/main">
               <m:oMath xmlns:m="http://schemas.openxmlformats.org/officeDocument/2006/math">
@@ -10754,7 +10734,7 @@
                   <a:srgbClr val="000000"/>
                 </a:solidFill>
               </a:rPr>
-              <a:t>Обе функции строго вогнуты — учитывают распределение всех классов</a:t>
+              <a:t>• Обе функции строго вогнуты — учитывают распределение всех классов</a:t>
             </a:r>
           </a:p>
           <a:p>
@@ -10769,7 +10749,7 @@
                   <a:srgbClr val="000000"/>
                 </a:solidFill>
               </a:rPr>
-              <a:t>Именно их используют на практике (sklearn: criterion='gini' или 'entropy')</a:t>
+              <a:t>• Именно их используют на практике (sklearn: criterion='gini' или 'entropy')</a:t>
             </a:r>
           </a:p>
           <a:p>
@@ -10784,7 +10764,7 @@
                   <a:srgbClr val="000000"/>
                 </a:solidFill>
               </a:rPr>
-              <a:t>Почему misclassification слабее — разберём в теоретическом блоке</a:t>
+              <a:t>• Почему misclassification слабее — разберём в теоретическом блоке</a:t>
             </a:r>
           </a:p>
         </p:txBody>
@@ -10798,7 +10778,7 @@
         <p:spPr>
           <a:xfrm>
             <a:off x="640080" y="4690872"/>
-            <a:ext cx="6766560" cy="804672"/>
+            <a:ext cx="6172200" cy="630936"/>
           </a:xfrm>
           <a:prstGeom prst="rect">
             <a:avLst/>
@@ -10843,7 +10823,7 @@
         <p:spPr>
           <a:xfrm>
             <a:off x="713231" y="4727448"/>
-            <a:ext cx="6620256" cy="731520"/>
+            <a:ext cx="6025896" cy="557784"/>
           </a:xfrm>
           <a:prstGeom prst="rect">
             <a:avLst/>
@@ -10868,22 +10848,6 @@
                 </a:solidFill>
                 <a:latin typeface="Consolas"/>
               </a:rPr>
-              <a:t>from sklearn.tree import DecisionTreeClassifier</a:t>
-            </a:r>
-          </a:p>
-          <a:p>
-            <a:pPr>
-              <a:spcAft>
-                <a:spcPts val="0"/>
-              </a:spcAft>
-            </a:pPr>
-            <a:r>
-              <a:rPr sz="1100">
-                <a:solidFill>
-                  <a:srgbClr val="000000"/>
-                </a:solidFill>
-                <a:latin typeface="Consolas"/>
-              </a:rPr>
               <a:t>clf = DecisionTreeClassifier(criterion='gini')</a:t>
             </a:r>
           </a:p>
@@ -10929,8 +10893,8 @@
         </p:nvSpPr>
         <p:spPr>
           <a:xfrm>
-            <a:off x="640080" y="5550408"/>
-            <a:ext cx="6766560" cy="201168"/>
+            <a:off x="640080" y="5376672"/>
+            <a:ext cx="6172200" cy="201168"/>
           </a:xfrm>
           <a:prstGeom prst="rect">
             <a:avLst/>
@@ -10972,8 +10936,8 @@
         </p:blipFill>
         <p:spPr>
           <a:xfrm>
-            <a:off x="7635240" y="2208847"/>
-            <a:ext cx="4343400" cy="2714625"/>
+            <a:off x="7269480" y="1325880"/>
+            <a:ext cx="4465015" cy="2404496"/>
           </a:xfrm>
           <a:prstGeom prst="rect">
             <a:avLst/>
@@ -11040,7 +11004,7 @@
         <p:spPr>
           <a:xfrm>
             <a:off x="640080" y="1371600"/>
-            <a:ext cx="11247120" cy="1810512"/>
+            <a:ext cx="11247120" cy="2423160"/>
           </a:xfrm>
           <a:prstGeom prst="rect">
             <a:avLst/>
@@ -11064,7 +11028,7 @@
                   <a:srgbClr val="000000"/>
                 </a:solidFill>
               </a:rPr>
-              <a:t>ID3 (Iterative Dichotomiser 3, Quinlan, 1986) — энтропия, категориальные признаки, без прунинга</a:t>
+              <a:t>• ID3 (Iterative Dichotomiser 3, Quinlan, 1986) — энтропия, категориальные признаки, без прунинга</a:t>
             </a:r>
           </a:p>
           <a:p>
@@ -11079,7 +11043,7 @@
                   <a:srgbClr val="000000"/>
                 </a:solidFill>
               </a:rPr>
-              <a:t>C4.5 — наследник ID3: непрерывные признаки (пороги), Gain Ratio против high-cardinality, прунинг</a:t>
+              <a:t>• C4.5 — наследник ID3: непрерывные признаки (пороги), Gain Ratio против high-cardinality, прунинг</a:t>
             </a:r>
           </a:p>
           <a:p>
@@ -11094,7 +11058,7 @@
                   <a:srgbClr val="000000"/>
                 </a:solidFill>
               </a:rPr>
-              <a:t>CART (Classification and Regression Trees, Breiman, 1984) — Gini/MSE, только бинарные разбиения</a:t>
+              <a:t>• CART (Classification and Regression Trees, Breiman, 1984) — Gini/MSE, только бинарные разбиения</a:t>
             </a:r>
           </a:p>
           <a:p>
@@ -11109,7 +11073,7 @@
                   <a:srgbClr val="000000"/>
                 </a:solidFill>
               </a:rPr>
-              <a:t>sklearn DecisionTreeClassifier/Regressor — реализация в духе CART</a:t>
+              <a:t>• sklearn DecisionTreeClassifier/Regressor — реализация в духе CART</a:t>
             </a:r>
           </a:p>
         </p:txBody>
@@ -11174,7 +11138,7 @@
         <p:spPr>
           <a:xfrm>
             <a:off x="640080" y="1371600"/>
-            <a:ext cx="11247120" cy="1810512"/>
+            <a:ext cx="11247120" cy="1828800"/>
           </a:xfrm>
           <a:prstGeom prst="rect">
             <a:avLst/>
@@ -11198,7 +11162,7 @@
                   <a:srgbClr val="000000"/>
                 </a:solidFill>
               </a:rPr>
-              <a:t>Для K классов линейные модели часто используют one-vs-rest или одну модель с softmax</a:t>
+              <a:t>• Для K классов линейные модели часто используют one-vs-rest или одну модель с softmax</a:t>
             </a:r>
           </a:p>
           <a:p>
@@ -11213,7 +11177,7 @@
                   <a:srgbClr val="000000"/>
                 </a:solidFill>
               </a:rPr>
-              <a:t>Дерево решений обобщается на K классов естественно — одна модель на все классы</a:t>
+              <a:t>• Дерево решений обобщается на K классов естественно — одна модель на все классы</a:t>
             </a:r>
           </a:p>
           <a:p>
@@ -11228,7 +11192,7 @@
                   <a:srgbClr val="000000"/>
                 </a:solidFill>
               </a:rPr>
-              <a:t>Подставляем K классов в формулы энтропии/Джини — алгоритм построения не меняется</a:t>
+              <a:t>• Подставляем K классов в формулы энтропии/Джини — алгоритм построения не меняется</a:t>
             </a:r>
           </a:p>
           <a:p>
@@ -11243,7 +11207,7 @@
                   <a:srgbClr val="000000"/>
                 </a:solidFill>
               </a:rPr>
-              <a:t>Никаких дополнительных моделей и схем one-vs-rest</a:t>
+              <a:t>• Никаких дополнительных моделей и схем one-vs-rest</a:t>
             </a:r>
           </a:p>
         </p:txBody>

--- a/lessons/derevo_resheniy/presentation.pptx
+++ b/lessons/derevo_resheniy/presentation.pptx
@@ -5342,7 +5342,7 @@
         <p:spPr>
           <a:xfrm>
             <a:off x="640080" y="1371600"/>
-            <a:ext cx="11247120" cy="2423160"/>
+            <a:ext cx="11247120" cy="2240280"/>
           </a:xfrm>
           <a:prstGeom prst="rect">
             <a:avLst/>
@@ -5476,7 +5476,7 @@
         <p:spPr>
           <a:xfrm>
             <a:off x="640080" y="1371600"/>
-            <a:ext cx="11247120" cy="2148839"/>
+            <a:ext cx="11247120" cy="1965960"/>
           </a:xfrm>
           <a:prstGeom prst="rect">
             <a:avLst/>
@@ -5558,8 +5558,8 @@
         </p:nvSpPr>
         <p:spPr>
           <a:xfrm>
-            <a:off x="640080" y="4690872"/>
-            <a:ext cx="11155680" cy="630936"/>
+            <a:off x="640080" y="5832856"/>
+            <a:ext cx="11155680" cy="604520"/>
           </a:xfrm>
           <a:prstGeom prst="rect">
             <a:avLst/>
@@ -5603,21 +5603,27 @@
         </p:nvSpPr>
         <p:spPr>
           <a:xfrm>
-            <a:off x="713231" y="4727448"/>
-            <a:ext cx="11009376" cy="557784"/>
+            <a:off x="713231" y="5878576"/>
+            <a:ext cx="11009376" cy="139700"/>
           </a:xfrm>
           <a:prstGeom prst="rect">
             <a:avLst/>
           </a:prstGeom>
           <a:noFill/>
+          <a:ln>
+            <a:noFill/>
+          </a:ln>
         </p:spPr>
         <p:txBody>
-          <a:bodyPr wrap="none">
+          <a:bodyPr wrap="none" anchor="t" lIns="0" rIns="0" tIns="0" bIns="0">
             <a:noAutofit/>
           </a:bodyPr>
           <a:lstStyle/>
           <a:p>
             <a:pPr>
+              <a:spcBef>
+                <a:spcPts val="0"/>
+              </a:spcBef>
               <a:spcAft>
                 <a:spcPts val="0"/>
               </a:spcAft>
@@ -5629,11 +5635,131 @@
                 </a:solidFill>
                 <a:latin typeface="Consolas"/>
               </a:rPr>
-              <a:t>y_pred = clf.predict(X_test)</a:t>
-            </a:r>
-          </a:p>
+              <a:t>y_pred</a:t>
+            </a:r>
+            <a:r>
+              <a:rPr sz="1100">
+                <a:solidFill>
+                  <a:srgbClr val="000000"/>
+                </a:solidFill>
+                <a:latin typeface="Consolas"/>
+              </a:rPr>
+              <a:t> </a:t>
+            </a:r>
+            <a:r>
+              <a:rPr sz="1100">
+                <a:solidFill>
+                  <a:srgbClr val="666666"/>
+                </a:solidFill>
+                <a:latin typeface="Consolas"/>
+              </a:rPr>
+              <a:t>=</a:t>
+            </a:r>
+            <a:r>
+              <a:rPr sz="1100">
+                <a:solidFill>
+                  <a:srgbClr val="000000"/>
+                </a:solidFill>
+                <a:latin typeface="Consolas"/>
+              </a:rPr>
+              <a:t> </a:t>
+            </a:r>
+            <a:r>
+              <a:rPr sz="1100">
+                <a:solidFill>
+                  <a:srgbClr val="000000"/>
+                </a:solidFill>
+                <a:latin typeface="Consolas"/>
+              </a:rPr>
+              <a:t>clf</a:t>
+            </a:r>
+            <a:r>
+              <a:rPr sz="1100">
+                <a:solidFill>
+                  <a:srgbClr val="666666"/>
+                </a:solidFill>
+                <a:latin typeface="Consolas"/>
+              </a:rPr>
+              <a:t>.</a:t>
+            </a:r>
+            <a:r>
+              <a:rPr sz="1100">
+                <a:solidFill>
+                  <a:srgbClr val="000000"/>
+                </a:solidFill>
+                <a:latin typeface="Consolas"/>
+              </a:rPr>
+              <a:t>predict</a:t>
+            </a:r>
+            <a:r>
+              <a:rPr sz="1100">
+                <a:solidFill>
+                  <a:srgbClr val="000000"/>
+                </a:solidFill>
+                <a:latin typeface="Consolas"/>
+              </a:rPr>
+              <a:t>(</a:t>
+            </a:r>
+            <a:r>
+              <a:rPr sz="1100">
+                <a:solidFill>
+                  <a:srgbClr val="000000"/>
+                </a:solidFill>
+                <a:latin typeface="Consolas"/>
+              </a:rPr>
+              <a:t>X_test</a:t>
+            </a:r>
+            <a:r>
+              <a:rPr sz="1100">
+                <a:solidFill>
+                  <a:srgbClr val="000000"/>
+                </a:solidFill>
+                <a:latin typeface="Consolas"/>
+              </a:rPr>
+              <a:t>)</a:t>
+            </a:r>
+            <a:r>
+              <a:rPr sz="1100">
+                <a:solidFill>
+                  <a:srgbClr val="BBBBBB"/>
+                </a:solidFill>
+                <a:latin typeface="Consolas"/>
+              </a:rPr>
+              <a:t>
+</a:t>
+            </a:r>
+          </a:p>
+        </p:txBody>
+      </p:sp>
+      <p:sp>
+        <p:nvSpPr>
+          <p:cNvPr id="6" name="TextBox 5"/>
+          <p:cNvSpPr txBox="1"/>
+          <p:nvPr/>
+        </p:nvSpPr>
+        <p:spPr>
+          <a:xfrm>
+            <a:off x="713231" y="6018275"/>
+            <a:ext cx="11009376" cy="139700"/>
+          </a:xfrm>
+          <a:prstGeom prst="rect">
+            <a:avLst/>
+          </a:prstGeom>
+          <a:noFill/>
+          <a:ln>
+            <a:noFill/>
+          </a:ln>
+        </p:spPr>
+        <p:txBody>
+          <a:bodyPr wrap="none" anchor="t" lIns="0" rIns="0" tIns="0" bIns="0">
+            <a:noAutofit/>
+          </a:bodyPr>
+          <a:lstStyle/>
           <a:p>
             <a:pPr>
+              <a:spcBef>
+                <a:spcPts val="0"/>
+              </a:spcBef>
               <a:spcAft>
                 <a:spcPts val="0"/>
               </a:spcAft>
@@ -5641,15 +5767,135 @@
             <a:r>
               <a:rPr sz="1100">
                 <a:solidFill>
-                  <a:srgbClr val="000000"/>
-                </a:solidFill>
-                <a:latin typeface="Consolas"/>
-              </a:rPr>
-              <a:t>print(accuracy_score(y_test, y_pred))</a:t>
-            </a:r>
-          </a:p>
+                  <a:srgbClr val="007020"/>
+                </a:solidFill>
+                <a:latin typeface="Consolas"/>
+              </a:rPr>
+              <a:t>print</a:t>
+            </a:r>
+            <a:r>
+              <a:rPr sz="1100">
+                <a:solidFill>
+                  <a:srgbClr val="000000"/>
+                </a:solidFill>
+                <a:latin typeface="Consolas"/>
+              </a:rPr>
+              <a:t>(</a:t>
+            </a:r>
+            <a:r>
+              <a:rPr sz="1100">
+                <a:solidFill>
+                  <a:srgbClr val="000000"/>
+                </a:solidFill>
+                <a:latin typeface="Consolas"/>
+              </a:rPr>
+              <a:t>accuracy_score</a:t>
+            </a:r>
+            <a:r>
+              <a:rPr sz="1100">
+                <a:solidFill>
+                  <a:srgbClr val="000000"/>
+                </a:solidFill>
+                <a:latin typeface="Consolas"/>
+              </a:rPr>
+              <a:t>(</a:t>
+            </a:r>
+            <a:r>
+              <a:rPr sz="1100">
+                <a:solidFill>
+                  <a:srgbClr val="000000"/>
+                </a:solidFill>
+                <a:latin typeface="Consolas"/>
+              </a:rPr>
+              <a:t>y_test</a:t>
+            </a:r>
+            <a:r>
+              <a:rPr sz="1100">
+                <a:solidFill>
+                  <a:srgbClr val="000000"/>
+                </a:solidFill>
+                <a:latin typeface="Consolas"/>
+              </a:rPr>
+              <a:t>,</a:t>
+            </a:r>
+            <a:r>
+              <a:rPr sz="1100">
+                <a:solidFill>
+                  <a:srgbClr val="000000"/>
+                </a:solidFill>
+                <a:latin typeface="Consolas"/>
+              </a:rPr>
+              <a:t> </a:t>
+            </a:r>
+            <a:r>
+              <a:rPr sz="1100">
+                <a:solidFill>
+                  <a:srgbClr val="000000"/>
+                </a:solidFill>
+                <a:latin typeface="Consolas"/>
+              </a:rPr>
+              <a:t>y_pred</a:t>
+            </a:r>
+            <a:r>
+              <a:rPr sz="1100">
+                <a:solidFill>
+                  <a:srgbClr val="000000"/>
+                </a:solidFill>
+                <a:latin typeface="Consolas"/>
+              </a:rPr>
+              <a:t>)</a:t>
+            </a:r>
+            <a:r>
+              <a:rPr sz="1100">
+                <a:solidFill>
+                  <a:srgbClr val="000000"/>
+                </a:solidFill>
+                <a:latin typeface="Consolas"/>
+              </a:rPr>
+              <a:t>)</a:t>
+            </a:r>
+            <a:r>
+              <a:rPr sz="1100">
+                <a:solidFill>
+                  <a:srgbClr val="BBBBBB"/>
+                </a:solidFill>
+                <a:latin typeface="Consolas"/>
+              </a:rPr>
+              <a:t>
+</a:t>
+            </a:r>
+          </a:p>
+        </p:txBody>
+      </p:sp>
+      <p:sp>
+        <p:nvSpPr>
+          <p:cNvPr id="7" name="TextBox 6"/>
+          <p:cNvSpPr txBox="1"/>
+          <p:nvPr/>
+        </p:nvSpPr>
+        <p:spPr>
+          <a:xfrm>
+            <a:off x="713231" y="6157975"/>
+            <a:ext cx="11009376" cy="139700"/>
+          </a:xfrm>
+          <a:prstGeom prst="rect">
+            <a:avLst/>
+          </a:prstGeom>
+          <a:noFill/>
+          <a:ln>
+            <a:noFill/>
+          </a:ln>
+        </p:spPr>
+        <p:txBody>
+          <a:bodyPr wrap="none" anchor="t" lIns="0" rIns="0" tIns="0" bIns="0">
+            <a:noAutofit/>
+          </a:bodyPr>
+          <a:lstStyle/>
           <a:p>
             <a:pPr>
+              <a:spcBef>
+                <a:spcPts val="0"/>
+              </a:spcBef>
               <a:spcAft>
                 <a:spcPts val="0"/>
               </a:spcAft>
@@ -5657,24 +5903,178 @@
             <a:r>
               <a:rPr sz="1100">
                 <a:solidFill>
-                  <a:srgbClr val="000000"/>
-                </a:solidFill>
-                <a:latin typeface="Consolas"/>
-              </a:rPr>
-              <a:t>print(f1_score(y_test, y_pred, average='macro'))</a:t>
-            </a:r>
-          </a:p>
-        </p:txBody>
-      </p:sp>
-      <p:sp>
-        <p:nvSpPr>
-          <p:cNvPr id="6" name="TextBox 5"/>
+                  <a:srgbClr val="007020"/>
+                </a:solidFill>
+                <a:latin typeface="Consolas"/>
+              </a:rPr>
+              <a:t>print</a:t>
+            </a:r>
+            <a:r>
+              <a:rPr sz="1100">
+                <a:solidFill>
+                  <a:srgbClr val="000000"/>
+                </a:solidFill>
+                <a:latin typeface="Consolas"/>
+              </a:rPr>
+              <a:t>(</a:t>
+            </a:r>
+            <a:r>
+              <a:rPr sz="1100">
+                <a:solidFill>
+                  <a:srgbClr val="000000"/>
+                </a:solidFill>
+                <a:latin typeface="Consolas"/>
+              </a:rPr>
+              <a:t>f1_score</a:t>
+            </a:r>
+            <a:r>
+              <a:rPr sz="1100">
+                <a:solidFill>
+                  <a:srgbClr val="000000"/>
+                </a:solidFill>
+                <a:latin typeface="Consolas"/>
+              </a:rPr>
+              <a:t>(</a:t>
+            </a:r>
+            <a:r>
+              <a:rPr sz="1100">
+                <a:solidFill>
+                  <a:srgbClr val="000000"/>
+                </a:solidFill>
+                <a:latin typeface="Consolas"/>
+              </a:rPr>
+              <a:t>y_test</a:t>
+            </a:r>
+            <a:r>
+              <a:rPr sz="1100">
+                <a:solidFill>
+                  <a:srgbClr val="000000"/>
+                </a:solidFill>
+                <a:latin typeface="Consolas"/>
+              </a:rPr>
+              <a:t>,</a:t>
+            </a:r>
+            <a:r>
+              <a:rPr sz="1100">
+                <a:solidFill>
+                  <a:srgbClr val="000000"/>
+                </a:solidFill>
+                <a:latin typeface="Consolas"/>
+              </a:rPr>
+              <a:t> </a:t>
+            </a:r>
+            <a:r>
+              <a:rPr sz="1100">
+                <a:solidFill>
+                  <a:srgbClr val="000000"/>
+                </a:solidFill>
+                <a:latin typeface="Consolas"/>
+              </a:rPr>
+              <a:t>y_pred</a:t>
+            </a:r>
+            <a:r>
+              <a:rPr sz="1100">
+                <a:solidFill>
+                  <a:srgbClr val="000000"/>
+                </a:solidFill>
+                <a:latin typeface="Consolas"/>
+              </a:rPr>
+              <a:t>,</a:t>
+            </a:r>
+            <a:r>
+              <a:rPr sz="1100">
+                <a:solidFill>
+                  <a:srgbClr val="000000"/>
+                </a:solidFill>
+                <a:latin typeface="Consolas"/>
+              </a:rPr>
+              <a:t> </a:t>
+            </a:r>
+            <a:r>
+              <a:rPr sz="1100">
+                <a:solidFill>
+                  <a:srgbClr val="000000"/>
+                </a:solidFill>
+                <a:latin typeface="Consolas"/>
+              </a:rPr>
+              <a:t>average</a:t>
+            </a:r>
+            <a:r>
+              <a:rPr sz="1100">
+                <a:solidFill>
+                  <a:srgbClr val="666666"/>
+                </a:solidFill>
+                <a:latin typeface="Consolas"/>
+              </a:rPr>
+              <a:t>=</a:t>
+            </a:r>
+            <a:r>
+              <a:rPr sz="1100">
+                <a:solidFill>
+                  <a:srgbClr val="4070A0"/>
+                </a:solidFill>
+                <a:latin typeface="Consolas"/>
+              </a:rPr>
+              <a:t>'</a:t>
+            </a:r>
+            <a:r>
+              <a:rPr sz="1100">
+                <a:solidFill>
+                  <a:srgbClr val="4070A0"/>
+                </a:solidFill>
+                <a:latin typeface="Consolas"/>
+              </a:rPr>
+              <a:t>macro</a:t>
+            </a:r>
+            <a:r>
+              <a:rPr sz="1100">
+                <a:solidFill>
+                  <a:srgbClr val="4070A0"/>
+                </a:solidFill>
+                <a:latin typeface="Consolas"/>
+              </a:rPr>
+              <a:t>'</a:t>
+            </a:r>
+            <a:r>
+              <a:rPr sz="1100">
+                <a:solidFill>
+                  <a:srgbClr val="000000"/>
+                </a:solidFill>
+                <a:latin typeface="Consolas"/>
+              </a:rPr>
+              <a:t>)</a:t>
+            </a:r>
+            <a:r>
+              <a:rPr sz="1100">
+                <a:solidFill>
+                  <a:srgbClr val="000000"/>
+                </a:solidFill>
+                <a:latin typeface="Consolas"/>
+              </a:rPr>
+              <a:t>)</a:t>
+            </a:r>
+            <a:r>
+              <a:rPr sz="1100">
+                <a:solidFill>
+                  <a:srgbClr val="BBBBBB"/>
+                </a:solidFill>
+                <a:latin typeface="Consolas"/>
+              </a:rPr>
+              <a:t>
+</a:t>
+            </a:r>
+          </a:p>
+        </p:txBody>
+      </p:sp>
+      <p:sp>
+        <p:nvSpPr>
+          <p:cNvPr id="8" name="TextBox 7"/>
           <p:cNvSpPr txBox="1"/>
           <p:nvPr/>
         </p:nvSpPr>
         <p:spPr>
           <a:xfrm>
-            <a:off x="640080" y="5376672"/>
+            <a:off x="640080" y="6492240"/>
             <a:ext cx="11155680" cy="201168"/>
           </a:xfrm>
           <a:prstGeom prst="rect">
@@ -5761,7 +6161,7 @@
         <p:spPr>
           <a:xfrm>
             <a:off x="640080" y="1371600"/>
-            <a:ext cx="6263640" cy="2971800"/>
+            <a:ext cx="6263640" cy="3337560"/>
           </a:xfrm>
           <a:prstGeom prst="rect">
             <a:avLst/>
@@ -5858,8 +6258,8 @@
         </p:nvSpPr>
         <p:spPr>
           <a:xfrm>
-            <a:off x="640080" y="4690872"/>
-            <a:ext cx="6172200" cy="630936"/>
+            <a:off x="640080" y="5832856"/>
+            <a:ext cx="6172200" cy="604520"/>
           </a:xfrm>
           <a:prstGeom prst="rect">
             <a:avLst/>
@@ -5903,21 +6303,27 @@
         </p:nvSpPr>
         <p:spPr>
           <a:xfrm>
-            <a:off x="713231" y="4727448"/>
-            <a:ext cx="6025896" cy="557784"/>
+            <a:off x="713231" y="5878576"/>
+            <a:ext cx="6025896" cy="139700"/>
           </a:xfrm>
           <a:prstGeom prst="rect">
             <a:avLst/>
           </a:prstGeom>
           <a:noFill/>
+          <a:ln>
+            <a:noFill/>
+          </a:ln>
         </p:spPr>
         <p:txBody>
-          <a:bodyPr wrap="none">
+          <a:bodyPr wrap="none" anchor="t" lIns="0" rIns="0" tIns="0" bIns="0">
             <a:noAutofit/>
           </a:bodyPr>
           <a:lstStyle/>
           <a:p>
             <a:pPr>
+              <a:spcBef>
+                <a:spcPts val="0"/>
+              </a:spcBef>
               <a:spcAft>
                 <a:spcPts val="0"/>
               </a:spcAft>
@@ -5929,11 +6335,131 @@
                 </a:solidFill>
                 <a:latin typeface="Consolas"/>
               </a:rPr>
-              <a:t>clf_deep = DecisionTreeClassifier(max_depth=None)</a:t>
-            </a:r>
-          </a:p>
+              <a:t>clf_deep</a:t>
+            </a:r>
+            <a:r>
+              <a:rPr sz="1100">
+                <a:solidFill>
+                  <a:srgbClr val="000000"/>
+                </a:solidFill>
+                <a:latin typeface="Consolas"/>
+              </a:rPr>
+              <a:t> </a:t>
+            </a:r>
+            <a:r>
+              <a:rPr sz="1100">
+                <a:solidFill>
+                  <a:srgbClr val="666666"/>
+                </a:solidFill>
+                <a:latin typeface="Consolas"/>
+              </a:rPr>
+              <a:t>=</a:t>
+            </a:r>
+            <a:r>
+              <a:rPr sz="1100">
+                <a:solidFill>
+                  <a:srgbClr val="000000"/>
+                </a:solidFill>
+                <a:latin typeface="Consolas"/>
+              </a:rPr>
+              <a:t> </a:t>
+            </a:r>
+            <a:r>
+              <a:rPr sz="1100">
+                <a:solidFill>
+                  <a:srgbClr val="000000"/>
+                </a:solidFill>
+                <a:latin typeface="Consolas"/>
+              </a:rPr>
+              <a:t>DecisionTreeClassifier</a:t>
+            </a:r>
+            <a:r>
+              <a:rPr sz="1100">
+                <a:solidFill>
+                  <a:srgbClr val="000000"/>
+                </a:solidFill>
+                <a:latin typeface="Consolas"/>
+              </a:rPr>
+              <a:t>(</a:t>
+            </a:r>
+            <a:r>
+              <a:rPr sz="1100">
+                <a:solidFill>
+                  <a:srgbClr val="000000"/>
+                </a:solidFill>
+                <a:latin typeface="Consolas"/>
+              </a:rPr>
+              <a:t>max_depth</a:t>
+            </a:r>
+            <a:r>
+              <a:rPr sz="1100">
+                <a:solidFill>
+                  <a:srgbClr val="666666"/>
+                </a:solidFill>
+                <a:latin typeface="Consolas"/>
+              </a:rPr>
+              <a:t>=</a:t>
+            </a:r>
+            <a:r>
+              <a:rPr sz="1100" b="1">
+                <a:solidFill>
+                  <a:srgbClr val="007020"/>
+                </a:solidFill>
+                <a:latin typeface="Consolas"/>
+              </a:rPr>
+              <a:t>None</a:t>
+            </a:r>
+            <a:r>
+              <a:rPr sz="1100">
+                <a:solidFill>
+                  <a:srgbClr val="000000"/>
+                </a:solidFill>
+                <a:latin typeface="Consolas"/>
+              </a:rPr>
+              <a:t>)</a:t>
+            </a:r>
+            <a:r>
+              <a:rPr sz="1100">
+                <a:solidFill>
+                  <a:srgbClr val="BBBBBB"/>
+                </a:solidFill>
+                <a:latin typeface="Consolas"/>
+              </a:rPr>
+              <a:t>
+</a:t>
+            </a:r>
+          </a:p>
+        </p:txBody>
+      </p:sp>
+      <p:sp>
+        <p:nvSpPr>
+          <p:cNvPr id="6" name="TextBox 5"/>
+          <p:cNvSpPr txBox="1"/>
+          <p:nvPr/>
+        </p:nvSpPr>
+        <p:spPr>
+          <a:xfrm>
+            <a:off x="713231" y="6018275"/>
+            <a:ext cx="6025896" cy="139700"/>
+          </a:xfrm>
+          <a:prstGeom prst="rect">
+            <a:avLst/>
+          </a:prstGeom>
+          <a:noFill/>
+          <a:ln>
+            <a:noFill/>
+          </a:ln>
+        </p:spPr>
+        <p:txBody>
+          <a:bodyPr wrap="none" anchor="t" lIns="0" rIns="0" tIns="0" bIns="0">
+            <a:noAutofit/>
+          </a:bodyPr>
+          <a:lstStyle/>
           <a:p>
             <a:pPr>
+              <a:spcBef>
+                <a:spcPts val="0"/>
+              </a:spcBef>
               <a:spcAft>
                 <a:spcPts val="0"/>
               </a:spcAft>
@@ -5945,36 +6471,166 @@
                 </a:solidFill>
                 <a:latin typeface="Consolas"/>
               </a:rPr>
-              <a:t>clf_reg = DecisionTreeClassifier(max_depth=3)</a:t>
-            </a:r>
-          </a:p>
+              <a:t>clf_reg</a:t>
+            </a:r>
+            <a:r>
+              <a:rPr sz="1100">
+                <a:solidFill>
+                  <a:srgbClr val="000000"/>
+                </a:solidFill>
+                <a:latin typeface="Consolas"/>
+              </a:rPr>
+              <a:t> </a:t>
+            </a:r>
+            <a:r>
+              <a:rPr sz="1100">
+                <a:solidFill>
+                  <a:srgbClr val="666666"/>
+                </a:solidFill>
+                <a:latin typeface="Consolas"/>
+              </a:rPr>
+              <a:t>=</a:t>
+            </a:r>
+            <a:r>
+              <a:rPr sz="1100">
+                <a:solidFill>
+                  <a:srgbClr val="000000"/>
+                </a:solidFill>
+                <a:latin typeface="Consolas"/>
+              </a:rPr>
+              <a:t> </a:t>
+            </a:r>
+            <a:r>
+              <a:rPr sz="1100">
+                <a:solidFill>
+                  <a:srgbClr val="000000"/>
+                </a:solidFill>
+                <a:latin typeface="Consolas"/>
+              </a:rPr>
+              <a:t>DecisionTreeClassifier</a:t>
+            </a:r>
+            <a:r>
+              <a:rPr sz="1100">
+                <a:solidFill>
+                  <a:srgbClr val="000000"/>
+                </a:solidFill>
+                <a:latin typeface="Consolas"/>
+              </a:rPr>
+              <a:t>(</a:t>
+            </a:r>
+            <a:r>
+              <a:rPr sz="1100">
+                <a:solidFill>
+                  <a:srgbClr val="000000"/>
+                </a:solidFill>
+                <a:latin typeface="Consolas"/>
+              </a:rPr>
+              <a:t>max_depth</a:t>
+            </a:r>
+            <a:r>
+              <a:rPr sz="1100">
+                <a:solidFill>
+                  <a:srgbClr val="666666"/>
+                </a:solidFill>
+                <a:latin typeface="Consolas"/>
+              </a:rPr>
+              <a:t>=</a:t>
+            </a:r>
+            <a:r>
+              <a:rPr sz="1100">
+                <a:solidFill>
+                  <a:srgbClr val="40A070"/>
+                </a:solidFill>
+                <a:latin typeface="Consolas"/>
+              </a:rPr>
+              <a:t>3</a:t>
+            </a:r>
+            <a:r>
+              <a:rPr sz="1100">
+                <a:solidFill>
+                  <a:srgbClr val="000000"/>
+                </a:solidFill>
+                <a:latin typeface="Consolas"/>
+              </a:rPr>
+              <a:t>)</a:t>
+            </a:r>
+            <a:r>
+              <a:rPr sz="1100">
+                <a:solidFill>
+                  <a:srgbClr val="BBBBBB"/>
+                </a:solidFill>
+                <a:latin typeface="Consolas"/>
+              </a:rPr>
+              <a:t>
+</a:t>
+            </a:r>
+          </a:p>
+        </p:txBody>
+      </p:sp>
+      <p:sp>
+        <p:nvSpPr>
+          <p:cNvPr id="7" name="TextBox 6"/>
+          <p:cNvSpPr txBox="1"/>
+          <p:nvPr/>
+        </p:nvSpPr>
+        <p:spPr>
+          <a:xfrm>
+            <a:off x="713231" y="6157975"/>
+            <a:ext cx="6025896" cy="139700"/>
+          </a:xfrm>
+          <a:prstGeom prst="rect">
+            <a:avLst/>
+          </a:prstGeom>
+          <a:noFill/>
+          <a:ln>
+            <a:noFill/>
+          </a:ln>
+        </p:spPr>
+        <p:txBody>
+          <a:bodyPr wrap="none" anchor="t" lIns="0" rIns="0" tIns="0" bIns="0">
+            <a:noAutofit/>
+          </a:bodyPr>
+          <a:lstStyle/>
           <a:p>
             <a:pPr>
+              <a:spcBef>
+                <a:spcPts val="0"/>
+              </a:spcBef>
               <a:spcAft>
                 <a:spcPts val="0"/>
               </a:spcAft>
             </a:pPr>
             <a:r>
-              <a:rPr sz="1100">
-                <a:solidFill>
-                  <a:srgbClr val="000000"/>
+              <a:rPr sz="1100" i="1">
+                <a:solidFill>
+                  <a:srgbClr val="60A0B0"/>
                 </a:solidFill>
                 <a:latin typeface="Consolas"/>
               </a:rPr>
               <a:t># глубокое дерево: высокий train, низкий test</a:t>
             </a:r>
-          </a:p>
-        </p:txBody>
-      </p:sp>
-      <p:sp>
-        <p:nvSpPr>
-          <p:cNvPr id="6" name="TextBox 5"/>
+            <a:r>
+              <a:rPr sz="1100">
+                <a:solidFill>
+                  <a:srgbClr val="BBBBBB"/>
+                </a:solidFill>
+                <a:latin typeface="Consolas"/>
+              </a:rPr>
+              <a:t>
+</a:t>
+            </a:r>
+          </a:p>
+        </p:txBody>
+      </p:sp>
+      <p:sp>
+        <p:nvSpPr>
+          <p:cNvPr id="8" name="TextBox 7"/>
           <p:cNvSpPr txBox="1"/>
           <p:nvPr/>
         </p:nvSpPr>
         <p:spPr>
           <a:xfrm>
-            <a:off x="640080" y="5376672"/>
+            <a:off x="640080" y="6492240"/>
             <a:ext cx="6172200" cy="201168"/>
           </a:xfrm>
           <a:prstGeom prst="rect">
@@ -6003,7 +6659,7 @@
       </p:sp>
       <p:pic>
         <p:nvPicPr>
-          <p:cNvPr id="7" name="Picture 6" descr="overfitting_curve.png"/>
+          <p:cNvPr id="9" name="Picture 8" descr="overfitting_curve.png"/>
           <p:cNvPicPr>
             <a:picLocks noChangeAspect="1"/>
           </p:cNvPicPr>
@@ -6017,8 +6673,8 @@
         </p:blipFill>
         <p:spPr>
           <a:xfrm>
-            <a:off x="7269480" y="1325880"/>
-            <a:ext cx="4465015" cy="2878076"/>
+            <a:off x="7269480" y="1371600"/>
+            <a:ext cx="4465015" cy="3503007"/>
           </a:xfrm>
           <a:prstGeom prst="rect">
             <a:avLst/>
@@ -6085,7 +6741,7 @@
         <p:spPr>
           <a:xfrm>
             <a:off x="640080" y="1371600"/>
-            <a:ext cx="11247120" cy="1874519"/>
+            <a:ext cx="11247120" cy="1691640"/>
           </a:xfrm>
           <a:prstGeom prst="rect">
             <a:avLst/>
@@ -6167,8 +6823,8 @@
         </p:nvSpPr>
         <p:spPr>
           <a:xfrm>
-            <a:off x="640080" y="4690872"/>
-            <a:ext cx="11155680" cy="630936"/>
+            <a:off x="640080" y="5832856"/>
+            <a:ext cx="11155680" cy="604520"/>
           </a:xfrm>
           <a:prstGeom prst="rect">
             <a:avLst/>
@@ -6212,21 +6868,27 @@
         </p:nvSpPr>
         <p:spPr>
           <a:xfrm>
-            <a:off x="713231" y="4727448"/>
-            <a:ext cx="11009376" cy="557784"/>
+            <a:off x="713231" y="5878576"/>
+            <a:ext cx="11009376" cy="139700"/>
           </a:xfrm>
           <a:prstGeom prst="rect">
             <a:avLst/>
           </a:prstGeom>
           <a:noFill/>
+          <a:ln>
+            <a:noFill/>
+          </a:ln>
         </p:spPr>
         <p:txBody>
-          <a:bodyPr wrap="none">
+          <a:bodyPr wrap="none" anchor="t" lIns="0" rIns="0" tIns="0" bIns="0">
             <a:noAutofit/>
           </a:bodyPr>
           <a:lstStyle/>
           <a:p>
             <a:pPr>
+              <a:spcBef>
+                <a:spcPts val="0"/>
+              </a:spcBef>
               <a:spcAft>
                 <a:spcPts val="0"/>
               </a:spcAft>
@@ -6238,11 +6900,176 @@
                 </a:solidFill>
                 <a:latin typeface="Consolas"/>
               </a:rPr>
-              <a:t>clf = DecisionTreeClassifier(max_depth=3, random_state=42)</a:t>
-            </a:r>
-          </a:p>
+              <a:t>clf</a:t>
+            </a:r>
+            <a:r>
+              <a:rPr sz="1100">
+                <a:solidFill>
+                  <a:srgbClr val="000000"/>
+                </a:solidFill>
+                <a:latin typeface="Consolas"/>
+              </a:rPr>
+              <a:t> </a:t>
+            </a:r>
+            <a:r>
+              <a:rPr sz="1100">
+                <a:solidFill>
+                  <a:srgbClr val="666666"/>
+                </a:solidFill>
+                <a:latin typeface="Consolas"/>
+              </a:rPr>
+              <a:t>=</a:t>
+            </a:r>
+            <a:r>
+              <a:rPr sz="1100">
+                <a:solidFill>
+                  <a:srgbClr val="000000"/>
+                </a:solidFill>
+                <a:latin typeface="Consolas"/>
+              </a:rPr>
+              <a:t> </a:t>
+            </a:r>
+            <a:r>
+              <a:rPr sz="1100">
+                <a:solidFill>
+                  <a:srgbClr val="000000"/>
+                </a:solidFill>
+                <a:latin typeface="Consolas"/>
+              </a:rPr>
+              <a:t>DecisionTreeClassifier</a:t>
+            </a:r>
+            <a:r>
+              <a:rPr sz="1100">
+                <a:solidFill>
+                  <a:srgbClr val="000000"/>
+                </a:solidFill>
+                <a:latin typeface="Consolas"/>
+              </a:rPr>
+              <a:t>(</a:t>
+            </a:r>
+            <a:r>
+              <a:rPr sz="1100">
+                <a:solidFill>
+                  <a:srgbClr val="000000"/>
+                </a:solidFill>
+                <a:latin typeface="Consolas"/>
+              </a:rPr>
+              <a:t>max_depth</a:t>
+            </a:r>
+            <a:r>
+              <a:rPr sz="1100">
+                <a:solidFill>
+                  <a:srgbClr val="666666"/>
+                </a:solidFill>
+                <a:latin typeface="Consolas"/>
+              </a:rPr>
+              <a:t>=</a:t>
+            </a:r>
+            <a:r>
+              <a:rPr sz="1100">
+                <a:solidFill>
+                  <a:srgbClr val="40A070"/>
+                </a:solidFill>
+                <a:latin typeface="Consolas"/>
+              </a:rPr>
+              <a:t>3</a:t>
+            </a:r>
+            <a:r>
+              <a:rPr sz="1100">
+                <a:solidFill>
+                  <a:srgbClr val="000000"/>
+                </a:solidFill>
+                <a:latin typeface="Consolas"/>
+              </a:rPr>
+              <a:t>,</a:t>
+            </a:r>
+            <a:r>
+              <a:rPr sz="1100">
+                <a:solidFill>
+                  <a:srgbClr val="000000"/>
+                </a:solidFill>
+                <a:latin typeface="Consolas"/>
+              </a:rPr>
+              <a:t> </a:t>
+            </a:r>
+            <a:r>
+              <a:rPr sz="1100">
+                <a:solidFill>
+                  <a:srgbClr val="000000"/>
+                </a:solidFill>
+                <a:latin typeface="Consolas"/>
+              </a:rPr>
+              <a:t>random_state</a:t>
+            </a:r>
+            <a:r>
+              <a:rPr sz="1100">
+                <a:solidFill>
+                  <a:srgbClr val="666666"/>
+                </a:solidFill>
+                <a:latin typeface="Consolas"/>
+              </a:rPr>
+              <a:t>=</a:t>
+            </a:r>
+            <a:r>
+              <a:rPr sz="1100">
+                <a:solidFill>
+                  <a:srgbClr val="40A070"/>
+                </a:solidFill>
+                <a:latin typeface="Consolas"/>
+              </a:rPr>
+              <a:t>42</a:t>
+            </a:r>
+            <a:r>
+              <a:rPr sz="1100">
+                <a:solidFill>
+                  <a:srgbClr val="000000"/>
+                </a:solidFill>
+                <a:latin typeface="Consolas"/>
+              </a:rPr>
+              <a:t>)</a:t>
+            </a:r>
+            <a:r>
+              <a:rPr sz="1100">
+                <a:solidFill>
+                  <a:srgbClr val="BBBBBB"/>
+                </a:solidFill>
+                <a:latin typeface="Consolas"/>
+              </a:rPr>
+              <a:t>
+</a:t>
+            </a:r>
+          </a:p>
+        </p:txBody>
+      </p:sp>
+      <p:sp>
+        <p:nvSpPr>
+          <p:cNvPr id="6" name="TextBox 5"/>
+          <p:cNvSpPr txBox="1"/>
+          <p:nvPr/>
+        </p:nvSpPr>
+        <p:spPr>
+          <a:xfrm>
+            <a:off x="713231" y="6018275"/>
+            <a:ext cx="11009376" cy="139700"/>
+          </a:xfrm>
+          <a:prstGeom prst="rect">
+            <a:avLst/>
+          </a:prstGeom>
+          <a:noFill/>
+          <a:ln>
+            <a:noFill/>
+          </a:ln>
+        </p:spPr>
+        <p:txBody>
+          <a:bodyPr wrap="none" anchor="t" lIns="0" rIns="0" tIns="0" bIns="0">
+            <a:noAutofit/>
+          </a:bodyPr>
+          <a:lstStyle/>
           <a:p>
             <a:pPr>
+              <a:spcBef>
+                <a:spcPts val="0"/>
+              </a:spcBef>
               <a:spcAft>
                 <a:spcPts val="0"/>
               </a:spcAft>
@@ -6254,11 +7081,122 @@
                 </a:solidFill>
                 <a:latin typeface="Consolas"/>
               </a:rPr>
-              <a:t>clf.fit(X_train, y_train)</a:t>
-            </a:r>
-          </a:p>
+              <a:t>clf</a:t>
+            </a:r>
+            <a:r>
+              <a:rPr sz="1100">
+                <a:solidFill>
+                  <a:srgbClr val="666666"/>
+                </a:solidFill>
+                <a:latin typeface="Consolas"/>
+              </a:rPr>
+              <a:t>.</a:t>
+            </a:r>
+            <a:r>
+              <a:rPr sz="1100">
+                <a:solidFill>
+                  <a:srgbClr val="000000"/>
+                </a:solidFill>
+                <a:latin typeface="Consolas"/>
+              </a:rPr>
+              <a:t>fit</a:t>
+            </a:r>
+            <a:r>
+              <a:rPr sz="1100">
+                <a:solidFill>
+                  <a:srgbClr val="000000"/>
+                </a:solidFill>
+                <a:latin typeface="Consolas"/>
+              </a:rPr>
+              <a:t>(</a:t>
+            </a:r>
+            <a:r>
+              <a:rPr sz="1100">
+                <a:solidFill>
+                  <a:srgbClr val="000000"/>
+                </a:solidFill>
+                <a:latin typeface="Consolas"/>
+              </a:rPr>
+              <a:t>X_train</a:t>
+            </a:r>
+            <a:r>
+              <a:rPr sz="1100">
+                <a:solidFill>
+                  <a:srgbClr val="000000"/>
+                </a:solidFill>
+                <a:latin typeface="Consolas"/>
+              </a:rPr>
+              <a:t>,</a:t>
+            </a:r>
+            <a:r>
+              <a:rPr sz="1100">
+                <a:solidFill>
+                  <a:srgbClr val="000000"/>
+                </a:solidFill>
+                <a:latin typeface="Consolas"/>
+              </a:rPr>
+              <a:t> </a:t>
+            </a:r>
+            <a:r>
+              <a:rPr sz="1100">
+                <a:solidFill>
+                  <a:srgbClr val="000000"/>
+                </a:solidFill>
+                <a:latin typeface="Consolas"/>
+              </a:rPr>
+              <a:t>y_train</a:t>
+            </a:r>
+            <a:r>
+              <a:rPr sz="1100">
+                <a:solidFill>
+                  <a:srgbClr val="000000"/>
+                </a:solidFill>
+                <a:latin typeface="Consolas"/>
+              </a:rPr>
+              <a:t>)</a:t>
+            </a:r>
+            <a:r>
+              <a:rPr sz="1100">
+                <a:solidFill>
+                  <a:srgbClr val="BBBBBB"/>
+                </a:solidFill>
+                <a:latin typeface="Consolas"/>
+              </a:rPr>
+              <a:t>
+</a:t>
+            </a:r>
+          </a:p>
+        </p:txBody>
+      </p:sp>
+      <p:sp>
+        <p:nvSpPr>
+          <p:cNvPr id="7" name="TextBox 6"/>
+          <p:cNvSpPr txBox="1"/>
+          <p:nvPr/>
+        </p:nvSpPr>
+        <p:spPr>
+          <a:xfrm>
+            <a:off x="713231" y="6157975"/>
+            <a:ext cx="11009376" cy="139700"/>
+          </a:xfrm>
+          <a:prstGeom prst="rect">
+            <a:avLst/>
+          </a:prstGeom>
+          <a:noFill/>
+          <a:ln>
+            <a:noFill/>
+          </a:ln>
+        </p:spPr>
+        <p:txBody>
+          <a:bodyPr wrap="none" anchor="t" lIns="0" rIns="0" tIns="0" bIns="0">
+            <a:noAutofit/>
+          </a:bodyPr>
+          <a:lstStyle/>
           <a:p>
             <a:pPr>
+              <a:spcBef>
+                <a:spcPts val="0"/>
+              </a:spcBef>
               <a:spcAft>
                 <a:spcPts val="0"/>
               </a:spcAft>
@@ -6270,20 +7208,75 @@
                 </a:solidFill>
                 <a:latin typeface="Consolas"/>
               </a:rPr>
-              <a:t>clf.predict(X_test)</a:t>
-            </a:r>
-          </a:p>
-        </p:txBody>
-      </p:sp>
-      <p:sp>
-        <p:nvSpPr>
-          <p:cNvPr id="6" name="TextBox 5"/>
+              <a:t>clf</a:t>
+            </a:r>
+            <a:r>
+              <a:rPr sz="1100">
+                <a:solidFill>
+                  <a:srgbClr val="666666"/>
+                </a:solidFill>
+                <a:latin typeface="Consolas"/>
+              </a:rPr>
+              <a:t>.</a:t>
+            </a:r>
+            <a:r>
+              <a:rPr sz="1100">
+                <a:solidFill>
+                  <a:srgbClr val="000000"/>
+                </a:solidFill>
+                <a:latin typeface="Consolas"/>
+              </a:rPr>
+              <a:t>predict</a:t>
+            </a:r>
+            <a:r>
+              <a:rPr sz="1100">
+                <a:solidFill>
+                  <a:srgbClr val="000000"/>
+                </a:solidFill>
+                <a:latin typeface="Consolas"/>
+              </a:rPr>
+              <a:t>(</a:t>
+            </a:r>
+            <a:r>
+              <a:rPr sz="1100">
+                <a:solidFill>
+                  <a:srgbClr val="000000"/>
+                </a:solidFill>
+                <a:latin typeface="Consolas"/>
+              </a:rPr>
+              <a:t>X_test</a:t>
+            </a:r>
+            <a:r>
+              <a:rPr sz="1100">
+                <a:solidFill>
+                  <a:srgbClr val="000000"/>
+                </a:solidFill>
+                <a:latin typeface="Consolas"/>
+              </a:rPr>
+              <a:t>)</a:t>
+            </a:r>
+            <a:r>
+              <a:rPr sz="1100">
+                <a:solidFill>
+                  <a:srgbClr val="BBBBBB"/>
+                </a:solidFill>
+                <a:latin typeface="Consolas"/>
+              </a:rPr>
+              <a:t>
+</a:t>
+            </a:r>
+          </a:p>
+        </p:txBody>
+      </p:sp>
+      <p:sp>
+        <p:nvSpPr>
+          <p:cNvPr id="8" name="TextBox 7"/>
           <p:cNvSpPr txBox="1"/>
           <p:nvPr/>
         </p:nvSpPr>
         <p:spPr>
           <a:xfrm>
-            <a:off x="640080" y="5376672"/>
+            <a:off x="640080" y="6492240"/>
             <a:ext cx="11155680" cy="201168"/>
           </a:xfrm>
           <a:prstGeom prst="rect">
@@ -6370,7 +7363,7 @@
         <p:spPr>
           <a:xfrm>
             <a:off x="640080" y="1371600"/>
-            <a:ext cx="6263640" cy="2697480"/>
+            <a:ext cx="6263640" cy="2514600"/>
           </a:xfrm>
           <a:prstGeom prst="rect">
             <a:avLst/>
@@ -6437,8 +7430,8 @@
         </p:nvSpPr>
         <p:spPr>
           <a:xfrm>
-            <a:off x="640080" y="4892040"/>
-            <a:ext cx="6172200" cy="457200"/>
+            <a:off x="640080" y="5693156"/>
+            <a:ext cx="6172200" cy="744220"/>
           </a:xfrm>
           <a:prstGeom prst="rect">
             <a:avLst/>
@@ -6482,21 +7475,27 @@
         </p:nvSpPr>
         <p:spPr>
           <a:xfrm>
-            <a:off x="713231" y="4928616"/>
-            <a:ext cx="6025896" cy="384048"/>
+            <a:off x="713231" y="5738876"/>
+            <a:ext cx="6025896" cy="139700"/>
           </a:xfrm>
           <a:prstGeom prst="rect">
             <a:avLst/>
           </a:prstGeom>
           <a:noFill/>
+          <a:ln>
+            <a:noFill/>
+          </a:ln>
         </p:spPr>
         <p:txBody>
-          <a:bodyPr wrap="none">
+          <a:bodyPr wrap="none" anchor="t" lIns="0" rIns="0" tIns="0" bIns="0">
             <a:noAutofit/>
           </a:bodyPr>
           <a:lstStyle/>
           <a:p>
             <a:pPr>
+              <a:spcBef>
+                <a:spcPts val="0"/>
+              </a:spcBef>
               <a:spcAft>
                 <a:spcPts val="0"/>
               </a:spcAft>
@@ -6508,11 +7507,113 @@
                 </a:solidFill>
                 <a:latin typeface="Consolas"/>
               </a:rPr>
-              <a:t>imp = pd.Series(clf.feature_importances_, index=feature_names)</a:t>
-            </a:r>
-          </a:p>
+              <a:t>imp</a:t>
+            </a:r>
+            <a:r>
+              <a:rPr sz="1100">
+                <a:solidFill>
+                  <a:srgbClr val="000000"/>
+                </a:solidFill>
+                <a:latin typeface="Consolas"/>
+              </a:rPr>
+              <a:t> </a:t>
+            </a:r>
+            <a:r>
+              <a:rPr sz="1100">
+                <a:solidFill>
+                  <a:srgbClr val="666666"/>
+                </a:solidFill>
+                <a:latin typeface="Consolas"/>
+              </a:rPr>
+              <a:t>=</a:t>
+            </a:r>
+            <a:r>
+              <a:rPr sz="1100">
+                <a:solidFill>
+                  <a:srgbClr val="000000"/>
+                </a:solidFill>
+                <a:latin typeface="Consolas"/>
+              </a:rPr>
+              <a:t> </a:t>
+            </a:r>
+            <a:r>
+              <a:rPr sz="1100">
+                <a:solidFill>
+                  <a:srgbClr val="000000"/>
+                </a:solidFill>
+                <a:latin typeface="Consolas"/>
+              </a:rPr>
+              <a:t>pd</a:t>
+            </a:r>
+            <a:r>
+              <a:rPr sz="1100">
+                <a:solidFill>
+                  <a:srgbClr val="666666"/>
+                </a:solidFill>
+                <a:latin typeface="Consolas"/>
+              </a:rPr>
+              <a:t>.</a:t>
+            </a:r>
+            <a:r>
+              <a:rPr sz="1100">
+                <a:solidFill>
+                  <a:srgbClr val="000000"/>
+                </a:solidFill>
+                <a:latin typeface="Consolas"/>
+              </a:rPr>
+              <a:t>Series</a:t>
+            </a:r>
+            <a:r>
+              <a:rPr sz="1100">
+                <a:solidFill>
+                  <a:srgbClr val="000000"/>
+                </a:solidFill>
+                <a:latin typeface="Consolas"/>
+              </a:rPr>
+              <a:t>(</a:t>
+            </a:r>
+            <a:r>
+              <a:rPr sz="1100">
+                <a:solidFill>
+                  <a:srgbClr val="BBBBBB"/>
+                </a:solidFill>
+                <a:latin typeface="Consolas"/>
+              </a:rPr>
+              <a:t>
+</a:t>
+            </a:r>
+          </a:p>
+        </p:txBody>
+      </p:sp>
+      <p:sp>
+        <p:nvSpPr>
+          <p:cNvPr id="6" name="TextBox 5"/>
+          <p:cNvSpPr txBox="1"/>
+          <p:nvPr/>
+        </p:nvSpPr>
+        <p:spPr>
+          <a:xfrm>
+            <a:off x="713231" y="5878576"/>
+            <a:ext cx="6025896" cy="139700"/>
+          </a:xfrm>
+          <a:prstGeom prst="rect">
+            <a:avLst/>
+          </a:prstGeom>
+          <a:noFill/>
+          <a:ln>
+            <a:noFill/>
+          </a:ln>
+        </p:spPr>
+        <p:txBody>
+          <a:bodyPr wrap="none" anchor="t" lIns="0" rIns="0" tIns="0" bIns="0">
+            <a:noAutofit/>
+          </a:bodyPr>
+          <a:lstStyle/>
           <a:p>
             <a:pPr>
+              <a:spcBef>
+                <a:spcPts val="0"/>
+              </a:spcBef>
               <a:spcAft>
                 <a:spcPts val="0"/>
               </a:spcAft>
@@ -6524,20 +7625,311 @@
                 </a:solidFill>
                 <a:latin typeface="Consolas"/>
               </a:rPr>
-              <a:t>imp.sort_values(ascending=False).head()</a:t>
-            </a:r>
-          </a:p>
-        </p:txBody>
-      </p:sp>
-      <p:sp>
-        <p:nvSpPr>
-          <p:cNvPr id="6" name="TextBox 5"/>
+              <a:t>    </a:t>
+            </a:r>
+            <a:r>
+              <a:rPr sz="1100">
+                <a:solidFill>
+                  <a:srgbClr val="000000"/>
+                </a:solidFill>
+                <a:latin typeface="Consolas"/>
+              </a:rPr>
+              <a:t>clf</a:t>
+            </a:r>
+            <a:r>
+              <a:rPr sz="1100">
+                <a:solidFill>
+                  <a:srgbClr val="666666"/>
+                </a:solidFill>
+                <a:latin typeface="Consolas"/>
+              </a:rPr>
+              <a:t>.</a:t>
+            </a:r>
+            <a:r>
+              <a:rPr sz="1100">
+                <a:solidFill>
+                  <a:srgbClr val="000000"/>
+                </a:solidFill>
+                <a:latin typeface="Consolas"/>
+              </a:rPr>
+              <a:t>feature_importances_</a:t>
+            </a:r>
+            <a:r>
+              <a:rPr sz="1100">
+                <a:solidFill>
+                  <a:srgbClr val="000000"/>
+                </a:solidFill>
+                <a:latin typeface="Consolas"/>
+              </a:rPr>
+              <a:t>,</a:t>
+            </a:r>
+            <a:r>
+              <a:rPr sz="1100">
+                <a:solidFill>
+                  <a:srgbClr val="BBBBBB"/>
+                </a:solidFill>
+                <a:latin typeface="Consolas"/>
+              </a:rPr>
+              <a:t>
+</a:t>
+            </a:r>
+          </a:p>
+        </p:txBody>
+      </p:sp>
+      <p:sp>
+        <p:nvSpPr>
+          <p:cNvPr id="7" name="TextBox 6"/>
           <p:cNvSpPr txBox="1"/>
           <p:nvPr/>
         </p:nvSpPr>
         <p:spPr>
           <a:xfrm>
-            <a:off x="640080" y="5404104"/>
+            <a:off x="713231" y="6018275"/>
+            <a:ext cx="6025896" cy="139700"/>
+          </a:xfrm>
+          <a:prstGeom prst="rect">
+            <a:avLst/>
+          </a:prstGeom>
+          <a:noFill/>
+          <a:ln>
+            <a:noFill/>
+          </a:ln>
+        </p:spPr>
+        <p:txBody>
+          <a:bodyPr wrap="none" anchor="t" lIns="0" rIns="0" tIns="0" bIns="0">
+            <a:noAutofit/>
+          </a:bodyPr>
+          <a:lstStyle/>
+          <a:p>
+            <a:pPr>
+              <a:spcBef>
+                <a:spcPts val="0"/>
+              </a:spcBef>
+              <a:spcAft>
+                <a:spcPts val="0"/>
+              </a:spcAft>
+            </a:pPr>
+            <a:r>
+              <a:rPr sz="1100">
+                <a:solidFill>
+                  <a:srgbClr val="000000"/>
+                </a:solidFill>
+                <a:latin typeface="Consolas"/>
+              </a:rPr>
+              <a:t>    </a:t>
+            </a:r>
+            <a:r>
+              <a:rPr sz="1100">
+                <a:solidFill>
+                  <a:srgbClr val="000000"/>
+                </a:solidFill>
+                <a:latin typeface="Consolas"/>
+              </a:rPr>
+              <a:t>index</a:t>
+            </a:r>
+            <a:r>
+              <a:rPr sz="1100">
+                <a:solidFill>
+                  <a:srgbClr val="666666"/>
+                </a:solidFill>
+                <a:latin typeface="Consolas"/>
+              </a:rPr>
+              <a:t>=</a:t>
+            </a:r>
+            <a:r>
+              <a:rPr sz="1100">
+                <a:solidFill>
+                  <a:srgbClr val="000000"/>
+                </a:solidFill>
+                <a:latin typeface="Consolas"/>
+              </a:rPr>
+              <a:t>feature_names</a:t>
+            </a:r>
+            <a:r>
+              <a:rPr sz="1100">
+                <a:solidFill>
+                  <a:srgbClr val="000000"/>
+                </a:solidFill>
+                <a:latin typeface="Consolas"/>
+              </a:rPr>
+              <a:t>)</a:t>
+            </a:r>
+            <a:r>
+              <a:rPr sz="1100">
+                <a:solidFill>
+                  <a:srgbClr val="BBBBBB"/>
+                </a:solidFill>
+                <a:latin typeface="Consolas"/>
+              </a:rPr>
+              <a:t>
+</a:t>
+            </a:r>
+          </a:p>
+        </p:txBody>
+      </p:sp>
+      <p:sp>
+        <p:nvSpPr>
+          <p:cNvPr id="8" name="TextBox 7"/>
+          <p:cNvSpPr txBox="1"/>
+          <p:nvPr/>
+        </p:nvSpPr>
+        <p:spPr>
+          <a:xfrm>
+            <a:off x="713231" y="6157975"/>
+            <a:ext cx="6025896" cy="139700"/>
+          </a:xfrm>
+          <a:prstGeom prst="rect">
+            <a:avLst/>
+          </a:prstGeom>
+          <a:noFill/>
+          <a:ln>
+            <a:noFill/>
+          </a:ln>
+        </p:spPr>
+        <p:txBody>
+          <a:bodyPr wrap="none" anchor="t" lIns="0" rIns="0" tIns="0" bIns="0">
+            <a:noAutofit/>
+          </a:bodyPr>
+          <a:lstStyle/>
+          <a:p>
+            <a:pPr>
+              <a:spcBef>
+                <a:spcPts val="0"/>
+              </a:spcBef>
+              <a:spcAft>
+                <a:spcPts val="0"/>
+              </a:spcAft>
+            </a:pPr>
+            <a:r>
+              <a:rPr sz="1100">
+                <a:solidFill>
+                  <a:srgbClr val="000000"/>
+                </a:solidFill>
+                <a:latin typeface="Consolas"/>
+              </a:rPr>
+              <a:t>imp</a:t>
+            </a:r>
+            <a:r>
+              <a:rPr sz="1100">
+                <a:solidFill>
+                  <a:srgbClr val="666666"/>
+                </a:solidFill>
+                <a:latin typeface="Consolas"/>
+              </a:rPr>
+              <a:t>.</a:t>
+            </a:r>
+            <a:r>
+              <a:rPr sz="1100">
+                <a:solidFill>
+                  <a:srgbClr val="000000"/>
+                </a:solidFill>
+                <a:latin typeface="Consolas"/>
+              </a:rPr>
+              <a:t>sort_values</a:t>
+            </a:r>
+            <a:r>
+              <a:rPr sz="1100">
+                <a:solidFill>
+                  <a:srgbClr val="000000"/>
+                </a:solidFill>
+                <a:latin typeface="Consolas"/>
+              </a:rPr>
+              <a:t>(</a:t>
+            </a:r>
+            <a:r>
+              <a:rPr sz="1100">
+                <a:solidFill>
+                  <a:srgbClr val="000000"/>
+                </a:solidFill>
+                <a:latin typeface="Consolas"/>
+              </a:rPr>
+              <a:t>ascending</a:t>
+            </a:r>
+            <a:r>
+              <a:rPr sz="1100">
+                <a:solidFill>
+                  <a:srgbClr val="666666"/>
+                </a:solidFill>
+                <a:latin typeface="Consolas"/>
+              </a:rPr>
+              <a:t>=</a:t>
+            </a:r>
+            <a:r>
+              <a:rPr sz="1100" b="1">
+                <a:solidFill>
+                  <a:srgbClr val="007020"/>
+                </a:solidFill>
+                <a:latin typeface="Consolas"/>
+              </a:rPr>
+              <a:t>False</a:t>
+            </a:r>
+            <a:r>
+              <a:rPr sz="1100">
+                <a:solidFill>
+                  <a:srgbClr val="000000"/>
+                </a:solidFill>
+                <a:latin typeface="Consolas"/>
+              </a:rPr>
+              <a:t>)</a:t>
+            </a:r>
+            <a:r>
+              <a:rPr sz="1100">
+                <a:solidFill>
+                  <a:srgbClr val="666666"/>
+                </a:solidFill>
+                <a:latin typeface="Consolas"/>
+              </a:rPr>
+              <a:t>.</a:t>
+            </a:r>
+            <a:r>
+              <a:rPr sz="1100">
+                <a:solidFill>
+                  <a:srgbClr val="000000"/>
+                </a:solidFill>
+                <a:latin typeface="Consolas"/>
+              </a:rPr>
+              <a:t>head</a:t>
+            </a:r>
+            <a:r>
+              <a:rPr sz="1100">
+                <a:solidFill>
+                  <a:srgbClr val="000000"/>
+                </a:solidFill>
+                <a:latin typeface="Consolas"/>
+              </a:rPr>
+              <a:t>(</a:t>
+            </a:r>
+            <a:r>
+              <a:rPr sz="1100">
+                <a:solidFill>
+                  <a:srgbClr val="000000"/>
+                </a:solidFill>
+                <a:latin typeface="Consolas"/>
+              </a:rPr>
+              <a:t>)</a:t>
+            </a:r>
+            <a:r>
+              <a:rPr sz="1100">
+                <a:solidFill>
+                  <a:srgbClr val="BBBBBB"/>
+                </a:solidFill>
+                <a:latin typeface="Consolas"/>
+              </a:rPr>
+              <a:t>
+</a:t>
+            </a:r>
+          </a:p>
+        </p:txBody>
+      </p:sp>
+      <p:sp>
+        <p:nvSpPr>
+          <p:cNvPr id="9" name="TextBox 8"/>
+          <p:cNvSpPr txBox="1"/>
+          <p:nvPr/>
+        </p:nvSpPr>
+        <p:spPr>
+          <a:xfrm>
+            <a:off x="640080" y="6492240"/>
             <a:ext cx="6172200" cy="201168"/>
           </a:xfrm>
           <a:prstGeom prst="rect">
@@ -6566,7 +7958,7 @@
       </p:sp>
       <p:pic>
         <p:nvPicPr>
-          <p:cNvPr id="7" name="Picture 6" descr="feature_importance.png"/>
+          <p:cNvPr id="10" name="Picture 9" descr="feature_importance.png"/>
           <p:cNvPicPr>
             <a:picLocks noChangeAspect="1"/>
           </p:cNvPicPr>
@@ -6580,8 +7972,8 @@
         </p:blipFill>
         <p:spPr>
           <a:xfrm>
-            <a:off x="7269480" y="1325880"/>
-            <a:ext cx="4465015" cy="2227866"/>
+            <a:off x="7269480" y="1371600"/>
+            <a:ext cx="4465015" cy="3900799"/>
           </a:xfrm>
           <a:prstGeom prst="rect">
             <a:avLst/>
@@ -6648,7 +8040,7 @@
         <p:spPr>
           <a:xfrm>
             <a:off x="640080" y="1371600"/>
-            <a:ext cx="11247120" cy="1874519"/>
+            <a:ext cx="11247120" cy="1691640"/>
           </a:xfrm>
           <a:prstGeom prst="rect">
             <a:avLst/>
@@ -6730,8 +8122,8 @@
         </p:nvSpPr>
         <p:spPr>
           <a:xfrm>
-            <a:off x="640080" y="4690872"/>
-            <a:ext cx="11155680" cy="630936"/>
+            <a:off x="640080" y="5832856"/>
+            <a:ext cx="11155680" cy="604520"/>
           </a:xfrm>
           <a:prstGeom prst="rect">
             <a:avLst/>
@@ -6775,21 +8167,27 @@
         </p:nvSpPr>
         <p:spPr>
           <a:xfrm>
-            <a:off x="713231" y="4727448"/>
-            <a:ext cx="11009376" cy="557784"/>
+            <a:off x="713231" y="5878576"/>
+            <a:ext cx="11009376" cy="139700"/>
           </a:xfrm>
           <a:prstGeom prst="rect">
             <a:avLst/>
           </a:prstGeom>
           <a:noFill/>
+          <a:ln>
+            <a:noFill/>
+          </a:ln>
         </p:spPr>
         <p:txBody>
-          <a:bodyPr wrap="none">
+          <a:bodyPr wrap="none" anchor="t" lIns="0" rIns="0" tIns="0" bIns="0">
             <a:noAutofit/>
           </a:bodyPr>
           <a:lstStyle/>
           <a:p>
             <a:pPr>
+              <a:spcBef>
+                <a:spcPts val="0"/>
+              </a:spcBef>
               <a:spcAft>
                 <a:spcPts val="0"/>
               </a:spcAft>
@@ -6801,11 +8199,176 @@
                 </a:solidFill>
                 <a:latin typeface="Consolas"/>
               </a:rPr>
-              <a:t>reg = DecisionTreeRegressor(max_depth=4, random_state=42)</a:t>
-            </a:r>
-          </a:p>
+              <a:t>reg</a:t>
+            </a:r>
+            <a:r>
+              <a:rPr sz="1100">
+                <a:solidFill>
+                  <a:srgbClr val="000000"/>
+                </a:solidFill>
+                <a:latin typeface="Consolas"/>
+              </a:rPr>
+              <a:t> </a:t>
+            </a:r>
+            <a:r>
+              <a:rPr sz="1100">
+                <a:solidFill>
+                  <a:srgbClr val="666666"/>
+                </a:solidFill>
+                <a:latin typeface="Consolas"/>
+              </a:rPr>
+              <a:t>=</a:t>
+            </a:r>
+            <a:r>
+              <a:rPr sz="1100">
+                <a:solidFill>
+                  <a:srgbClr val="000000"/>
+                </a:solidFill>
+                <a:latin typeface="Consolas"/>
+              </a:rPr>
+              <a:t> </a:t>
+            </a:r>
+            <a:r>
+              <a:rPr sz="1100">
+                <a:solidFill>
+                  <a:srgbClr val="000000"/>
+                </a:solidFill>
+                <a:latin typeface="Consolas"/>
+              </a:rPr>
+              <a:t>DecisionTreeRegressor</a:t>
+            </a:r>
+            <a:r>
+              <a:rPr sz="1100">
+                <a:solidFill>
+                  <a:srgbClr val="000000"/>
+                </a:solidFill>
+                <a:latin typeface="Consolas"/>
+              </a:rPr>
+              <a:t>(</a:t>
+            </a:r>
+            <a:r>
+              <a:rPr sz="1100">
+                <a:solidFill>
+                  <a:srgbClr val="000000"/>
+                </a:solidFill>
+                <a:latin typeface="Consolas"/>
+              </a:rPr>
+              <a:t>max_depth</a:t>
+            </a:r>
+            <a:r>
+              <a:rPr sz="1100">
+                <a:solidFill>
+                  <a:srgbClr val="666666"/>
+                </a:solidFill>
+                <a:latin typeface="Consolas"/>
+              </a:rPr>
+              <a:t>=</a:t>
+            </a:r>
+            <a:r>
+              <a:rPr sz="1100">
+                <a:solidFill>
+                  <a:srgbClr val="40A070"/>
+                </a:solidFill>
+                <a:latin typeface="Consolas"/>
+              </a:rPr>
+              <a:t>4</a:t>
+            </a:r>
+            <a:r>
+              <a:rPr sz="1100">
+                <a:solidFill>
+                  <a:srgbClr val="000000"/>
+                </a:solidFill>
+                <a:latin typeface="Consolas"/>
+              </a:rPr>
+              <a:t>,</a:t>
+            </a:r>
+            <a:r>
+              <a:rPr sz="1100">
+                <a:solidFill>
+                  <a:srgbClr val="000000"/>
+                </a:solidFill>
+                <a:latin typeface="Consolas"/>
+              </a:rPr>
+              <a:t> </a:t>
+            </a:r>
+            <a:r>
+              <a:rPr sz="1100">
+                <a:solidFill>
+                  <a:srgbClr val="000000"/>
+                </a:solidFill>
+                <a:latin typeface="Consolas"/>
+              </a:rPr>
+              <a:t>random_state</a:t>
+            </a:r>
+            <a:r>
+              <a:rPr sz="1100">
+                <a:solidFill>
+                  <a:srgbClr val="666666"/>
+                </a:solidFill>
+                <a:latin typeface="Consolas"/>
+              </a:rPr>
+              <a:t>=</a:t>
+            </a:r>
+            <a:r>
+              <a:rPr sz="1100">
+                <a:solidFill>
+                  <a:srgbClr val="40A070"/>
+                </a:solidFill>
+                <a:latin typeface="Consolas"/>
+              </a:rPr>
+              <a:t>42</a:t>
+            </a:r>
+            <a:r>
+              <a:rPr sz="1100">
+                <a:solidFill>
+                  <a:srgbClr val="000000"/>
+                </a:solidFill>
+                <a:latin typeface="Consolas"/>
+              </a:rPr>
+              <a:t>)</a:t>
+            </a:r>
+            <a:r>
+              <a:rPr sz="1100">
+                <a:solidFill>
+                  <a:srgbClr val="BBBBBB"/>
+                </a:solidFill>
+                <a:latin typeface="Consolas"/>
+              </a:rPr>
+              <a:t>
+</a:t>
+            </a:r>
+          </a:p>
+        </p:txBody>
+      </p:sp>
+      <p:sp>
+        <p:nvSpPr>
+          <p:cNvPr id="6" name="TextBox 5"/>
+          <p:cNvSpPr txBox="1"/>
+          <p:nvPr/>
+        </p:nvSpPr>
+        <p:spPr>
+          <a:xfrm>
+            <a:off x="713231" y="6018275"/>
+            <a:ext cx="11009376" cy="139700"/>
+          </a:xfrm>
+          <a:prstGeom prst="rect">
+            <a:avLst/>
+          </a:prstGeom>
+          <a:noFill/>
+          <a:ln>
+            <a:noFill/>
+          </a:ln>
+        </p:spPr>
+        <p:txBody>
+          <a:bodyPr wrap="none" anchor="t" lIns="0" rIns="0" tIns="0" bIns="0">
+            <a:noAutofit/>
+          </a:bodyPr>
+          <a:lstStyle/>
           <a:p>
             <a:pPr>
+              <a:spcBef>
+                <a:spcPts val="0"/>
+              </a:spcBef>
               <a:spcAft>
                 <a:spcPts val="0"/>
               </a:spcAft>
@@ -6817,11 +8380,122 @@
                 </a:solidFill>
                 <a:latin typeface="Consolas"/>
               </a:rPr>
-              <a:t>reg.fit(X_train, y_train)</a:t>
-            </a:r>
-          </a:p>
+              <a:t>reg</a:t>
+            </a:r>
+            <a:r>
+              <a:rPr sz="1100">
+                <a:solidFill>
+                  <a:srgbClr val="666666"/>
+                </a:solidFill>
+                <a:latin typeface="Consolas"/>
+              </a:rPr>
+              <a:t>.</a:t>
+            </a:r>
+            <a:r>
+              <a:rPr sz="1100">
+                <a:solidFill>
+                  <a:srgbClr val="000000"/>
+                </a:solidFill>
+                <a:latin typeface="Consolas"/>
+              </a:rPr>
+              <a:t>fit</a:t>
+            </a:r>
+            <a:r>
+              <a:rPr sz="1100">
+                <a:solidFill>
+                  <a:srgbClr val="000000"/>
+                </a:solidFill>
+                <a:latin typeface="Consolas"/>
+              </a:rPr>
+              <a:t>(</a:t>
+            </a:r>
+            <a:r>
+              <a:rPr sz="1100">
+                <a:solidFill>
+                  <a:srgbClr val="000000"/>
+                </a:solidFill>
+                <a:latin typeface="Consolas"/>
+              </a:rPr>
+              <a:t>X_train</a:t>
+            </a:r>
+            <a:r>
+              <a:rPr sz="1100">
+                <a:solidFill>
+                  <a:srgbClr val="000000"/>
+                </a:solidFill>
+                <a:latin typeface="Consolas"/>
+              </a:rPr>
+              <a:t>,</a:t>
+            </a:r>
+            <a:r>
+              <a:rPr sz="1100">
+                <a:solidFill>
+                  <a:srgbClr val="000000"/>
+                </a:solidFill>
+                <a:latin typeface="Consolas"/>
+              </a:rPr>
+              <a:t> </a:t>
+            </a:r>
+            <a:r>
+              <a:rPr sz="1100">
+                <a:solidFill>
+                  <a:srgbClr val="000000"/>
+                </a:solidFill>
+                <a:latin typeface="Consolas"/>
+              </a:rPr>
+              <a:t>y_train</a:t>
+            </a:r>
+            <a:r>
+              <a:rPr sz="1100">
+                <a:solidFill>
+                  <a:srgbClr val="000000"/>
+                </a:solidFill>
+                <a:latin typeface="Consolas"/>
+              </a:rPr>
+              <a:t>)</a:t>
+            </a:r>
+            <a:r>
+              <a:rPr sz="1100">
+                <a:solidFill>
+                  <a:srgbClr val="BBBBBB"/>
+                </a:solidFill>
+                <a:latin typeface="Consolas"/>
+              </a:rPr>
+              <a:t>
+</a:t>
+            </a:r>
+          </a:p>
+        </p:txBody>
+      </p:sp>
+      <p:sp>
+        <p:nvSpPr>
+          <p:cNvPr id="7" name="TextBox 6"/>
+          <p:cNvSpPr txBox="1"/>
+          <p:nvPr/>
+        </p:nvSpPr>
+        <p:spPr>
+          <a:xfrm>
+            <a:off x="713231" y="6157975"/>
+            <a:ext cx="11009376" cy="139700"/>
+          </a:xfrm>
+          <a:prstGeom prst="rect">
+            <a:avLst/>
+          </a:prstGeom>
+          <a:noFill/>
+          <a:ln>
+            <a:noFill/>
+          </a:ln>
+        </p:spPr>
+        <p:txBody>
+          <a:bodyPr wrap="none" anchor="t" lIns="0" rIns="0" tIns="0" bIns="0">
+            <a:noAutofit/>
+          </a:bodyPr>
+          <a:lstStyle/>
           <a:p>
             <a:pPr>
+              <a:spcBef>
+                <a:spcPts val="0"/>
+              </a:spcBef>
               <a:spcAft>
                 <a:spcPts val="0"/>
               </a:spcAft>
@@ -6833,20 +8507,75 @@
                 </a:solidFill>
                 <a:latin typeface="Consolas"/>
               </a:rPr>
-              <a:t>reg.predict(X_test)</a:t>
-            </a:r>
-          </a:p>
-        </p:txBody>
-      </p:sp>
-      <p:sp>
-        <p:nvSpPr>
-          <p:cNvPr id="6" name="TextBox 5"/>
+              <a:t>reg</a:t>
+            </a:r>
+            <a:r>
+              <a:rPr sz="1100">
+                <a:solidFill>
+                  <a:srgbClr val="666666"/>
+                </a:solidFill>
+                <a:latin typeface="Consolas"/>
+              </a:rPr>
+              <a:t>.</a:t>
+            </a:r>
+            <a:r>
+              <a:rPr sz="1100">
+                <a:solidFill>
+                  <a:srgbClr val="000000"/>
+                </a:solidFill>
+                <a:latin typeface="Consolas"/>
+              </a:rPr>
+              <a:t>predict</a:t>
+            </a:r>
+            <a:r>
+              <a:rPr sz="1100">
+                <a:solidFill>
+                  <a:srgbClr val="000000"/>
+                </a:solidFill>
+                <a:latin typeface="Consolas"/>
+              </a:rPr>
+              <a:t>(</a:t>
+            </a:r>
+            <a:r>
+              <a:rPr sz="1100">
+                <a:solidFill>
+                  <a:srgbClr val="000000"/>
+                </a:solidFill>
+                <a:latin typeface="Consolas"/>
+              </a:rPr>
+              <a:t>X_test</a:t>
+            </a:r>
+            <a:r>
+              <a:rPr sz="1100">
+                <a:solidFill>
+                  <a:srgbClr val="000000"/>
+                </a:solidFill>
+                <a:latin typeface="Consolas"/>
+              </a:rPr>
+              <a:t>)</a:t>
+            </a:r>
+            <a:r>
+              <a:rPr sz="1100">
+                <a:solidFill>
+                  <a:srgbClr val="BBBBBB"/>
+                </a:solidFill>
+                <a:latin typeface="Consolas"/>
+              </a:rPr>
+              <a:t>
+</a:t>
+            </a:r>
+          </a:p>
+        </p:txBody>
+      </p:sp>
+      <p:sp>
+        <p:nvSpPr>
+          <p:cNvPr id="8" name="TextBox 7"/>
           <p:cNvSpPr txBox="1"/>
           <p:nvPr/>
         </p:nvSpPr>
         <p:spPr>
           <a:xfrm>
-            <a:off x="640080" y="5376672"/>
+            <a:off x="640080" y="6492240"/>
             <a:ext cx="11155680" cy="201168"/>
           </a:xfrm>
           <a:prstGeom prst="rect">
@@ -6933,7 +8662,7 @@
         <p:spPr>
           <a:xfrm>
             <a:off x="640080" y="1371600"/>
-            <a:ext cx="5532120" cy="2148839"/>
+            <a:ext cx="5532120" cy="1965960"/>
           </a:xfrm>
           <a:prstGeom prst="rect">
             <a:avLst/>
@@ -7001,7 +8730,7 @@
         <p:spPr>
           <a:xfrm>
             <a:off x="6355080" y="1371600"/>
-            <a:ext cx="5532120" cy="2148839"/>
+            <a:ext cx="5532120" cy="1965960"/>
           </a:xfrm>
           <a:prstGeom prst="rect">
             <a:avLst/>
@@ -7105,7 +8834,7 @@
         <p:spPr>
           <a:xfrm>
             <a:off x="640080" y="1371600"/>
-            <a:ext cx="11247120" cy="1325880"/>
+            <a:ext cx="11247120" cy="1143000"/>
           </a:xfrm>
           <a:prstGeom prst="rect">
             <a:avLst/>
@@ -7172,8 +8901,8 @@
         </p:nvSpPr>
         <p:spPr>
           <a:xfrm>
-            <a:off x="640080" y="4892040"/>
-            <a:ext cx="11155680" cy="457200"/>
+            <a:off x="640080" y="5972556"/>
+            <a:ext cx="11155680" cy="464820"/>
           </a:xfrm>
           <a:prstGeom prst="rect">
             <a:avLst/>
@@ -7217,21 +8946,27 @@
         </p:nvSpPr>
         <p:spPr>
           <a:xfrm>
-            <a:off x="713231" y="4928616"/>
-            <a:ext cx="11009376" cy="384048"/>
+            <a:off x="713231" y="6018275"/>
+            <a:ext cx="11009376" cy="139700"/>
           </a:xfrm>
           <a:prstGeom prst="rect">
             <a:avLst/>
           </a:prstGeom>
           <a:noFill/>
+          <a:ln>
+            <a:noFill/>
+          </a:ln>
         </p:spPr>
         <p:txBody>
-          <a:bodyPr wrap="none">
+          <a:bodyPr wrap="none" anchor="t" lIns="0" rIns="0" tIns="0" bIns="0">
             <a:noAutofit/>
           </a:bodyPr>
           <a:lstStyle/>
           <a:p>
             <a:pPr>
+              <a:spcBef>
+                <a:spcPts val="0"/>
+              </a:spcBef>
               <a:spcAft>
                 <a:spcPts val="0"/>
               </a:spcAft>
@@ -7243,11 +8978,167 @@
                 </a:solidFill>
                 <a:latin typeface="Consolas"/>
               </a:rPr>
-              <a:t>plot_tree(clf, feature_names=names, filled=True)</a:t>
-            </a:r>
-          </a:p>
+              <a:t>plot_tree</a:t>
+            </a:r>
+            <a:r>
+              <a:rPr sz="1100">
+                <a:solidFill>
+                  <a:srgbClr val="000000"/>
+                </a:solidFill>
+                <a:latin typeface="Consolas"/>
+              </a:rPr>
+              <a:t>(</a:t>
+            </a:r>
+            <a:r>
+              <a:rPr sz="1100">
+                <a:solidFill>
+                  <a:srgbClr val="000000"/>
+                </a:solidFill>
+                <a:latin typeface="Consolas"/>
+              </a:rPr>
+              <a:t>clf</a:t>
+            </a:r>
+            <a:r>
+              <a:rPr sz="1100">
+                <a:solidFill>
+                  <a:srgbClr val="000000"/>
+                </a:solidFill>
+                <a:latin typeface="Consolas"/>
+              </a:rPr>
+              <a:t>,</a:t>
+            </a:r>
+            <a:r>
+              <a:rPr sz="1100">
+                <a:solidFill>
+                  <a:srgbClr val="000000"/>
+                </a:solidFill>
+                <a:latin typeface="Consolas"/>
+              </a:rPr>
+              <a:t> </a:t>
+            </a:r>
+            <a:r>
+              <a:rPr sz="1100">
+                <a:solidFill>
+                  <a:srgbClr val="000000"/>
+                </a:solidFill>
+                <a:latin typeface="Consolas"/>
+              </a:rPr>
+              <a:t>feature_names</a:t>
+            </a:r>
+            <a:r>
+              <a:rPr sz="1100">
+                <a:solidFill>
+                  <a:srgbClr val="666666"/>
+                </a:solidFill>
+                <a:latin typeface="Consolas"/>
+              </a:rPr>
+              <a:t>=</a:t>
+            </a:r>
+            <a:r>
+              <a:rPr sz="1100">
+                <a:solidFill>
+                  <a:srgbClr val="000000"/>
+                </a:solidFill>
+                <a:latin typeface="Consolas"/>
+              </a:rPr>
+              <a:t>names</a:t>
+            </a:r>
+            <a:r>
+              <a:rPr sz="1100">
+                <a:solidFill>
+                  <a:srgbClr val="000000"/>
+                </a:solidFill>
+                <a:latin typeface="Consolas"/>
+              </a:rPr>
+              <a:t>,</a:t>
+            </a:r>
+            <a:r>
+              <a:rPr sz="1100">
+                <a:solidFill>
+                  <a:srgbClr val="000000"/>
+                </a:solidFill>
+                <a:latin typeface="Consolas"/>
+              </a:rPr>
+              <a:t> </a:t>
+            </a:r>
+            <a:r>
+              <a:rPr sz="1100">
+                <a:solidFill>
+                  <a:srgbClr val="000000"/>
+                </a:solidFill>
+                <a:latin typeface="Consolas"/>
+              </a:rPr>
+              <a:t>filled</a:t>
+            </a:r>
+            <a:r>
+              <a:rPr sz="1100">
+                <a:solidFill>
+                  <a:srgbClr val="666666"/>
+                </a:solidFill>
+                <a:latin typeface="Consolas"/>
+              </a:rPr>
+              <a:t>=</a:t>
+            </a:r>
+            <a:r>
+              <a:rPr sz="1100" b="1">
+                <a:solidFill>
+                  <a:srgbClr val="007020"/>
+                </a:solidFill>
+                <a:latin typeface="Consolas"/>
+              </a:rPr>
+              <a:t>True</a:t>
+            </a:r>
+            <a:r>
+              <a:rPr sz="1100">
+                <a:solidFill>
+                  <a:srgbClr val="000000"/>
+                </a:solidFill>
+                <a:latin typeface="Consolas"/>
+              </a:rPr>
+              <a:t>)</a:t>
+            </a:r>
+            <a:r>
+              <a:rPr sz="1100">
+                <a:solidFill>
+                  <a:srgbClr val="BBBBBB"/>
+                </a:solidFill>
+                <a:latin typeface="Consolas"/>
+              </a:rPr>
+              <a:t>
+</a:t>
+            </a:r>
+          </a:p>
+        </p:txBody>
+      </p:sp>
+      <p:sp>
+        <p:nvSpPr>
+          <p:cNvPr id="6" name="TextBox 5"/>
+          <p:cNvSpPr txBox="1"/>
+          <p:nvPr/>
+        </p:nvSpPr>
+        <p:spPr>
+          <a:xfrm>
+            <a:off x="713231" y="6157975"/>
+            <a:ext cx="11009376" cy="139700"/>
+          </a:xfrm>
+          <a:prstGeom prst="rect">
+            <a:avLst/>
+          </a:prstGeom>
+          <a:noFill/>
+          <a:ln>
+            <a:noFill/>
+          </a:ln>
+        </p:spPr>
+        <p:txBody>
+          <a:bodyPr wrap="none" anchor="t" lIns="0" rIns="0" tIns="0" bIns="0">
+            <a:noAutofit/>
+          </a:bodyPr>
+          <a:lstStyle/>
           <a:p>
             <a:pPr>
+              <a:spcBef>
+                <a:spcPts val="0"/>
+              </a:spcBef>
               <a:spcAft>
                 <a:spcPts val="0"/>
               </a:spcAft>
@@ -7259,20 +9150,66 @@
                 </a:solidFill>
                 <a:latin typeface="Consolas"/>
               </a:rPr>
-              <a:t>plt.show()</a:t>
-            </a:r>
-          </a:p>
-        </p:txBody>
-      </p:sp>
-      <p:sp>
-        <p:nvSpPr>
-          <p:cNvPr id="6" name="TextBox 5"/>
+              <a:t>plt</a:t>
+            </a:r>
+            <a:r>
+              <a:rPr sz="1100">
+                <a:solidFill>
+                  <a:srgbClr val="666666"/>
+                </a:solidFill>
+                <a:latin typeface="Consolas"/>
+              </a:rPr>
+              <a:t>.</a:t>
+            </a:r>
+            <a:r>
+              <a:rPr sz="1100">
+                <a:solidFill>
+                  <a:srgbClr val="000000"/>
+                </a:solidFill>
+                <a:latin typeface="Consolas"/>
+              </a:rPr>
+              <a:t>show</a:t>
+            </a:r>
+            <a:r>
+              <a:rPr sz="1100">
+                <a:solidFill>
+                  <a:srgbClr val="000000"/>
+                </a:solidFill>
+                <a:latin typeface="Consolas"/>
+              </a:rPr>
+              <a:t>(</a:t>
+            </a:r>
+            <a:r>
+              <a:rPr sz="1100">
+                <a:solidFill>
+                  <a:srgbClr val="000000"/>
+                </a:solidFill>
+                <a:latin typeface="Consolas"/>
+              </a:rPr>
+              <a:t>)</a:t>
+            </a:r>
+            <a:r>
+              <a:rPr sz="1100">
+                <a:solidFill>
+                  <a:srgbClr val="BBBBBB"/>
+                </a:solidFill>
+                <a:latin typeface="Consolas"/>
+              </a:rPr>
+              <a:t>
+</a:t>
+            </a:r>
+          </a:p>
+        </p:txBody>
+      </p:sp>
+      <p:sp>
+        <p:nvSpPr>
+          <p:cNvPr id="7" name="TextBox 6"/>
           <p:cNvSpPr txBox="1"/>
           <p:nvPr/>
         </p:nvSpPr>
         <p:spPr>
           <a:xfrm>
-            <a:off x="640080" y="5404104"/>
+            <a:off x="640080" y="6492240"/>
             <a:ext cx="11155680" cy="201168"/>
           </a:xfrm>
           <a:prstGeom prst="rect">
@@ -7359,7 +9296,7 @@
         <p:spPr>
           <a:xfrm>
             <a:off x="640080" y="1371600"/>
-            <a:ext cx="6263640" cy="2148839"/>
+            <a:ext cx="6263640" cy="1965960"/>
           </a:xfrm>
           <a:prstGeom prst="rect">
             <a:avLst/>
@@ -7426,8 +9363,8 @@
         </p:nvSpPr>
         <p:spPr>
           <a:xfrm>
-            <a:off x="640080" y="4288536"/>
-            <a:ext cx="6172200" cy="978407"/>
+            <a:off x="640080" y="5413756"/>
+            <a:ext cx="6172200" cy="1023620"/>
           </a:xfrm>
           <a:prstGeom prst="rect">
             <a:avLst/>
@@ -7471,21 +9408,27 @@
         </p:nvSpPr>
         <p:spPr>
           <a:xfrm>
-            <a:off x="713231" y="4325112"/>
-            <a:ext cx="6025896" cy="905255"/>
+            <a:off x="713231" y="5459476"/>
+            <a:ext cx="6025896" cy="139700"/>
           </a:xfrm>
           <a:prstGeom prst="rect">
             <a:avLst/>
           </a:prstGeom>
           <a:noFill/>
+          <a:ln>
+            <a:noFill/>
+          </a:ln>
         </p:spPr>
         <p:txBody>
-          <a:bodyPr wrap="none">
+          <a:bodyPr wrap="none" anchor="t" lIns="0" rIns="0" tIns="0" bIns="0">
             <a:noAutofit/>
           </a:bodyPr>
           <a:lstStyle/>
           <a:p>
             <a:pPr>
+              <a:spcBef>
+                <a:spcPts val="0"/>
+              </a:spcBef>
               <a:spcAft>
                 <a:spcPts val="0"/>
               </a:spcAft>
@@ -7497,11 +9440,140 @@
                 </a:solidFill>
                 <a:latin typeface="Consolas"/>
               </a:rPr>
-              <a:t>xx, yy = np.meshgrid(</a:t>
-            </a:r>
-          </a:p>
+              <a:t>xx</a:t>
+            </a:r>
+            <a:r>
+              <a:rPr sz="1100">
+                <a:solidFill>
+                  <a:srgbClr val="000000"/>
+                </a:solidFill>
+                <a:latin typeface="Consolas"/>
+              </a:rPr>
+              <a:t>,</a:t>
+            </a:r>
+            <a:r>
+              <a:rPr sz="1100">
+                <a:solidFill>
+                  <a:srgbClr val="000000"/>
+                </a:solidFill>
+                <a:latin typeface="Consolas"/>
+              </a:rPr>
+              <a:t> </a:t>
+            </a:r>
+            <a:r>
+              <a:rPr sz="1100">
+                <a:solidFill>
+                  <a:srgbClr val="000000"/>
+                </a:solidFill>
+                <a:latin typeface="Consolas"/>
+              </a:rPr>
+              <a:t>yy</a:t>
+            </a:r>
+            <a:r>
+              <a:rPr sz="1100">
+                <a:solidFill>
+                  <a:srgbClr val="000000"/>
+                </a:solidFill>
+                <a:latin typeface="Consolas"/>
+              </a:rPr>
+              <a:t> </a:t>
+            </a:r>
+            <a:r>
+              <a:rPr sz="1100">
+                <a:solidFill>
+                  <a:srgbClr val="666666"/>
+                </a:solidFill>
+                <a:latin typeface="Consolas"/>
+              </a:rPr>
+              <a:t>=</a:t>
+            </a:r>
+            <a:r>
+              <a:rPr sz="1100">
+                <a:solidFill>
+                  <a:srgbClr val="000000"/>
+                </a:solidFill>
+                <a:latin typeface="Consolas"/>
+              </a:rPr>
+              <a:t> </a:t>
+            </a:r>
+            <a:r>
+              <a:rPr sz="1100">
+                <a:solidFill>
+                  <a:srgbClr val="000000"/>
+                </a:solidFill>
+                <a:latin typeface="Consolas"/>
+              </a:rPr>
+              <a:t>np</a:t>
+            </a:r>
+            <a:r>
+              <a:rPr sz="1100">
+                <a:solidFill>
+                  <a:srgbClr val="666666"/>
+                </a:solidFill>
+                <a:latin typeface="Consolas"/>
+              </a:rPr>
+              <a:t>.</a:t>
+            </a:r>
+            <a:r>
+              <a:rPr sz="1100">
+                <a:solidFill>
+                  <a:srgbClr val="000000"/>
+                </a:solidFill>
+                <a:latin typeface="Consolas"/>
+              </a:rPr>
+              <a:t>meshgrid</a:t>
+            </a:r>
+            <a:r>
+              <a:rPr sz="1100">
+                <a:solidFill>
+                  <a:srgbClr val="000000"/>
+                </a:solidFill>
+                <a:latin typeface="Consolas"/>
+              </a:rPr>
+              <a:t>(</a:t>
+            </a:r>
+            <a:r>
+              <a:rPr sz="1100">
+                <a:solidFill>
+                  <a:srgbClr val="BBBBBB"/>
+                </a:solidFill>
+                <a:latin typeface="Consolas"/>
+              </a:rPr>
+              <a:t>
+</a:t>
+            </a:r>
+          </a:p>
+        </p:txBody>
+      </p:sp>
+      <p:sp>
+        <p:nvSpPr>
+          <p:cNvPr id="6" name="TextBox 5"/>
+          <p:cNvSpPr txBox="1"/>
+          <p:nvPr/>
+        </p:nvSpPr>
+        <p:spPr>
+          <a:xfrm>
+            <a:off x="713231" y="5599176"/>
+            <a:ext cx="6025896" cy="139700"/>
+          </a:xfrm>
+          <a:prstGeom prst="rect">
+            <a:avLst/>
+          </a:prstGeom>
+          <a:noFill/>
+          <a:ln>
+            <a:noFill/>
+          </a:ln>
+        </p:spPr>
+        <p:txBody>
+          <a:bodyPr wrap="none" anchor="t" lIns="0" rIns="0" tIns="0" bIns="0">
+            <a:noAutofit/>
+          </a:bodyPr>
+          <a:lstStyle/>
           <a:p>
             <a:pPr>
+              <a:spcBef>
+                <a:spcPts val="0"/>
+              </a:spcBef>
               <a:spcAft>
                 <a:spcPts val="0"/>
               </a:spcAft>
@@ -7513,11 +9585,239 @@
                 </a:solidFill>
                 <a:latin typeface="Consolas"/>
               </a:rPr>
-              <a:t>    np.linspace(x.min(), x.max(), 200),</a:t>
-            </a:r>
-          </a:p>
+              <a:t>    </a:t>
+            </a:r>
+            <a:r>
+              <a:rPr sz="1100">
+                <a:solidFill>
+                  <a:srgbClr val="000000"/>
+                </a:solidFill>
+                <a:latin typeface="Consolas"/>
+              </a:rPr>
+              <a:t>np</a:t>
+            </a:r>
+            <a:r>
+              <a:rPr sz="1100">
+                <a:solidFill>
+                  <a:srgbClr val="666666"/>
+                </a:solidFill>
+                <a:latin typeface="Consolas"/>
+              </a:rPr>
+              <a:t>.</a:t>
+            </a:r>
+            <a:r>
+              <a:rPr sz="1100">
+                <a:solidFill>
+                  <a:srgbClr val="000000"/>
+                </a:solidFill>
+                <a:latin typeface="Consolas"/>
+              </a:rPr>
+              <a:t>linspace</a:t>
+            </a:r>
+            <a:r>
+              <a:rPr sz="1100">
+                <a:solidFill>
+                  <a:srgbClr val="000000"/>
+                </a:solidFill>
+                <a:latin typeface="Consolas"/>
+              </a:rPr>
+              <a:t>(</a:t>
+            </a:r>
+            <a:r>
+              <a:rPr sz="1100">
+                <a:solidFill>
+                  <a:srgbClr val="000000"/>
+                </a:solidFill>
+                <a:latin typeface="Consolas"/>
+              </a:rPr>
+              <a:t>x</a:t>
+            </a:r>
+            <a:r>
+              <a:rPr sz="1100">
+                <a:solidFill>
+                  <a:srgbClr val="666666"/>
+                </a:solidFill>
+                <a:latin typeface="Consolas"/>
+              </a:rPr>
+              <a:t>.</a:t>
+            </a:r>
+            <a:r>
+              <a:rPr sz="1100">
+                <a:solidFill>
+                  <a:srgbClr val="000000"/>
+                </a:solidFill>
+                <a:latin typeface="Consolas"/>
+              </a:rPr>
+              <a:t>min</a:t>
+            </a:r>
+            <a:r>
+              <a:rPr sz="1100">
+                <a:solidFill>
+                  <a:srgbClr val="000000"/>
+                </a:solidFill>
+                <a:latin typeface="Consolas"/>
+              </a:rPr>
+              <a:t>(</a:t>
+            </a:r>
+            <a:r>
+              <a:rPr sz="1100">
+                <a:solidFill>
+                  <a:srgbClr val="000000"/>
+                </a:solidFill>
+                <a:latin typeface="Consolas"/>
+              </a:rPr>
+              <a:t>)</a:t>
+            </a:r>
+            <a:r>
+              <a:rPr sz="1100">
+                <a:solidFill>
+                  <a:srgbClr val="000000"/>
+                </a:solidFill>
+                <a:latin typeface="Consolas"/>
+              </a:rPr>
+              <a:t>,</a:t>
+            </a:r>
+            <a:r>
+              <a:rPr sz="1100">
+                <a:solidFill>
+                  <a:srgbClr val="000000"/>
+                </a:solidFill>
+                <a:latin typeface="Consolas"/>
+              </a:rPr>
+              <a:t> </a:t>
+            </a:r>
+            <a:r>
+              <a:rPr sz="1100">
+                <a:solidFill>
+                  <a:srgbClr val="000000"/>
+                </a:solidFill>
+                <a:latin typeface="Consolas"/>
+              </a:rPr>
+              <a:t>x</a:t>
+            </a:r>
+            <a:r>
+              <a:rPr sz="1100">
+                <a:solidFill>
+                  <a:srgbClr val="666666"/>
+                </a:solidFill>
+                <a:latin typeface="Consolas"/>
+              </a:rPr>
+              <a:t>.</a:t>
+            </a:r>
+            <a:r>
+              <a:rPr sz="1100">
+                <a:solidFill>
+                  <a:srgbClr val="000000"/>
+                </a:solidFill>
+                <a:latin typeface="Consolas"/>
+              </a:rPr>
+              <a:t>max</a:t>
+            </a:r>
+            <a:r>
+              <a:rPr sz="1100">
+                <a:solidFill>
+                  <a:srgbClr val="000000"/>
+                </a:solidFill>
+                <a:latin typeface="Consolas"/>
+              </a:rPr>
+              <a:t>(</a:t>
+            </a:r>
+            <a:r>
+              <a:rPr sz="1100">
+                <a:solidFill>
+                  <a:srgbClr val="000000"/>
+                </a:solidFill>
+                <a:latin typeface="Consolas"/>
+              </a:rPr>
+              <a:t>)</a:t>
+            </a:r>
+            <a:r>
+              <a:rPr sz="1100">
+                <a:solidFill>
+                  <a:srgbClr val="000000"/>
+                </a:solidFill>
+                <a:latin typeface="Consolas"/>
+              </a:rPr>
+              <a:t>,</a:t>
+            </a:r>
+            <a:r>
+              <a:rPr sz="1100">
+                <a:solidFill>
+                  <a:srgbClr val="000000"/>
+                </a:solidFill>
+                <a:latin typeface="Consolas"/>
+              </a:rPr>
+              <a:t> </a:t>
+            </a:r>
+            <a:r>
+              <a:rPr sz="1100">
+                <a:solidFill>
+                  <a:srgbClr val="40A070"/>
+                </a:solidFill>
+                <a:latin typeface="Consolas"/>
+              </a:rPr>
+              <a:t>200</a:t>
+            </a:r>
+            <a:r>
+              <a:rPr sz="1100">
+                <a:solidFill>
+                  <a:srgbClr val="000000"/>
+                </a:solidFill>
+                <a:latin typeface="Consolas"/>
+              </a:rPr>
+              <a:t>)</a:t>
+            </a:r>
+            <a:r>
+              <a:rPr sz="1100">
+                <a:solidFill>
+                  <a:srgbClr val="000000"/>
+                </a:solidFill>
+                <a:latin typeface="Consolas"/>
+              </a:rPr>
+              <a:t>,</a:t>
+            </a:r>
+            <a:r>
+              <a:rPr sz="1100">
+                <a:solidFill>
+                  <a:srgbClr val="BBBBBB"/>
+                </a:solidFill>
+                <a:latin typeface="Consolas"/>
+              </a:rPr>
+              <a:t>
+</a:t>
+            </a:r>
+          </a:p>
+        </p:txBody>
+      </p:sp>
+      <p:sp>
+        <p:nvSpPr>
+          <p:cNvPr id="7" name="TextBox 6"/>
+          <p:cNvSpPr txBox="1"/>
+          <p:nvPr/>
+        </p:nvSpPr>
+        <p:spPr>
+          <a:xfrm>
+            <a:off x="713231" y="5738876"/>
+            <a:ext cx="6025896" cy="139700"/>
+          </a:xfrm>
+          <a:prstGeom prst="rect">
+            <a:avLst/>
+          </a:prstGeom>
+          <a:noFill/>
+          <a:ln>
+            <a:noFill/>
+          </a:ln>
+        </p:spPr>
+        <p:txBody>
+          <a:bodyPr wrap="none" anchor="t" lIns="0" rIns="0" tIns="0" bIns="0">
+            <a:noAutofit/>
+          </a:bodyPr>
+          <a:lstStyle/>
           <a:p>
             <a:pPr>
+              <a:spcBef>
+                <a:spcPts val="0"/>
+              </a:spcBef>
               <a:spcAft>
                 <a:spcPts val="0"/>
               </a:spcAft>
@@ -7529,11 +9829,239 @@
                 </a:solidFill>
                 <a:latin typeface="Consolas"/>
               </a:rPr>
-              <a:t>    np.linspace(y.min(), y.max(), 200),</a:t>
-            </a:r>
-          </a:p>
+              <a:t>    </a:t>
+            </a:r>
+            <a:r>
+              <a:rPr sz="1100">
+                <a:solidFill>
+                  <a:srgbClr val="000000"/>
+                </a:solidFill>
+                <a:latin typeface="Consolas"/>
+              </a:rPr>
+              <a:t>np</a:t>
+            </a:r>
+            <a:r>
+              <a:rPr sz="1100">
+                <a:solidFill>
+                  <a:srgbClr val="666666"/>
+                </a:solidFill>
+                <a:latin typeface="Consolas"/>
+              </a:rPr>
+              <a:t>.</a:t>
+            </a:r>
+            <a:r>
+              <a:rPr sz="1100">
+                <a:solidFill>
+                  <a:srgbClr val="000000"/>
+                </a:solidFill>
+                <a:latin typeface="Consolas"/>
+              </a:rPr>
+              <a:t>linspace</a:t>
+            </a:r>
+            <a:r>
+              <a:rPr sz="1100">
+                <a:solidFill>
+                  <a:srgbClr val="000000"/>
+                </a:solidFill>
+                <a:latin typeface="Consolas"/>
+              </a:rPr>
+              <a:t>(</a:t>
+            </a:r>
+            <a:r>
+              <a:rPr sz="1100">
+                <a:solidFill>
+                  <a:srgbClr val="000000"/>
+                </a:solidFill>
+                <a:latin typeface="Consolas"/>
+              </a:rPr>
+              <a:t>y</a:t>
+            </a:r>
+            <a:r>
+              <a:rPr sz="1100">
+                <a:solidFill>
+                  <a:srgbClr val="666666"/>
+                </a:solidFill>
+                <a:latin typeface="Consolas"/>
+              </a:rPr>
+              <a:t>.</a:t>
+            </a:r>
+            <a:r>
+              <a:rPr sz="1100">
+                <a:solidFill>
+                  <a:srgbClr val="000000"/>
+                </a:solidFill>
+                <a:latin typeface="Consolas"/>
+              </a:rPr>
+              <a:t>min</a:t>
+            </a:r>
+            <a:r>
+              <a:rPr sz="1100">
+                <a:solidFill>
+                  <a:srgbClr val="000000"/>
+                </a:solidFill>
+                <a:latin typeface="Consolas"/>
+              </a:rPr>
+              <a:t>(</a:t>
+            </a:r>
+            <a:r>
+              <a:rPr sz="1100">
+                <a:solidFill>
+                  <a:srgbClr val="000000"/>
+                </a:solidFill>
+                <a:latin typeface="Consolas"/>
+              </a:rPr>
+              <a:t>)</a:t>
+            </a:r>
+            <a:r>
+              <a:rPr sz="1100">
+                <a:solidFill>
+                  <a:srgbClr val="000000"/>
+                </a:solidFill>
+                <a:latin typeface="Consolas"/>
+              </a:rPr>
+              <a:t>,</a:t>
+            </a:r>
+            <a:r>
+              <a:rPr sz="1100">
+                <a:solidFill>
+                  <a:srgbClr val="000000"/>
+                </a:solidFill>
+                <a:latin typeface="Consolas"/>
+              </a:rPr>
+              <a:t> </a:t>
+            </a:r>
+            <a:r>
+              <a:rPr sz="1100">
+                <a:solidFill>
+                  <a:srgbClr val="000000"/>
+                </a:solidFill>
+                <a:latin typeface="Consolas"/>
+              </a:rPr>
+              <a:t>y</a:t>
+            </a:r>
+            <a:r>
+              <a:rPr sz="1100">
+                <a:solidFill>
+                  <a:srgbClr val="666666"/>
+                </a:solidFill>
+                <a:latin typeface="Consolas"/>
+              </a:rPr>
+              <a:t>.</a:t>
+            </a:r>
+            <a:r>
+              <a:rPr sz="1100">
+                <a:solidFill>
+                  <a:srgbClr val="000000"/>
+                </a:solidFill>
+                <a:latin typeface="Consolas"/>
+              </a:rPr>
+              <a:t>max</a:t>
+            </a:r>
+            <a:r>
+              <a:rPr sz="1100">
+                <a:solidFill>
+                  <a:srgbClr val="000000"/>
+                </a:solidFill>
+                <a:latin typeface="Consolas"/>
+              </a:rPr>
+              <a:t>(</a:t>
+            </a:r>
+            <a:r>
+              <a:rPr sz="1100">
+                <a:solidFill>
+                  <a:srgbClr val="000000"/>
+                </a:solidFill>
+                <a:latin typeface="Consolas"/>
+              </a:rPr>
+              <a:t>)</a:t>
+            </a:r>
+            <a:r>
+              <a:rPr sz="1100">
+                <a:solidFill>
+                  <a:srgbClr val="000000"/>
+                </a:solidFill>
+                <a:latin typeface="Consolas"/>
+              </a:rPr>
+              <a:t>,</a:t>
+            </a:r>
+            <a:r>
+              <a:rPr sz="1100">
+                <a:solidFill>
+                  <a:srgbClr val="000000"/>
+                </a:solidFill>
+                <a:latin typeface="Consolas"/>
+              </a:rPr>
+              <a:t> </a:t>
+            </a:r>
+            <a:r>
+              <a:rPr sz="1100">
+                <a:solidFill>
+                  <a:srgbClr val="40A070"/>
+                </a:solidFill>
+                <a:latin typeface="Consolas"/>
+              </a:rPr>
+              <a:t>200</a:t>
+            </a:r>
+            <a:r>
+              <a:rPr sz="1100">
+                <a:solidFill>
+                  <a:srgbClr val="000000"/>
+                </a:solidFill>
+                <a:latin typeface="Consolas"/>
+              </a:rPr>
+              <a:t>)</a:t>
+            </a:r>
+            <a:r>
+              <a:rPr sz="1100">
+                <a:solidFill>
+                  <a:srgbClr val="000000"/>
+                </a:solidFill>
+                <a:latin typeface="Consolas"/>
+              </a:rPr>
+              <a:t>,</a:t>
+            </a:r>
+            <a:r>
+              <a:rPr sz="1100">
+                <a:solidFill>
+                  <a:srgbClr val="BBBBBB"/>
+                </a:solidFill>
+                <a:latin typeface="Consolas"/>
+              </a:rPr>
+              <a:t>
+</a:t>
+            </a:r>
+          </a:p>
+        </p:txBody>
+      </p:sp>
+      <p:sp>
+        <p:nvSpPr>
+          <p:cNvPr id="8" name="TextBox 7"/>
+          <p:cNvSpPr txBox="1"/>
+          <p:nvPr/>
+        </p:nvSpPr>
+        <p:spPr>
+          <a:xfrm>
+            <a:off x="713231" y="5878576"/>
+            <a:ext cx="6025896" cy="139700"/>
+          </a:xfrm>
+          <a:prstGeom prst="rect">
+            <a:avLst/>
+          </a:prstGeom>
+          <a:noFill/>
+          <a:ln>
+            <a:noFill/>
+          </a:ln>
+        </p:spPr>
+        <p:txBody>
+          <a:bodyPr wrap="none" anchor="t" lIns="0" rIns="0" tIns="0" bIns="0">
+            <a:noAutofit/>
+          </a:bodyPr>
+          <a:lstStyle/>
           <a:p>
             <a:pPr>
+              <a:spcBef>
+                <a:spcPts val="0"/>
+              </a:spcBef>
               <a:spcAft>
                 <a:spcPts val="0"/>
               </a:spcAft>
@@ -7547,9 +10075,48 @@
               </a:rPr>
               <a:t>)</a:t>
             </a:r>
-          </a:p>
+            <a:r>
+              <a:rPr sz="1100">
+                <a:solidFill>
+                  <a:srgbClr val="BBBBBB"/>
+                </a:solidFill>
+                <a:latin typeface="Consolas"/>
+              </a:rPr>
+              <a:t>
+</a:t>
+            </a:r>
+          </a:p>
+        </p:txBody>
+      </p:sp>
+      <p:sp>
+        <p:nvSpPr>
+          <p:cNvPr id="9" name="TextBox 8"/>
+          <p:cNvSpPr txBox="1"/>
+          <p:nvPr/>
+        </p:nvSpPr>
+        <p:spPr>
+          <a:xfrm>
+            <a:off x="713231" y="6018276"/>
+            <a:ext cx="6025896" cy="139700"/>
+          </a:xfrm>
+          <a:prstGeom prst="rect">
+            <a:avLst/>
+          </a:prstGeom>
+          <a:noFill/>
+          <a:ln>
+            <a:noFill/>
+          </a:ln>
+        </p:spPr>
+        <p:txBody>
+          <a:bodyPr wrap="none" anchor="t" lIns="0" rIns="0" tIns="0" bIns="0">
+            <a:noAutofit/>
+          </a:bodyPr>
+          <a:lstStyle/>
           <a:p>
             <a:pPr>
+              <a:spcBef>
+                <a:spcPts val="0"/>
+              </a:spcBef>
               <a:spcAft>
                 <a:spcPts val="0"/>
               </a:spcAft>
@@ -7561,20 +10128,364 @@
                 </a:solidFill>
                 <a:latin typeface="Consolas"/>
               </a:rPr>
-              <a:t>Z = clf.predict(np.c_[xx.ravel(), yy.ravel()]).reshape(xx.shape)</a:t>
-            </a:r>
-          </a:p>
-        </p:txBody>
-      </p:sp>
-      <p:sp>
-        <p:nvSpPr>
-          <p:cNvPr id="6" name="TextBox 5"/>
+              <a:t>Z</a:t>
+            </a:r>
+            <a:r>
+              <a:rPr sz="1100">
+                <a:solidFill>
+                  <a:srgbClr val="000000"/>
+                </a:solidFill>
+                <a:latin typeface="Consolas"/>
+              </a:rPr>
+              <a:t> </a:t>
+            </a:r>
+            <a:r>
+              <a:rPr sz="1100">
+                <a:solidFill>
+                  <a:srgbClr val="666666"/>
+                </a:solidFill>
+                <a:latin typeface="Consolas"/>
+              </a:rPr>
+              <a:t>=</a:t>
+            </a:r>
+            <a:r>
+              <a:rPr sz="1100">
+                <a:solidFill>
+                  <a:srgbClr val="000000"/>
+                </a:solidFill>
+                <a:latin typeface="Consolas"/>
+              </a:rPr>
+              <a:t> </a:t>
+            </a:r>
+            <a:r>
+              <a:rPr sz="1100">
+                <a:solidFill>
+                  <a:srgbClr val="000000"/>
+                </a:solidFill>
+                <a:latin typeface="Consolas"/>
+              </a:rPr>
+              <a:t>clf</a:t>
+            </a:r>
+            <a:r>
+              <a:rPr sz="1100">
+                <a:solidFill>
+                  <a:srgbClr val="666666"/>
+                </a:solidFill>
+                <a:latin typeface="Consolas"/>
+              </a:rPr>
+              <a:t>.</a:t>
+            </a:r>
+            <a:r>
+              <a:rPr sz="1100">
+                <a:solidFill>
+                  <a:srgbClr val="000000"/>
+                </a:solidFill>
+                <a:latin typeface="Consolas"/>
+              </a:rPr>
+              <a:t>predict</a:t>
+            </a:r>
+            <a:r>
+              <a:rPr sz="1100">
+                <a:solidFill>
+                  <a:srgbClr val="000000"/>
+                </a:solidFill>
+                <a:latin typeface="Consolas"/>
+              </a:rPr>
+              <a:t>(</a:t>
+            </a:r>
+            <a:r>
+              <a:rPr sz="1100">
+                <a:solidFill>
+                  <a:srgbClr val="000000"/>
+                </a:solidFill>
+                <a:latin typeface="Consolas"/>
+              </a:rPr>
+              <a:t>np</a:t>
+            </a:r>
+            <a:r>
+              <a:rPr sz="1100">
+                <a:solidFill>
+                  <a:srgbClr val="666666"/>
+                </a:solidFill>
+                <a:latin typeface="Consolas"/>
+              </a:rPr>
+              <a:t>.</a:t>
+            </a:r>
+            <a:r>
+              <a:rPr sz="1100">
+                <a:solidFill>
+                  <a:srgbClr val="000000"/>
+                </a:solidFill>
+                <a:latin typeface="Consolas"/>
+              </a:rPr>
+              <a:t>c_</a:t>
+            </a:r>
+            <a:r>
+              <a:rPr sz="1100">
+                <a:solidFill>
+                  <a:srgbClr val="000000"/>
+                </a:solidFill>
+                <a:latin typeface="Consolas"/>
+              </a:rPr>
+              <a:t>[</a:t>
+            </a:r>
+            <a:r>
+              <a:rPr sz="1100">
+                <a:solidFill>
+                  <a:srgbClr val="000000"/>
+                </a:solidFill>
+                <a:latin typeface="Consolas"/>
+              </a:rPr>
+              <a:t>xx</a:t>
+            </a:r>
+            <a:r>
+              <a:rPr sz="1100">
+                <a:solidFill>
+                  <a:srgbClr val="666666"/>
+                </a:solidFill>
+                <a:latin typeface="Consolas"/>
+              </a:rPr>
+              <a:t>.</a:t>
+            </a:r>
+            <a:r>
+              <a:rPr sz="1100">
+                <a:solidFill>
+                  <a:srgbClr val="000000"/>
+                </a:solidFill>
+                <a:latin typeface="Consolas"/>
+              </a:rPr>
+              <a:t>ravel</a:t>
+            </a:r>
+            <a:r>
+              <a:rPr sz="1100">
+                <a:solidFill>
+                  <a:srgbClr val="000000"/>
+                </a:solidFill>
+                <a:latin typeface="Consolas"/>
+              </a:rPr>
+              <a:t>(</a:t>
+            </a:r>
+            <a:r>
+              <a:rPr sz="1100">
+                <a:solidFill>
+                  <a:srgbClr val="000000"/>
+                </a:solidFill>
+                <a:latin typeface="Consolas"/>
+              </a:rPr>
+              <a:t>)</a:t>
+            </a:r>
+            <a:r>
+              <a:rPr sz="1100">
+                <a:solidFill>
+                  <a:srgbClr val="000000"/>
+                </a:solidFill>
+                <a:latin typeface="Consolas"/>
+              </a:rPr>
+              <a:t>,</a:t>
+            </a:r>
+            <a:r>
+              <a:rPr sz="1100">
+                <a:solidFill>
+                  <a:srgbClr val="BBBBBB"/>
+                </a:solidFill>
+                <a:latin typeface="Consolas"/>
+              </a:rPr>
+              <a:t>
+</a:t>
+            </a:r>
+          </a:p>
+        </p:txBody>
+      </p:sp>
+      <p:sp>
+        <p:nvSpPr>
+          <p:cNvPr id="10" name="TextBox 9"/>
           <p:cNvSpPr txBox="1"/>
           <p:nvPr/>
         </p:nvSpPr>
         <p:spPr>
           <a:xfrm>
-            <a:off x="640080" y="5321807"/>
+            <a:off x="713231" y="6157976"/>
+            <a:ext cx="6025896" cy="139700"/>
+          </a:xfrm>
+          <a:prstGeom prst="rect">
+            <a:avLst/>
+          </a:prstGeom>
+          <a:noFill/>
+          <a:ln>
+            <a:noFill/>
+          </a:ln>
+        </p:spPr>
+        <p:txBody>
+          <a:bodyPr wrap="none" anchor="t" lIns="0" rIns="0" tIns="0" bIns="0">
+            <a:noAutofit/>
+          </a:bodyPr>
+          <a:lstStyle/>
+          <a:p>
+            <a:pPr>
+              <a:spcBef>
+                <a:spcPts val="0"/>
+              </a:spcBef>
+              <a:spcAft>
+                <a:spcPts val="0"/>
+              </a:spcAft>
+            </a:pPr>
+            <a:r>
+              <a:rPr sz="1100">
+                <a:solidFill>
+                  <a:srgbClr val="000000"/>
+                </a:solidFill>
+                <a:latin typeface="Consolas"/>
+              </a:rPr>
+              <a:t>    </a:t>
+            </a:r>
+            <a:r>
+              <a:rPr sz="1100">
+                <a:solidFill>
+                  <a:srgbClr val="000000"/>
+                </a:solidFill>
+                <a:latin typeface="Consolas"/>
+              </a:rPr>
+              <a:t>yy</a:t>
+            </a:r>
+            <a:r>
+              <a:rPr sz="1100">
+                <a:solidFill>
+                  <a:srgbClr val="666666"/>
+                </a:solidFill>
+                <a:latin typeface="Consolas"/>
+              </a:rPr>
+              <a:t>.</a:t>
+            </a:r>
+            <a:r>
+              <a:rPr sz="1100">
+                <a:solidFill>
+                  <a:srgbClr val="000000"/>
+                </a:solidFill>
+                <a:latin typeface="Consolas"/>
+              </a:rPr>
+              <a:t>ravel</a:t>
+            </a:r>
+            <a:r>
+              <a:rPr sz="1100">
+                <a:solidFill>
+                  <a:srgbClr val="000000"/>
+                </a:solidFill>
+                <a:latin typeface="Consolas"/>
+              </a:rPr>
+              <a:t>(</a:t>
+            </a:r>
+            <a:r>
+              <a:rPr sz="1100">
+                <a:solidFill>
+                  <a:srgbClr val="000000"/>
+                </a:solidFill>
+                <a:latin typeface="Consolas"/>
+              </a:rPr>
+              <a:t>)</a:t>
+            </a:r>
+            <a:r>
+              <a:rPr sz="1100">
+                <a:solidFill>
+                  <a:srgbClr val="000000"/>
+                </a:solidFill>
+                <a:latin typeface="Consolas"/>
+              </a:rPr>
+              <a:t>]</a:t>
+            </a:r>
+            <a:r>
+              <a:rPr sz="1100">
+                <a:solidFill>
+                  <a:srgbClr val="000000"/>
+                </a:solidFill>
+                <a:latin typeface="Consolas"/>
+              </a:rPr>
+              <a:t>)</a:t>
+            </a:r>
+            <a:r>
+              <a:rPr sz="1100">
+                <a:solidFill>
+                  <a:srgbClr val="666666"/>
+                </a:solidFill>
+                <a:latin typeface="Consolas"/>
+              </a:rPr>
+              <a:t>.</a:t>
+            </a:r>
+            <a:r>
+              <a:rPr sz="1100">
+                <a:solidFill>
+                  <a:srgbClr val="000000"/>
+                </a:solidFill>
+                <a:latin typeface="Consolas"/>
+              </a:rPr>
+              <a:t>reshape</a:t>
+            </a:r>
+            <a:r>
+              <a:rPr sz="1100">
+                <a:solidFill>
+                  <a:srgbClr val="000000"/>
+                </a:solidFill>
+                <a:latin typeface="Consolas"/>
+              </a:rPr>
+              <a:t>(</a:t>
+            </a:r>
+            <a:r>
+              <a:rPr sz="1100">
+                <a:solidFill>
+                  <a:srgbClr val="000000"/>
+                </a:solidFill>
+                <a:latin typeface="Consolas"/>
+              </a:rPr>
+              <a:t>xx</a:t>
+            </a:r>
+            <a:r>
+              <a:rPr sz="1100">
+                <a:solidFill>
+                  <a:srgbClr val="666666"/>
+                </a:solidFill>
+                <a:latin typeface="Consolas"/>
+              </a:rPr>
+              <a:t>.</a:t>
+            </a:r>
+            <a:r>
+              <a:rPr sz="1100">
+                <a:solidFill>
+                  <a:srgbClr val="000000"/>
+                </a:solidFill>
+                <a:latin typeface="Consolas"/>
+              </a:rPr>
+              <a:t>shape</a:t>
+            </a:r>
+            <a:r>
+              <a:rPr sz="1100">
+                <a:solidFill>
+                  <a:srgbClr val="000000"/>
+                </a:solidFill>
+                <a:latin typeface="Consolas"/>
+              </a:rPr>
+              <a:t>)</a:t>
+            </a:r>
+            <a:r>
+              <a:rPr sz="1100">
+                <a:solidFill>
+                  <a:srgbClr val="BBBBBB"/>
+                </a:solidFill>
+                <a:latin typeface="Consolas"/>
+              </a:rPr>
+              <a:t>
+</a:t>
+            </a:r>
+          </a:p>
+        </p:txBody>
+      </p:sp>
+      <p:sp>
+        <p:nvSpPr>
+          <p:cNvPr id="11" name="TextBox 10"/>
+          <p:cNvSpPr txBox="1"/>
+          <p:nvPr/>
+        </p:nvSpPr>
+        <p:spPr>
+          <a:xfrm>
+            <a:off x="640080" y="6492240"/>
             <a:ext cx="6172200" cy="201168"/>
           </a:xfrm>
           <a:prstGeom prst="rect">
@@ -7603,7 +10514,7 @@
       </p:sp>
       <p:pic>
         <p:nvPicPr>
-          <p:cNvPr id="7" name="Picture 6" descr="decision_boundary.png"/>
+          <p:cNvPr id="12" name="Picture 11" descr="decision_boundary.png"/>
           <p:cNvPicPr>
             <a:picLocks noChangeAspect="1"/>
           </p:cNvPicPr>
@@ -7617,8 +10528,8 @@
         </p:blipFill>
         <p:spPr>
           <a:xfrm>
-            <a:off x="7269480" y="1325880"/>
-            <a:ext cx="4465015" cy="2578036"/>
+            <a:off x="7269480" y="1371600"/>
+            <a:ext cx="4465015" cy="3503007"/>
           </a:xfrm>
           <a:prstGeom prst="rect">
             <a:avLst/>
@@ -7819,7 +10730,7 @@
         <p:spPr>
           <a:xfrm>
             <a:off x="640080" y="1371600"/>
-            <a:ext cx="6263640" cy="2697480"/>
+            <a:ext cx="6263640" cy="2514600"/>
           </a:xfrm>
           <a:prstGeom prst="rect">
             <a:avLst/>
@@ -7909,8 +10820,8 @@
         </p:blipFill>
         <p:spPr>
           <a:xfrm>
-            <a:off x="7269480" y="1325880"/>
-            <a:ext cx="4465015" cy="2495677"/>
+            <a:off x="7269480" y="1371600"/>
+            <a:ext cx="4465015" cy="2336001"/>
           </a:xfrm>
           <a:prstGeom prst="rect">
             <a:avLst/>
@@ -7977,7 +10888,7 @@
         <p:spPr>
           <a:xfrm>
             <a:off x="640080" y="1371600"/>
-            <a:ext cx="5532120" cy="2697480"/>
+            <a:ext cx="5532120" cy="2514600"/>
           </a:xfrm>
           <a:prstGeom prst="rect">
             <a:avLst/>
@@ -8045,7 +10956,7 @@
         <p:spPr>
           <a:xfrm>
             <a:off x="6355080" y="1371600"/>
-            <a:ext cx="5532120" cy="2697480"/>
+            <a:ext cx="5532120" cy="2514600"/>
           </a:xfrm>
           <a:prstGeom prst="rect">
             <a:avLst/>
@@ -8112,8 +11023,8 @@
         </p:nvSpPr>
         <p:spPr>
           <a:xfrm>
-            <a:off x="640080" y="4690872"/>
-            <a:ext cx="11155680" cy="630936"/>
+            <a:off x="640080" y="5832856"/>
+            <a:ext cx="11155680" cy="604520"/>
           </a:xfrm>
           <a:prstGeom prst="rect">
             <a:avLst/>
@@ -8157,37 +11068,82 @@
         </p:nvSpPr>
         <p:spPr>
           <a:xfrm>
-            <a:off x="713231" y="4727448"/>
-            <a:ext cx="11009376" cy="557784"/>
+            <a:off x="713231" y="5878576"/>
+            <a:ext cx="11009376" cy="139700"/>
           </a:xfrm>
           <a:prstGeom prst="rect">
             <a:avLst/>
           </a:prstGeom>
           <a:noFill/>
+          <a:ln>
+            <a:noFill/>
+          </a:ln>
         </p:spPr>
         <p:txBody>
-          <a:bodyPr wrap="none">
+          <a:bodyPr wrap="none" anchor="t" lIns="0" rIns="0" tIns="0" bIns="0">
             <a:noAutofit/>
           </a:bodyPr>
           <a:lstStyle/>
           <a:p>
             <a:pPr>
+              <a:spcBef>
+                <a:spcPts val="0"/>
+              </a:spcBef>
               <a:spcAft>
                 <a:spcPts val="0"/>
               </a:spcAft>
             </a:pPr>
             <a:r>
-              <a:rPr sz="1100">
-                <a:solidFill>
-                  <a:srgbClr val="000000"/>
+              <a:rPr sz="1100" i="1">
+                <a:solidFill>
+                  <a:srgbClr val="60A0B0"/>
                 </a:solidFill>
                 <a:latin typeface="Consolas"/>
               </a:rPr>
               <a:t># масштабирование не обязательно</a:t>
             </a:r>
-          </a:p>
+            <a:r>
+              <a:rPr sz="1100">
+                <a:solidFill>
+                  <a:srgbClr val="BBBBBB"/>
+                </a:solidFill>
+                <a:latin typeface="Consolas"/>
+              </a:rPr>
+              <a:t>
+</a:t>
+            </a:r>
+          </a:p>
+        </p:txBody>
+      </p:sp>
+      <p:sp>
+        <p:nvSpPr>
+          <p:cNvPr id="7" name="TextBox 6"/>
+          <p:cNvSpPr txBox="1"/>
+          <p:nvPr/>
+        </p:nvSpPr>
+        <p:spPr>
+          <a:xfrm>
+            <a:off x="713231" y="6018275"/>
+            <a:ext cx="11009376" cy="139700"/>
+          </a:xfrm>
+          <a:prstGeom prst="rect">
+            <a:avLst/>
+          </a:prstGeom>
+          <a:noFill/>
+          <a:ln>
+            <a:noFill/>
+          </a:ln>
+        </p:spPr>
+        <p:txBody>
+          <a:bodyPr wrap="none" anchor="t" lIns="0" rIns="0" tIns="0" bIns="0">
+            <a:noAutofit/>
+          </a:bodyPr>
+          <a:lstStyle/>
           <a:p>
             <a:pPr>
+              <a:spcBef>
+                <a:spcPts val="0"/>
+              </a:spcBef>
               <a:spcAft>
                 <a:spcPts val="0"/>
               </a:spcAft>
@@ -8199,11 +11155,131 @@
                 </a:solidFill>
                 <a:latin typeface="Consolas"/>
               </a:rPr>
-              <a:t>clf = DecisionTreeClassifier(random_state=42)</a:t>
-            </a:r>
-          </a:p>
+              <a:t>clf</a:t>
+            </a:r>
+            <a:r>
+              <a:rPr sz="1100">
+                <a:solidFill>
+                  <a:srgbClr val="000000"/>
+                </a:solidFill>
+                <a:latin typeface="Consolas"/>
+              </a:rPr>
+              <a:t> </a:t>
+            </a:r>
+            <a:r>
+              <a:rPr sz="1100">
+                <a:solidFill>
+                  <a:srgbClr val="666666"/>
+                </a:solidFill>
+                <a:latin typeface="Consolas"/>
+              </a:rPr>
+              <a:t>=</a:t>
+            </a:r>
+            <a:r>
+              <a:rPr sz="1100">
+                <a:solidFill>
+                  <a:srgbClr val="000000"/>
+                </a:solidFill>
+                <a:latin typeface="Consolas"/>
+              </a:rPr>
+              <a:t> </a:t>
+            </a:r>
+            <a:r>
+              <a:rPr sz="1100">
+                <a:solidFill>
+                  <a:srgbClr val="000000"/>
+                </a:solidFill>
+                <a:latin typeface="Consolas"/>
+              </a:rPr>
+              <a:t>DecisionTreeClassifier</a:t>
+            </a:r>
+            <a:r>
+              <a:rPr sz="1100">
+                <a:solidFill>
+                  <a:srgbClr val="000000"/>
+                </a:solidFill>
+                <a:latin typeface="Consolas"/>
+              </a:rPr>
+              <a:t>(</a:t>
+            </a:r>
+            <a:r>
+              <a:rPr sz="1100">
+                <a:solidFill>
+                  <a:srgbClr val="000000"/>
+                </a:solidFill>
+                <a:latin typeface="Consolas"/>
+              </a:rPr>
+              <a:t>random_state</a:t>
+            </a:r>
+            <a:r>
+              <a:rPr sz="1100">
+                <a:solidFill>
+                  <a:srgbClr val="666666"/>
+                </a:solidFill>
+                <a:latin typeface="Consolas"/>
+              </a:rPr>
+              <a:t>=</a:t>
+            </a:r>
+            <a:r>
+              <a:rPr sz="1100">
+                <a:solidFill>
+                  <a:srgbClr val="40A070"/>
+                </a:solidFill>
+                <a:latin typeface="Consolas"/>
+              </a:rPr>
+              <a:t>42</a:t>
+            </a:r>
+            <a:r>
+              <a:rPr sz="1100">
+                <a:solidFill>
+                  <a:srgbClr val="000000"/>
+                </a:solidFill>
+                <a:latin typeface="Consolas"/>
+              </a:rPr>
+              <a:t>)</a:t>
+            </a:r>
+            <a:r>
+              <a:rPr sz="1100">
+                <a:solidFill>
+                  <a:srgbClr val="BBBBBB"/>
+                </a:solidFill>
+                <a:latin typeface="Consolas"/>
+              </a:rPr>
+              <a:t>
+</a:t>
+            </a:r>
+          </a:p>
+        </p:txBody>
+      </p:sp>
+      <p:sp>
+        <p:nvSpPr>
+          <p:cNvPr id="8" name="TextBox 7"/>
+          <p:cNvSpPr txBox="1"/>
+          <p:nvPr/>
+        </p:nvSpPr>
+        <p:spPr>
+          <a:xfrm>
+            <a:off x="713231" y="6157975"/>
+            <a:ext cx="11009376" cy="139700"/>
+          </a:xfrm>
+          <a:prstGeom prst="rect">
+            <a:avLst/>
+          </a:prstGeom>
+          <a:noFill/>
+          <a:ln>
+            <a:noFill/>
+          </a:ln>
+        </p:spPr>
+        <p:txBody>
+          <a:bodyPr wrap="none" anchor="t" lIns="0" rIns="0" tIns="0" bIns="0">
+            <a:noAutofit/>
+          </a:bodyPr>
+          <a:lstStyle/>
           <a:p>
             <a:pPr>
+              <a:spcBef>
+                <a:spcPts val="0"/>
+              </a:spcBef>
               <a:spcAft>
                 <a:spcPts val="0"/>
               </a:spcAft>
@@ -8215,20 +11291,120 @@
                 </a:solidFill>
                 <a:latin typeface="Consolas"/>
               </a:rPr>
-              <a:t>clf.fit(X_raw, y)  # можно на исходных признаках</a:t>
-            </a:r>
-          </a:p>
-        </p:txBody>
-      </p:sp>
-      <p:sp>
-        <p:nvSpPr>
-          <p:cNvPr id="7" name="TextBox 6"/>
+              <a:t>clf</a:t>
+            </a:r>
+            <a:r>
+              <a:rPr sz="1100">
+                <a:solidFill>
+                  <a:srgbClr val="666666"/>
+                </a:solidFill>
+                <a:latin typeface="Consolas"/>
+              </a:rPr>
+              <a:t>.</a:t>
+            </a:r>
+            <a:r>
+              <a:rPr sz="1100">
+                <a:solidFill>
+                  <a:srgbClr val="000000"/>
+                </a:solidFill>
+                <a:latin typeface="Consolas"/>
+              </a:rPr>
+              <a:t>fit</a:t>
+            </a:r>
+            <a:r>
+              <a:rPr sz="1100">
+                <a:solidFill>
+                  <a:srgbClr val="000000"/>
+                </a:solidFill>
+                <a:latin typeface="Consolas"/>
+              </a:rPr>
+              <a:t>(</a:t>
+            </a:r>
+            <a:r>
+              <a:rPr sz="1100">
+                <a:solidFill>
+                  <a:srgbClr val="000000"/>
+                </a:solidFill>
+                <a:latin typeface="Consolas"/>
+              </a:rPr>
+              <a:t>X_raw</a:t>
+            </a:r>
+            <a:r>
+              <a:rPr sz="1100">
+                <a:solidFill>
+                  <a:srgbClr val="000000"/>
+                </a:solidFill>
+                <a:latin typeface="Consolas"/>
+              </a:rPr>
+              <a:t>,</a:t>
+            </a:r>
+            <a:r>
+              <a:rPr sz="1100">
+                <a:solidFill>
+                  <a:srgbClr val="000000"/>
+                </a:solidFill>
+                <a:latin typeface="Consolas"/>
+              </a:rPr>
+              <a:t> </a:t>
+            </a:r>
+            <a:r>
+              <a:rPr sz="1100">
+                <a:solidFill>
+                  <a:srgbClr val="000000"/>
+                </a:solidFill>
+                <a:latin typeface="Consolas"/>
+              </a:rPr>
+              <a:t>y</a:t>
+            </a:r>
+            <a:r>
+              <a:rPr sz="1100">
+                <a:solidFill>
+                  <a:srgbClr val="000000"/>
+                </a:solidFill>
+                <a:latin typeface="Consolas"/>
+              </a:rPr>
+              <a:t>)</a:t>
+            </a:r>
+            <a:r>
+              <a:rPr sz="1100">
+                <a:solidFill>
+                  <a:srgbClr val="000000"/>
+                </a:solidFill>
+                <a:latin typeface="Consolas"/>
+              </a:rPr>
+              <a:t>  </a:t>
+            </a:r>
+            <a:r>
+              <a:rPr sz="1100" i="1">
+                <a:solidFill>
+                  <a:srgbClr val="60A0B0"/>
+                </a:solidFill>
+                <a:latin typeface="Consolas"/>
+              </a:rPr>
+              <a:t># можно на исходных признаках</a:t>
+            </a:r>
+            <a:r>
+              <a:rPr sz="1100">
+                <a:solidFill>
+                  <a:srgbClr val="BBBBBB"/>
+                </a:solidFill>
+                <a:latin typeface="Consolas"/>
+              </a:rPr>
+              <a:t>
+</a:t>
+            </a:r>
+          </a:p>
+        </p:txBody>
+      </p:sp>
+      <p:sp>
+        <p:nvSpPr>
+          <p:cNvPr id="9" name="TextBox 8"/>
           <p:cNvSpPr txBox="1"/>
           <p:nvPr/>
         </p:nvSpPr>
         <p:spPr>
           <a:xfrm>
-            <a:off x="640080" y="5376672"/>
+            <a:off x="640080" y="6492240"/>
             <a:ext cx="11155680" cy="201168"/>
           </a:xfrm>
           <a:prstGeom prst="rect">
@@ -8315,7 +11491,7 @@
         <p:spPr>
           <a:xfrm>
             <a:off x="640080" y="1371600"/>
-            <a:ext cx="5532120" cy="2423160"/>
+            <a:ext cx="5532120" cy="2240280"/>
           </a:xfrm>
           <a:prstGeom prst="rect">
             <a:avLst/>
@@ -8383,7 +11559,7 @@
         <p:spPr>
           <a:xfrm>
             <a:off x="6355080" y="1371600"/>
-            <a:ext cx="5532120" cy="2423160"/>
+            <a:ext cx="5532120" cy="2240280"/>
           </a:xfrm>
           <a:prstGeom prst="rect">
             <a:avLst/>
@@ -8487,7 +11663,7 @@
         <p:spPr>
           <a:xfrm>
             <a:off x="640080" y="1371600"/>
-            <a:ext cx="5532120" cy="2423160"/>
+            <a:ext cx="5532120" cy="2240280"/>
           </a:xfrm>
           <a:prstGeom prst="rect">
             <a:avLst/>
@@ -8621,7 +11797,7 @@
         <p:spPr>
           <a:xfrm>
             <a:off x="6355080" y="1371600"/>
-            <a:ext cx="5532120" cy="2423160"/>
+            <a:ext cx="5532120" cy="2240280"/>
           </a:xfrm>
           <a:prstGeom prst="rect">
             <a:avLst/>
@@ -8725,7 +11901,7 @@
         <p:spPr>
           <a:xfrm>
             <a:off x="640080" y="1371600"/>
-            <a:ext cx="5532120" cy="3246120"/>
+            <a:ext cx="5532120" cy="3063240"/>
           </a:xfrm>
           <a:prstGeom prst="rect">
             <a:avLst/>
@@ -8914,7 +12090,7 @@
         <p:spPr>
           <a:xfrm>
             <a:off x="6355080" y="1371600"/>
-            <a:ext cx="5532120" cy="3246120"/>
+            <a:ext cx="5532120" cy="3063240"/>
           </a:xfrm>
           <a:prstGeom prst="rect">
             <a:avLst/>
@@ -9033,7 +12209,7 @@
         <p:spPr>
           <a:xfrm>
             <a:off x="640080" y="1371600"/>
-            <a:ext cx="11247120" cy="2423160"/>
+            <a:ext cx="11247120" cy="2240280"/>
           </a:xfrm>
           <a:prstGeom prst="rect">
             <a:avLst/>
@@ -9676,7 +12852,7 @@
         <p:spPr>
           <a:xfrm>
             <a:off x="640080" y="1371600"/>
-            <a:ext cx="6263640" cy="2423160"/>
+            <a:ext cx="6263640" cy="2240280"/>
           </a:xfrm>
           <a:prstGeom prst="rect">
             <a:avLst/>
@@ -9766,8 +12942,8 @@
         </p:blipFill>
         <p:spPr>
           <a:xfrm>
-            <a:off x="7269480" y="1325880"/>
-            <a:ext cx="4465015" cy="2907852"/>
+            <a:off x="7269480" y="1371600"/>
+            <a:ext cx="4465015" cy="2929213"/>
           </a:xfrm>
           <a:prstGeom prst="rect">
             <a:avLst/>
@@ -9900,7 +13076,7 @@
         <p:spPr>
           <a:xfrm>
             <a:off x="640080" y="1371600"/>
-            <a:ext cx="6263640" cy="2697480"/>
+            <a:ext cx="6263640" cy="2514600"/>
           </a:xfrm>
           <a:prstGeom prst="rect">
             <a:avLst/>
@@ -9997,8 +13173,8 @@
         </p:nvSpPr>
         <p:spPr>
           <a:xfrm>
-            <a:off x="640080" y="4489703"/>
-            <a:ext cx="6172200" cy="804672"/>
+            <a:off x="640080" y="5693156"/>
+            <a:ext cx="6172200" cy="744220"/>
           </a:xfrm>
           <a:prstGeom prst="rect">
             <a:avLst/>
@@ -10042,37 +13218,154 @@
         </p:nvSpPr>
         <p:spPr>
           <a:xfrm>
-            <a:off x="713231" y="4526279"/>
-            <a:ext cx="6025896" cy="731520"/>
+            <a:off x="713231" y="5738876"/>
+            <a:ext cx="6025896" cy="139700"/>
           </a:xfrm>
           <a:prstGeom prst="rect">
             <a:avLst/>
           </a:prstGeom>
           <a:noFill/>
+          <a:ln>
+            <a:noFill/>
+          </a:ln>
         </p:spPr>
         <p:txBody>
-          <a:bodyPr wrap="none">
+          <a:bodyPr wrap="none" anchor="t" lIns="0" rIns="0" tIns="0" bIns="0">
             <a:noAutofit/>
           </a:bodyPr>
           <a:lstStyle/>
           <a:p>
             <a:pPr>
+              <a:spcBef>
+                <a:spcPts val="0"/>
+              </a:spcBef>
               <a:spcAft>
                 <a:spcPts val="0"/>
               </a:spcAft>
             </a:pPr>
             <a:r>
-              <a:rPr sz="1100">
-                <a:solidFill>
-                  <a:srgbClr val="000000"/>
-                </a:solidFill>
-                <a:latin typeface="Consolas"/>
-              </a:rPr>
-              <a:t>from sklearn.datasets import load_iris</a:t>
-            </a:r>
-          </a:p>
+              <a:rPr sz="1100" b="1">
+                <a:solidFill>
+                  <a:srgbClr val="007020"/>
+                </a:solidFill>
+                <a:latin typeface="Consolas"/>
+              </a:rPr>
+              <a:t>from</a:t>
+            </a:r>
+            <a:r>
+              <a:rPr sz="1100">
+                <a:solidFill>
+                  <a:srgbClr val="BBBBBB"/>
+                </a:solidFill>
+                <a:latin typeface="Consolas"/>
+              </a:rPr>
+              <a:t> </a:t>
+            </a:r>
+            <a:r>
+              <a:rPr sz="1100" b="1">
+                <a:solidFill>
+                  <a:srgbClr val="0E84B5"/>
+                </a:solidFill>
+                <a:latin typeface="Consolas"/>
+              </a:rPr>
+              <a:t>sklearn</a:t>
+            </a:r>
+            <a:r>
+              <a:rPr sz="1100" b="1">
+                <a:solidFill>
+                  <a:srgbClr val="0E84B5"/>
+                </a:solidFill>
+                <a:latin typeface="Consolas"/>
+              </a:rPr>
+              <a:t>.</a:t>
+            </a:r>
+            <a:r>
+              <a:rPr sz="1100" b="1">
+                <a:solidFill>
+                  <a:srgbClr val="0E84B5"/>
+                </a:solidFill>
+                <a:latin typeface="Consolas"/>
+              </a:rPr>
+              <a:t>datasets</a:t>
+            </a:r>
+            <a:r>
+              <a:rPr sz="1100">
+                <a:solidFill>
+                  <a:srgbClr val="BBBBBB"/>
+                </a:solidFill>
+                <a:latin typeface="Consolas"/>
+              </a:rPr>
+              <a:t> </a:t>
+            </a:r>
+            <a:r>
+              <a:rPr sz="1100" b="1">
+                <a:solidFill>
+                  <a:srgbClr val="007020"/>
+                </a:solidFill>
+                <a:latin typeface="Consolas"/>
+              </a:rPr>
+              <a:t>import</a:t>
+            </a:r>
+            <a:r>
+              <a:rPr sz="1100">
+                <a:solidFill>
+                  <a:srgbClr val="000000"/>
+                </a:solidFill>
+                <a:latin typeface="Consolas"/>
+              </a:rPr>
+              <a:t> </a:t>
+            </a:r>
+            <a:r>
+              <a:rPr sz="1100">
+                <a:solidFill>
+                  <a:srgbClr val="000000"/>
+                </a:solidFill>
+                <a:latin typeface="Consolas"/>
+              </a:rPr>
+              <a:t>load_iris</a:t>
+            </a:r>
+            <a:r>
+              <a:rPr sz="1100">
+                <a:solidFill>
+                  <a:srgbClr val="BBBBBB"/>
+                </a:solidFill>
+                <a:latin typeface="Consolas"/>
+              </a:rPr>
+              <a:t>
+</a:t>
+            </a:r>
+          </a:p>
+        </p:txBody>
+      </p:sp>
+      <p:sp>
+        <p:nvSpPr>
+          <p:cNvPr id="6" name="TextBox 5"/>
+          <p:cNvSpPr txBox="1"/>
+          <p:nvPr/>
+        </p:nvSpPr>
+        <p:spPr>
+          <a:xfrm>
+            <a:off x="713231" y="5878576"/>
+            <a:ext cx="6025896" cy="139700"/>
+          </a:xfrm>
+          <a:prstGeom prst="rect">
+            <a:avLst/>
+          </a:prstGeom>
+          <a:noFill/>
+          <a:ln>
+            <a:noFill/>
+          </a:ln>
+        </p:spPr>
+        <p:txBody>
+          <a:bodyPr wrap="none" anchor="t" lIns="0" rIns="0" tIns="0" bIns="0">
+            <a:noAutofit/>
+          </a:bodyPr>
+          <a:lstStyle/>
           <a:p>
             <a:pPr>
+              <a:spcBef>
+                <a:spcPts val="0"/>
+              </a:spcBef>
               <a:spcAft>
                 <a:spcPts val="0"/>
               </a:spcAft>
@@ -10084,11 +13377,158 @@
                 </a:solidFill>
                 <a:latin typeface="Consolas"/>
               </a:rPr>
-              <a:t>X, y = load_iris(return_X_y=True)</a:t>
-            </a:r>
-          </a:p>
+              <a:t>X</a:t>
+            </a:r>
+            <a:r>
+              <a:rPr sz="1100">
+                <a:solidFill>
+                  <a:srgbClr val="000000"/>
+                </a:solidFill>
+                <a:latin typeface="Consolas"/>
+              </a:rPr>
+              <a:t>,</a:t>
+            </a:r>
+            <a:r>
+              <a:rPr sz="1100">
+                <a:solidFill>
+                  <a:srgbClr val="000000"/>
+                </a:solidFill>
+                <a:latin typeface="Consolas"/>
+              </a:rPr>
+              <a:t> </a:t>
+            </a:r>
+            <a:r>
+              <a:rPr sz="1100">
+                <a:solidFill>
+                  <a:srgbClr val="000000"/>
+                </a:solidFill>
+                <a:latin typeface="Consolas"/>
+              </a:rPr>
+              <a:t>y</a:t>
+            </a:r>
+            <a:r>
+              <a:rPr sz="1100">
+                <a:solidFill>
+                  <a:srgbClr val="000000"/>
+                </a:solidFill>
+                <a:latin typeface="Consolas"/>
+              </a:rPr>
+              <a:t> </a:t>
+            </a:r>
+            <a:r>
+              <a:rPr sz="1100">
+                <a:solidFill>
+                  <a:srgbClr val="666666"/>
+                </a:solidFill>
+                <a:latin typeface="Consolas"/>
+              </a:rPr>
+              <a:t>=</a:t>
+            </a:r>
+            <a:r>
+              <a:rPr sz="1100">
+                <a:solidFill>
+                  <a:srgbClr val="000000"/>
+                </a:solidFill>
+                <a:latin typeface="Consolas"/>
+              </a:rPr>
+              <a:t> </a:t>
+            </a:r>
+            <a:r>
+              <a:rPr sz="1100">
+                <a:solidFill>
+                  <a:srgbClr val="000000"/>
+                </a:solidFill>
+                <a:latin typeface="Consolas"/>
+              </a:rPr>
+              <a:t>load_iris</a:t>
+            </a:r>
+            <a:r>
+              <a:rPr sz="1100">
+                <a:solidFill>
+                  <a:srgbClr val="000000"/>
+                </a:solidFill>
+                <a:latin typeface="Consolas"/>
+              </a:rPr>
+              <a:t>(</a:t>
+            </a:r>
+            <a:r>
+              <a:rPr sz="1100">
+                <a:solidFill>
+                  <a:srgbClr val="000000"/>
+                </a:solidFill>
+                <a:latin typeface="Consolas"/>
+              </a:rPr>
+              <a:t>return_X_y</a:t>
+            </a:r>
+            <a:r>
+              <a:rPr sz="1100">
+                <a:solidFill>
+                  <a:srgbClr val="666666"/>
+                </a:solidFill>
+                <a:latin typeface="Consolas"/>
+              </a:rPr>
+              <a:t>=</a:t>
+            </a:r>
+            <a:r>
+              <a:rPr sz="1100" b="1">
+                <a:solidFill>
+                  <a:srgbClr val="007020"/>
+                </a:solidFill>
+                <a:latin typeface="Consolas"/>
+              </a:rPr>
+              <a:t>True</a:t>
+            </a:r>
+            <a:r>
+              <a:rPr sz="1100">
+                <a:solidFill>
+                  <a:srgbClr val="000000"/>
+                </a:solidFill>
+                <a:latin typeface="Consolas"/>
+              </a:rPr>
+              <a:t>)</a:t>
+            </a:r>
+            <a:r>
+              <a:rPr sz="1100">
+                <a:solidFill>
+                  <a:srgbClr val="BBBBBB"/>
+                </a:solidFill>
+                <a:latin typeface="Consolas"/>
+              </a:rPr>
+              <a:t>
+</a:t>
+            </a:r>
+          </a:p>
+        </p:txBody>
+      </p:sp>
+      <p:sp>
+        <p:nvSpPr>
+          <p:cNvPr id="7" name="TextBox 6"/>
+          <p:cNvSpPr txBox="1"/>
+          <p:nvPr/>
+        </p:nvSpPr>
+        <p:spPr>
+          <a:xfrm>
+            <a:off x="713231" y="6018275"/>
+            <a:ext cx="6025896" cy="139700"/>
+          </a:xfrm>
+          <a:prstGeom prst="rect">
+            <a:avLst/>
+          </a:prstGeom>
+          <a:noFill/>
+          <a:ln>
+            <a:noFill/>
+          </a:ln>
+        </p:spPr>
+        <p:txBody>
+          <a:bodyPr wrap="none" anchor="t" lIns="0" rIns="0" tIns="0" bIns="0">
+            <a:noAutofit/>
+          </a:bodyPr>
+          <a:lstStyle/>
           <a:p>
             <a:pPr>
+              <a:spcBef>
+                <a:spcPts val="0"/>
+              </a:spcBef>
               <a:spcAft>
                 <a:spcPts val="0"/>
               </a:spcAft>
@@ -10100,36 +13540,400 @@
                 </a:solidFill>
                 <a:latin typeface="Consolas"/>
               </a:rPr>
-              <a:t>X, y = X[y != 2], (y[y != 2] == 0).astype(int)</a:t>
-            </a:r>
-          </a:p>
+              <a:t>X</a:t>
+            </a:r>
+            <a:r>
+              <a:rPr sz="1100">
+                <a:solidFill>
+                  <a:srgbClr val="000000"/>
+                </a:solidFill>
+                <a:latin typeface="Consolas"/>
+              </a:rPr>
+              <a:t>,</a:t>
+            </a:r>
+            <a:r>
+              <a:rPr sz="1100">
+                <a:solidFill>
+                  <a:srgbClr val="000000"/>
+                </a:solidFill>
+                <a:latin typeface="Consolas"/>
+              </a:rPr>
+              <a:t> </a:t>
+            </a:r>
+            <a:r>
+              <a:rPr sz="1100">
+                <a:solidFill>
+                  <a:srgbClr val="000000"/>
+                </a:solidFill>
+                <a:latin typeface="Consolas"/>
+              </a:rPr>
+              <a:t>y</a:t>
+            </a:r>
+            <a:r>
+              <a:rPr sz="1100">
+                <a:solidFill>
+                  <a:srgbClr val="000000"/>
+                </a:solidFill>
+                <a:latin typeface="Consolas"/>
+              </a:rPr>
+              <a:t> </a:t>
+            </a:r>
+            <a:r>
+              <a:rPr sz="1100">
+                <a:solidFill>
+                  <a:srgbClr val="666666"/>
+                </a:solidFill>
+                <a:latin typeface="Consolas"/>
+              </a:rPr>
+              <a:t>=</a:t>
+            </a:r>
+            <a:r>
+              <a:rPr sz="1100">
+                <a:solidFill>
+                  <a:srgbClr val="000000"/>
+                </a:solidFill>
+                <a:latin typeface="Consolas"/>
+              </a:rPr>
+              <a:t> </a:t>
+            </a:r>
+            <a:r>
+              <a:rPr sz="1100">
+                <a:solidFill>
+                  <a:srgbClr val="000000"/>
+                </a:solidFill>
+                <a:latin typeface="Consolas"/>
+              </a:rPr>
+              <a:t>X</a:t>
+            </a:r>
+            <a:r>
+              <a:rPr sz="1100">
+                <a:solidFill>
+                  <a:srgbClr val="000000"/>
+                </a:solidFill>
+                <a:latin typeface="Consolas"/>
+              </a:rPr>
+              <a:t>[</a:t>
+            </a:r>
+            <a:r>
+              <a:rPr sz="1100">
+                <a:solidFill>
+                  <a:srgbClr val="000000"/>
+                </a:solidFill>
+                <a:latin typeface="Consolas"/>
+              </a:rPr>
+              <a:t>y</a:t>
+            </a:r>
+            <a:r>
+              <a:rPr sz="1100">
+                <a:solidFill>
+                  <a:srgbClr val="000000"/>
+                </a:solidFill>
+                <a:latin typeface="Consolas"/>
+              </a:rPr>
+              <a:t> </a:t>
+            </a:r>
+            <a:r>
+              <a:rPr sz="1100">
+                <a:solidFill>
+                  <a:srgbClr val="666666"/>
+                </a:solidFill>
+                <a:latin typeface="Consolas"/>
+              </a:rPr>
+              <a:t>!=</a:t>
+            </a:r>
+            <a:r>
+              <a:rPr sz="1100">
+                <a:solidFill>
+                  <a:srgbClr val="000000"/>
+                </a:solidFill>
+                <a:latin typeface="Consolas"/>
+              </a:rPr>
+              <a:t> </a:t>
+            </a:r>
+            <a:r>
+              <a:rPr sz="1100">
+                <a:solidFill>
+                  <a:srgbClr val="40A070"/>
+                </a:solidFill>
+                <a:latin typeface="Consolas"/>
+              </a:rPr>
+              <a:t>2</a:t>
+            </a:r>
+            <a:r>
+              <a:rPr sz="1100">
+                <a:solidFill>
+                  <a:srgbClr val="000000"/>
+                </a:solidFill>
+                <a:latin typeface="Consolas"/>
+              </a:rPr>
+              <a:t>]</a:t>
+            </a:r>
+            <a:r>
+              <a:rPr sz="1100">
+                <a:solidFill>
+                  <a:srgbClr val="000000"/>
+                </a:solidFill>
+                <a:latin typeface="Consolas"/>
+              </a:rPr>
+              <a:t>,</a:t>
+            </a:r>
+            <a:r>
+              <a:rPr sz="1100">
+                <a:solidFill>
+                  <a:srgbClr val="000000"/>
+                </a:solidFill>
+                <a:latin typeface="Consolas"/>
+              </a:rPr>
+              <a:t> </a:t>
+            </a:r>
+            <a:r>
+              <a:rPr sz="1100">
+                <a:solidFill>
+                  <a:srgbClr val="000000"/>
+                </a:solidFill>
+                <a:latin typeface="Consolas"/>
+              </a:rPr>
+              <a:t>(</a:t>
+            </a:r>
+            <a:r>
+              <a:rPr sz="1100">
+                <a:solidFill>
+                  <a:srgbClr val="000000"/>
+                </a:solidFill>
+                <a:latin typeface="Consolas"/>
+              </a:rPr>
+              <a:t>y</a:t>
+            </a:r>
+            <a:r>
+              <a:rPr sz="1100">
+                <a:solidFill>
+                  <a:srgbClr val="000000"/>
+                </a:solidFill>
+                <a:latin typeface="Consolas"/>
+              </a:rPr>
+              <a:t>[</a:t>
+            </a:r>
+            <a:r>
+              <a:rPr sz="1100">
+                <a:solidFill>
+                  <a:srgbClr val="000000"/>
+                </a:solidFill>
+                <a:latin typeface="Consolas"/>
+              </a:rPr>
+              <a:t>y</a:t>
+            </a:r>
+            <a:r>
+              <a:rPr sz="1100">
+                <a:solidFill>
+                  <a:srgbClr val="000000"/>
+                </a:solidFill>
+                <a:latin typeface="Consolas"/>
+              </a:rPr>
+              <a:t> </a:t>
+            </a:r>
+            <a:r>
+              <a:rPr sz="1100">
+                <a:solidFill>
+                  <a:srgbClr val="666666"/>
+                </a:solidFill>
+                <a:latin typeface="Consolas"/>
+              </a:rPr>
+              <a:t>!=</a:t>
+            </a:r>
+            <a:r>
+              <a:rPr sz="1100">
+                <a:solidFill>
+                  <a:srgbClr val="000000"/>
+                </a:solidFill>
+                <a:latin typeface="Consolas"/>
+              </a:rPr>
+              <a:t> </a:t>
+            </a:r>
+            <a:r>
+              <a:rPr sz="1100">
+                <a:solidFill>
+                  <a:srgbClr val="40A070"/>
+                </a:solidFill>
+                <a:latin typeface="Consolas"/>
+              </a:rPr>
+              <a:t>2</a:t>
+            </a:r>
+            <a:r>
+              <a:rPr sz="1100">
+                <a:solidFill>
+                  <a:srgbClr val="000000"/>
+                </a:solidFill>
+                <a:latin typeface="Consolas"/>
+              </a:rPr>
+              <a:t>]</a:t>
+            </a:r>
+            <a:r>
+              <a:rPr sz="1100">
+                <a:solidFill>
+                  <a:srgbClr val="000000"/>
+                </a:solidFill>
+                <a:latin typeface="Consolas"/>
+              </a:rPr>
+              <a:t> </a:t>
+            </a:r>
+            <a:r>
+              <a:rPr sz="1100">
+                <a:solidFill>
+                  <a:srgbClr val="666666"/>
+                </a:solidFill>
+                <a:latin typeface="Consolas"/>
+              </a:rPr>
+              <a:t>==</a:t>
+            </a:r>
+            <a:r>
+              <a:rPr sz="1100">
+                <a:solidFill>
+                  <a:srgbClr val="000000"/>
+                </a:solidFill>
+                <a:latin typeface="Consolas"/>
+              </a:rPr>
+              <a:t> </a:t>
+            </a:r>
+            <a:r>
+              <a:rPr sz="1100">
+                <a:solidFill>
+                  <a:srgbClr val="40A070"/>
+                </a:solidFill>
+                <a:latin typeface="Consolas"/>
+              </a:rPr>
+              <a:t>0</a:t>
+            </a:r>
+            <a:r>
+              <a:rPr sz="1100">
+                <a:solidFill>
+                  <a:srgbClr val="000000"/>
+                </a:solidFill>
+                <a:latin typeface="Consolas"/>
+              </a:rPr>
+              <a:t>)</a:t>
+            </a:r>
+            <a:r>
+              <a:rPr sz="1100">
+                <a:solidFill>
+                  <a:srgbClr val="666666"/>
+                </a:solidFill>
+                <a:latin typeface="Consolas"/>
+              </a:rPr>
+              <a:t>.</a:t>
+            </a:r>
+            <a:r>
+              <a:rPr sz="1100">
+                <a:solidFill>
+                  <a:srgbClr val="000000"/>
+                </a:solidFill>
+                <a:latin typeface="Consolas"/>
+              </a:rPr>
+              <a:t>astype</a:t>
+            </a:r>
+            <a:r>
+              <a:rPr sz="1100">
+                <a:solidFill>
+                  <a:srgbClr val="000000"/>
+                </a:solidFill>
+                <a:latin typeface="Consolas"/>
+              </a:rPr>
+              <a:t>(</a:t>
+            </a:r>
+            <a:r>
+              <a:rPr sz="1100">
+                <a:solidFill>
+                  <a:srgbClr val="007020"/>
+                </a:solidFill>
+                <a:latin typeface="Consolas"/>
+              </a:rPr>
+              <a:t>int</a:t>
+            </a:r>
+            <a:r>
+              <a:rPr sz="1100">
+                <a:solidFill>
+                  <a:srgbClr val="000000"/>
+                </a:solidFill>
+                <a:latin typeface="Consolas"/>
+              </a:rPr>
+              <a:t>)</a:t>
+            </a:r>
+            <a:r>
+              <a:rPr sz="1100">
+                <a:solidFill>
+                  <a:srgbClr val="BBBBBB"/>
+                </a:solidFill>
+                <a:latin typeface="Consolas"/>
+              </a:rPr>
+              <a:t>
+</a:t>
+            </a:r>
+          </a:p>
+        </p:txBody>
+      </p:sp>
+      <p:sp>
+        <p:nvSpPr>
+          <p:cNvPr id="8" name="TextBox 7"/>
+          <p:cNvSpPr txBox="1"/>
+          <p:nvPr/>
+        </p:nvSpPr>
+        <p:spPr>
+          <a:xfrm>
+            <a:off x="713231" y="6157975"/>
+            <a:ext cx="6025896" cy="139700"/>
+          </a:xfrm>
+          <a:prstGeom prst="rect">
+            <a:avLst/>
+          </a:prstGeom>
+          <a:noFill/>
+          <a:ln>
+            <a:noFill/>
+          </a:ln>
+        </p:spPr>
+        <p:txBody>
+          <a:bodyPr wrap="none" anchor="t" lIns="0" rIns="0" tIns="0" bIns="0">
+            <a:noAutofit/>
+          </a:bodyPr>
+          <a:lstStyle/>
           <a:p>
             <a:pPr>
+              <a:spcBef>
+                <a:spcPts val="0"/>
+              </a:spcBef>
               <a:spcAft>
                 <a:spcPts val="0"/>
               </a:spcAft>
             </a:pPr>
             <a:r>
-              <a:rPr sz="1100">
-                <a:solidFill>
-                  <a:srgbClr val="000000"/>
+              <a:rPr sz="1100" i="1">
+                <a:solidFill>
+                  <a:srgbClr val="60A0B0"/>
                 </a:solidFill>
                 <a:latin typeface="Consolas"/>
               </a:rPr>
               <a:t># бинарная задача: setosa vs остальные</a:t>
             </a:r>
-          </a:p>
-        </p:txBody>
-      </p:sp>
-      <p:sp>
-        <p:nvSpPr>
-          <p:cNvPr id="6" name="TextBox 5"/>
+            <a:r>
+              <a:rPr sz="1100">
+                <a:solidFill>
+                  <a:srgbClr val="BBBBBB"/>
+                </a:solidFill>
+                <a:latin typeface="Consolas"/>
+              </a:rPr>
+              <a:t>
+</a:t>
+            </a:r>
+          </a:p>
+        </p:txBody>
+      </p:sp>
+      <p:sp>
+        <p:nvSpPr>
+          <p:cNvPr id="9" name="TextBox 8"/>
           <p:cNvSpPr txBox="1"/>
           <p:nvPr/>
         </p:nvSpPr>
         <p:spPr>
           <a:xfrm>
-            <a:off x="640080" y="5349240"/>
+            <a:off x="640080" y="6492240"/>
             <a:ext cx="6172200" cy="201168"/>
           </a:xfrm>
           <a:prstGeom prst="rect">
@@ -10158,7 +13962,7 @@
       </p:sp>
       <p:pic>
         <p:nvPicPr>
-          <p:cNvPr id="7" name="Picture 6" descr="binary_classification_rectangles.png"/>
+          <p:cNvPr id="10" name="Picture 9" descr="binary_classification_rectangles.png"/>
           <p:cNvPicPr>
             <a:picLocks noChangeAspect="1"/>
           </p:cNvPicPr>
@@ -10172,8 +13976,8 @@
         </p:blipFill>
         <p:spPr>
           <a:xfrm>
-            <a:off x="7269480" y="1325880"/>
-            <a:ext cx="4465015" cy="2578036"/>
+            <a:off x="7269480" y="1371600"/>
+            <a:ext cx="4465015" cy="3503007"/>
           </a:xfrm>
           <a:prstGeom prst="rect">
             <a:avLst/>
@@ -10240,7 +14044,7 @@
         <p:spPr>
           <a:xfrm>
             <a:off x="640080" y="1371600"/>
-            <a:ext cx="11247120" cy="2148839"/>
+            <a:ext cx="11247120" cy="1965960"/>
           </a:xfrm>
           <a:prstGeom prst="rect">
             <a:avLst/>
@@ -10529,7 +14333,7 @@
         <p:spPr>
           <a:xfrm>
             <a:off x="640080" y="1371600"/>
-            <a:ext cx="6263640" cy="2971800"/>
+            <a:ext cx="6263640" cy="2788920"/>
           </a:xfrm>
           <a:prstGeom prst="rect">
             <a:avLst/>
@@ -10777,8 +14581,8 @@
         </p:nvSpPr>
         <p:spPr>
           <a:xfrm>
-            <a:off x="640080" y="4690872"/>
-            <a:ext cx="6172200" cy="630936"/>
+            <a:off x="640080" y="5832856"/>
+            <a:ext cx="6172200" cy="604520"/>
           </a:xfrm>
           <a:prstGeom prst="rect">
             <a:avLst/>
@@ -10822,21 +14626,27 @@
         </p:nvSpPr>
         <p:spPr>
           <a:xfrm>
-            <a:off x="713231" y="4727448"/>
-            <a:ext cx="6025896" cy="557784"/>
+            <a:off x="713231" y="5878576"/>
+            <a:ext cx="6025896" cy="139700"/>
           </a:xfrm>
           <a:prstGeom prst="rect">
             <a:avLst/>
           </a:prstGeom>
           <a:noFill/>
+          <a:ln>
+            <a:noFill/>
+          </a:ln>
         </p:spPr>
         <p:txBody>
-          <a:bodyPr wrap="none">
+          <a:bodyPr wrap="none" anchor="t" lIns="0" rIns="0" tIns="0" bIns="0">
             <a:noAutofit/>
           </a:bodyPr>
           <a:lstStyle/>
           <a:p>
             <a:pPr>
+              <a:spcBef>
+                <a:spcPts val="0"/>
+              </a:spcBef>
               <a:spcAft>
                 <a:spcPts val="0"/>
               </a:spcAft>
@@ -10848,11 +14658,149 @@
                 </a:solidFill>
                 <a:latin typeface="Consolas"/>
               </a:rPr>
-              <a:t>clf = DecisionTreeClassifier(criterion='gini')</a:t>
-            </a:r>
-          </a:p>
+              <a:t>clf</a:t>
+            </a:r>
+            <a:r>
+              <a:rPr sz="1100">
+                <a:solidFill>
+                  <a:srgbClr val="000000"/>
+                </a:solidFill>
+                <a:latin typeface="Consolas"/>
+              </a:rPr>
+              <a:t> </a:t>
+            </a:r>
+            <a:r>
+              <a:rPr sz="1100">
+                <a:solidFill>
+                  <a:srgbClr val="666666"/>
+                </a:solidFill>
+                <a:latin typeface="Consolas"/>
+              </a:rPr>
+              <a:t>=</a:t>
+            </a:r>
+            <a:r>
+              <a:rPr sz="1100">
+                <a:solidFill>
+                  <a:srgbClr val="000000"/>
+                </a:solidFill>
+                <a:latin typeface="Consolas"/>
+              </a:rPr>
+              <a:t> </a:t>
+            </a:r>
+            <a:r>
+              <a:rPr sz="1100">
+                <a:solidFill>
+                  <a:srgbClr val="000000"/>
+                </a:solidFill>
+                <a:latin typeface="Consolas"/>
+              </a:rPr>
+              <a:t>DecisionTreeClassifier</a:t>
+            </a:r>
+            <a:r>
+              <a:rPr sz="1100">
+                <a:solidFill>
+                  <a:srgbClr val="000000"/>
+                </a:solidFill>
+                <a:latin typeface="Consolas"/>
+              </a:rPr>
+              <a:t>(</a:t>
+            </a:r>
+            <a:r>
+              <a:rPr sz="1100">
+                <a:solidFill>
+                  <a:srgbClr val="000000"/>
+                </a:solidFill>
+                <a:latin typeface="Consolas"/>
+              </a:rPr>
+              <a:t>criterion</a:t>
+            </a:r>
+            <a:r>
+              <a:rPr sz="1100">
+                <a:solidFill>
+                  <a:srgbClr val="666666"/>
+                </a:solidFill>
+                <a:latin typeface="Consolas"/>
+              </a:rPr>
+              <a:t>=</a:t>
+            </a:r>
+            <a:r>
+              <a:rPr sz="1100">
+                <a:solidFill>
+                  <a:srgbClr val="4070A0"/>
+                </a:solidFill>
+                <a:latin typeface="Consolas"/>
+              </a:rPr>
+              <a:t>'</a:t>
+            </a:r>
+            <a:r>
+              <a:rPr sz="1100">
+                <a:solidFill>
+                  <a:srgbClr val="4070A0"/>
+                </a:solidFill>
+                <a:latin typeface="Consolas"/>
+              </a:rPr>
+              <a:t>gini</a:t>
+            </a:r>
+            <a:r>
+              <a:rPr sz="1100">
+                <a:solidFill>
+                  <a:srgbClr val="4070A0"/>
+                </a:solidFill>
+                <a:latin typeface="Consolas"/>
+              </a:rPr>
+              <a:t>'</a:t>
+            </a:r>
+            <a:r>
+              <a:rPr sz="1100">
+                <a:solidFill>
+                  <a:srgbClr val="000000"/>
+                </a:solidFill>
+                <a:latin typeface="Consolas"/>
+              </a:rPr>
+              <a:t>)</a:t>
+            </a:r>
+            <a:r>
+              <a:rPr sz="1100">
+                <a:solidFill>
+                  <a:srgbClr val="BBBBBB"/>
+                </a:solidFill>
+                <a:latin typeface="Consolas"/>
+              </a:rPr>
+              <a:t>
+</a:t>
+            </a:r>
+          </a:p>
+        </p:txBody>
+      </p:sp>
+      <p:sp>
+        <p:nvSpPr>
+          <p:cNvPr id="6" name="TextBox 5"/>
+          <p:cNvSpPr txBox="1"/>
+          <p:nvPr/>
+        </p:nvSpPr>
+        <p:spPr>
+          <a:xfrm>
+            <a:off x="713231" y="6018275"/>
+            <a:ext cx="6025896" cy="139700"/>
+          </a:xfrm>
+          <a:prstGeom prst="rect">
+            <a:avLst/>
+          </a:prstGeom>
+          <a:noFill/>
+          <a:ln>
+            <a:noFill/>
+          </a:ln>
+        </p:spPr>
+        <p:txBody>
+          <a:bodyPr wrap="none" anchor="t" lIns="0" rIns="0" tIns="0" bIns="0">
+            <a:noAutofit/>
+          </a:bodyPr>
+          <a:lstStyle/>
           <a:p>
             <a:pPr>
+              <a:spcBef>
+                <a:spcPts val="0"/>
+              </a:spcBef>
               <a:spcAft>
                 <a:spcPts val="0"/>
               </a:spcAft>
@@ -10864,36 +14812,184 @@
                 </a:solidFill>
                 <a:latin typeface="Consolas"/>
               </a:rPr>
-              <a:t>clf_ent = DecisionTreeClassifier(criterion='entropy')</a:t>
-            </a:r>
-          </a:p>
+              <a:t>clf_ent</a:t>
+            </a:r>
+            <a:r>
+              <a:rPr sz="1100">
+                <a:solidFill>
+                  <a:srgbClr val="000000"/>
+                </a:solidFill>
+                <a:latin typeface="Consolas"/>
+              </a:rPr>
+              <a:t> </a:t>
+            </a:r>
+            <a:r>
+              <a:rPr sz="1100">
+                <a:solidFill>
+                  <a:srgbClr val="666666"/>
+                </a:solidFill>
+                <a:latin typeface="Consolas"/>
+              </a:rPr>
+              <a:t>=</a:t>
+            </a:r>
+            <a:r>
+              <a:rPr sz="1100">
+                <a:solidFill>
+                  <a:srgbClr val="000000"/>
+                </a:solidFill>
+                <a:latin typeface="Consolas"/>
+              </a:rPr>
+              <a:t> </a:t>
+            </a:r>
+            <a:r>
+              <a:rPr sz="1100">
+                <a:solidFill>
+                  <a:srgbClr val="000000"/>
+                </a:solidFill>
+                <a:latin typeface="Consolas"/>
+              </a:rPr>
+              <a:t>DecisionTreeClassifier</a:t>
+            </a:r>
+            <a:r>
+              <a:rPr sz="1100">
+                <a:solidFill>
+                  <a:srgbClr val="000000"/>
+                </a:solidFill>
+                <a:latin typeface="Consolas"/>
+              </a:rPr>
+              <a:t>(</a:t>
+            </a:r>
+            <a:r>
+              <a:rPr sz="1100">
+                <a:solidFill>
+                  <a:srgbClr val="000000"/>
+                </a:solidFill>
+                <a:latin typeface="Consolas"/>
+              </a:rPr>
+              <a:t>criterion</a:t>
+            </a:r>
+            <a:r>
+              <a:rPr sz="1100">
+                <a:solidFill>
+                  <a:srgbClr val="666666"/>
+                </a:solidFill>
+                <a:latin typeface="Consolas"/>
+              </a:rPr>
+              <a:t>=</a:t>
+            </a:r>
+            <a:r>
+              <a:rPr sz="1100">
+                <a:solidFill>
+                  <a:srgbClr val="4070A0"/>
+                </a:solidFill>
+                <a:latin typeface="Consolas"/>
+              </a:rPr>
+              <a:t>'</a:t>
+            </a:r>
+            <a:r>
+              <a:rPr sz="1100">
+                <a:solidFill>
+                  <a:srgbClr val="4070A0"/>
+                </a:solidFill>
+                <a:latin typeface="Consolas"/>
+              </a:rPr>
+              <a:t>entropy</a:t>
+            </a:r>
+            <a:r>
+              <a:rPr sz="1100">
+                <a:solidFill>
+                  <a:srgbClr val="4070A0"/>
+                </a:solidFill>
+                <a:latin typeface="Consolas"/>
+              </a:rPr>
+              <a:t>'</a:t>
+            </a:r>
+            <a:r>
+              <a:rPr sz="1100">
+                <a:solidFill>
+                  <a:srgbClr val="000000"/>
+                </a:solidFill>
+                <a:latin typeface="Consolas"/>
+              </a:rPr>
+              <a:t>)</a:t>
+            </a:r>
+            <a:r>
+              <a:rPr sz="1100">
+                <a:solidFill>
+                  <a:srgbClr val="BBBBBB"/>
+                </a:solidFill>
+                <a:latin typeface="Consolas"/>
+              </a:rPr>
+              <a:t>
+</a:t>
+            </a:r>
+          </a:p>
+        </p:txBody>
+      </p:sp>
+      <p:sp>
+        <p:nvSpPr>
+          <p:cNvPr id="7" name="TextBox 6"/>
+          <p:cNvSpPr txBox="1"/>
+          <p:nvPr/>
+        </p:nvSpPr>
+        <p:spPr>
+          <a:xfrm>
+            <a:off x="713231" y="6157975"/>
+            <a:ext cx="6025896" cy="139700"/>
+          </a:xfrm>
+          <a:prstGeom prst="rect">
+            <a:avLst/>
+          </a:prstGeom>
+          <a:noFill/>
+          <a:ln>
+            <a:noFill/>
+          </a:ln>
+        </p:spPr>
+        <p:txBody>
+          <a:bodyPr wrap="none" anchor="t" lIns="0" rIns="0" tIns="0" bIns="0">
+            <a:noAutofit/>
+          </a:bodyPr>
+          <a:lstStyle/>
           <a:p>
             <a:pPr>
+              <a:spcBef>
+                <a:spcPts val="0"/>
+              </a:spcBef>
               <a:spcAft>
                 <a:spcPts val="0"/>
               </a:spcAft>
             </a:pPr>
             <a:r>
-              <a:rPr sz="1100">
-                <a:solidFill>
-                  <a:srgbClr val="000000"/>
+              <a:rPr sz="1100" i="1">
+                <a:solidFill>
+                  <a:srgbClr val="60A0B0"/>
                 </a:solidFill>
                 <a:latin typeface="Consolas"/>
               </a:rPr>
               <a:t># сравните деревья на одних данных</a:t>
             </a:r>
-          </a:p>
-        </p:txBody>
-      </p:sp>
-      <p:sp>
-        <p:nvSpPr>
-          <p:cNvPr id="6" name="TextBox 5"/>
+            <a:r>
+              <a:rPr sz="1100">
+                <a:solidFill>
+                  <a:srgbClr val="BBBBBB"/>
+                </a:solidFill>
+                <a:latin typeface="Consolas"/>
+              </a:rPr>
+              <a:t>
+</a:t>
+            </a:r>
+          </a:p>
+        </p:txBody>
+      </p:sp>
+      <p:sp>
+        <p:nvSpPr>
+          <p:cNvPr id="8" name="TextBox 7"/>
           <p:cNvSpPr txBox="1"/>
           <p:nvPr/>
         </p:nvSpPr>
         <p:spPr>
           <a:xfrm>
-            <a:off x="640080" y="5376672"/>
+            <a:off x="640080" y="6492240"/>
             <a:ext cx="6172200" cy="201168"/>
           </a:xfrm>
           <a:prstGeom prst="rect">
@@ -10922,7 +15018,7 @@
       </p:sp>
       <p:pic>
         <p:nvPicPr>
-          <p:cNvPr id="7" name="Picture 6" descr="impurity_functions.png"/>
+          <p:cNvPr id="9" name="Picture 8" descr="impurity_functions.png"/>
           <p:cNvPicPr>
             <a:picLocks noChangeAspect="1"/>
           </p:cNvPicPr>
@@ -10936,8 +15032,8 @@
         </p:blipFill>
         <p:spPr>
           <a:xfrm>
-            <a:off x="7269480" y="1325880"/>
-            <a:ext cx="4465015" cy="2404496"/>
+            <a:off x="7269480" y="1371600"/>
+            <a:ext cx="4465015" cy="3503007"/>
           </a:xfrm>
           <a:prstGeom prst="rect">
             <a:avLst/>
@@ -11004,7 +15100,7 @@
         <p:spPr>
           <a:xfrm>
             <a:off x="640080" y="1371600"/>
-            <a:ext cx="11247120" cy="2423160"/>
+            <a:ext cx="11247120" cy="2240280"/>
           </a:xfrm>
           <a:prstGeom prst="rect">
             <a:avLst/>
